--- a/00 Admin/04 Commercial + SOW/JP_TapThat_ProposalDeck_v03.pptx
+++ b/00 Admin/04 Commercial + SOW/JP_TapThat_ProposalDeck_v03.pptx
@@ -32,6 +32,9 @@
     <p:sldId id="280" r:id="rId31"/>
     <p:sldId id="281" r:id="rId32"/>
     <p:sldId id="282" r:id="rId33"/>
+    <p:sldId id="283" r:id="rId34"/>
+    <p:sldId id="284" r:id="rId35"/>
+    <p:sldId id="285" r:id="rId36"/>
   </p:sldIdLst>
   <p:sldSz cx="12191695" cy="6858000" type="screen4x3"/>
   <p:notesSz cx="6858000" cy="9144000"/>
@@ -3354,6 +3357,1580 @@
                 </a:solidFill>
                 <a:latin typeface="Poppins"/>
               </a:rPr>
+              <a:t>SETTLED 18 SEPTEMBER · THREE OF THREE</a:t>
+            </a:r>
+          </a:p>
+        </p:txBody>
+      </p:sp>
+      <p:sp>
+        <p:nvSpPr>
+          <p:cNvPr id="3" name="TextBox 2"/>
+          <p:cNvSpPr txBox="1"/>
+          <p:nvPr/>
+        </p:nvSpPr>
+        <p:spPr>
+          <a:xfrm>
+            <a:off x="914400" y="1691640"/>
+            <a:ext cx="10362895" cy="2103120"/>
+          </a:xfrm>
+          <a:prstGeom prst="rect">
+            <a:avLst/>
+          </a:prstGeom>
+          <a:noFill/>
+        </p:spPr>
+        <p:txBody>
+          <a:bodyPr wrap="square" lIns="0" rIns="0" tIns="0" bIns="0" anchor="t">
+            <a:spAutoFit/>
+          </a:bodyPr>
+          <a:lstStyle/>
+          <a:p>
+            <a:pPr algn="l">
+              <a:lnSpc>
+                <a:spcPct val="112000"/>
+              </a:lnSpc>
+            </a:pPr>
+            <a:r>
+              <a:rPr sz="4200" b="0">
+                <a:solidFill>
+                  <a:srgbClr val="111111"/>
+                </a:solidFill>
+                <a:latin typeface="Poppins"/>
+              </a:rPr>
+              <a:t>250 refillers is also the money number.</a:t>
+            </a:r>
+          </a:p>
+        </p:txBody>
+      </p:sp>
+      <p:sp>
+        <p:nvSpPr>
+          <p:cNvPr id="4" name="TextBox 3"/>
+          <p:cNvSpPr txBox="1"/>
+          <p:nvPr/>
+        </p:nvSpPr>
+        <p:spPr>
+          <a:xfrm>
+            <a:off x="914400" y="4114800"/>
+            <a:ext cx="7863840" cy="2011680"/>
+          </a:xfrm>
+          <a:prstGeom prst="rect">
+            <a:avLst/>
+          </a:prstGeom>
+          <a:noFill/>
+        </p:spPr>
+        <p:txBody>
+          <a:bodyPr wrap="square" lIns="0" rIns="0" tIns="0" bIns="0" anchor="t">
+            <a:spAutoFit/>
+          </a:bodyPr>
+          <a:lstStyle/>
+          <a:p>
+            <a:pPr algn="l">
+              <a:lnSpc>
+                <a:spcPct val="150000"/>
+              </a:lnSpc>
+              <a:spcAft>
+                <a:spcPts val="800"/>
+              </a:spcAft>
+            </a:pPr>
+            <a:r>
+              <a:rPr sz="1400" b="0">
+                <a:solidFill>
+                  <a:srgbClr val="111111"/>
+                </a:solidFill>
+                <a:latin typeface="Poppins"/>
+              </a:rPr>
+              <a:t>Break-even is about $50,000 a month against a current run rate of $35,000 to $45,000, and one month has already hit it. You confirmed that 250 active refillers clears it. The six-month number and the money number are the same number.</a:t>
+            </a:r>
+          </a:p>
+          <a:p>
+            <a:pPr algn="l">
+              <a:lnSpc>
+                <a:spcPct val="150000"/>
+              </a:lnSpc>
+              <a:spcAft>
+                <a:spcPts val="800"/>
+              </a:spcAft>
+            </a:pPr>
+            <a:r>
+              <a:rPr sz="1400" b="0">
+                <a:solidFill>
+                  <a:srgbClr val="111111"/>
+                </a:solidFill>
+                <a:latin typeface="Poppins"/>
+              </a:rPr>
+              <a:t>Which opens the one question this proposal cannot answer for you. Christy has put 250 by Christmas on the table given the outdoor entertaining season. March 2027 or Christmas 2026 should be settled before this is signed.</a:t>
+            </a:r>
+          </a:p>
+        </p:txBody>
+      </p:sp>
+    </p:spTree>
+  </p:cSld>
+  <p:clrMapOvr>
+    <a:masterClrMapping/>
+  </p:clrMapOvr>
+</p:sld>
+</file>
+
+<file path=ppt/slides/slide11.xml><?xml version="1.0" encoding="utf-8"?>
+<p:sld xmlns:a="http://schemas.openxmlformats.org/drawingml/2006/main" xmlns:p="http://schemas.openxmlformats.org/presentationml/2006/main" xmlns:r="http://schemas.openxmlformats.org/officeDocument/2006/relationships">
+  <p:cSld>
+    <p:bg>
+      <p:bgPr>
+        <a:solidFill>
+          <a:srgbClr val="111111"/>
+        </a:solidFill>
+        <a:effectLst/>
+      </p:bgPr>
+    </p:bg>
+    <p:spTree>
+      <p:nvGrpSpPr>
+        <p:cNvPr id="1" name=""/>
+        <p:cNvGrpSpPr/>
+        <p:nvPr/>
+      </p:nvGrpSpPr>
+      <p:grpSpPr/>
+      <p:sp>
+        <p:nvSpPr>
+          <p:cNvPr id="2" name="TextBox 1"/>
+          <p:cNvSpPr txBox="1"/>
+          <p:nvPr/>
+        </p:nvSpPr>
+        <p:spPr>
+          <a:xfrm>
+            <a:off x="914400" y="914400"/>
+            <a:ext cx="10362895" cy="274320"/>
+          </a:xfrm>
+          <a:prstGeom prst="rect">
+            <a:avLst/>
+          </a:prstGeom>
+          <a:noFill/>
+        </p:spPr>
+        <p:txBody>
+          <a:bodyPr wrap="square" lIns="0" rIns="0" tIns="0" bIns="0" anchor="t">
+            <a:spAutoFit/>
+          </a:bodyPr>
+          <a:lstStyle/>
+          <a:p>
+            <a:pPr algn="l">
+              <a:lnSpc>
+                <a:spcPct val="100000"/>
+              </a:lnSpc>
+            </a:pPr>
+            <a:r>
+              <a:rPr sz="1400" b="0" spc="200">
+                <a:solidFill>
+                  <a:srgbClr val="FAF8F4"/>
+                </a:solidFill>
+                <a:latin typeface="Poppins"/>
+              </a:rPr>
+              <a:t>PART 02</a:t>
+            </a:r>
+          </a:p>
+        </p:txBody>
+      </p:sp>
+      <p:sp>
+        <p:nvSpPr>
+          <p:cNvPr id="3" name="TextBox 2"/>
+          <p:cNvSpPr txBox="1"/>
+          <p:nvPr/>
+        </p:nvSpPr>
+        <p:spPr>
+          <a:xfrm>
+            <a:off x="914400" y="2194560"/>
+            <a:ext cx="10362895" cy="2377440"/>
+          </a:xfrm>
+          <a:prstGeom prst="rect">
+            <a:avLst/>
+          </a:prstGeom>
+          <a:noFill/>
+        </p:spPr>
+        <p:txBody>
+          <a:bodyPr wrap="square" lIns="0" rIns="0" tIns="0" bIns="0" anchor="ctr">
+            <a:spAutoFit/>
+          </a:bodyPr>
+          <a:lstStyle/>
+          <a:p>
+            <a:pPr algn="l">
+              <a:lnSpc>
+                <a:spcPct val="100000"/>
+              </a:lnSpc>
+            </a:pPr>
+            <a:r>
+              <a:rPr sz="9600" b="0">
+                <a:solidFill>
+                  <a:srgbClr val="FAF8F4"/>
+                </a:solidFill>
+                <a:latin typeface="Poppins"/>
+              </a:rPr>
+              <a:t>The work.</a:t>
+            </a:r>
+          </a:p>
+        </p:txBody>
+      </p:sp>
+      <p:sp>
+        <p:nvSpPr>
+          <p:cNvPr id="4" name="TextBox 3"/>
+          <p:cNvSpPr txBox="1"/>
+          <p:nvPr/>
+        </p:nvSpPr>
+        <p:spPr>
+          <a:xfrm>
+            <a:off x="914400" y="5212080"/>
+            <a:ext cx="10362895" cy="457200"/>
+          </a:xfrm>
+          <a:prstGeom prst="rect">
+            <a:avLst/>
+          </a:prstGeom>
+          <a:noFill/>
+        </p:spPr>
+        <p:txBody>
+          <a:bodyPr wrap="square" lIns="0" rIns="0" tIns="0" bIns="0" anchor="t">
+            <a:spAutoFit/>
+          </a:bodyPr>
+          <a:lstStyle/>
+          <a:p>
+            <a:pPr algn="l">
+              <a:lnSpc>
+                <a:spcPct val="130000"/>
+              </a:lnSpc>
+            </a:pPr>
+            <a:r>
+              <a:rPr sz="1600" b="0">
+                <a:solidFill>
+                  <a:srgbClr val="FAF8F4"/>
+                </a:solidFill>
+                <a:latin typeface="Poppins"/>
+              </a:rPr>
+              <a:t>Seven workstreams, on your horizons.</a:t>
+            </a:r>
+          </a:p>
+        </p:txBody>
+      </p:sp>
+    </p:spTree>
+  </p:cSld>
+  <p:clrMapOvr>
+    <a:masterClrMapping/>
+  </p:clrMapOvr>
+</p:sld>
+</file>
+
+<file path=ppt/slides/slide12.xml><?xml version="1.0" encoding="utf-8"?>
+<p:sld xmlns:a="http://schemas.openxmlformats.org/drawingml/2006/main" xmlns:p="http://schemas.openxmlformats.org/presentationml/2006/main" xmlns:r="http://schemas.openxmlformats.org/officeDocument/2006/relationships">
+  <p:cSld>
+    <p:bg>
+      <p:bgPr>
+        <a:solidFill>
+          <a:srgbClr val="FAF8F4"/>
+        </a:solidFill>
+        <a:effectLst/>
+      </p:bgPr>
+    </p:bg>
+    <p:spTree>
+      <p:nvGrpSpPr>
+        <p:cNvPr id="1" name=""/>
+        <p:cNvGrpSpPr/>
+        <p:nvPr/>
+      </p:nvGrpSpPr>
+      <p:grpSpPr/>
+      <p:sp>
+        <p:nvSpPr>
+          <p:cNvPr id="2" name="TextBox 1"/>
+          <p:cNvSpPr txBox="1"/>
+          <p:nvPr/>
+        </p:nvSpPr>
+        <p:spPr>
+          <a:xfrm>
+            <a:off x="914400" y="914400"/>
+            <a:ext cx="10362895" cy="274320"/>
+          </a:xfrm>
+          <a:prstGeom prst="rect">
+            <a:avLst/>
+          </a:prstGeom>
+          <a:noFill/>
+        </p:spPr>
+        <p:txBody>
+          <a:bodyPr wrap="square" lIns="0" rIns="0" tIns="0" bIns="0" anchor="t">
+            <a:spAutoFit/>
+          </a:bodyPr>
+          <a:lstStyle/>
+          <a:p>
+            <a:pPr algn="l">
+              <a:lnSpc>
+                <a:spcPct val="100000"/>
+              </a:lnSpc>
+            </a:pPr>
+            <a:r>
+              <a:rPr sz="900" b="0" spc="200">
+                <a:solidFill>
+                  <a:srgbClr val="111111"/>
+                </a:solidFill>
+                <a:latin typeface="Poppins"/>
+              </a:rPr>
+              <a:t>AT A GLANCE</a:t>
+            </a:r>
+          </a:p>
+        </p:txBody>
+      </p:sp>
+      <p:sp>
+        <p:nvSpPr>
+          <p:cNvPr id="3" name="TextBox 2"/>
+          <p:cNvSpPr txBox="1"/>
+          <p:nvPr/>
+        </p:nvSpPr>
+        <p:spPr>
+          <a:xfrm>
+            <a:off x="914400" y="1371600"/>
+            <a:ext cx="10362895" cy="640080"/>
+          </a:xfrm>
+          <a:prstGeom prst="rect">
+            <a:avLst/>
+          </a:prstGeom>
+          <a:noFill/>
+        </p:spPr>
+        <p:txBody>
+          <a:bodyPr wrap="square" lIns="0" rIns="0" tIns="0" bIns="0" anchor="t">
+            <a:spAutoFit/>
+          </a:bodyPr>
+          <a:lstStyle/>
+          <a:p>
+            <a:pPr algn="l">
+              <a:lnSpc>
+                <a:spcPct val="112000"/>
+              </a:lnSpc>
+            </a:pPr>
+            <a:r>
+              <a:rPr sz="2800" b="0">
+                <a:solidFill>
+                  <a:srgbClr val="111111"/>
+                </a:solidFill>
+                <a:latin typeface="Poppins"/>
+              </a:rPr>
+              <a:t>Seven workstreams. The first carries the other six.</a:t>
+            </a:r>
+          </a:p>
+        </p:txBody>
+      </p:sp>
+      <p:graphicFrame>
+        <p:nvGraphicFramePr>
+          <p:cNvPr id="4" name="Table 3"/>
+          <p:cNvGraphicFramePr>
+            <a:graphicFrameLocks noGrp="1"/>
+          </p:cNvGraphicFramePr>
+          <p:nvPr/>
+        </p:nvGraphicFramePr>
+        <p:xfrm>
+          <a:off x="914400" y="2194560"/>
+          <a:ext cx="10362893" cy="2584187"/>
+        </p:xfrm>
+        <a:graphic>
+          <a:graphicData uri="http://schemas.openxmlformats.org/drawingml/2006/table">
+            <a:tbl>
+              <a:tblPr firstRow="0" bandRow="0">
+                <a:tableStyleId>{2D5ABB26-0587-4C30-8999-92F81FD0307C}</a:tableStyleId>
+              </a:tblPr>
+              <a:tblGrid>
+                <a:gridCol w="518144"/>
+                <a:gridCol w="2901610"/>
+                <a:gridCol w="6943139"/>
+              </a:tblGrid>
+              <a:tr h="274320">
+                <a:tc>
+                  <a:txBody>
+                    <a:bodyPr wrap="square"/>
+                    <a:lstStyle/>
+                    <a:p>
+                      <a:pPr>
+                        <a:lnSpc>
+                          <a:spcPct val="134000"/>
+                        </a:lnSpc>
+                      </a:pPr>
+                      <a:r>
+                        <a:rPr sz="900" b="0" spc="200">
+                          <a:solidFill>
+                            <a:srgbClr val="666666"/>
+                          </a:solidFill>
+                          <a:latin typeface="Poppins"/>
+                        </a:rPr>
+                        <a:t/>
+                      </a:r>
+                    </a:p>
+                  </a:txBody>
+                  <a:tcPr marL="0" marR="128016" marT="36576" marB="54864" anchor="t">
+                    <a:lnB w="9525" cap="flat" cmpd="sng" algn="ctr">
+                      <a:solidFill>
+                        <a:srgbClr val="D4D2D0"/>
+                      </a:solidFill>
+                    </a:lnB>
+                    <a:lnT w="0" cap="flat" cmpd="sng" algn="ctr">
+                      <a:solidFill>
+                        <a:srgbClr val="FAF8F4"/>
+                      </a:solidFill>
+                    </a:lnT>
+                    <a:lnR w="0" cap="flat" cmpd="sng" algn="ctr">
+                      <a:solidFill>
+                        <a:srgbClr val="FAF8F4"/>
+                      </a:solidFill>
+                    </a:lnR>
+                    <a:lnL w="0" cap="flat" cmpd="sng" algn="ctr">
+                      <a:solidFill>
+                        <a:srgbClr val="FAF8F4"/>
+                      </a:solidFill>
+                    </a:lnL>
+                    <a:noFill/>
+                  </a:tcPr>
+                </a:tc>
+                <a:tc>
+                  <a:txBody>
+                    <a:bodyPr wrap="square"/>
+                    <a:lstStyle/>
+                    <a:p>
+                      <a:pPr>
+                        <a:lnSpc>
+                          <a:spcPct val="134000"/>
+                        </a:lnSpc>
+                      </a:pPr>
+                      <a:r>
+                        <a:rPr sz="900" b="0" spc="200">
+                          <a:solidFill>
+                            <a:srgbClr val="666666"/>
+                          </a:solidFill>
+                          <a:latin typeface="Poppins"/>
+                        </a:rPr>
+                        <a:t>WORKSTREAM</a:t>
+                      </a:r>
+                    </a:p>
+                  </a:txBody>
+                  <a:tcPr marL="0" marR="128016" marT="36576" marB="54864" anchor="t">
+                    <a:lnB w="9525" cap="flat" cmpd="sng" algn="ctr">
+                      <a:solidFill>
+                        <a:srgbClr val="D4D2D0"/>
+                      </a:solidFill>
+                    </a:lnB>
+                    <a:lnT w="0" cap="flat" cmpd="sng" algn="ctr">
+                      <a:solidFill>
+                        <a:srgbClr val="FAF8F4"/>
+                      </a:solidFill>
+                    </a:lnT>
+                    <a:lnR w="0" cap="flat" cmpd="sng" algn="ctr">
+                      <a:solidFill>
+                        <a:srgbClr val="FAF8F4"/>
+                      </a:solidFill>
+                    </a:lnR>
+                    <a:lnL w="0" cap="flat" cmpd="sng" algn="ctr">
+                      <a:solidFill>
+                        <a:srgbClr val="FAF8F4"/>
+                      </a:solidFill>
+                    </a:lnL>
+                    <a:noFill/>
+                  </a:tcPr>
+                </a:tc>
+                <a:tc>
+                  <a:txBody>
+                    <a:bodyPr wrap="square"/>
+                    <a:lstStyle/>
+                    <a:p>
+                      <a:pPr>
+                        <a:lnSpc>
+                          <a:spcPct val="134000"/>
+                        </a:lnSpc>
+                      </a:pPr>
+                      <a:r>
+                        <a:rPr sz="900" b="0" spc="200">
+                          <a:solidFill>
+                            <a:srgbClr val="666666"/>
+                          </a:solidFill>
+                          <a:latin typeface="Poppins"/>
+                        </a:rPr>
+                        <a:t>THE MOVE</a:t>
+                      </a:r>
+                    </a:p>
+                  </a:txBody>
+                  <a:tcPr marL="0" marR="128016" marT="36576" marB="54864" anchor="t">
+                    <a:lnB w="9525" cap="flat" cmpd="sng" algn="ctr">
+                      <a:solidFill>
+                        <a:srgbClr val="D4D2D0"/>
+                      </a:solidFill>
+                    </a:lnB>
+                    <a:lnT w="0" cap="flat" cmpd="sng" algn="ctr">
+                      <a:solidFill>
+                        <a:srgbClr val="FAF8F4"/>
+                      </a:solidFill>
+                    </a:lnT>
+                    <a:lnR w="0" cap="flat" cmpd="sng" algn="ctr">
+                      <a:solidFill>
+                        <a:srgbClr val="FAF8F4"/>
+                      </a:solidFill>
+                    </a:lnR>
+                    <a:lnL w="0" cap="flat" cmpd="sng" algn="ctr">
+                      <a:solidFill>
+                        <a:srgbClr val="FAF8F4"/>
+                      </a:solidFill>
+                    </a:lnL>
+                    <a:noFill/>
+                  </a:tcPr>
+                </a:tc>
+              </a:tr>
+              <a:tr h="329981">
+                <a:tc>
+                  <a:txBody>
+                    <a:bodyPr wrap="square"/>
+                    <a:lstStyle/>
+                    <a:p>
+                      <a:pPr>
+                        <a:lnSpc>
+                          <a:spcPct val="134000"/>
+                        </a:lnSpc>
+                      </a:pPr>
+                      <a:r>
+                        <a:rPr sz="1100" b="1">
+                          <a:solidFill>
+                            <a:srgbClr val="111111"/>
+                          </a:solidFill>
+                          <a:latin typeface="Poppins"/>
+                        </a:rPr>
+                        <a:t>01</a:t>
+                      </a:r>
+                    </a:p>
+                  </a:txBody>
+                  <a:tcPr marL="0" marR="128016" marT="36576" marB="54864" anchor="t">
+                    <a:lnB w="9525" cap="flat" cmpd="sng" algn="ctr">
+                      <a:solidFill>
+                        <a:srgbClr val="D4D2D0"/>
+                      </a:solidFill>
+                    </a:lnB>
+                    <a:lnT w="0" cap="flat" cmpd="sng" algn="ctr">
+                      <a:solidFill>
+                        <a:srgbClr val="FAF8F4"/>
+                      </a:solidFill>
+                    </a:lnT>
+                    <a:lnR w="0" cap="flat" cmpd="sng" algn="ctr">
+                      <a:solidFill>
+                        <a:srgbClr val="FAF8F4"/>
+                      </a:solidFill>
+                    </a:lnR>
+                    <a:lnL w="0" cap="flat" cmpd="sng" algn="ctr">
+                      <a:solidFill>
+                        <a:srgbClr val="FAF8F4"/>
+                      </a:solidFill>
+                    </a:lnL>
+                    <a:noFill/>
+                  </a:tcPr>
+                </a:tc>
+                <a:tc>
+                  <a:txBody>
+                    <a:bodyPr wrap="square"/>
+                    <a:lstStyle/>
+                    <a:p>
+                      <a:pPr>
+                        <a:lnSpc>
+                          <a:spcPct val="134000"/>
+                        </a:lnSpc>
+                      </a:pPr>
+                      <a:r>
+                        <a:rPr sz="1100" b="0">
+                          <a:solidFill>
+                            <a:srgbClr val="111111"/>
+                          </a:solidFill>
+                          <a:latin typeface="Poppins"/>
+                        </a:rPr>
+                        <a:t>Connect the system</a:t>
+                      </a:r>
+                    </a:p>
+                  </a:txBody>
+                  <a:tcPr marL="0" marR="128016" marT="36576" marB="54864" anchor="t">
+                    <a:lnB w="9525" cap="flat" cmpd="sng" algn="ctr">
+                      <a:solidFill>
+                        <a:srgbClr val="D4D2D0"/>
+                      </a:solidFill>
+                    </a:lnB>
+                    <a:lnT w="0" cap="flat" cmpd="sng" algn="ctr">
+                      <a:solidFill>
+                        <a:srgbClr val="FAF8F4"/>
+                      </a:solidFill>
+                    </a:lnT>
+                    <a:lnR w="0" cap="flat" cmpd="sng" algn="ctr">
+                      <a:solidFill>
+                        <a:srgbClr val="FAF8F4"/>
+                      </a:solidFill>
+                    </a:lnR>
+                    <a:lnL w="0" cap="flat" cmpd="sng" algn="ctr">
+                      <a:solidFill>
+                        <a:srgbClr val="FAF8F4"/>
+                      </a:solidFill>
+                    </a:lnL>
+                    <a:noFill/>
+                  </a:tcPr>
+                </a:tc>
+                <a:tc>
+                  <a:txBody>
+                    <a:bodyPr wrap="square"/>
+                    <a:lstStyle/>
+                    <a:p>
+                      <a:pPr>
+                        <a:lnSpc>
+                          <a:spcPct val="134000"/>
+                        </a:lnSpc>
+                      </a:pPr>
+                      <a:r>
+                        <a:rPr sz="1100" b="0">
+                          <a:solidFill>
+                            <a:srgbClr val="111111"/>
+                          </a:solidFill>
+                          <a:latin typeface="Poppins"/>
+                        </a:rPr>
+                        <a:t>Nothing compounds until the website, POS and CRM talk</a:t>
+                      </a:r>
+                    </a:p>
+                  </a:txBody>
+                  <a:tcPr marL="0" marR="128016" marT="36576" marB="54864" anchor="t">
+                    <a:lnB w="9525" cap="flat" cmpd="sng" algn="ctr">
+                      <a:solidFill>
+                        <a:srgbClr val="D4D2D0"/>
+                      </a:solidFill>
+                    </a:lnB>
+                    <a:lnT w="0" cap="flat" cmpd="sng" algn="ctr">
+                      <a:solidFill>
+                        <a:srgbClr val="FAF8F4"/>
+                      </a:solidFill>
+                    </a:lnT>
+                    <a:lnR w="0" cap="flat" cmpd="sng" algn="ctr">
+                      <a:solidFill>
+                        <a:srgbClr val="FAF8F4"/>
+                      </a:solidFill>
+                    </a:lnR>
+                    <a:lnL w="0" cap="flat" cmpd="sng" algn="ctr">
+                      <a:solidFill>
+                        <a:srgbClr val="FAF8F4"/>
+                      </a:solidFill>
+                    </a:lnL>
+                    <a:noFill/>
+                  </a:tcPr>
+                </a:tc>
+              </a:tr>
+              <a:tr h="329981">
+                <a:tc>
+                  <a:txBody>
+                    <a:bodyPr wrap="square"/>
+                    <a:lstStyle/>
+                    <a:p>
+                      <a:pPr>
+                        <a:lnSpc>
+                          <a:spcPct val="134000"/>
+                        </a:lnSpc>
+                      </a:pPr>
+                      <a:r>
+                        <a:rPr sz="1100" b="1">
+                          <a:solidFill>
+                            <a:srgbClr val="111111"/>
+                          </a:solidFill>
+                          <a:latin typeface="Poppins"/>
+                        </a:rPr>
+                        <a:t>02</a:t>
+                      </a:r>
+                    </a:p>
+                  </a:txBody>
+                  <a:tcPr marL="0" marR="128016" marT="36576" marB="54864" anchor="t">
+                    <a:lnB w="9525" cap="flat" cmpd="sng" algn="ctr">
+                      <a:solidFill>
+                        <a:srgbClr val="D4D2D0"/>
+                      </a:solidFill>
+                    </a:lnB>
+                    <a:lnT w="0" cap="flat" cmpd="sng" algn="ctr">
+                      <a:solidFill>
+                        <a:srgbClr val="FAF8F4"/>
+                      </a:solidFill>
+                    </a:lnT>
+                    <a:lnR w="0" cap="flat" cmpd="sng" algn="ctr">
+                      <a:solidFill>
+                        <a:srgbClr val="FAF8F4"/>
+                      </a:solidFill>
+                    </a:lnR>
+                    <a:lnL w="0" cap="flat" cmpd="sng" algn="ctr">
+                      <a:solidFill>
+                        <a:srgbClr val="FAF8F4"/>
+                      </a:solidFill>
+                    </a:lnL>
+                    <a:noFill/>
+                  </a:tcPr>
+                </a:tc>
+                <a:tc>
+                  <a:txBody>
+                    <a:bodyPr wrap="square"/>
+                    <a:lstStyle/>
+                    <a:p>
+                      <a:pPr>
+                        <a:lnSpc>
+                          <a:spcPct val="134000"/>
+                        </a:lnSpc>
+                      </a:pPr>
+                      <a:r>
+                        <a:rPr sz="1100" b="0">
+                          <a:solidFill>
+                            <a:srgbClr val="111111"/>
+                          </a:solidFill>
+                          <a:latin typeface="Poppins"/>
+                        </a:rPr>
+                        <a:t>Switch existing owners</a:t>
+                      </a:r>
+                    </a:p>
+                  </a:txBody>
+                  <a:tcPr marL="0" marR="128016" marT="36576" marB="54864" anchor="t">
+                    <a:lnB w="9525" cap="flat" cmpd="sng" algn="ctr">
+                      <a:solidFill>
+                        <a:srgbClr val="D4D2D0"/>
+                      </a:solidFill>
+                    </a:lnB>
+                    <a:lnT w="0" cap="flat" cmpd="sng" algn="ctr">
+                      <a:solidFill>
+                        <a:srgbClr val="FAF8F4"/>
+                      </a:solidFill>
+                    </a:lnT>
+                    <a:lnR w="0" cap="flat" cmpd="sng" algn="ctr">
+                      <a:solidFill>
+                        <a:srgbClr val="FAF8F4"/>
+                      </a:solidFill>
+                    </a:lnR>
+                    <a:lnL w="0" cap="flat" cmpd="sng" algn="ctr">
+                      <a:solidFill>
+                        <a:srgbClr val="FAF8F4"/>
+                      </a:solidFill>
+                    </a:lnL>
+                    <a:noFill/>
+                  </a:tcPr>
+                </a:tc>
+                <a:tc>
+                  <a:txBody>
+                    <a:bodyPr wrap="square"/>
+                    <a:lstStyle/>
+                    <a:p>
+                      <a:pPr>
+                        <a:lnSpc>
+                          <a:spcPct val="134000"/>
+                        </a:lnSpc>
+                      </a:pPr>
+                      <a:r>
+                        <a:rPr sz="1100" b="0">
+                          <a:solidFill>
+                            <a:srgbClr val="111111"/>
+                          </a:solidFill>
+                          <a:latin typeface="Poppins"/>
+                        </a:rPr>
+                        <a:t>Your number one. They have already bought the hardware</a:t>
+                      </a:r>
+                    </a:p>
+                  </a:txBody>
+                  <a:tcPr marL="0" marR="128016" marT="36576" marB="54864" anchor="t">
+                    <a:lnB w="9525" cap="flat" cmpd="sng" algn="ctr">
+                      <a:solidFill>
+                        <a:srgbClr val="D4D2D0"/>
+                      </a:solidFill>
+                    </a:lnB>
+                    <a:lnT w="0" cap="flat" cmpd="sng" algn="ctr">
+                      <a:solidFill>
+                        <a:srgbClr val="FAF8F4"/>
+                      </a:solidFill>
+                    </a:lnT>
+                    <a:lnR w="0" cap="flat" cmpd="sng" algn="ctr">
+                      <a:solidFill>
+                        <a:srgbClr val="FAF8F4"/>
+                      </a:solidFill>
+                    </a:lnR>
+                    <a:lnL w="0" cap="flat" cmpd="sng" algn="ctr">
+                      <a:solidFill>
+                        <a:srgbClr val="FAF8F4"/>
+                      </a:solidFill>
+                    </a:lnL>
+                    <a:noFill/>
+                  </a:tcPr>
+                </a:tc>
+              </a:tr>
+              <a:tr h="329981">
+                <a:tc>
+                  <a:txBody>
+                    <a:bodyPr wrap="square"/>
+                    <a:lstStyle/>
+                    <a:p>
+                      <a:pPr>
+                        <a:lnSpc>
+                          <a:spcPct val="134000"/>
+                        </a:lnSpc>
+                      </a:pPr>
+                      <a:r>
+                        <a:rPr sz="1100" b="1">
+                          <a:solidFill>
+                            <a:srgbClr val="111111"/>
+                          </a:solidFill>
+                          <a:latin typeface="Poppins"/>
+                        </a:rPr>
+                        <a:t>03</a:t>
+                      </a:r>
+                    </a:p>
+                  </a:txBody>
+                  <a:tcPr marL="0" marR="128016" marT="36576" marB="54864" anchor="t">
+                    <a:lnB w="9525" cap="flat" cmpd="sng" algn="ctr">
+                      <a:solidFill>
+                        <a:srgbClr val="D4D2D0"/>
+                      </a:solidFill>
+                    </a:lnB>
+                    <a:lnT w="0" cap="flat" cmpd="sng" algn="ctr">
+                      <a:solidFill>
+                        <a:srgbClr val="FAF8F4"/>
+                      </a:solidFill>
+                    </a:lnT>
+                    <a:lnR w="0" cap="flat" cmpd="sng" algn="ctr">
+                      <a:solidFill>
+                        <a:srgbClr val="FAF8F4"/>
+                      </a:solidFill>
+                    </a:lnR>
+                    <a:lnL w="0" cap="flat" cmpd="sng" algn="ctr">
+                      <a:solidFill>
+                        <a:srgbClr val="FAF8F4"/>
+                      </a:solidFill>
+                    </a:lnL>
+                    <a:noFill/>
+                  </a:tcPr>
+                </a:tc>
+                <a:tc>
+                  <a:txBody>
+                    <a:bodyPr wrap="square"/>
+                    <a:lstStyle/>
+                    <a:p>
+                      <a:pPr>
+                        <a:lnSpc>
+                          <a:spcPct val="134000"/>
+                        </a:lnSpc>
+                      </a:pPr>
+                      <a:r>
+                        <a:rPr sz="1100" b="0">
+                          <a:solidFill>
+                            <a:srgbClr val="111111"/>
+                          </a:solidFill>
+                          <a:latin typeface="Poppins"/>
+                        </a:rPr>
+                        <a:t>Referrals, JVPs, ambassadors</a:t>
+                      </a:r>
+                    </a:p>
+                  </a:txBody>
+                  <a:tcPr marL="0" marR="128016" marT="36576" marB="54864" anchor="t">
+                    <a:lnB w="9525" cap="flat" cmpd="sng" algn="ctr">
+                      <a:solidFill>
+                        <a:srgbClr val="D4D2D0"/>
+                      </a:solidFill>
+                    </a:lnB>
+                    <a:lnT w="0" cap="flat" cmpd="sng" algn="ctr">
+                      <a:solidFill>
+                        <a:srgbClr val="FAF8F4"/>
+                      </a:solidFill>
+                    </a:lnT>
+                    <a:lnR w="0" cap="flat" cmpd="sng" algn="ctr">
+                      <a:solidFill>
+                        <a:srgbClr val="FAF8F4"/>
+                      </a:solidFill>
+                    </a:lnR>
+                    <a:lnL w="0" cap="flat" cmpd="sng" algn="ctr">
+                      <a:solidFill>
+                        <a:srgbClr val="FAF8F4"/>
+                      </a:solidFill>
+                    </a:lnL>
+                    <a:noFill/>
+                  </a:tcPr>
+                </a:tc>
+                <a:tc>
+                  <a:txBody>
+                    <a:bodyPr wrap="square"/>
+                    <a:lstStyle/>
+                    <a:p>
+                      <a:pPr>
+                        <a:lnSpc>
+                          <a:spcPct val="134000"/>
+                        </a:lnSpc>
+                      </a:pPr>
+                      <a:r>
+                        <a:rPr sz="1100" b="0">
+                          <a:solidFill>
+                            <a:srgbClr val="111111"/>
+                          </a:solidFill>
+                          <a:latin typeface="Poppins"/>
+                        </a:rPr>
+                        <a:t>18% of sales already, on a programme nobody can hold</a:t>
+                      </a:r>
+                    </a:p>
+                  </a:txBody>
+                  <a:tcPr marL="0" marR="128016" marT="36576" marB="54864" anchor="t">
+                    <a:lnB w="9525" cap="flat" cmpd="sng" algn="ctr">
+                      <a:solidFill>
+                        <a:srgbClr val="D4D2D0"/>
+                      </a:solidFill>
+                    </a:lnB>
+                    <a:lnT w="0" cap="flat" cmpd="sng" algn="ctr">
+                      <a:solidFill>
+                        <a:srgbClr val="FAF8F4"/>
+                      </a:solidFill>
+                    </a:lnT>
+                    <a:lnR w="0" cap="flat" cmpd="sng" algn="ctr">
+                      <a:solidFill>
+                        <a:srgbClr val="FAF8F4"/>
+                      </a:solidFill>
+                    </a:lnR>
+                    <a:lnL w="0" cap="flat" cmpd="sng" algn="ctr">
+                      <a:solidFill>
+                        <a:srgbClr val="FAF8F4"/>
+                      </a:solidFill>
+                    </a:lnL>
+                    <a:noFill/>
+                  </a:tcPr>
+                </a:tc>
+              </a:tr>
+              <a:tr h="329981">
+                <a:tc>
+                  <a:txBody>
+                    <a:bodyPr wrap="square"/>
+                    <a:lstStyle/>
+                    <a:p>
+                      <a:pPr>
+                        <a:lnSpc>
+                          <a:spcPct val="134000"/>
+                        </a:lnSpc>
+                      </a:pPr>
+                      <a:r>
+                        <a:rPr sz="1100" b="1">
+                          <a:solidFill>
+                            <a:srgbClr val="111111"/>
+                          </a:solidFill>
+                          <a:latin typeface="Poppins"/>
+                        </a:rPr>
+                        <a:t>04</a:t>
+                      </a:r>
+                    </a:p>
+                  </a:txBody>
+                  <a:tcPr marL="0" marR="128016" marT="36576" marB="54864" anchor="t">
+                    <a:lnB w="9525" cap="flat" cmpd="sng" algn="ctr">
+                      <a:solidFill>
+                        <a:srgbClr val="D4D2D0"/>
+                      </a:solidFill>
+                    </a:lnB>
+                    <a:lnT w="0" cap="flat" cmpd="sng" algn="ctr">
+                      <a:solidFill>
+                        <a:srgbClr val="FAF8F4"/>
+                      </a:solidFill>
+                    </a:lnT>
+                    <a:lnR w="0" cap="flat" cmpd="sng" algn="ctr">
+                      <a:solidFill>
+                        <a:srgbClr val="FAF8F4"/>
+                      </a:solidFill>
+                    </a:lnR>
+                    <a:lnL w="0" cap="flat" cmpd="sng" algn="ctr">
+                      <a:solidFill>
+                        <a:srgbClr val="FAF8F4"/>
+                      </a:solidFill>
+                    </a:lnL>
+                    <a:noFill/>
+                  </a:tcPr>
+                </a:tc>
+                <a:tc>
+                  <a:txBody>
+                    <a:bodyPr wrap="square"/>
+                    <a:lstStyle/>
+                    <a:p>
+                      <a:pPr>
+                        <a:lnSpc>
+                          <a:spcPct val="134000"/>
+                        </a:lnSpc>
+                      </a:pPr>
+                      <a:r>
+                        <a:rPr sz="1100" b="0">
+                          <a:solidFill>
+                            <a:srgbClr val="111111"/>
+                          </a:solidFill>
+                          <a:latin typeface="Poppins"/>
+                        </a:rPr>
+                        <a:t>The Tap Room as a destination</a:t>
+                      </a:r>
+                    </a:p>
+                  </a:txBody>
+                  <a:tcPr marL="0" marR="128016" marT="36576" marB="54864" anchor="t">
+                    <a:lnB w="9525" cap="flat" cmpd="sng" algn="ctr">
+                      <a:solidFill>
+                        <a:srgbClr val="D4D2D0"/>
+                      </a:solidFill>
+                    </a:lnB>
+                    <a:lnT w="0" cap="flat" cmpd="sng" algn="ctr">
+                      <a:solidFill>
+                        <a:srgbClr val="FAF8F4"/>
+                      </a:solidFill>
+                    </a:lnT>
+                    <a:lnR w="0" cap="flat" cmpd="sng" algn="ctr">
+                      <a:solidFill>
+                        <a:srgbClr val="FAF8F4"/>
+                      </a:solidFill>
+                    </a:lnR>
+                    <a:lnL w="0" cap="flat" cmpd="sng" algn="ctr">
+                      <a:solidFill>
+                        <a:srgbClr val="FAF8F4"/>
+                      </a:solidFill>
+                    </a:lnL>
+                    <a:noFill/>
+                  </a:tcPr>
+                </a:tc>
+                <a:tc>
+                  <a:txBody>
+                    <a:bodyPr wrap="square"/>
+                    <a:lstStyle/>
+                    <a:p>
+                      <a:pPr>
+                        <a:lnSpc>
+                          <a:spcPct val="134000"/>
+                        </a:lnSpc>
+                      </a:pPr>
+                      <a:r>
+                        <a:rPr sz="1100" b="0">
+                          <a:solidFill>
+                            <a:srgbClr val="111111"/>
+                          </a:solidFill>
+                          <a:latin typeface="Poppins"/>
+                        </a:rPr>
+                        <a:t>Events, functions, ticketed music and local business</a:t>
+                      </a:r>
+                    </a:p>
+                  </a:txBody>
+                  <a:tcPr marL="0" marR="128016" marT="36576" marB="54864" anchor="t">
+                    <a:lnB w="9525" cap="flat" cmpd="sng" algn="ctr">
+                      <a:solidFill>
+                        <a:srgbClr val="D4D2D0"/>
+                      </a:solidFill>
+                    </a:lnB>
+                    <a:lnT w="0" cap="flat" cmpd="sng" algn="ctr">
+                      <a:solidFill>
+                        <a:srgbClr val="FAF8F4"/>
+                      </a:solidFill>
+                    </a:lnT>
+                    <a:lnR w="0" cap="flat" cmpd="sng" algn="ctr">
+                      <a:solidFill>
+                        <a:srgbClr val="FAF8F4"/>
+                      </a:solidFill>
+                    </a:lnR>
+                    <a:lnL w="0" cap="flat" cmpd="sng" algn="ctr">
+                      <a:solidFill>
+                        <a:srgbClr val="FAF8F4"/>
+                      </a:solidFill>
+                    </a:lnL>
+                    <a:noFill/>
+                  </a:tcPr>
+                </a:tc>
+              </a:tr>
+              <a:tr h="329981">
+                <a:tc>
+                  <a:txBody>
+                    <a:bodyPr wrap="square"/>
+                    <a:lstStyle/>
+                    <a:p>
+                      <a:pPr>
+                        <a:lnSpc>
+                          <a:spcPct val="134000"/>
+                        </a:lnSpc>
+                      </a:pPr>
+                      <a:r>
+                        <a:rPr sz="1100" b="1">
+                          <a:solidFill>
+                            <a:srgbClr val="111111"/>
+                          </a:solidFill>
+                          <a:latin typeface="Poppins"/>
+                        </a:rPr>
+                        <a:t>05</a:t>
+                      </a:r>
+                    </a:p>
+                  </a:txBody>
+                  <a:tcPr marL="0" marR="128016" marT="36576" marB="54864" anchor="t">
+                    <a:lnB w="9525" cap="flat" cmpd="sng" algn="ctr">
+                      <a:solidFill>
+                        <a:srgbClr val="D4D2D0"/>
+                      </a:solidFill>
+                    </a:lnB>
+                    <a:lnT w="0" cap="flat" cmpd="sng" algn="ctr">
+                      <a:solidFill>
+                        <a:srgbClr val="FAF8F4"/>
+                      </a:solidFill>
+                    </a:lnT>
+                    <a:lnR w="0" cap="flat" cmpd="sng" algn="ctr">
+                      <a:solidFill>
+                        <a:srgbClr val="FAF8F4"/>
+                      </a:solidFill>
+                    </a:lnR>
+                    <a:lnL w="0" cap="flat" cmpd="sng" algn="ctr">
+                      <a:solidFill>
+                        <a:srgbClr val="FAF8F4"/>
+                      </a:solidFill>
+                    </a:lnL>
+                    <a:noFill/>
+                  </a:tcPr>
+                </a:tc>
+                <a:tc>
+                  <a:txBody>
+                    <a:bodyPr wrap="square"/>
+                    <a:lstStyle/>
+                    <a:p>
+                      <a:pPr>
+                        <a:lnSpc>
+                          <a:spcPct val="134000"/>
+                        </a:lnSpc>
+                      </a:pPr>
+                      <a:r>
+                        <a:rPr sz="1100" b="0">
+                          <a:solidFill>
+                            <a:srgbClr val="111111"/>
+                          </a:solidFill>
+                          <a:latin typeface="Poppins"/>
+                        </a:rPr>
+                        <a:t>Wholesale as a function</a:t>
+                      </a:r>
+                    </a:p>
+                  </a:txBody>
+                  <a:tcPr marL="0" marR="128016" marT="36576" marB="54864" anchor="t">
+                    <a:lnB w="9525" cap="flat" cmpd="sng" algn="ctr">
+                      <a:solidFill>
+                        <a:srgbClr val="D4D2D0"/>
+                      </a:solidFill>
+                    </a:lnB>
+                    <a:lnT w="0" cap="flat" cmpd="sng" algn="ctr">
+                      <a:solidFill>
+                        <a:srgbClr val="FAF8F4"/>
+                      </a:solidFill>
+                    </a:lnT>
+                    <a:lnR w="0" cap="flat" cmpd="sng" algn="ctr">
+                      <a:solidFill>
+                        <a:srgbClr val="FAF8F4"/>
+                      </a:solidFill>
+                    </a:lnR>
+                    <a:lnL w="0" cap="flat" cmpd="sng" algn="ctr">
+                      <a:solidFill>
+                        <a:srgbClr val="FAF8F4"/>
+                      </a:solidFill>
+                    </a:lnL>
+                    <a:noFill/>
+                  </a:tcPr>
+                </a:tc>
+                <a:tc>
+                  <a:txBody>
+                    <a:bodyPr wrap="square"/>
+                    <a:lstStyle/>
+                    <a:p>
+                      <a:pPr>
+                        <a:lnSpc>
+                          <a:spcPct val="134000"/>
+                        </a:lnSpc>
+                      </a:pPr>
+                      <a:r>
+                        <a:rPr sz="1100" b="0">
+                          <a:solidFill>
+                            <a:srgbClr val="111111"/>
+                          </a:solidFill>
+                          <a:latin typeface="Poppins"/>
+                        </a:rPr>
+                        <a:t>Demand exists. Follow-up does not</a:t>
+                      </a:r>
+                    </a:p>
+                  </a:txBody>
+                  <a:tcPr marL="0" marR="128016" marT="36576" marB="54864" anchor="t">
+                    <a:lnB w="9525" cap="flat" cmpd="sng" algn="ctr">
+                      <a:solidFill>
+                        <a:srgbClr val="D4D2D0"/>
+                      </a:solidFill>
+                    </a:lnB>
+                    <a:lnT w="0" cap="flat" cmpd="sng" algn="ctr">
+                      <a:solidFill>
+                        <a:srgbClr val="FAF8F4"/>
+                      </a:solidFill>
+                    </a:lnT>
+                    <a:lnR w="0" cap="flat" cmpd="sng" algn="ctr">
+                      <a:solidFill>
+                        <a:srgbClr val="FAF8F4"/>
+                      </a:solidFill>
+                    </a:lnR>
+                    <a:lnL w="0" cap="flat" cmpd="sng" algn="ctr">
+                      <a:solidFill>
+                        <a:srgbClr val="FAF8F4"/>
+                      </a:solidFill>
+                    </a:lnL>
+                    <a:noFill/>
+                  </a:tcPr>
+                </a:tc>
+              </a:tr>
+              <a:tr h="329981">
+                <a:tc>
+                  <a:txBody>
+                    <a:bodyPr wrap="square"/>
+                    <a:lstStyle/>
+                    <a:p>
+                      <a:pPr>
+                        <a:lnSpc>
+                          <a:spcPct val="134000"/>
+                        </a:lnSpc>
+                      </a:pPr>
+                      <a:r>
+                        <a:rPr sz="1100" b="1">
+                          <a:solidFill>
+                            <a:srgbClr val="111111"/>
+                          </a:solidFill>
+                          <a:latin typeface="Poppins"/>
+                        </a:rPr>
+                        <a:t>06</a:t>
+                      </a:r>
+                    </a:p>
+                  </a:txBody>
+                  <a:tcPr marL="0" marR="128016" marT="36576" marB="54864" anchor="t">
+                    <a:lnB w="9525" cap="flat" cmpd="sng" algn="ctr">
+                      <a:solidFill>
+                        <a:srgbClr val="D4D2D0"/>
+                      </a:solidFill>
+                    </a:lnB>
+                    <a:lnT w="0" cap="flat" cmpd="sng" algn="ctr">
+                      <a:solidFill>
+                        <a:srgbClr val="FAF8F4"/>
+                      </a:solidFill>
+                    </a:lnT>
+                    <a:lnR w="0" cap="flat" cmpd="sng" algn="ctr">
+                      <a:solidFill>
+                        <a:srgbClr val="FAF8F4"/>
+                      </a:solidFill>
+                    </a:lnR>
+                    <a:lnL w="0" cap="flat" cmpd="sng" algn="ctr">
+                      <a:solidFill>
+                        <a:srgbClr val="FAF8F4"/>
+                      </a:solidFill>
+                    </a:lnL>
+                    <a:noFill/>
+                  </a:tcPr>
+                </a:tc>
+                <a:tc>
+                  <a:txBody>
+                    <a:bodyPr wrap="square"/>
+                    <a:lstStyle/>
+                    <a:p>
+                      <a:pPr>
+                        <a:lnSpc>
+                          <a:spcPct val="134000"/>
+                        </a:lnSpc>
+                      </a:pPr>
+                      <a:r>
+                        <a:rPr sz="1100" b="0">
+                          <a:solidFill>
+                            <a:srgbClr val="111111"/>
+                          </a:solidFill>
+                          <a:latin typeface="Poppins"/>
+                        </a:rPr>
+                        <a:t>Brand, range and proof</a:t>
+                      </a:r>
+                    </a:p>
+                  </a:txBody>
+                  <a:tcPr marL="0" marR="128016" marT="36576" marB="54864" anchor="t">
+                    <a:lnB w="9525" cap="flat" cmpd="sng" algn="ctr">
+                      <a:solidFill>
+                        <a:srgbClr val="D4D2D0"/>
+                      </a:solidFill>
+                    </a:lnB>
+                    <a:lnT w="0" cap="flat" cmpd="sng" algn="ctr">
+                      <a:solidFill>
+                        <a:srgbClr val="FAF8F4"/>
+                      </a:solidFill>
+                    </a:lnT>
+                    <a:lnR w="0" cap="flat" cmpd="sng" algn="ctr">
+                      <a:solidFill>
+                        <a:srgbClr val="FAF8F4"/>
+                      </a:solidFill>
+                    </a:lnR>
+                    <a:lnL w="0" cap="flat" cmpd="sng" algn="ctr">
+                      <a:solidFill>
+                        <a:srgbClr val="FAF8F4"/>
+                      </a:solidFill>
+                    </a:lnL>
+                    <a:noFill/>
+                  </a:tcPr>
+                </a:tc>
+                <a:tc>
+                  <a:txBody>
+                    <a:bodyPr wrap="square"/>
+                    <a:lstStyle/>
+                    <a:p>
+                      <a:pPr>
+                        <a:lnSpc>
+                          <a:spcPct val="134000"/>
+                        </a:lnSpc>
+                      </a:pPr>
+                      <a:r>
+                        <a:rPr sz="1100" b="0">
+                          <a:solidFill>
+                            <a:srgbClr val="111111"/>
+                          </a:solidFill>
+                          <a:latin typeface="Poppins"/>
+                        </a:rPr>
+                        <a:t>Sharpened, not rebuilt. Proof you own and barely use</a:t>
+                      </a:r>
+                    </a:p>
+                  </a:txBody>
+                  <a:tcPr marL="0" marR="128016" marT="36576" marB="54864" anchor="t">
+                    <a:lnB w="9525" cap="flat" cmpd="sng" algn="ctr">
+                      <a:solidFill>
+                        <a:srgbClr val="D4D2D0"/>
+                      </a:solidFill>
+                    </a:lnB>
+                    <a:lnT w="0" cap="flat" cmpd="sng" algn="ctr">
+                      <a:solidFill>
+                        <a:srgbClr val="FAF8F4"/>
+                      </a:solidFill>
+                    </a:lnT>
+                    <a:lnR w="0" cap="flat" cmpd="sng" algn="ctr">
+                      <a:solidFill>
+                        <a:srgbClr val="FAF8F4"/>
+                      </a:solidFill>
+                    </a:lnR>
+                    <a:lnL w="0" cap="flat" cmpd="sng" algn="ctr">
+                      <a:solidFill>
+                        <a:srgbClr val="FAF8F4"/>
+                      </a:solidFill>
+                    </a:lnL>
+                    <a:noFill/>
+                  </a:tcPr>
+                </a:tc>
+              </a:tr>
+              <a:tr h="329981">
+                <a:tc>
+                  <a:txBody>
+                    <a:bodyPr wrap="square"/>
+                    <a:lstStyle/>
+                    <a:p>
+                      <a:pPr>
+                        <a:lnSpc>
+                          <a:spcPct val="134000"/>
+                        </a:lnSpc>
+                      </a:pPr>
+                      <a:r>
+                        <a:rPr sz="1100" b="1">
+                          <a:solidFill>
+                            <a:srgbClr val="111111"/>
+                          </a:solidFill>
+                          <a:latin typeface="Poppins"/>
+                        </a:rPr>
+                        <a:t>07</a:t>
+                      </a:r>
+                    </a:p>
+                  </a:txBody>
+                  <a:tcPr marL="0" marR="128016" marT="36576" marB="54864" anchor="t">
+                    <a:lnB w="9525" cap="flat" cmpd="sng" algn="ctr">
+                      <a:solidFill>
+                        <a:srgbClr val="D4D2D0"/>
+                      </a:solidFill>
+                    </a:lnB>
+                    <a:lnT w="0" cap="flat" cmpd="sng" algn="ctr">
+                      <a:solidFill>
+                        <a:srgbClr val="FAF8F4"/>
+                      </a:solidFill>
+                    </a:lnT>
+                    <a:lnR w="0" cap="flat" cmpd="sng" algn="ctr">
+                      <a:solidFill>
+                        <a:srgbClr val="FAF8F4"/>
+                      </a:solidFill>
+                    </a:lnR>
+                    <a:lnL w="0" cap="flat" cmpd="sng" algn="ctr">
+                      <a:solidFill>
+                        <a:srgbClr val="FAF8F4"/>
+                      </a:solidFill>
+                    </a:lnL>
+                    <a:noFill/>
+                  </a:tcPr>
+                </a:tc>
+                <a:tc>
+                  <a:txBody>
+                    <a:bodyPr wrap="square"/>
+                    <a:lstStyle/>
+                    <a:p>
+                      <a:pPr>
+                        <a:lnSpc>
+                          <a:spcPct val="134000"/>
+                        </a:lnSpc>
+                      </a:pPr>
+                      <a:r>
+                        <a:rPr sz="1100" b="0">
+                          <a:solidFill>
+                            <a:srgbClr val="111111"/>
+                          </a:solidFill>
+                          <a:latin typeface="Poppins"/>
+                        </a:rPr>
+                        <a:t>Governance</a:t>
+                      </a:r>
+                    </a:p>
+                  </a:txBody>
+                  <a:tcPr marL="0" marR="128016" marT="36576" marB="54864" anchor="t">
+                    <a:lnB w="9525" cap="flat" cmpd="sng" algn="ctr">
+                      <a:solidFill>
+                        <a:srgbClr val="D4D2D0"/>
+                      </a:solidFill>
+                    </a:lnB>
+                    <a:lnT w="0" cap="flat" cmpd="sng" algn="ctr">
+                      <a:solidFill>
+                        <a:srgbClr val="FAF8F4"/>
+                      </a:solidFill>
+                    </a:lnT>
+                    <a:lnR w="0" cap="flat" cmpd="sng" algn="ctr">
+                      <a:solidFill>
+                        <a:srgbClr val="FAF8F4"/>
+                      </a:solidFill>
+                    </a:lnR>
+                    <a:lnL w="0" cap="flat" cmpd="sng" algn="ctr">
+                      <a:solidFill>
+                        <a:srgbClr val="FAF8F4"/>
+                      </a:solidFill>
+                    </a:lnL>
+                    <a:noFill/>
+                  </a:tcPr>
+                </a:tc>
+                <a:tc>
+                  <a:txBody>
+                    <a:bodyPr wrap="square"/>
+                    <a:lstStyle/>
+                    <a:p>
+                      <a:pPr>
+                        <a:lnSpc>
+                          <a:spcPct val="134000"/>
+                        </a:lnSpc>
+                      </a:pPr>
+                      <a:r>
+                        <a:rPr sz="1100" b="0">
+                          <a:solidFill>
+                            <a:srgbClr val="111111"/>
+                          </a:solidFill>
+                          <a:latin typeface="Poppins"/>
+                        </a:rPr>
+                        <a:t>Four numbers, one page, one rhythm</a:t>
+                      </a:r>
+                    </a:p>
+                  </a:txBody>
+                  <a:tcPr marL="0" marR="128016" marT="36576" marB="54864" anchor="t">
+                    <a:lnB w="9525" cap="flat" cmpd="sng" algn="ctr">
+                      <a:solidFill>
+                        <a:srgbClr val="D4D2D0"/>
+                      </a:solidFill>
+                    </a:lnB>
+                    <a:lnT w="0" cap="flat" cmpd="sng" algn="ctr">
+                      <a:solidFill>
+                        <a:srgbClr val="FAF8F4"/>
+                      </a:solidFill>
+                    </a:lnT>
+                    <a:lnR w="0" cap="flat" cmpd="sng" algn="ctr">
+                      <a:solidFill>
+                        <a:srgbClr val="FAF8F4"/>
+                      </a:solidFill>
+                    </a:lnR>
+                    <a:lnL w="0" cap="flat" cmpd="sng" algn="ctr">
+                      <a:solidFill>
+                        <a:srgbClr val="FAF8F4"/>
+                      </a:solidFill>
+                    </a:lnL>
+                    <a:noFill/>
+                  </a:tcPr>
+                </a:tc>
+              </a:tr>
+            </a:tbl>
+          </a:graphicData>
+        </a:graphic>
+      </p:graphicFrame>
+      <p:sp>
+        <p:nvSpPr>
+          <p:cNvPr id="5" name="TextBox 4"/>
+          <p:cNvSpPr txBox="1"/>
+          <p:nvPr/>
+        </p:nvSpPr>
+        <p:spPr>
+          <a:xfrm>
+            <a:off x="914400" y="6291072"/>
+            <a:ext cx="10362895" cy="274320"/>
+          </a:xfrm>
+          <a:prstGeom prst="rect">
+            <a:avLst/>
+          </a:prstGeom>
+          <a:noFill/>
+        </p:spPr>
+        <p:txBody>
+          <a:bodyPr wrap="square" lIns="0" rIns="0" tIns="0" bIns="0" anchor="t">
+            <a:spAutoFit/>
+          </a:bodyPr>
+          <a:lstStyle/>
+          <a:p>
+            <a:pPr algn="l">
+              <a:lnSpc>
+                <a:spcPct val="100000"/>
+              </a:lnSpc>
+            </a:pPr>
+            <a:r>
+              <a:rPr sz="900" b="0">
+                <a:solidFill>
+                  <a:srgbClr val="666666"/>
+                </a:solidFill>
+                <a:latin typeface="Poppins"/>
+              </a:rPr>
+              <a:t>Horizons are your own: 30 days to mid-October, three months to mid-December, six months to March 2027, one year to September 2027.</a:t>
+            </a:r>
+          </a:p>
+        </p:txBody>
+      </p:sp>
+    </p:spTree>
+  </p:cSld>
+  <p:clrMapOvr>
+    <a:masterClrMapping/>
+  </p:clrMapOvr>
+</p:sld>
+</file>
+
+<file path=ppt/slides/slide13.xml><?xml version="1.0" encoding="utf-8"?>
+<p:sld xmlns:a="http://schemas.openxmlformats.org/drawingml/2006/main" xmlns:p="http://schemas.openxmlformats.org/presentationml/2006/main" xmlns:r="http://schemas.openxmlformats.org/officeDocument/2006/relationships">
+  <p:cSld>
+    <p:bg>
+      <p:bgPr>
+        <a:solidFill>
+          <a:srgbClr val="FAF8F4"/>
+        </a:solidFill>
+        <a:effectLst/>
+      </p:bgPr>
+    </p:bg>
+    <p:spTree>
+      <p:nvGrpSpPr>
+        <p:cNvPr id="1" name=""/>
+        <p:cNvGrpSpPr/>
+        <p:nvPr/>
+      </p:nvGrpSpPr>
+      <p:grpSpPr/>
+      <p:sp>
+        <p:nvSpPr>
+          <p:cNvPr id="2" name="TextBox 1"/>
+          <p:cNvSpPr txBox="1"/>
+          <p:nvPr/>
+        </p:nvSpPr>
+        <p:spPr>
+          <a:xfrm>
+            <a:off x="914400" y="914400"/>
+            <a:ext cx="10362895" cy="274320"/>
+          </a:xfrm>
+          <a:prstGeom prst="rect">
+            <a:avLst/>
+          </a:prstGeom>
+          <a:noFill/>
+        </p:spPr>
+        <p:txBody>
+          <a:bodyPr wrap="square" lIns="0" rIns="0" tIns="0" bIns="0" anchor="t">
+            <a:spAutoFit/>
+          </a:bodyPr>
+          <a:lstStyle/>
+          <a:p>
+            <a:pPr algn="l">
+              <a:lnSpc>
+                <a:spcPct val="100000"/>
+              </a:lnSpc>
+            </a:pPr>
+            <a:r>
+              <a:rPr sz="900" b="0" spc="200">
+                <a:solidFill>
+                  <a:srgbClr val="111111"/>
+                </a:solidFill>
+                <a:latin typeface="Poppins"/>
+              </a:rPr>
               <a:t>WORKSTREAM 01</a:t>
             </a:r>
           </a:p>
@@ -4431,7 +6008,7 @@
 </p:sld>
 </file>
 
-<file path=ppt/slides/slide11.xml><?xml version="1.0" encoding="utf-8"?>
+<file path=ppt/slides/slide14.xml><?xml version="1.0" encoding="utf-8"?>
 <p:sld xmlns:a="http://schemas.openxmlformats.org/drawingml/2006/main" xmlns:p="http://schemas.openxmlformats.org/presentationml/2006/main" xmlns:r="http://schemas.openxmlformats.org/officeDocument/2006/relationships">
   <p:cSld>
     <p:bg>
@@ -4561,7 +6138,7 @@
                 </a:solidFill>
                 <a:latin typeface="Poppins"/>
               </a:rPr>
-              <a:t>Your number one, and ours. They have overcome every objection already.</a:t>
+              <a:t>The lead priority. They have bought the hardware and overcome every objection already.</a:t>
             </a:r>
           </a:p>
         </p:txBody>
@@ -4576,7 +6153,7 @@
         </p:nvGraphicFramePr>
         <p:xfrm>
           <a:off x="914400" y="2880360"/>
-          <a:ext cx="10362893" cy="2380989"/>
+          <a:ext cx="10362893" cy="3167734"/>
         </p:xfrm>
         <a:graphic>
           <a:graphicData uri="http://schemas.openxmlformats.org/drawingml/2006/table">
@@ -4744,7 +6321,7 @@
                           </a:solidFill>
                           <a:latin typeface="Poppins"/>
                         </a:rPr>
-                        <a:t>Harvey Norman</a:t>
+                        <a:t>National retail, to explore</a:t>
                       </a:r>
                     </a:p>
                   </a:txBody>
@@ -4789,7 +6366,7 @@
                           </a:solidFill>
                           <a:latin typeface="Poppins"/>
                         </a:rPr>
-                        <a:t>Gift-with-purchase or first keg free at franchisee level, plus the buyer database and the outdoor living grouping</a:t>
+                        <a:t>Harvey Norman, JB Hi-Fi and The Good Guys. A gift-with-purchase or first keg free at franchisee level, plus the buyer database</a:t>
                       </a:r>
                     </a:p>
                   </a:txBody>
@@ -5000,7 +6577,7 @@
                   </a:tcPr>
                 </a:tc>
               </a:tr>
-              <a:tr h="329981">
+              <a:tr h="558363">
                 <a:tc>
                   <a:txBody>
                     <a:bodyPr wrap="square"/>
@@ -5063,7 +6640,144 @@
                           </a:solidFill>
                           <a:latin typeface="Poppins"/>
                         </a:rPr>
-                        <a:t>One offer, one page: you already have the hardware, we are the beer, first keg on us</a:t>
+                        <a:t>The lead priority. One offer, one page: you already have the hardware, we are the beer, first keg on us</a:t>
+                      </a:r>
+                    </a:p>
+                  </a:txBody>
+                  <a:tcPr marL="0" marR="128016" marT="36576" marB="54864" anchor="t">
+                    <a:lnB w="9525" cap="flat" cmpd="sng" algn="ctr">
+                      <a:solidFill>
+                        <a:srgbClr val="D4D2D0"/>
+                      </a:solidFill>
+                    </a:lnB>
+                    <a:lnT w="0" cap="flat" cmpd="sng" algn="ctr">
+                      <a:solidFill>
+                        <a:srgbClr val="FAF8F4"/>
+                      </a:solidFill>
+                    </a:lnT>
+                    <a:lnR w="0" cap="flat" cmpd="sng" algn="ctr">
+                      <a:solidFill>
+                        <a:srgbClr val="FAF8F4"/>
+                      </a:solidFill>
+                    </a:lnR>
+                    <a:lnL w="0" cap="flat" cmpd="sng" algn="ctr">
+                      <a:solidFill>
+                        <a:srgbClr val="FAF8F4"/>
+                      </a:solidFill>
+                    </a:lnL>
+                    <a:noFill/>
+                  </a:tcPr>
+                </a:tc>
+                <a:tc>
+                  <a:txBody>
+                    <a:bodyPr wrap="square"/>
+                    <a:lstStyle/>
+                    <a:p>
+                      <a:pPr>
+                        <a:lnSpc>
+                          <a:spcPct val="134000"/>
+                        </a:lnSpc>
+                      </a:pPr>
+                      <a:r>
+                        <a:rPr sz="1100" b="0">
+                          <a:solidFill>
+                            <a:srgbClr val="111111"/>
+                          </a:solidFill>
+                          <a:latin typeface="Poppins"/>
+                        </a:rPr>
+                        <a:t>3 months</a:t>
+                      </a:r>
+                    </a:p>
+                  </a:txBody>
+                  <a:tcPr marL="0" marR="128016" marT="36576" marB="54864" anchor="t">
+                    <a:lnB w="9525" cap="flat" cmpd="sng" algn="ctr">
+                      <a:solidFill>
+                        <a:srgbClr val="D4D2D0"/>
+                      </a:solidFill>
+                    </a:lnB>
+                    <a:lnT w="0" cap="flat" cmpd="sng" algn="ctr">
+                      <a:solidFill>
+                        <a:srgbClr val="FAF8F4"/>
+                      </a:solidFill>
+                    </a:lnT>
+                    <a:lnR w="0" cap="flat" cmpd="sng" algn="ctr">
+                      <a:solidFill>
+                        <a:srgbClr val="FAF8F4"/>
+                      </a:solidFill>
+                    </a:lnR>
+                    <a:lnL w="0" cap="flat" cmpd="sng" algn="ctr">
+                      <a:solidFill>
+                        <a:srgbClr val="FAF8F4"/>
+                      </a:solidFill>
+                    </a:lnL>
+                    <a:noFill/>
+                  </a:tcPr>
+                </a:tc>
+              </a:tr>
+              <a:tr h="558363">
+                <a:tc>
+                  <a:txBody>
+                    <a:bodyPr wrap="square"/>
+                    <a:lstStyle/>
+                    <a:p>
+                      <a:pPr>
+                        <a:lnSpc>
+                          <a:spcPct val="134000"/>
+                        </a:lnSpc>
+                      </a:pPr>
+                      <a:r>
+                        <a:rPr sz="1100" b="1">
+                          <a:solidFill>
+                            <a:srgbClr val="111111"/>
+                          </a:solidFill>
+                          <a:latin typeface="Poppins"/>
+                        </a:rPr>
+                        <a:t>Switcher offer conditions</a:t>
+                      </a:r>
+                    </a:p>
+                  </a:txBody>
+                  <a:tcPr marL="0" marR="128016" marT="36576" marB="54864" anchor="t">
+                    <a:lnB w="9525" cap="flat" cmpd="sng" algn="ctr">
+                      <a:solidFill>
+                        <a:srgbClr val="D4D2D0"/>
+                      </a:solidFill>
+                    </a:lnB>
+                    <a:lnT w="0" cap="flat" cmpd="sng" algn="ctr">
+                      <a:solidFill>
+                        <a:srgbClr val="FAF8F4"/>
+                      </a:solidFill>
+                    </a:lnT>
+                    <a:lnR w="0" cap="flat" cmpd="sng" algn="ctr">
+                      <a:solidFill>
+                        <a:srgbClr val="FAF8F4"/>
+                      </a:solidFill>
+                    </a:lnR>
+                    <a:lnL w="0" cap="flat" cmpd="sng" algn="ctr">
+                      <a:solidFill>
+                        <a:srgbClr val="FAF8F4"/>
+                      </a:solidFill>
+                    </a:lnL>
+                    <a:noFill/>
+                  </a:tcPr>
+                </a:tc>
+                <a:tc>
+                  <a:txBody>
+                    <a:bodyPr wrap="square"/>
+                    <a:lstStyle/>
+                    <a:p>
+                      <a:pPr>
+                        <a:lnSpc>
+                          <a:spcPct val="134000"/>
+                        </a:lnSpc>
+                      </a:pPr>
+                      <a:r>
+                        <a:rPr sz="1100" b="0">
+                          <a:solidFill>
+                            <a:srgbClr val="111111"/>
+                          </a:solidFill>
+                          <a:latin typeface="Poppins"/>
+                        </a:rPr>
+                        <a:t>Compatibility check, one offer per household or venue, proof of ownership, liquor promotion wording, Meta targeting 18 and over</a:t>
                       </a:r>
                     </a:p>
                   </a:txBody>
@@ -5423,7 +7137,7 @@
 </p:sld>
 </file>
 
-<file path=ppt/slides/slide12.xml><?xml version="1.0" encoding="utf-8"?>
+<file path=ppt/slides/slide15.xml><?xml version="1.0" encoding="utf-8"?>
 <p:sld xmlns:a="http://schemas.openxmlformats.org/drawingml/2006/main" xmlns:p="http://schemas.openxmlformats.org/presentationml/2006/main" xmlns:r="http://schemas.openxmlformats.org/officeDocument/2006/relationships">
   <p:cSld>
     <p:bg>
@@ -5519,56 +7233,17 @@
           </a:p>
         </p:txBody>
       </p:sp>
-      <p:sp>
-        <p:nvSpPr>
-          <p:cNvPr id="4" name="TextBox 3"/>
-          <p:cNvSpPr txBox="1"/>
-          <p:nvPr/>
-        </p:nvSpPr>
-        <p:spPr>
-          <a:xfrm>
-            <a:off x="914400" y="2084831"/>
-            <a:ext cx="8778240" cy="548640"/>
-          </a:xfrm>
-          <a:prstGeom prst="rect">
-            <a:avLst/>
-          </a:prstGeom>
-          <a:noFill/>
-        </p:spPr>
-        <p:txBody>
-          <a:bodyPr wrap="square" lIns="0" rIns="0" tIns="0" bIns="0" anchor="t">
-            <a:spAutoFit/>
-          </a:bodyPr>
-          <a:lstStyle/>
-          <a:p>
-            <a:pPr algn="l">
-              <a:lnSpc>
-                <a:spcPct val="140000"/>
-              </a:lnSpc>
-            </a:pPr>
-            <a:r>
-              <a:rPr sz="1300" b="0">
-                <a:solidFill>
-                  <a:srgbClr val="666666"/>
-                </a:solidFill>
-                <a:latin typeface="Poppins"/>
-              </a:rPr>
-              <a:t>Referral is already 18% of acquisition, on a programme nobody can hold in their hand.</a:t>
-            </a:r>
-          </a:p>
-        </p:txBody>
-      </p:sp>
       <p:graphicFrame>
         <p:nvGraphicFramePr>
-          <p:cNvPr id="5" name="Table 4"/>
+          <p:cNvPr id="4" name="Table 3"/>
           <p:cNvGraphicFramePr>
             <a:graphicFrameLocks noGrp="1"/>
           </p:cNvGraphicFramePr>
           <p:nvPr/>
         </p:nvGraphicFramePr>
         <p:xfrm>
-          <a:off x="914400" y="2880360"/>
-          <a:ext cx="10362893" cy="2609371"/>
+          <a:off x="914400" y="2194560"/>
+          <a:ext cx="10362893" cy="3954479"/>
         </p:xfrm>
         <a:graphic>
           <a:graphicData uri="http://schemas.openxmlformats.org/drawingml/2006/table">
@@ -5781,7 +7456,7 @@
                           </a:solidFill>
                           <a:latin typeface="Poppins"/>
                         </a:rPr>
-                        <a:t>Tokens do not travel. A free keg does. Rebuilt around a free keg and a QR card an owner hands to a mate</a:t>
+                        <a:t>Tokens do not travel. A reward worth passing on does. Rebuilt around a free keg and a QR card an owner hands to a mate</a:t>
                       </a:r>
                     </a:p>
                   </a:txBody>
@@ -5873,7 +7548,7 @@
                           </a:solidFill>
                           <a:latin typeface="Poppins"/>
                         </a:rPr>
-                        <a:t>JVPs and partners</a:t>
+                        <a:t>Internal referral programme</a:t>
                       </a:r>
                     </a:p>
                   </a:txBody>
@@ -5918,7 +7593,7 @@
                           </a:solidFill>
                           <a:latin typeface="Poppins"/>
                         </a:rPr>
-                        <a:t>The list, offer, outreach and follow-up from the CRM. Mark's venues, Zip, Value H2O, Jim's Mowing, the tour operators</a:t>
+                        <a:t>The same mechanic pointed at keg system sales, for the team and for existing customers. Tracked so it can be paid</a:t>
                       </a:r>
                     </a:p>
                   </a:txBody>
@@ -6010,6 +7685,143 @@
                           </a:solidFill>
                           <a:latin typeface="Poppins"/>
                         </a:rPr>
+                        <a:t>JVPs and partners</a:t>
+                      </a:r>
+                    </a:p>
+                  </a:txBody>
+                  <a:tcPr marL="0" marR="128016" marT="36576" marB="54864" anchor="t">
+                    <a:lnB w="9525" cap="flat" cmpd="sng" algn="ctr">
+                      <a:solidFill>
+                        <a:srgbClr val="D4D2D0"/>
+                      </a:solidFill>
+                    </a:lnB>
+                    <a:lnT w="0" cap="flat" cmpd="sng" algn="ctr">
+                      <a:solidFill>
+                        <a:srgbClr val="FAF8F4"/>
+                      </a:solidFill>
+                    </a:lnT>
+                    <a:lnR w="0" cap="flat" cmpd="sng" algn="ctr">
+                      <a:solidFill>
+                        <a:srgbClr val="FAF8F4"/>
+                      </a:solidFill>
+                    </a:lnR>
+                    <a:lnL w="0" cap="flat" cmpd="sng" algn="ctr">
+                      <a:solidFill>
+                        <a:srgbClr val="FAF8F4"/>
+                      </a:solidFill>
+                    </a:lnL>
+                    <a:noFill/>
+                  </a:tcPr>
+                </a:tc>
+                <a:tc>
+                  <a:txBody>
+                    <a:bodyPr wrap="square"/>
+                    <a:lstStyle/>
+                    <a:p>
+                      <a:pPr>
+                        <a:lnSpc>
+                          <a:spcPct val="134000"/>
+                        </a:lnSpc>
+                      </a:pPr>
+                      <a:r>
+                        <a:rPr sz="1100" b="0">
+                          <a:solidFill>
+                            <a:srgbClr val="111111"/>
+                          </a:solidFill>
+                          <a:latin typeface="Poppins"/>
+                        </a:rPr>
+                        <a:t>The list, offer, outreach and follow-up from the CRM. Mark's venues, Never Quit and the tour operators</a:t>
+                      </a:r>
+                    </a:p>
+                  </a:txBody>
+                  <a:tcPr marL="0" marR="128016" marT="36576" marB="54864" anchor="t">
+                    <a:lnB w="9525" cap="flat" cmpd="sng" algn="ctr">
+                      <a:solidFill>
+                        <a:srgbClr val="D4D2D0"/>
+                      </a:solidFill>
+                    </a:lnB>
+                    <a:lnT w="0" cap="flat" cmpd="sng" algn="ctr">
+                      <a:solidFill>
+                        <a:srgbClr val="FAF8F4"/>
+                      </a:solidFill>
+                    </a:lnT>
+                    <a:lnR w="0" cap="flat" cmpd="sng" algn="ctr">
+                      <a:solidFill>
+                        <a:srgbClr val="FAF8F4"/>
+                      </a:solidFill>
+                    </a:lnR>
+                    <a:lnL w="0" cap="flat" cmpd="sng" algn="ctr">
+                      <a:solidFill>
+                        <a:srgbClr val="FAF8F4"/>
+                      </a:solidFill>
+                    </a:lnL>
+                    <a:noFill/>
+                  </a:tcPr>
+                </a:tc>
+                <a:tc>
+                  <a:txBody>
+                    <a:bodyPr wrap="square"/>
+                    <a:lstStyle/>
+                    <a:p>
+                      <a:pPr>
+                        <a:lnSpc>
+                          <a:spcPct val="134000"/>
+                        </a:lnSpc>
+                      </a:pPr>
+                      <a:r>
+                        <a:rPr sz="1100" b="0">
+                          <a:solidFill>
+                            <a:srgbClr val="111111"/>
+                          </a:solidFill>
+                          <a:latin typeface="Poppins"/>
+                        </a:rPr>
+                        <a:t>3 months</a:t>
+                      </a:r>
+                    </a:p>
+                  </a:txBody>
+                  <a:tcPr marL="0" marR="128016" marT="36576" marB="54864" anchor="t">
+                    <a:lnB w="9525" cap="flat" cmpd="sng" algn="ctr">
+                      <a:solidFill>
+                        <a:srgbClr val="D4D2D0"/>
+                      </a:solidFill>
+                    </a:lnB>
+                    <a:lnT w="0" cap="flat" cmpd="sng" algn="ctr">
+                      <a:solidFill>
+                        <a:srgbClr val="FAF8F4"/>
+                      </a:solidFill>
+                    </a:lnT>
+                    <a:lnR w="0" cap="flat" cmpd="sng" algn="ctr">
+                      <a:solidFill>
+                        <a:srgbClr val="FAF8F4"/>
+                      </a:solidFill>
+                    </a:lnR>
+                    <a:lnL w="0" cap="flat" cmpd="sng" algn="ctr">
+                      <a:solidFill>
+                        <a:srgbClr val="FAF8F4"/>
+                      </a:solidFill>
+                    </a:lnL>
+                    <a:noFill/>
+                  </a:tcPr>
+                </a:tc>
+              </a:tr>
+              <a:tr h="558363">
+                <a:tc>
+                  <a:txBody>
+                    <a:bodyPr wrap="square"/>
+                    <a:lstStyle/>
+                    <a:p>
+                      <a:pPr>
+                        <a:lnSpc>
+                          <a:spcPct val="134000"/>
+                        </a:lnSpc>
+                      </a:pPr>
+                      <a:r>
+                        <a:rPr sz="1100" b="1">
+                          <a:solidFill>
+                            <a:srgbClr val="111111"/>
+                          </a:solidFill>
+                          <a:latin typeface="Poppins"/>
+                        </a:rPr>
                         <a:t>Trades as a referral force</a:t>
                       </a:r>
                     </a:p>
@@ -6266,7 +8078,7 @@
                   </a:tcPr>
                 </a:tc>
               </a:tr>
-              <a:tr h="329981">
+              <a:tr h="558363">
                 <a:tc>
                   <a:txBody>
                     <a:bodyPr wrap="square"/>
@@ -6284,7 +8096,7 @@
                           </a:solidFill>
                           <a:latin typeface="Poppins"/>
                         </a:rPr>
-                        <a:t>Host a tasting</a:t>
+                        <a:t>Hosted tasting nights, to test</a:t>
                       </a:r>
                     </a:p>
                   </a:txBody>
@@ -6329,7 +8141,144 @@
                           </a:solidFill>
                           <a:latin typeface="Poppins"/>
                         </a:rPr>
-                        <a:t>An owner pours for about twenty friends at home and earns on anything sold</a:t>
+                        <a:t>A test, not a commitment. An owner hosts at home and earns a free keg or credit on anything sold</a:t>
+                      </a:r>
+                    </a:p>
+                  </a:txBody>
+                  <a:tcPr marL="0" marR="128016" marT="36576" marB="54864" anchor="t">
+                    <a:lnB w="9525" cap="flat" cmpd="sng" algn="ctr">
+                      <a:solidFill>
+                        <a:srgbClr val="D4D2D0"/>
+                      </a:solidFill>
+                    </a:lnB>
+                    <a:lnT w="0" cap="flat" cmpd="sng" algn="ctr">
+                      <a:solidFill>
+                        <a:srgbClr val="FAF8F4"/>
+                      </a:solidFill>
+                    </a:lnT>
+                    <a:lnR w="0" cap="flat" cmpd="sng" algn="ctr">
+                      <a:solidFill>
+                        <a:srgbClr val="FAF8F4"/>
+                      </a:solidFill>
+                    </a:lnR>
+                    <a:lnL w="0" cap="flat" cmpd="sng" algn="ctr">
+                      <a:solidFill>
+                        <a:srgbClr val="FAF8F4"/>
+                      </a:solidFill>
+                    </a:lnL>
+                    <a:noFill/>
+                  </a:tcPr>
+                </a:tc>
+                <a:tc>
+                  <a:txBody>
+                    <a:bodyPr wrap="square"/>
+                    <a:lstStyle/>
+                    <a:p>
+                      <a:pPr>
+                        <a:lnSpc>
+                          <a:spcPct val="134000"/>
+                        </a:lnSpc>
+                      </a:pPr>
+                      <a:r>
+                        <a:rPr sz="1100" b="0">
+                          <a:solidFill>
+                            <a:srgbClr val="111111"/>
+                          </a:solidFill>
+                          <a:latin typeface="Poppins"/>
+                        </a:rPr>
+                        <a:t>6 months</a:t>
+                      </a:r>
+                    </a:p>
+                  </a:txBody>
+                  <a:tcPr marL="0" marR="128016" marT="36576" marB="54864" anchor="t">
+                    <a:lnB w="9525" cap="flat" cmpd="sng" algn="ctr">
+                      <a:solidFill>
+                        <a:srgbClr val="D4D2D0"/>
+                      </a:solidFill>
+                    </a:lnB>
+                    <a:lnT w="0" cap="flat" cmpd="sng" algn="ctr">
+                      <a:solidFill>
+                        <a:srgbClr val="FAF8F4"/>
+                      </a:solidFill>
+                    </a:lnT>
+                    <a:lnR w="0" cap="flat" cmpd="sng" algn="ctr">
+                      <a:solidFill>
+                        <a:srgbClr val="FAF8F4"/>
+                      </a:solidFill>
+                    </a:lnR>
+                    <a:lnL w="0" cap="flat" cmpd="sng" algn="ctr">
+                      <a:solidFill>
+                        <a:srgbClr val="FAF8F4"/>
+                      </a:solidFill>
+                    </a:lnL>
+                    <a:noFill/>
+                  </a:tcPr>
+                </a:tc>
+              </a:tr>
+              <a:tr h="558363">
+                <a:tc>
+                  <a:txBody>
+                    <a:bodyPr wrap="square"/>
+                    <a:lstStyle/>
+                    <a:p>
+                      <a:pPr>
+                        <a:lnSpc>
+                          <a:spcPct val="134000"/>
+                        </a:lnSpc>
+                      </a:pPr>
+                      <a:r>
+                        <a:rPr sz="1100" b="1">
+                          <a:solidFill>
+                            <a:srgbClr val="111111"/>
+                          </a:solidFill>
+                          <a:latin typeface="Poppins"/>
+                        </a:rPr>
+                        <a:t>Service networks, to explore</a:t>
+                      </a:r>
+                    </a:p>
+                  </a:txBody>
+                  <a:tcPr marL="0" marR="128016" marT="36576" marB="54864" anchor="t">
+                    <a:lnB w="9525" cap="flat" cmpd="sng" algn="ctr">
+                      <a:solidFill>
+                        <a:srgbClr val="D4D2D0"/>
+                      </a:solidFill>
+                    </a:lnB>
+                    <a:lnT w="0" cap="flat" cmpd="sng" algn="ctr">
+                      <a:solidFill>
+                        <a:srgbClr val="FAF8F4"/>
+                      </a:solidFill>
+                    </a:lnT>
+                    <a:lnR w="0" cap="flat" cmpd="sng" algn="ctr">
+                      <a:solidFill>
+                        <a:srgbClr val="FAF8F4"/>
+                      </a:solidFill>
+                    </a:lnR>
+                    <a:lnL w="0" cap="flat" cmpd="sng" algn="ctr">
+                      <a:solidFill>
+                        <a:srgbClr val="FAF8F4"/>
+                      </a:solidFill>
+                    </a:lnL>
+                    <a:noFill/>
+                  </a:tcPr>
+                </a:tc>
+                <a:tc>
+                  <a:txBody>
+                    <a:bodyPr wrap="square"/>
+                    <a:lstStyle/>
+                    <a:p>
+                      <a:pPr>
+                        <a:lnSpc>
+                          <a:spcPct val="134000"/>
+                        </a:lnSpc>
+                      </a:pPr>
+                      <a:r>
+                        <a:rPr sz="1100" b="0">
+                          <a:solidFill>
+                            <a:srgbClr val="111111"/>
+                          </a:solidFill>
+                          <a:latin typeface="Poppins"/>
+                        </a:rPr>
+                        <a:t>East coast technician routes already visiting thousands of businesses. A referral on a service visit</a:t>
                       </a:r>
                     </a:p>
                   </a:txBody>
@@ -6415,7 +8364,7 @@
 </p:sld>
 </file>
 
-<file path=ppt/slides/slide13.xml><?xml version="1.0" encoding="utf-8"?>
+<file path=ppt/slides/slide16.xml><?xml version="1.0" encoding="utf-8"?>
 <p:sld xmlns:a="http://schemas.openxmlformats.org/drawingml/2006/main" xmlns:p="http://schemas.openxmlformats.org/presentationml/2006/main" xmlns:r="http://schemas.openxmlformats.org/officeDocument/2006/relationships">
   <p:cSld>
     <p:bg>
@@ -7681,7 +9630,7 @@
 </p:sld>
 </file>
 
-<file path=ppt/slides/slide14.xml><?xml version="1.0" encoding="utf-8"?>
+<file path=ppt/slides/slide17.xml><?xml version="1.0" encoding="utf-8"?>
 <p:sld xmlns:a="http://schemas.openxmlformats.org/drawingml/2006/main" xmlns:p="http://schemas.openxmlformats.org/presentationml/2006/main" xmlns:r="http://schemas.openxmlformats.org/officeDocument/2006/relationships">
   <p:cSld>
     <p:bg>
@@ -8399,7 +10348,7 @@
 </p:sld>
 </file>
 
-<file path=ppt/slides/slide15.xml><?xml version="1.0" encoding="utf-8"?>
+<file path=ppt/slides/slide18.xml><?xml version="1.0" encoding="utf-8"?>
 <p:sld xmlns:a="http://schemas.openxmlformats.org/drawingml/2006/main" xmlns:p="http://schemas.openxmlformats.org/presentationml/2006/main" xmlns:r="http://schemas.openxmlformats.org/officeDocument/2006/relationships">
   <p:cSld>
     <p:bg>
@@ -8544,7 +10493,7 @@
         </p:nvGraphicFramePr>
         <p:xfrm>
           <a:off x="914400" y="2880360"/>
-          <a:ext cx="10362893" cy="3142550"/>
+          <a:ext cx="10362893" cy="3370932"/>
         </p:xfrm>
         <a:graphic>
           <a:graphicData uri="http://schemas.openxmlformats.org/drawingml/2006/table">
@@ -8694,7 +10643,7 @@
                   </a:tcPr>
                 </a:tc>
               </a:tr>
-              <a:tr h="329981">
+              <a:tr h="558363">
                 <a:tc>
                   <a:txBody>
                     <a:bodyPr wrap="square"/>
@@ -8757,7 +10706,7 @@
                           </a:solidFill>
                           <a:latin typeface="Poppins"/>
                         </a:rPr>
-                        <a:t>Adopted 18 September. Home entertainment, not beer. Christy owns the wording</a:t>
+                        <a:t>The position, worked into a line you sign off, then into key messaging. Christy owns the wording</a:t>
                       </a:r>
                     </a:p>
                   </a:txBody>
@@ -9802,7 +11751,7 @@
 </p:sld>
 </file>
 
-<file path=ppt/slides/slide16.xml><?xml version="1.0" encoding="utf-8"?>
+<file path=ppt/slides/slide19.xml><?xml version="1.0" encoding="utf-8"?>
 <p:sld xmlns:a="http://schemas.openxmlformats.org/drawingml/2006/main" xmlns:p="http://schemas.openxmlformats.org/presentationml/2006/main" xmlns:r="http://schemas.openxmlformats.org/officeDocument/2006/relationships">
   <p:cSld>
     <p:bg>
@@ -10520,1779 +12469,6 @@
 </p:sld>
 </file>
 
-<file path=ppt/slides/slide17.xml><?xml version="1.0" encoding="utf-8"?>
-<p:sld xmlns:a="http://schemas.openxmlformats.org/drawingml/2006/main" xmlns:p="http://schemas.openxmlformats.org/presentationml/2006/main" xmlns:r="http://schemas.openxmlformats.org/officeDocument/2006/relationships">
-  <p:cSld>
-    <p:bg>
-      <p:bgPr>
-        <a:solidFill>
-          <a:srgbClr val="111111"/>
-        </a:solidFill>
-        <a:effectLst/>
-      </p:bgPr>
-    </p:bg>
-    <p:spTree>
-      <p:nvGrpSpPr>
-        <p:cNvPr id="1" name=""/>
-        <p:cNvGrpSpPr/>
-        <p:nvPr/>
-      </p:nvGrpSpPr>
-      <p:grpSpPr/>
-      <p:sp>
-        <p:nvSpPr>
-          <p:cNvPr id="2" name="TextBox 1"/>
-          <p:cNvSpPr txBox="1"/>
-          <p:nvPr/>
-        </p:nvSpPr>
-        <p:spPr>
-          <a:xfrm>
-            <a:off x="914400" y="914400"/>
-            <a:ext cx="10362895" cy="274320"/>
-          </a:xfrm>
-          <a:prstGeom prst="rect">
-            <a:avLst/>
-          </a:prstGeom>
-          <a:noFill/>
-        </p:spPr>
-        <p:txBody>
-          <a:bodyPr wrap="square" lIns="0" rIns="0" tIns="0" bIns="0" anchor="t">
-            <a:spAutoFit/>
-          </a:bodyPr>
-          <a:lstStyle/>
-          <a:p>
-            <a:pPr algn="l">
-              <a:lnSpc>
-                <a:spcPct val="100000"/>
-              </a:lnSpc>
-            </a:pPr>
-            <a:r>
-              <a:rPr sz="1400" b="0" spc="200">
-                <a:solidFill>
-                  <a:srgbClr val="FAF8F4"/>
-                </a:solidFill>
-                <a:latin typeface="Poppins"/>
-              </a:rPr>
-              <a:t>PART 03</a:t>
-            </a:r>
-          </a:p>
-        </p:txBody>
-      </p:sp>
-      <p:sp>
-        <p:nvSpPr>
-          <p:cNvPr id="3" name="TextBox 2"/>
-          <p:cNvSpPr txBox="1"/>
-          <p:nvPr/>
-        </p:nvSpPr>
-        <p:spPr>
-          <a:xfrm>
-            <a:off x="914400" y="2194560"/>
-            <a:ext cx="10362895" cy="2377440"/>
-          </a:xfrm>
-          <a:prstGeom prst="rect">
-            <a:avLst/>
-          </a:prstGeom>
-          <a:noFill/>
-        </p:spPr>
-        <p:txBody>
-          <a:bodyPr wrap="square" lIns="0" rIns="0" tIns="0" bIns="0" anchor="ctr">
-            <a:spAutoFit/>
-          </a:bodyPr>
-          <a:lstStyle/>
-          <a:p>
-            <a:pPr algn="l">
-              <a:lnSpc>
-                <a:spcPct val="100000"/>
-              </a:lnSpc>
-            </a:pPr>
-            <a:r>
-              <a:rPr sz="9600" b="0">
-                <a:solidFill>
-                  <a:srgbClr val="FAF8F4"/>
-                </a:solidFill>
-                <a:latin typeface="Poppins"/>
-              </a:rPr>
-              <a:t>How it runs.</a:t>
-            </a:r>
-          </a:p>
-        </p:txBody>
-      </p:sp>
-      <p:sp>
-        <p:nvSpPr>
-          <p:cNvPr id="4" name="TextBox 3"/>
-          <p:cNvSpPr txBox="1"/>
-          <p:nvPr/>
-        </p:nvSpPr>
-        <p:spPr>
-          <a:xfrm>
-            <a:off x="914400" y="5212080"/>
-            <a:ext cx="10362895" cy="457200"/>
-          </a:xfrm>
-          <a:prstGeom prst="rect">
-            <a:avLst/>
-          </a:prstGeom>
-          <a:noFill/>
-        </p:spPr>
-        <p:txBody>
-          <a:bodyPr wrap="square" lIns="0" rIns="0" tIns="0" bIns="0" anchor="t">
-            <a:spAutoFit/>
-          </a:bodyPr>
-          <a:lstStyle/>
-          <a:p>
-            <a:pPr algn="l">
-              <a:lnSpc>
-                <a:spcPct val="130000"/>
-              </a:lnSpc>
-            </a:pPr>
-            <a:r>
-              <a:rPr sz="1600" b="0">
-                <a:solidFill>
-                  <a:srgbClr val="FAF8F4"/>
-                </a:solidFill>
-                <a:latin typeface="Poppins"/>
-              </a:rPr>
-              <a:t>The first sprint, the ladder, and what we need from you.</a:t>
-            </a:r>
-          </a:p>
-        </p:txBody>
-      </p:sp>
-    </p:spTree>
-  </p:cSld>
-  <p:clrMapOvr>
-    <a:masterClrMapping/>
-  </p:clrMapOvr>
-</p:sld>
-</file>
-
-<file path=ppt/slides/slide18.xml><?xml version="1.0" encoding="utf-8"?>
-<p:sld xmlns:a="http://schemas.openxmlformats.org/drawingml/2006/main" xmlns:p="http://schemas.openxmlformats.org/presentationml/2006/main" xmlns:r="http://schemas.openxmlformats.org/officeDocument/2006/relationships">
-  <p:cSld>
-    <p:bg>
-      <p:bgPr>
-        <a:solidFill>
-          <a:srgbClr val="FAF8F4"/>
-        </a:solidFill>
-        <a:effectLst/>
-      </p:bgPr>
-    </p:bg>
-    <p:spTree>
-      <p:nvGrpSpPr>
-        <p:cNvPr id="1" name=""/>
-        <p:cNvGrpSpPr/>
-        <p:nvPr/>
-      </p:nvGrpSpPr>
-      <p:grpSpPr/>
-      <p:sp>
-        <p:nvSpPr>
-          <p:cNvPr id="2" name="TextBox 1"/>
-          <p:cNvSpPr txBox="1"/>
-          <p:nvPr/>
-        </p:nvSpPr>
-        <p:spPr>
-          <a:xfrm>
-            <a:off x="914400" y="914400"/>
-            <a:ext cx="10362895" cy="274320"/>
-          </a:xfrm>
-          <a:prstGeom prst="rect">
-            <a:avLst/>
-          </a:prstGeom>
-          <a:noFill/>
-        </p:spPr>
-        <p:txBody>
-          <a:bodyPr wrap="square" lIns="0" rIns="0" tIns="0" bIns="0" anchor="t">
-            <a:spAutoFit/>
-          </a:bodyPr>
-          <a:lstStyle/>
-          <a:p>
-            <a:pPr algn="l">
-              <a:lnSpc>
-                <a:spcPct val="100000"/>
-              </a:lnSpc>
-            </a:pPr>
-            <a:r>
-              <a:rPr sz="900" b="0" spc="200">
-                <a:solidFill>
-                  <a:srgbClr val="111111"/>
-                </a:solidFill>
-                <a:latin typeface="Poppins"/>
-              </a:rPr>
-              <a:t>THE FIRST 30 DAYS</a:t>
-            </a:r>
-          </a:p>
-        </p:txBody>
-      </p:sp>
-      <p:sp>
-        <p:nvSpPr>
-          <p:cNvPr id="3" name="TextBox 2"/>
-          <p:cNvSpPr txBox="1"/>
-          <p:nvPr/>
-        </p:nvSpPr>
-        <p:spPr>
-          <a:xfrm>
-            <a:off x="914400" y="1371600"/>
-            <a:ext cx="10362895" cy="640080"/>
-          </a:xfrm>
-          <a:prstGeom prst="rect">
-            <a:avLst/>
-          </a:prstGeom>
-          <a:noFill/>
-        </p:spPr>
-        <p:txBody>
-          <a:bodyPr wrap="square" lIns="0" rIns="0" tIns="0" bIns="0" anchor="t">
-            <a:spAutoFit/>
-          </a:bodyPr>
-          <a:lstStyle/>
-          <a:p>
-            <a:pPr algn="l">
-              <a:lnSpc>
-                <a:spcPct val="112000"/>
-              </a:lnSpc>
-            </a:pPr>
-            <a:r>
-              <a:rPr sz="2800" b="0">
-                <a:solidFill>
-                  <a:srgbClr val="111111"/>
-                </a:solidFill>
-                <a:latin typeface="Poppins"/>
-              </a:rPr>
-              <a:t>Your own 30-day list is the first sprint.</a:t>
-            </a:r>
-          </a:p>
-        </p:txBody>
-      </p:sp>
-      <p:graphicFrame>
-        <p:nvGraphicFramePr>
-          <p:cNvPr id="4" name="Table 3"/>
-          <p:cNvGraphicFramePr>
-            <a:graphicFrameLocks noGrp="1"/>
-          </p:cNvGraphicFramePr>
-          <p:nvPr/>
-        </p:nvGraphicFramePr>
-        <p:xfrm>
-          <a:off x="914400" y="2194560"/>
-          <a:ext cx="10362894" cy="2914168"/>
-        </p:xfrm>
-        <a:graphic>
-          <a:graphicData uri="http://schemas.openxmlformats.org/drawingml/2006/table">
-            <a:tbl>
-              <a:tblPr firstRow="0" bandRow="0">
-                <a:tableStyleId>{2D5ABB26-0587-4C30-8999-92F81FD0307C}</a:tableStyleId>
-              </a:tblPr>
-              <a:tblGrid>
-                <a:gridCol w="518144"/>
-                <a:gridCol w="9844750"/>
-              </a:tblGrid>
-              <a:tr h="274320">
-                <a:tc>
-                  <a:txBody>
-                    <a:bodyPr wrap="square"/>
-                    <a:lstStyle/>
-                    <a:p>
-                      <a:pPr>
-                        <a:lnSpc>
-                          <a:spcPct val="134000"/>
-                        </a:lnSpc>
-                      </a:pPr>
-                      <a:r>
-                        <a:rPr sz="900" b="0" spc="200">
-                          <a:solidFill>
-                            <a:srgbClr val="666666"/>
-                          </a:solidFill>
-                          <a:latin typeface="Poppins"/>
-                        </a:rPr>
-                        <a:t/>
-                      </a:r>
-                    </a:p>
-                  </a:txBody>
-                  <a:tcPr marL="0" marR="128016" marT="36576" marB="54864" anchor="t">
-                    <a:lnB w="9525" cap="flat" cmpd="sng" algn="ctr">
-                      <a:solidFill>
-                        <a:srgbClr val="D4D2D0"/>
-                      </a:solidFill>
-                    </a:lnB>
-                    <a:lnT w="0" cap="flat" cmpd="sng" algn="ctr">
-                      <a:solidFill>
-                        <a:srgbClr val="FAF8F4"/>
-                      </a:solidFill>
-                    </a:lnT>
-                    <a:lnR w="0" cap="flat" cmpd="sng" algn="ctr">
-                      <a:solidFill>
-                        <a:srgbClr val="FAF8F4"/>
-                      </a:solidFill>
-                    </a:lnR>
-                    <a:lnL w="0" cap="flat" cmpd="sng" algn="ctr">
-                      <a:solidFill>
-                        <a:srgbClr val="FAF8F4"/>
-                      </a:solidFill>
-                    </a:lnL>
-                    <a:noFill/>
-                  </a:tcPr>
-                </a:tc>
-                <a:tc>
-                  <a:txBody>
-                    <a:bodyPr wrap="square"/>
-                    <a:lstStyle/>
-                    <a:p>
-                      <a:pPr>
-                        <a:lnSpc>
-                          <a:spcPct val="134000"/>
-                        </a:lnSpc>
-                      </a:pPr>
-                      <a:r>
-                        <a:rPr sz="900" b="0" spc="200">
-                          <a:solidFill>
-                            <a:srgbClr val="666666"/>
-                          </a:solidFill>
-                          <a:latin typeface="Poppins"/>
-                        </a:rPr>
-                        <a:t>WHAT CLOSES</a:t>
-                      </a:r>
-                    </a:p>
-                  </a:txBody>
-                  <a:tcPr marL="0" marR="128016" marT="36576" marB="54864" anchor="t">
-                    <a:lnB w="9525" cap="flat" cmpd="sng" algn="ctr">
-                      <a:solidFill>
-                        <a:srgbClr val="D4D2D0"/>
-                      </a:solidFill>
-                    </a:lnB>
-                    <a:lnT w="0" cap="flat" cmpd="sng" algn="ctr">
-                      <a:solidFill>
-                        <a:srgbClr val="FAF8F4"/>
-                      </a:solidFill>
-                    </a:lnT>
-                    <a:lnR w="0" cap="flat" cmpd="sng" algn="ctr">
-                      <a:solidFill>
-                        <a:srgbClr val="FAF8F4"/>
-                      </a:solidFill>
-                    </a:lnR>
-                    <a:lnL w="0" cap="flat" cmpd="sng" algn="ctr">
-                      <a:solidFill>
-                        <a:srgbClr val="FAF8F4"/>
-                      </a:solidFill>
-                    </a:lnL>
-                    <a:noFill/>
-                  </a:tcPr>
-                </a:tc>
-              </a:tr>
-              <a:tr h="329981">
-                <a:tc>
-                  <a:txBody>
-                    <a:bodyPr wrap="square"/>
-                    <a:lstStyle/>
-                    <a:p>
-                      <a:pPr>
-                        <a:lnSpc>
-                          <a:spcPct val="134000"/>
-                        </a:lnSpc>
-                      </a:pPr>
-                      <a:r>
-                        <a:rPr sz="1100" b="1">
-                          <a:solidFill>
-                            <a:srgbClr val="111111"/>
-                          </a:solidFill>
-                          <a:latin typeface="Poppins"/>
-                        </a:rPr>
-                        <a:t>01</a:t>
-                      </a:r>
-                    </a:p>
-                  </a:txBody>
-                  <a:tcPr marL="0" marR="128016" marT="36576" marB="54864" anchor="t">
-                    <a:lnB w="9525" cap="flat" cmpd="sng" algn="ctr">
-                      <a:solidFill>
-                        <a:srgbClr val="D4D2D0"/>
-                      </a:solidFill>
-                    </a:lnB>
-                    <a:lnT w="0" cap="flat" cmpd="sng" algn="ctr">
-                      <a:solidFill>
-                        <a:srgbClr val="FAF8F4"/>
-                      </a:solidFill>
-                    </a:lnT>
-                    <a:lnR w="0" cap="flat" cmpd="sng" algn="ctr">
-                      <a:solidFill>
-                        <a:srgbClr val="FAF8F4"/>
-                      </a:solidFill>
-                    </a:lnR>
-                    <a:lnL w="0" cap="flat" cmpd="sng" algn="ctr">
-                      <a:solidFill>
-                        <a:srgbClr val="FAF8F4"/>
-                      </a:solidFill>
-                    </a:lnL>
-                    <a:noFill/>
-                  </a:tcPr>
-                </a:tc>
-                <a:tc>
-                  <a:txBody>
-                    <a:bodyPr wrap="square"/>
-                    <a:lstStyle/>
-                    <a:p>
-                      <a:pPr>
-                        <a:lnSpc>
-                          <a:spcPct val="134000"/>
-                        </a:lnSpc>
-                      </a:pPr>
-                      <a:r>
-                        <a:rPr sz="1100" b="0">
-                          <a:solidFill>
-                            <a:srgbClr val="111111"/>
-                          </a:solidFill>
-                          <a:latin typeface="Poppins"/>
-                        </a:rPr>
-                        <a:t>The shape decision, finished. Showroom or event space</a:t>
-                      </a:r>
-                    </a:p>
-                  </a:txBody>
-                  <a:tcPr marL="0" marR="128016" marT="36576" marB="54864" anchor="t">
-                    <a:lnB w="9525" cap="flat" cmpd="sng" algn="ctr">
-                      <a:solidFill>
-                        <a:srgbClr val="D4D2D0"/>
-                      </a:solidFill>
-                    </a:lnB>
-                    <a:lnT w="0" cap="flat" cmpd="sng" algn="ctr">
-                      <a:solidFill>
-                        <a:srgbClr val="FAF8F4"/>
-                      </a:solidFill>
-                    </a:lnT>
-                    <a:lnR w="0" cap="flat" cmpd="sng" algn="ctr">
-                      <a:solidFill>
-                        <a:srgbClr val="FAF8F4"/>
-                      </a:solidFill>
-                    </a:lnR>
-                    <a:lnL w="0" cap="flat" cmpd="sng" algn="ctr">
-                      <a:solidFill>
-                        <a:srgbClr val="FAF8F4"/>
-                      </a:solidFill>
-                    </a:lnL>
-                    <a:noFill/>
-                  </a:tcPr>
-                </a:tc>
-              </a:tr>
-              <a:tr h="329981">
-                <a:tc>
-                  <a:txBody>
-                    <a:bodyPr wrap="square"/>
-                    <a:lstStyle/>
-                    <a:p>
-                      <a:pPr>
-                        <a:lnSpc>
-                          <a:spcPct val="134000"/>
-                        </a:lnSpc>
-                      </a:pPr>
-                      <a:r>
-                        <a:rPr sz="1100" b="1">
-                          <a:solidFill>
-                            <a:srgbClr val="111111"/>
-                          </a:solidFill>
-                          <a:latin typeface="Poppins"/>
-                        </a:rPr>
-                        <a:t>02</a:t>
-                      </a:r>
-                    </a:p>
-                  </a:txBody>
-                  <a:tcPr marL="0" marR="128016" marT="36576" marB="54864" anchor="t">
-                    <a:lnB w="9525" cap="flat" cmpd="sng" algn="ctr">
-                      <a:solidFill>
-                        <a:srgbClr val="D4D2D0"/>
-                      </a:solidFill>
-                    </a:lnB>
-                    <a:lnT w="0" cap="flat" cmpd="sng" algn="ctr">
-                      <a:solidFill>
-                        <a:srgbClr val="FAF8F4"/>
-                      </a:solidFill>
-                    </a:lnT>
-                    <a:lnR w="0" cap="flat" cmpd="sng" algn="ctr">
-                      <a:solidFill>
-                        <a:srgbClr val="FAF8F4"/>
-                      </a:solidFill>
-                    </a:lnR>
-                    <a:lnL w="0" cap="flat" cmpd="sng" algn="ctr">
-                      <a:solidFill>
-                        <a:srgbClr val="FAF8F4"/>
-                      </a:solidFill>
-                    </a:lnL>
-                    <a:noFill/>
-                  </a:tcPr>
-                </a:tc>
-                <a:tc>
-                  <a:txBody>
-                    <a:bodyPr wrap="square"/>
-                    <a:lstStyle/>
-                    <a:p>
-                      <a:pPr>
-                        <a:lnSpc>
-                          <a:spcPct val="134000"/>
-                        </a:lnSpc>
-                      </a:pPr>
-                      <a:r>
-                        <a:rPr sz="1100" b="0">
-                          <a:solidFill>
-                            <a:srgbClr val="111111"/>
-                          </a:solidFill>
-                          <a:latin typeface="Poppins"/>
-                        </a:rPr>
-                        <a:t>Residential versus commercial. Where the energy goes</a:t>
-                      </a:r>
-                    </a:p>
-                  </a:txBody>
-                  <a:tcPr marL="0" marR="128016" marT="36576" marB="54864" anchor="t">
-                    <a:lnB w="9525" cap="flat" cmpd="sng" algn="ctr">
-                      <a:solidFill>
-                        <a:srgbClr val="D4D2D0"/>
-                      </a:solidFill>
-                    </a:lnB>
-                    <a:lnT w="0" cap="flat" cmpd="sng" algn="ctr">
-                      <a:solidFill>
-                        <a:srgbClr val="FAF8F4"/>
-                      </a:solidFill>
-                    </a:lnT>
-                    <a:lnR w="0" cap="flat" cmpd="sng" algn="ctr">
-                      <a:solidFill>
-                        <a:srgbClr val="FAF8F4"/>
-                      </a:solidFill>
-                    </a:lnR>
-                    <a:lnL w="0" cap="flat" cmpd="sng" algn="ctr">
-                      <a:solidFill>
-                        <a:srgbClr val="FAF8F4"/>
-                      </a:solidFill>
-                    </a:lnL>
-                    <a:noFill/>
-                  </a:tcPr>
-                </a:tc>
-              </a:tr>
-              <a:tr h="329981">
-                <a:tc>
-                  <a:txBody>
-                    <a:bodyPr wrap="square"/>
-                    <a:lstStyle/>
-                    <a:p>
-                      <a:pPr>
-                        <a:lnSpc>
-                          <a:spcPct val="134000"/>
-                        </a:lnSpc>
-                      </a:pPr>
-                      <a:r>
-                        <a:rPr sz="1100" b="1">
-                          <a:solidFill>
-                            <a:srgbClr val="111111"/>
-                          </a:solidFill>
-                          <a:latin typeface="Poppins"/>
-                        </a:rPr>
-                        <a:t>03</a:t>
-                      </a:r>
-                    </a:p>
-                  </a:txBody>
-                  <a:tcPr marL="0" marR="128016" marT="36576" marB="54864" anchor="t">
-                    <a:lnB w="9525" cap="flat" cmpd="sng" algn="ctr">
-                      <a:solidFill>
-                        <a:srgbClr val="D4D2D0"/>
-                      </a:solidFill>
-                    </a:lnB>
-                    <a:lnT w="0" cap="flat" cmpd="sng" algn="ctr">
-                      <a:solidFill>
-                        <a:srgbClr val="FAF8F4"/>
-                      </a:solidFill>
-                    </a:lnT>
-                    <a:lnR w="0" cap="flat" cmpd="sng" algn="ctr">
-                      <a:solidFill>
-                        <a:srgbClr val="FAF8F4"/>
-                      </a:solidFill>
-                    </a:lnR>
-                    <a:lnL w="0" cap="flat" cmpd="sng" algn="ctr">
-                      <a:solidFill>
-                        <a:srgbClr val="FAF8F4"/>
-                      </a:solidFill>
-                    </a:lnL>
-                    <a:noFill/>
-                  </a:tcPr>
-                </a:tc>
-                <a:tc>
-                  <a:txBody>
-                    <a:bodyPr wrap="square"/>
-                    <a:lstStyle/>
-                    <a:p>
-                      <a:pPr>
-                        <a:lnSpc>
-                          <a:spcPct val="134000"/>
-                        </a:lnSpc>
-                      </a:pPr>
-                      <a:r>
-                        <a:rPr sz="1100" b="0">
-                          <a:solidFill>
-                            <a:srgbClr val="111111"/>
-                          </a:solidFill>
-                          <a:latin typeface="Poppins"/>
-                        </a:rPr>
-                        <a:t>Key messaging and the customer journey. Delivered by us, signed by you</a:t>
-                      </a:r>
-                    </a:p>
-                  </a:txBody>
-                  <a:tcPr marL="0" marR="128016" marT="36576" marB="54864" anchor="t">
-                    <a:lnB w="9525" cap="flat" cmpd="sng" algn="ctr">
-                      <a:solidFill>
-                        <a:srgbClr val="D4D2D0"/>
-                      </a:solidFill>
-                    </a:lnB>
-                    <a:lnT w="0" cap="flat" cmpd="sng" algn="ctr">
-                      <a:solidFill>
-                        <a:srgbClr val="FAF8F4"/>
-                      </a:solidFill>
-                    </a:lnT>
-                    <a:lnR w="0" cap="flat" cmpd="sng" algn="ctr">
-                      <a:solidFill>
-                        <a:srgbClr val="FAF8F4"/>
-                      </a:solidFill>
-                    </a:lnR>
-                    <a:lnL w="0" cap="flat" cmpd="sng" algn="ctr">
-                      <a:solidFill>
-                        <a:srgbClr val="FAF8F4"/>
-                      </a:solidFill>
-                    </a:lnL>
-                    <a:noFill/>
-                  </a:tcPr>
-                </a:tc>
-              </a:tr>
-              <a:tr h="329981">
-                <a:tc>
-                  <a:txBody>
-                    <a:bodyPr wrap="square"/>
-                    <a:lstStyle/>
-                    <a:p>
-                      <a:pPr>
-                        <a:lnSpc>
-                          <a:spcPct val="134000"/>
-                        </a:lnSpc>
-                      </a:pPr>
-                      <a:r>
-                        <a:rPr sz="1100" b="1">
-                          <a:solidFill>
-                            <a:srgbClr val="111111"/>
-                          </a:solidFill>
-                          <a:latin typeface="Poppins"/>
-                        </a:rPr>
-                        <a:t>04</a:t>
-                      </a:r>
-                    </a:p>
-                  </a:txBody>
-                  <a:tcPr marL="0" marR="128016" marT="36576" marB="54864" anchor="t">
-                    <a:lnB w="9525" cap="flat" cmpd="sng" algn="ctr">
-                      <a:solidFill>
-                        <a:srgbClr val="D4D2D0"/>
-                      </a:solidFill>
-                    </a:lnB>
-                    <a:lnT w="0" cap="flat" cmpd="sng" algn="ctr">
-                      <a:solidFill>
-                        <a:srgbClr val="FAF8F4"/>
-                      </a:solidFill>
-                    </a:lnT>
-                    <a:lnR w="0" cap="flat" cmpd="sng" algn="ctr">
-                      <a:solidFill>
-                        <a:srgbClr val="FAF8F4"/>
-                      </a:solidFill>
-                    </a:lnR>
-                    <a:lnL w="0" cap="flat" cmpd="sng" algn="ctr">
-                      <a:solidFill>
-                        <a:srgbClr val="FAF8F4"/>
-                      </a:solidFill>
-                    </a:lnL>
-                    <a:noFill/>
-                  </a:tcPr>
-                </a:tc>
-                <a:tc>
-                  <a:txBody>
-                    <a:bodyPr wrap="square"/>
-                    <a:lstStyle/>
-                    <a:p>
-                      <a:pPr>
-                        <a:lnSpc>
-                          <a:spcPct val="134000"/>
-                        </a:lnSpc>
-                      </a:pPr>
-                      <a:r>
-                        <a:rPr sz="1100" b="0">
-                          <a:solidFill>
-                            <a:srgbClr val="111111"/>
-                          </a:solidFill>
-                          <a:latin typeface="Poppins"/>
-                        </a:rPr>
-                        <a:t>KPIs and the meeting rhythm. Four numbers, one definition of active refiller</a:t>
-                      </a:r>
-                    </a:p>
-                  </a:txBody>
-                  <a:tcPr marL="0" marR="128016" marT="36576" marB="54864" anchor="t">
-                    <a:lnB w="9525" cap="flat" cmpd="sng" algn="ctr">
-                      <a:solidFill>
-                        <a:srgbClr val="D4D2D0"/>
-                      </a:solidFill>
-                    </a:lnB>
-                    <a:lnT w="0" cap="flat" cmpd="sng" algn="ctr">
-                      <a:solidFill>
-                        <a:srgbClr val="FAF8F4"/>
-                      </a:solidFill>
-                    </a:lnT>
-                    <a:lnR w="0" cap="flat" cmpd="sng" algn="ctr">
-                      <a:solidFill>
-                        <a:srgbClr val="FAF8F4"/>
-                      </a:solidFill>
-                    </a:lnR>
-                    <a:lnL w="0" cap="flat" cmpd="sng" algn="ctr">
-                      <a:solidFill>
-                        <a:srgbClr val="FAF8F4"/>
-                      </a:solidFill>
-                    </a:lnL>
-                    <a:noFill/>
-                  </a:tcPr>
-                </a:tc>
-              </a:tr>
-              <a:tr h="329981">
-                <a:tc>
-                  <a:txBody>
-                    <a:bodyPr wrap="square"/>
-                    <a:lstStyle/>
-                    <a:p>
-                      <a:pPr>
-                        <a:lnSpc>
-                          <a:spcPct val="134000"/>
-                        </a:lnSpc>
-                      </a:pPr>
-                      <a:r>
-                        <a:rPr sz="1100" b="1">
-                          <a:solidFill>
-                            <a:srgbClr val="111111"/>
-                          </a:solidFill>
-                          <a:latin typeface="Poppins"/>
-                        </a:rPr>
-                        <a:t>05</a:t>
-                      </a:r>
-                    </a:p>
-                  </a:txBody>
-                  <a:tcPr marL="0" marR="128016" marT="36576" marB="54864" anchor="t">
-                    <a:lnB w="9525" cap="flat" cmpd="sng" algn="ctr">
-                      <a:solidFill>
-                        <a:srgbClr val="D4D2D0"/>
-                      </a:solidFill>
-                    </a:lnB>
-                    <a:lnT w="0" cap="flat" cmpd="sng" algn="ctr">
-                      <a:solidFill>
-                        <a:srgbClr val="FAF8F4"/>
-                      </a:solidFill>
-                    </a:lnT>
-                    <a:lnR w="0" cap="flat" cmpd="sng" algn="ctr">
-                      <a:solidFill>
-                        <a:srgbClr val="FAF8F4"/>
-                      </a:solidFill>
-                    </a:lnR>
-                    <a:lnL w="0" cap="flat" cmpd="sng" algn="ctr">
-                      <a:solidFill>
-                        <a:srgbClr val="FAF8F4"/>
-                      </a:solidFill>
-                    </a:lnL>
-                    <a:noFill/>
-                  </a:tcPr>
-                </a:tc>
-                <a:tc>
-                  <a:txBody>
-                    <a:bodyPr wrap="square"/>
-                    <a:lstStyle/>
-                    <a:p>
-                      <a:pPr>
-                        <a:lnSpc>
-                          <a:spcPct val="134000"/>
-                        </a:lnSpc>
-                      </a:pPr>
-                      <a:r>
-                        <a:rPr sz="1100" b="0">
-                          <a:solidFill>
-                            <a:srgbClr val="111111"/>
-                          </a:solidFill>
-                          <a:latin typeface="Poppins"/>
-                        </a:rPr>
-                        <a:t>The Jewell split. What we own, what Harry and Justin keep</a:t>
-                      </a:r>
-                    </a:p>
-                  </a:txBody>
-                  <a:tcPr marL="0" marR="128016" marT="36576" marB="54864" anchor="t">
-                    <a:lnB w="9525" cap="flat" cmpd="sng" algn="ctr">
-                      <a:solidFill>
-                        <a:srgbClr val="D4D2D0"/>
-                      </a:solidFill>
-                    </a:lnB>
-                    <a:lnT w="0" cap="flat" cmpd="sng" algn="ctr">
-                      <a:solidFill>
-                        <a:srgbClr val="FAF8F4"/>
-                      </a:solidFill>
-                    </a:lnT>
-                    <a:lnR w="0" cap="flat" cmpd="sng" algn="ctr">
-                      <a:solidFill>
-                        <a:srgbClr val="FAF8F4"/>
-                      </a:solidFill>
-                    </a:lnR>
-                    <a:lnL w="0" cap="flat" cmpd="sng" algn="ctr">
-                      <a:solidFill>
-                        <a:srgbClr val="FAF8F4"/>
-                      </a:solidFill>
-                    </a:lnL>
-                    <a:noFill/>
-                  </a:tcPr>
-                </a:tc>
-              </a:tr>
-              <a:tr h="329981">
-                <a:tc>
-                  <a:txBody>
-                    <a:bodyPr wrap="square"/>
-                    <a:lstStyle/>
-                    <a:p>
-                      <a:pPr>
-                        <a:lnSpc>
-                          <a:spcPct val="134000"/>
-                        </a:lnSpc>
-                      </a:pPr>
-                      <a:r>
-                        <a:rPr sz="1100" b="1">
-                          <a:solidFill>
-                            <a:srgbClr val="111111"/>
-                          </a:solidFill>
-                          <a:latin typeface="Poppins"/>
-                        </a:rPr>
-                        <a:t>06</a:t>
-                      </a:r>
-                    </a:p>
-                  </a:txBody>
-                  <a:tcPr marL="0" marR="128016" marT="36576" marB="54864" anchor="t">
-                    <a:lnB w="9525" cap="flat" cmpd="sng" algn="ctr">
-                      <a:solidFill>
-                        <a:srgbClr val="D4D2D0"/>
-                      </a:solidFill>
-                    </a:lnB>
-                    <a:lnT w="0" cap="flat" cmpd="sng" algn="ctr">
-                      <a:solidFill>
-                        <a:srgbClr val="FAF8F4"/>
-                      </a:solidFill>
-                    </a:lnT>
-                    <a:lnR w="0" cap="flat" cmpd="sng" algn="ctr">
-                      <a:solidFill>
-                        <a:srgbClr val="FAF8F4"/>
-                      </a:solidFill>
-                    </a:lnR>
-                    <a:lnL w="0" cap="flat" cmpd="sng" algn="ctr">
-                      <a:solidFill>
-                        <a:srgbClr val="FAF8F4"/>
-                      </a:solidFill>
-                    </a:lnL>
-                    <a:noFill/>
-                  </a:tcPr>
-                </a:tc>
-                <a:tc>
-                  <a:txBody>
-                    <a:bodyPr wrap="square"/>
-                    <a:lstStyle/>
-                    <a:p>
-                      <a:pPr>
-                        <a:lnSpc>
-                          <a:spcPct val="134000"/>
-                        </a:lnSpc>
-                      </a:pPr>
-                      <a:r>
-                        <a:rPr sz="1100" b="0">
-                          <a:solidFill>
-                            <a:srgbClr val="111111"/>
-                          </a:solidFill>
-                          <a:latin typeface="Poppins"/>
-                        </a:rPr>
-                        <a:t>Ambassadors named, Oktoberfest run, giveaway entries in the CRM</a:t>
-                      </a:r>
-                    </a:p>
-                  </a:txBody>
-                  <a:tcPr marL="0" marR="128016" marT="36576" marB="54864" anchor="t">
-                    <a:lnB w="9525" cap="flat" cmpd="sng" algn="ctr">
-                      <a:solidFill>
-                        <a:srgbClr val="D4D2D0"/>
-                      </a:solidFill>
-                    </a:lnB>
-                    <a:lnT w="0" cap="flat" cmpd="sng" algn="ctr">
-                      <a:solidFill>
-                        <a:srgbClr val="FAF8F4"/>
-                      </a:solidFill>
-                    </a:lnT>
-                    <a:lnR w="0" cap="flat" cmpd="sng" algn="ctr">
-                      <a:solidFill>
-                        <a:srgbClr val="FAF8F4"/>
-                      </a:solidFill>
-                    </a:lnR>
-                    <a:lnL w="0" cap="flat" cmpd="sng" algn="ctr">
-                      <a:solidFill>
-                        <a:srgbClr val="FAF8F4"/>
-                      </a:solidFill>
-                    </a:lnL>
-                    <a:noFill/>
-                  </a:tcPr>
-                </a:tc>
-              </a:tr>
-              <a:tr h="329981">
-                <a:tc>
-                  <a:txBody>
-                    <a:bodyPr wrap="square"/>
-                    <a:lstStyle/>
-                    <a:p>
-                      <a:pPr>
-                        <a:lnSpc>
-                          <a:spcPct val="134000"/>
-                        </a:lnSpc>
-                      </a:pPr>
-                      <a:r>
-                        <a:rPr sz="1100" b="1">
-                          <a:solidFill>
-                            <a:srgbClr val="111111"/>
-                          </a:solidFill>
-                          <a:latin typeface="Poppins"/>
-                        </a:rPr>
-                        <a:t>07</a:t>
-                      </a:r>
-                    </a:p>
-                  </a:txBody>
-                  <a:tcPr marL="0" marR="128016" marT="36576" marB="54864" anchor="t">
-                    <a:lnB w="9525" cap="flat" cmpd="sng" algn="ctr">
-                      <a:solidFill>
-                        <a:srgbClr val="D4D2D0"/>
-                      </a:solidFill>
-                    </a:lnB>
-                    <a:lnT w="0" cap="flat" cmpd="sng" algn="ctr">
-                      <a:solidFill>
-                        <a:srgbClr val="FAF8F4"/>
-                      </a:solidFill>
-                    </a:lnT>
-                    <a:lnR w="0" cap="flat" cmpd="sng" algn="ctr">
-                      <a:solidFill>
-                        <a:srgbClr val="FAF8F4"/>
-                      </a:solidFill>
-                    </a:lnR>
-                    <a:lnL w="0" cap="flat" cmpd="sng" algn="ctr">
-                      <a:solidFill>
-                        <a:srgbClr val="FAF8F4"/>
-                      </a:solidFill>
-                    </a:lnL>
-                    <a:noFill/>
-                  </a:tcPr>
-                </a:tc>
-                <a:tc>
-                  <a:txBody>
-                    <a:bodyPr wrap="square"/>
-                    <a:lstStyle/>
-                    <a:p>
-                      <a:pPr>
-                        <a:lnSpc>
-                          <a:spcPct val="134000"/>
-                        </a:lnSpc>
-                      </a:pPr>
-                      <a:r>
-                        <a:rPr sz="1100" b="0">
-                          <a:solidFill>
-                            <a:srgbClr val="111111"/>
-                          </a:solidFill>
-                          <a:latin typeface="Poppins"/>
-                        </a:rPr>
-                        <a:t>Settle $2.55 as the per-schooner figure on the live ad</a:t>
-                      </a:r>
-                    </a:p>
-                  </a:txBody>
-                  <a:tcPr marL="0" marR="128016" marT="36576" marB="54864" anchor="t">
-                    <a:lnB w="9525" cap="flat" cmpd="sng" algn="ctr">
-                      <a:solidFill>
-                        <a:srgbClr val="D4D2D0"/>
-                      </a:solidFill>
-                    </a:lnB>
-                    <a:lnT w="0" cap="flat" cmpd="sng" algn="ctr">
-                      <a:solidFill>
-                        <a:srgbClr val="FAF8F4"/>
-                      </a:solidFill>
-                    </a:lnT>
-                    <a:lnR w="0" cap="flat" cmpd="sng" algn="ctr">
-                      <a:solidFill>
-                        <a:srgbClr val="FAF8F4"/>
-                      </a:solidFill>
-                    </a:lnR>
-                    <a:lnL w="0" cap="flat" cmpd="sng" algn="ctr">
-                      <a:solidFill>
-                        <a:srgbClr val="FAF8F4"/>
-                      </a:solidFill>
-                    </a:lnL>
-                    <a:noFill/>
-                  </a:tcPr>
-                </a:tc>
-              </a:tr>
-              <a:tr h="329981">
-                <a:tc>
-                  <a:txBody>
-                    <a:bodyPr wrap="square"/>
-                    <a:lstStyle/>
-                    <a:p>
-                      <a:pPr>
-                        <a:lnSpc>
-                          <a:spcPct val="134000"/>
-                        </a:lnSpc>
-                      </a:pPr>
-                      <a:r>
-                        <a:rPr sz="1100" b="1">
-                          <a:solidFill>
-                            <a:srgbClr val="111111"/>
-                          </a:solidFill>
-                          <a:latin typeface="Poppins"/>
-                        </a:rPr>
-                        <a:t>08</a:t>
-                      </a:r>
-                    </a:p>
-                  </a:txBody>
-                  <a:tcPr marL="0" marR="128016" marT="36576" marB="54864" anchor="t">
-                    <a:lnB w="9525" cap="flat" cmpd="sng" algn="ctr">
-                      <a:solidFill>
-                        <a:srgbClr val="D4D2D0"/>
-                      </a:solidFill>
-                    </a:lnB>
-                    <a:lnT w="0" cap="flat" cmpd="sng" algn="ctr">
-                      <a:solidFill>
-                        <a:srgbClr val="FAF8F4"/>
-                      </a:solidFill>
-                    </a:lnT>
-                    <a:lnR w="0" cap="flat" cmpd="sng" algn="ctr">
-                      <a:solidFill>
-                        <a:srgbClr val="FAF8F4"/>
-                      </a:solidFill>
-                    </a:lnR>
-                    <a:lnL w="0" cap="flat" cmpd="sng" algn="ctr">
-                      <a:solidFill>
-                        <a:srgbClr val="FAF8F4"/>
-                      </a:solidFill>
-                    </a:lnL>
-                    <a:noFill/>
-                  </a:tcPr>
-                </a:tc>
-                <a:tc>
-                  <a:txBody>
-                    <a:bodyPr wrap="square"/>
-                    <a:lstStyle/>
-                    <a:p>
-                      <a:pPr>
-                        <a:lnSpc>
-                          <a:spcPct val="134000"/>
-                        </a:lnSpc>
-                      </a:pPr>
-                      <a:r>
-                        <a:rPr sz="1100" b="0">
-                          <a:solidFill>
-                            <a:srgbClr val="111111"/>
-                          </a:solidFill>
-                          <a:latin typeface="Poppins"/>
-                        </a:rPr>
-                        <a:t>The 250 date. March 2027 or Christmas 2026</a:t>
-                      </a:r>
-                    </a:p>
-                  </a:txBody>
-                  <a:tcPr marL="0" marR="128016" marT="36576" marB="54864" anchor="t">
-                    <a:lnB w="9525" cap="flat" cmpd="sng" algn="ctr">
-                      <a:solidFill>
-                        <a:srgbClr val="D4D2D0"/>
-                      </a:solidFill>
-                    </a:lnB>
-                    <a:lnT w="0" cap="flat" cmpd="sng" algn="ctr">
-                      <a:solidFill>
-                        <a:srgbClr val="FAF8F4"/>
-                      </a:solidFill>
-                    </a:lnT>
-                    <a:lnR w="0" cap="flat" cmpd="sng" algn="ctr">
-                      <a:solidFill>
-                        <a:srgbClr val="FAF8F4"/>
-                      </a:solidFill>
-                    </a:lnR>
-                    <a:lnL w="0" cap="flat" cmpd="sng" algn="ctr">
-                      <a:solidFill>
-                        <a:srgbClr val="FAF8F4"/>
-                      </a:solidFill>
-                    </a:lnL>
-                    <a:noFill/>
-                  </a:tcPr>
-                </a:tc>
-              </a:tr>
-            </a:tbl>
-          </a:graphicData>
-        </a:graphic>
-      </p:graphicFrame>
-      <p:sp>
-        <p:nvSpPr>
-          <p:cNvPr id="5" name="TextBox 4"/>
-          <p:cNvSpPr txBox="1"/>
-          <p:nvPr/>
-        </p:nvSpPr>
-        <p:spPr>
-          <a:xfrm>
-            <a:off x="914400" y="6291072"/>
-            <a:ext cx="10362895" cy="274320"/>
-          </a:xfrm>
-          <a:prstGeom prst="rect">
-            <a:avLst/>
-          </a:prstGeom>
-          <a:noFill/>
-        </p:spPr>
-        <p:txBody>
-          <a:bodyPr wrap="square" lIns="0" rIns="0" tIns="0" bIns="0" anchor="t">
-            <a:spAutoFit/>
-          </a:bodyPr>
-          <a:lstStyle/>
-          <a:p>
-            <a:pPr algn="l">
-              <a:lnSpc>
-                <a:spcPct val="100000"/>
-              </a:lnSpc>
-            </a:pPr>
-            <a:r>
-              <a:rPr sz="900" b="0">
-                <a:solidFill>
-                  <a:srgbClr val="666666"/>
-                </a:solidFill>
-                <a:latin typeface="Poppins"/>
-              </a:rPr>
-              <a:t>We work it with you rather than around you.</a:t>
-            </a:r>
-          </a:p>
-        </p:txBody>
-      </p:sp>
-    </p:spTree>
-  </p:cSld>
-  <p:clrMapOvr>
-    <a:masterClrMapping/>
-  </p:clrMapOvr>
-</p:sld>
-</file>
-
-<file path=ppt/slides/slide19.xml><?xml version="1.0" encoding="utf-8"?>
-<p:sld xmlns:a="http://schemas.openxmlformats.org/drawingml/2006/main" xmlns:p="http://schemas.openxmlformats.org/presentationml/2006/main" xmlns:r="http://schemas.openxmlformats.org/officeDocument/2006/relationships">
-  <p:cSld>
-    <p:bg>
-      <p:bgPr>
-        <a:solidFill>
-          <a:srgbClr val="FAF8F4"/>
-        </a:solidFill>
-        <a:effectLst/>
-      </p:bgPr>
-    </p:bg>
-    <p:spTree>
-      <p:nvGrpSpPr>
-        <p:cNvPr id="1" name=""/>
-        <p:cNvGrpSpPr/>
-        <p:nvPr/>
-      </p:nvGrpSpPr>
-      <p:grpSpPr/>
-      <p:sp>
-        <p:nvSpPr>
-          <p:cNvPr id="2" name="TextBox 1"/>
-          <p:cNvSpPr txBox="1"/>
-          <p:nvPr/>
-        </p:nvSpPr>
-        <p:spPr>
-          <a:xfrm>
-            <a:off x="914400" y="914400"/>
-            <a:ext cx="10362895" cy="274320"/>
-          </a:xfrm>
-          <a:prstGeom prst="rect">
-            <a:avLst/>
-          </a:prstGeom>
-          <a:noFill/>
-        </p:spPr>
-        <p:txBody>
-          <a:bodyPr wrap="square" lIns="0" rIns="0" tIns="0" bIns="0" anchor="t">
-            <a:spAutoFit/>
-          </a:bodyPr>
-          <a:lstStyle/>
-          <a:p>
-            <a:pPr algn="l">
-              <a:lnSpc>
-                <a:spcPct val="100000"/>
-              </a:lnSpc>
-            </a:pPr>
-            <a:r>
-              <a:rPr sz="900" b="0" spc="200">
-                <a:solidFill>
-                  <a:srgbClr val="111111"/>
-                </a:solidFill>
-                <a:latin typeface="Poppins"/>
-              </a:rPr>
-              <a:t>TIMELINE</a:t>
-            </a:r>
-          </a:p>
-        </p:txBody>
-      </p:sp>
-      <p:sp>
-        <p:nvSpPr>
-          <p:cNvPr id="3" name="TextBox 2"/>
-          <p:cNvSpPr txBox="1"/>
-          <p:nvPr/>
-        </p:nvSpPr>
-        <p:spPr>
-          <a:xfrm>
-            <a:off x="914400" y="1371600"/>
-            <a:ext cx="10362895" cy="640080"/>
-          </a:xfrm>
-          <a:prstGeom prst="rect">
-            <a:avLst/>
-          </a:prstGeom>
-          <a:noFill/>
-        </p:spPr>
-        <p:txBody>
-          <a:bodyPr wrap="square" lIns="0" rIns="0" tIns="0" bIns="0" anchor="t">
-            <a:spAutoFit/>
-          </a:bodyPr>
-          <a:lstStyle/>
-          <a:p>
-            <a:pPr algn="l">
-              <a:lnSpc>
-                <a:spcPct val="112000"/>
-              </a:lnSpc>
-            </a:pPr>
-            <a:r>
-              <a:rPr sz="2800" b="0">
-                <a:solidFill>
-                  <a:srgbClr val="111111"/>
-                </a:solidFill>
-                <a:latin typeface="Poppins"/>
-              </a:rPr>
-              <a:t>On your ladder, not ours.</a:t>
-            </a:r>
-          </a:p>
-        </p:txBody>
-      </p:sp>
-      <p:graphicFrame>
-        <p:nvGraphicFramePr>
-          <p:cNvPr id="4" name="Table 3"/>
-          <p:cNvGraphicFramePr>
-            <a:graphicFrameLocks noGrp="1"/>
-          </p:cNvGraphicFramePr>
-          <p:nvPr/>
-        </p:nvGraphicFramePr>
-        <p:xfrm>
-          <a:off x="914400" y="2194560"/>
-          <a:ext cx="10362895" cy="2507772"/>
-        </p:xfrm>
-        <a:graphic>
-          <a:graphicData uri="http://schemas.openxmlformats.org/drawingml/2006/table">
-            <a:tbl>
-              <a:tblPr firstRow="0" bandRow="0">
-                <a:tableStyleId>{2D5ABB26-0587-4C30-8999-92F81FD0307C}</a:tableStyleId>
-              </a:tblPr>
-              <a:tblGrid>
-                <a:gridCol w="1761692"/>
-                <a:gridCol w="8601203"/>
-              </a:tblGrid>
-              <a:tr h="274320">
-                <a:tc>
-                  <a:txBody>
-                    <a:bodyPr wrap="square"/>
-                    <a:lstStyle/>
-                    <a:p>
-                      <a:pPr>
-                        <a:lnSpc>
-                          <a:spcPct val="134000"/>
-                        </a:lnSpc>
-                      </a:pPr>
-                      <a:r>
-                        <a:rPr sz="900" b="0" spc="200">
-                          <a:solidFill>
-                            <a:srgbClr val="666666"/>
-                          </a:solidFill>
-                          <a:latin typeface="Poppins"/>
-                        </a:rPr>
-                        <a:t>HORIZON</a:t>
-                      </a:r>
-                    </a:p>
-                  </a:txBody>
-                  <a:tcPr marL="0" marR="128016" marT="36576" marB="54864" anchor="t">
-                    <a:lnB w="9525" cap="flat" cmpd="sng" algn="ctr">
-                      <a:solidFill>
-                        <a:srgbClr val="D4D2D0"/>
-                      </a:solidFill>
-                    </a:lnB>
-                    <a:lnT w="0" cap="flat" cmpd="sng" algn="ctr">
-                      <a:solidFill>
-                        <a:srgbClr val="FAF8F4"/>
-                      </a:solidFill>
-                    </a:lnT>
-                    <a:lnR w="0" cap="flat" cmpd="sng" algn="ctr">
-                      <a:solidFill>
-                        <a:srgbClr val="FAF8F4"/>
-                      </a:solidFill>
-                    </a:lnR>
-                    <a:lnL w="0" cap="flat" cmpd="sng" algn="ctr">
-                      <a:solidFill>
-                        <a:srgbClr val="FAF8F4"/>
-                      </a:solidFill>
-                    </a:lnL>
-                    <a:noFill/>
-                  </a:tcPr>
-                </a:tc>
-                <a:tc>
-                  <a:txBody>
-                    <a:bodyPr wrap="square"/>
-                    <a:lstStyle/>
-                    <a:p>
-                      <a:pPr>
-                        <a:lnSpc>
-                          <a:spcPct val="134000"/>
-                        </a:lnSpc>
-                      </a:pPr>
-                      <a:r>
-                        <a:rPr sz="900" b="0" spc="200">
-                          <a:solidFill>
-                            <a:srgbClr val="666666"/>
-                          </a:solidFill>
-                          <a:latin typeface="Poppins"/>
-                        </a:rPr>
-                        <a:t>WHAT IS TRUE AT THE END OF IT</a:t>
-                      </a:r>
-                    </a:p>
-                  </a:txBody>
-                  <a:tcPr marL="0" marR="128016" marT="36576" marB="54864" anchor="t">
-                    <a:lnB w="9525" cap="flat" cmpd="sng" algn="ctr">
-                      <a:solidFill>
-                        <a:srgbClr val="D4D2D0"/>
-                      </a:solidFill>
-                    </a:lnB>
-                    <a:lnT w="0" cap="flat" cmpd="sng" algn="ctr">
-                      <a:solidFill>
-                        <a:srgbClr val="FAF8F4"/>
-                      </a:solidFill>
-                    </a:lnT>
-                    <a:lnR w="0" cap="flat" cmpd="sng" algn="ctr">
-                      <a:solidFill>
-                        <a:srgbClr val="FAF8F4"/>
-                      </a:solidFill>
-                    </a:lnR>
-                    <a:lnL w="0" cap="flat" cmpd="sng" algn="ctr">
-                      <a:solidFill>
-                        <a:srgbClr val="FAF8F4"/>
-                      </a:solidFill>
-                    </a:lnL>
-                    <a:noFill/>
-                  </a:tcPr>
-                </a:tc>
-              </a:tr>
-              <a:tr h="558363">
-                <a:tc>
-                  <a:txBody>
-                    <a:bodyPr wrap="square"/>
-                    <a:lstStyle/>
-                    <a:p>
-                      <a:pPr>
-                        <a:lnSpc>
-                          <a:spcPct val="134000"/>
-                        </a:lnSpc>
-                      </a:pPr>
-                      <a:r>
-                        <a:rPr sz="1100" b="1">
-                          <a:solidFill>
-                            <a:srgbClr val="111111"/>
-                          </a:solidFill>
-                          <a:latin typeface="Poppins"/>
-                        </a:rPr>
-                        <a:t>30 days
-Mid-October</a:t>
-                      </a:r>
-                    </a:p>
-                  </a:txBody>
-                  <a:tcPr marL="0" marR="128016" marT="36576" marB="54864" anchor="t">
-                    <a:lnB w="9525" cap="flat" cmpd="sng" algn="ctr">
-                      <a:solidFill>
-                        <a:srgbClr val="D4D2D0"/>
-                      </a:solidFill>
-                    </a:lnB>
-                    <a:lnT w="0" cap="flat" cmpd="sng" algn="ctr">
-                      <a:solidFill>
-                        <a:srgbClr val="FAF8F4"/>
-                      </a:solidFill>
-                    </a:lnT>
-                    <a:lnR w="0" cap="flat" cmpd="sng" algn="ctr">
-                      <a:solidFill>
-                        <a:srgbClr val="FAF8F4"/>
-                      </a:solidFill>
-                    </a:lnR>
-                    <a:lnL w="0" cap="flat" cmpd="sng" algn="ctr">
-                      <a:solidFill>
-                        <a:srgbClr val="FAF8F4"/>
-                      </a:solidFill>
-                    </a:lnL>
-                    <a:noFill/>
-                  </a:tcPr>
-                </a:tc>
-                <a:tc>
-                  <a:txBody>
-                    <a:bodyPr wrap="square"/>
-                    <a:lstStyle/>
-                    <a:p>
-                      <a:pPr>
-                        <a:lnSpc>
-                          <a:spcPct val="134000"/>
-                        </a:lnSpc>
-                      </a:pPr>
-                      <a:r>
-                        <a:rPr sz="1100" b="0">
-                          <a:solidFill>
-                            <a:srgbClr val="111111"/>
-                          </a:solidFill>
-                          <a:latin typeface="Poppins"/>
-                        </a:rPr>
-                        <a:t>Showroom or event space decided, and the Jewell split agreed. Messaging and journey signed on the home entertainment position. KPIs and the weekly rhythm set. Oktoberfest run. The 250 date chosen</a:t>
-                      </a:r>
-                    </a:p>
-                  </a:txBody>
-                  <a:tcPr marL="0" marR="128016" marT="36576" marB="54864" anchor="t">
-                    <a:lnB w="9525" cap="flat" cmpd="sng" algn="ctr">
-                      <a:solidFill>
-                        <a:srgbClr val="D4D2D0"/>
-                      </a:solidFill>
-                    </a:lnB>
-                    <a:lnT w="0" cap="flat" cmpd="sng" algn="ctr">
-                      <a:solidFill>
-                        <a:srgbClr val="FAF8F4"/>
-                      </a:solidFill>
-                    </a:lnT>
-                    <a:lnR w="0" cap="flat" cmpd="sng" algn="ctr">
-                      <a:solidFill>
-                        <a:srgbClr val="FAF8F4"/>
-                      </a:solidFill>
-                    </a:lnR>
-                    <a:lnL w="0" cap="flat" cmpd="sng" algn="ctr">
-                      <a:solidFill>
-                        <a:srgbClr val="FAF8F4"/>
-                      </a:solidFill>
-                    </a:lnL>
-                    <a:noFill/>
-                  </a:tcPr>
-                </a:tc>
-              </a:tr>
-              <a:tr h="558363">
-                <a:tc>
-                  <a:txBody>
-                    <a:bodyPr wrap="square"/>
-                    <a:lstStyle/>
-                    <a:p>
-                      <a:pPr>
-                        <a:lnSpc>
-                          <a:spcPct val="134000"/>
-                        </a:lnSpc>
-                      </a:pPr>
-                      <a:r>
-                        <a:rPr sz="1100" b="1">
-                          <a:solidFill>
-                            <a:srgbClr val="111111"/>
-                          </a:solidFill>
-                          <a:latin typeface="Poppins"/>
-                        </a:rPr>
-                        <a:t>3 months
-Mid-December</a:t>
-                      </a:r>
-                    </a:p>
-                  </a:txBody>
-                  <a:tcPr marL="0" marR="128016" marT="36576" marB="54864" anchor="t">
-                    <a:lnB w="9525" cap="flat" cmpd="sng" algn="ctr">
-                      <a:solidFill>
-                        <a:srgbClr val="D4D2D0"/>
-                      </a:solidFill>
-                    </a:lnB>
-                    <a:lnT w="0" cap="flat" cmpd="sng" algn="ctr">
-                      <a:solidFill>
-                        <a:srgbClr val="FAF8F4"/>
-                      </a:solidFill>
-                    </a:lnT>
-                    <a:lnR w="0" cap="flat" cmpd="sng" algn="ctr">
-                      <a:solidFill>
-                        <a:srgbClr val="FAF8F4"/>
-                      </a:solidFill>
-                    </a:lnR>
-                    <a:lnL w="0" cap="flat" cmpd="sng" algn="ctr">
-                      <a:solidFill>
-                        <a:srgbClr val="FAF8F4"/>
-                      </a:solidFill>
-                    </a:lnL>
-                    <a:noFill/>
-                  </a:tcPr>
-                </a:tc>
-                <a:tc>
-                  <a:txBody>
-                    <a:bodyPr wrap="square"/>
-                    <a:lstStyle/>
-                    <a:p>
-                      <a:pPr>
-                        <a:lnSpc>
-                          <a:spcPct val="134000"/>
-                        </a:lnSpc>
-                      </a:pPr>
-                      <a:r>
-                        <a:rPr sz="1100" b="0">
-                          <a:solidFill>
-                            <a:srgbClr val="111111"/>
-                          </a:solidFill>
-                          <a:latin typeface="Poppins"/>
-                        </a:rPr>
-                        <a:t>Website and SEM live. GoTab and Fishbowl connected, CRM triggers replacing the 90-day SMS. Lease-to-buy and delivery launched. Referral programme live, with trades carrying cards. Wholesale pipeline in the CRM. Next hire decided</a:t>
-                      </a:r>
-                    </a:p>
-                  </a:txBody>
-                  <a:tcPr marL="0" marR="128016" marT="36576" marB="54864" anchor="t">
-                    <a:lnB w="9525" cap="flat" cmpd="sng" algn="ctr">
-                      <a:solidFill>
-                        <a:srgbClr val="D4D2D0"/>
-                      </a:solidFill>
-                    </a:lnB>
-                    <a:lnT w="0" cap="flat" cmpd="sng" algn="ctr">
-                      <a:solidFill>
-                        <a:srgbClr val="FAF8F4"/>
-                      </a:solidFill>
-                    </a:lnT>
-                    <a:lnR w="0" cap="flat" cmpd="sng" algn="ctr">
-                      <a:solidFill>
-                        <a:srgbClr val="FAF8F4"/>
-                      </a:solidFill>
-                    </a:lnR>
-                    <a:lnL w="0" cap="flat" cmpd="sng" algn="ctr">
-                      <a:solidFill>
-                        <a:srgbClr val="FAF8F4"/>
-                      </a:solidFill>
-                    </a:lnL>
-                    <a:noFill/>
-                  </a:tcPr>
-                </a:tc>
-              </a:tr>
-              <a:tr h="558363">
-                <a:tc>
-                  <a:txBody>
-                    <a:bodyPr wrap="square"/>
-                    <a:lstStyle/>
-                    <a:p>
-                      <a:pPr>
-                        <a:lnSpc>
-                          <a:spcPct val="134000"/>
-                        </a:lnSpc>
-                      </a:pPr>
-                      <a:r>
-                        <a:rPr sz="1100" b="1">
-                          <a:solidFill>
-                            <a:srgbClr val="111111"/>
-                          </a:solidFill>
-                          <a:latin typeface="Poppins"/>
-                        </a:rPr>
-                        <a:t>6 months
-March 2027</a:t>
-                      </a:r>
-                    </a:p>
-                  </a:txBody>
-                  <a:tcPr marL="0" marR="128016" marT="36576" marB="54864" anchor="t">
-                    <a:lnB w="9525" cap="flat" cmpd="sng" algn="ctr">
-                      <a:solidFill>
-                        <a:srgbClr val="D4D2D0"/>
-                      </a:solidFill>
-                    </a:lnB>
-                    <a:lnT w="0" cap="flat" cmpd="sng" algn="ctr">
-                      <a:solidFill>
-                        <a:srgbClr val="FAF8F4"/>
-                      </a:solidFill>
-                    </a:lnT>
-                    <a:lnR w="0" cap="flat" cmpd="sng" algn="ctr">
-                      <a:solidFill>
-                        <a:srgbClr val="FAF8F4"/>
-                      </a:solidFill>
-                    </a:lnR>
-                    <a:lnL w="0" cap="flat" cmpd="sng" algn="ctr">
-                      <a:solidFill>
-                        <a:srgbClr val="FAF8F4"/>
-                      </a:solidFill>
-                    </a:lnL>
-                    <a:noFill/>
-                  </a:tcPr>
-                </a:tc>
-                <a:tc>
-                  <a:txBody>
-                    <a:bodyPr wrap="square"/>
-                    <a:lstStyle/>
-                    <a:p>
-                      <a:pPr>
-                        <a:lnSpc>
-                          <a:spcPct val="134000"/>
-                        </a:lnSpc>
-                      </a:pPr>
-                      <a:r>
-                        <a:rPr sz="1100" b="0">
-                          <a:solidFill>
-                            <a:srgbClr val="111111"/>
-                          </a:solidFill>
-                          <a:latin typeface="Poppins"/>
-                        </a:rPr>
-                        <a:t>250 active keg refillers, or December if you take the Christmas date. Weddings and functions selling. Membership redesigned. Designing-for-her and hardware-as-object briefs in market</a:t>
-                      </a:r>
-                    </a:p>
-                  </a:txBody>
-                  <a:tcPr marL="0" marR="128016" marT="36576" marB="54864" anchor="t">
-                    <a:lnB w="9525" cap="flat" cmpd="sng" algn="ctr">
-                      <a:solidFill>
-                        <a:srgbClr val="D4D2D0"/>
-                      </a:solidFill>
-                    </a:lnB>
-                    <a:lnT w="0" cap="flat" cmpd="sng" algn="ctr">
-                      <a:solidFill>
-                        <a:srgbClr val="FAF8F4"/>
-                      </a:solidFill>
-                    </a:lnT>
-                    <a:lnR w="0" cap="flat" cmpd="sng" algn="ctr">
-                      <a:solidFill>
-                        <a:srgbClr val="FAF8F4"/>
-                      </a:solidFill>
-                    </a:lnR>
-                    <a:lnL w="0" cap="flat" cmpd="sng" algn="ctr">
-                      <a:solidFill>
-                        <a:srgbClr val="FAF8F4"/>
-                      </a:solidFill>
-                    </a:lnL>
-                    <a:noFill/>
-                  </a:tcPr>
-                </a:tc>
-              </a:tr>
-              <a:tr h="558363">
-                <a:tc>
-                  <a:txBody>
-                    <a:bodyPr wrap="square"/>
-                    <a:lstStyle/>
-                    <a:p>
-                      <a:pPr>
-                        <a:lnSpc>
-                          <a:spcPct val="134000"/>
-                        </a:lnSpc>
-                      </a:pPr>
-                      <a:r>
-                        <a:rPr sz="1100" b="1">
-                          <a:solidFill>
-                            <a:srgbClr val="111111"/>
-                          </a:solidFill>
-                          <a:latin typeface="Poppins"/>
-                        </a:rPr>
-                        <a:t>1 year
-September 2027</a:t>
-                      </a:r>
-                    </a:p>
-                  </a:txBody>
-                  <a:tcPr marL="0" marR="128016" marT="36576" marB="54864" anchor="t">
-                    <a:lnB w="9525" cap="flat" cmpd="sng" algn="ctr">
-                      <a:solidFill>
-                        <a:srgbClr val="D4D2D0"/>
-                      </a:solidFill>
-                    </a:lnB>
-                    <a:lnT w="0" cap="flat" cmpd="sng" algn="ctr">
-                      <a:solidFill>
-                        <a:srgbClr val="FAF8F4"/>
-                      </a:solidFill>
-                    </a:lnT>
-                    <a:lnR w="0" cap="flat" cmpd="sng" algn="ctr">
-                      <a:solidFill>
-                        <a:srgbClr val="FAF8F4"/>
-                      </a:solidFill>
-                    </a:lnR>
-                    <a:lnL w="0" cap="flat" cmpd="sng" algn="ctr">
-                      <a:solidFill>
-                        <a:srgbClr val="FAF8F4"/>
-                      </a:solidFill>
-                    </a:lnL>
-                    <a:noFill/>
-                  </a:tcPr>
-                </a:tc>
-                <a:tc>
-                  <a:txBody>
-                    <a:bodyPr wrap="square"/>
-                    <a:lstStyle/>
-                    <a:p>
-                      <a:pPr>
-                        <a:lnSpc>
-                          <a:spcPct val="134000"/>
-                        </a:lnSpc>
-                      </a:pPr>
-                      <a:r>
-                        <a:rPr sz="1100" b="0">
-                          <a:solidFill>
-                            <a:srgbClr val="111111"/>
-                          </a:solidFill>
-                          <a:latin typeface="Poppins"/>
-                        </a:rPr>
-                        <a:t>Referrals, JVPs and online driving most system sales. Replicable events calendar running. Cashflow positive, Justin on a wage</a:t>
-                      </a:r>
-                    </a:p>
-                  </a:txBody>
-                  <a:tcPr marL="0" marR="128016" marT="36576" marB="54864" anchor="t">
-                    <a:lnB w="9525" cap="flat" cmpd="sng" algn="ctr">
-                      <a:solidFill>
-                        <a:srgbClr val="D4D2D0"/>
-                      </a:solidFill>
-                    </a:lnB>
-                    <a:lnT w="0" cap="flat" cmpd="sng" algn="ctr">
-                      <a:solidFill>
-                        <a:srgbClr val="FAF8F4"/>
-                      </a:solidFill>
-                    </a:lnT>
-                    <a:lnR w="0" cap="flat" cmpd="sng" algn="ctr">
-                      <a:solidFill>
-                        <a:srgbClr val="FAF8F4"/>
-                      </a:solidFill>
-                    </a:lnR>
-                    <a:lnL w="0" cap="flat" cmpd="sng" algn="ctr">
-                      <a:solidFill>
-                        <a:srgbClr val="FAF8F4"/>
-                      </a:solidFill>
-                    </a:lnL>
-                    <a:noFill/>
-                  </a:tcPr>
-                </a:tc>
-              </a:tr>
-            </a:tbl>
-          </a:graphicData>
-        </a:graphic>
-      </p:graphicFrame>
-      <p:sp>
-        <p:nvSpPr>
-          <p:cNvPr id="5" name="TextBox 4"/>
-          <p:cNvSpPr txBox="1"/>
-          <p:nvPr/>
-        </p:nvSpPr>
-        <p:spPr>
-          <a:xfrm>
-            <a:off x="914400" y="6291072"/>
-            <a:ext cx="10362895" cy="274320"/>
-          </a:xfrm>
-          <a:prstGeom prst="rect">
-            <a:avLst/>
-          </a:prstGeom>
-          <a:noFill/>
-        </p:spPr>
-        <p:txBody>
-          <a:bodyPr wrap="square" lIns="0" rIns="0" tIns="0" bIns="0" anchor="t">
-            <a:spAutoFit/>
-          </a:bodyPr>
-          <a:lstStyle/>
-          <a:p>
-            <a:pPr algn="l">
-              <a:lnSpc>
-                <a:spcPct val="100000"/>
-              </a:lnSpc>
-            </a:pPr>
-            <a:r>
-              <a:rPr sz="900" b="0">
-                <a:solidFill>
-                  <a:srgbClr val="666666"/>
-                </a:solidFill>
-                <a:latin typeface="Poppins"/>
-              </a:rPr>
-              <a:t>Three years, five years and the exit sit on the summary sheet. This covers the first year of the climb.</a:t>
-            </a:r>
-          </a:p>
-        </p:txBody>
-      </p:sp>
-    </p:spTree>
-  </p:cSld>
-  <p:clrMapOvr>
-    <a:masterClrMapping/>
-  </p:clrMapOvr>
-</p:sld>
-</file>
-
 <file path=ppt/slides/slide2.xml><?xml version="1.0" encoding="utf-8"?>
 <p:sld xmlns:a="http://schemas.openxmlformats.org/drawingml/2006/main" xmlns:p="http://schemas.openxmlformats.org/presentationml/2006/main" xmlns:r="http://schemas.openxmlformats.org/officeDocument/2006/relationships">
   <p:cSld>
@@ -12442,6 +12618,1779 @@
     <p:bg>
       <p:bgPr>
         <a:solidFill>
+          <a:srgbClr val="111111"/>
+        </a:solidFill>
+        <a:effectLst/>
+      </p:bgPr>
+    </p:bg>
+    <p:spTree>
+      <p:nvGrpSpPr>
+        <p:cNvPr id="1" name=""/>
+        <p:cNvGrpSpPr/>
+        <p:nvPr/>
+      </p:nvGrpSpPr>
+      <p:grpSpPr/>
+      <p:sp>
+        <p:nvSpPr>
+          <p:cNvPr id="2" name="TextBox 1"/>
+          <p:cNvSpPr txBox="1"/>
+          <p:nvPr/>
+        </p:nvSpPr>
+        <p:spPr>
+          <a:xfrm>
+            <a:off x="914400" y="914400"/>
+            <a:ext cx="10362895" cy="274320"/>
+          </a:xfrm>
+          <a:prstGeom prst="rect">
+            <a:avLst/>
+          </a:prstGeom>
+          <a:noFill/>
+        </p:spPr>
+        <p:txBody>
+          <a:bodyPr wrap="square" lIns="0" rIns="0" tIns="0" bIns="0" anchor="t">
+            <a:spAutoFit/>
+          </a:bodyPr>
+          <a:lstStyle/>
+          <a:p>
+            <a:pPr algn="l">
+              <a:lnSpc>
+                <a:spcPct val="100000"/>
+              </a:lnSpc>
+            </a:pPr>
+            <a:r>
+              <a:rPr sz="1400" b="0" spc="200">
+                <a:solidFill>
+                  <a:srgbClr val="FAF8F4"/>
+                </a:solidFill>
+                <a:latin typeface="Poppins"/>
+              </a:rPr>
+              <a:t>PART 03</a:t>
+            </a:r>
+          </a:p>
+        </p:txBody>
+      </p:sp>
+      <p:sp>
+        <p:nvSpPr>
+          <p:cNvPr id="3" name="TextBox 2"/>
+          <p:cNvSpPr txBox="1"/>
+          <p:nvPr/>
+        </p:nvSpPr>
+        <p:spPr>
+          <a:xfrm>
+            <a:off x="914400" y="2194560"/>
+            <a:ext cx="10362895" cy="2377440"/>
+          </a:xfrm>
+          <a:prstGeom prst="rect">
+            <a:avLst/>
+          </a:prstGeom>
+          <a:noFill/>
+        </p:spPr>
+        <p:txBody>
+          <a:bodyPr wrap="square" lIns="0" rIns="0" tIns="0" bIns="0" anchor="ctr">
+            <a:spAutoFit/>
+          </a:bodyPr>
+          <a:lstStyle/>
+          <a:p>
+            <a:pPr algn="l">
+              <a:lnSpc>
+                <a:spcPct val="100000"/>
+              </a:lnSpc>
+            </a:pPr>
+            <a:r>
+              <a:rPr sz="9600" b="0">
+                <a:solidFill>
+                  <a:srgbClr val="FAF8F4"/>
+                </a:solidFill>
+                <a:latin typeface="Poppins"/>
+              </a:rPr>
+              <a:t>How it runs.</a:t>
+            </a:r>
+          </a:p>
+        </p:txBody>
+      </p:sp>
+      <p:sp>
+        <p:nvSpPr>
+          <p:cNvPr id="4" name="TextBox 3"/>
+          <p:cNvSpPr txBox="1"/>
+          <p:nvPr/>
+        </p:nvSpPr>
+        <p:spPr>
+          <a:xfrm>
+            <a:off x="914400" y="5212080"/>
+            <a:ext cx="10362895" cy="457200"/>
+          </a:xfrm>
+          <a:prstGeom prst="rect">
+            <a:avLst/>
+          </a:prstGeom>
+          <a:noFill/>
+        </p:spPr>
+        <p:txBody>
+          <a:bodyPr wrap="square" lIns="0" rIns="0" tIns="0" bIns="0" anchor="t">
+            <a:spAutoFit/>
+          </a:bodyPr>
+          <a:lstStyle/>
+          <a:p>
+            <a:pPr algn="l">
+              <a:lnSpc>
+                <a:spcPct val="130000"/>
+              </a:lnSpc>
+            </a:pPr>
+            <a:r>
+              <a:rPr sz="1600" b="0">
+                <a:solidFill>
+                  <a:srgbClr val="FAF8F4"/>
+                </a:solidFill>
+                <a:latin typeface="Poppins"/>
+              </a:rPr>
+              <a:t>The first sprint, the ladder, and what we need from you.</a:t>
+            </a:r>
+          </a:p>
+        </p:txBody>
+      </p:sp>
+    </p:spTree>
+  </p:cSld>
+  <p:clrMapOvr>
+    <a:masterClrMapping/>
+  </p:clrMapOvr>
+</p:sld>
+</file>
+
+<file path=ppt/slides/slide21.xml><?xml version="1.0" encoding="utf-8"?>
+<p:sld xmlns:a="http://schemas.openxmlformats.org/drawingml/2006/main" xmlns:p="http://schemas.openxmlformats.org/presentationml/2006/main" xmlns:r="http://schemas.openxmlformats.org/officeDocument/2006/relationships">
+  <p:cSld>
+    <p:bg>
+      <p:bgPr>
+        <a:solidFill>
+          <a:srgbClr val="FAF8F4"/>
+        </a:solidFill>
+        <a:effectLst/>
+      </p:bgPr>
+    </p:bg>
+    <p:spTree>
+      <p:nvGrpSpPr>
+        <p:cNvPr id="1" name=""/>
+        <p:cNvGrpSpPr/>
+        <p:nvPr/>
+      </p:nvGrpSpPr>
+      <p:grpSpPr/>
+      <p:sp>
+        <p:nvSpPr>
+          <p:cNvPr id="2" name="TextBox 1"/>
+          <p:cNvSpPr txBox="1"/>
+          <p:nvPr/>
+        </p:nvSpPr>
+        <p:spPr>
+          <a:xfrm>
+            <a:off x="914400" y="914400"/>
+            <a:ext cx="10362895" cy="274320"/>
+          </a:xfrm>
+          <a:prstGeom prst="rect">
+            <a:avLst/>
+          </a:prstGeom>
+          <a:noFill/>
+        </p:spPr>
+        <p:txBody>
+          <a:bodyPr wrap="square" lIns="0" rIns="0" tIns="0" bIns="0" anchor="t">
+            <a:spAutoFit/>
+          </a:bodyPr>
+          <a:lstStyle/>
+          <a:p>
+            <a:pPr algn="l">
+              <a:lnSpc>
+                <a:spcPct val="100000"/>
+              </a:lnSpc>
+            </a:pPr>
+            <a:r>
+              <a:rPr sz="900" b="0" spc="200">
+                <a:solidFill>
+                  <a:srgbClr val="111111"/>
+                </a:solidFill>
+                <a:latin typeface="Poppins"/>
+              </a:rPr>
+              <a:t>THE FIRST 30 DAYS</a:t>
+            </a:r>
+          </a:p>
+        </p:txBody>
+      </p:sp>
+      <p:sp>
+        <p:nvSpPr>
+          <p:cNvPr id="3" name="TextBox 2"/>
+          <p:cNvSpPr txBox="1"/>
+          <p:nvPr/>
+        </p:nvSpPr>
+        <p:spPr>
+          <a:xfrm>
+            <a:off x="914400" y="1371600"/>
+            <a:ext cx="10362895" cy="640080"/>
+          </a:xfrm>
+          <a:prstGeom prst="rect">
+            <a:avLst/>
+          </a:prstGeom>
+          <a:noFill/>
+        </p:spPr>
+        <p:txBody>
+          <a:bodyPr wrap="square" lIns="0" rIns="0" tIns="0" bIns="0" anchor="t">
+            <a:spAutoFit/>
+          </a:bodyPr>
+          <a:lstStyle/>
+          <a:p>
+            <a:pPr algn="l">
+              <a:lnSpc>
+                <a:spcPct val="112000"/>
+              </a:lnSpc>
+            </a:pPr>
+            <a:r>
+              <a:rPr sz="2800" b="0">
+                <a:solidFill>
+                  <a:srgbClr val="111111"/>
+                </a:solidFill>
+                <a:latin typeface="Poppins"/>
+              </a:rPr>
+              <a:t>Your own 30-day list is the first sprint.</a:t>
+            </a:r>
+          </a:p>
+        </p:txBody>
+      </p:sp>
+      <p:graphicFrame>
+        <p:nvGraphicFramePr>
+          <p:cNvPr id="4" name="Table 3"/>
+          <p:cNvGraphicFramePr>
+            <a:graphicFrameLocks noGrp="1"/>
+          </p:cNvGraphicFramePr>
+          <p:nvPr/>
+        </p:nvGraphicFramePr>
+        <p:xfrm>
+          <a:off x="914400" y="2194560"/>
+          <a:ext cx="10362894" cy="2914168"/>
+        </p:xfrm>
+        <a:graphic>
+          <a:graphicData uri="http://schemas.openxmlformats.org/drawingml/2006/table">
+            <a:tbl>
+              <a:tblPr firstRow="0" bandRow="0">
+                <a:tableStyleId>{2D5ABB26-0587-4C30-8999-92F81FD0307C}</a:tableStyleId>
+              </a:tblPr>
+              <a:tblGrid>
+                <a:gridCol w="518144"/>
+                <a:gridCol w="9844750"/>
+              </a:tblGrid>
+              <a:tr h="274320">
+                <a:tc>
+                  <a:txBody>
+                    <a:bodyPr wrap="square"/>
+                    <a:lstStyle/>
+                    <a:p>
+                      <a:pPr>
+                        <a:lnSpc>
+                          <a:spcPct val="134000"/>
+                        </a:lnSpc>
+                      </a:pPr>
+                      <a:r>
+                        <a:rPr sz="900" b="0" spc="200">
+                          <a:solidFill>
+                            <a:srgbClr val="666666"/>
+                          </a:solidFill>
+                          <a:latin typeface="Poppins"/>
+                        </a:rPr>
+                        <a:t/>
+                      </a:r>
+                    </a:p>
+                  </a:txBody>
+                  <a:tcPr marL="0" marR="128016" marT="36576" marB="54864" anchor="t">
+                    <a:lnB w="9525" cap="flat" cmpd="sng" algn="ctr">
+                      <a:solidFill>
+                        <a:srgbClr val="D4D2D0"/>
+                      </a:solidFill>
+                    </a:lnB>
+                    <a:lnT w="0" cap="flat" cmpd="sng" algn="ctr">
+                      <a:solidFill>
+                        <a:srgbClr val="FAF8F4"/>
+                      </a:solidFill>
+                    </a:lnT>
+                    <a:lnR w="0" cap="flat" cmpd="sng" algn="ctr">
+                      <a:solidFill>
+                        <a:srgbClr val="FAF8F4"/>
+                      </a:solidFill>
+                    </a:lnR>
+                    <a:lnL w="0" cap="flat" cmpd="sng" algn="ctr">
+                      <a:solidFill>
+                        <a:srgbClr val="FAF8F4"/>
+                      </a:solidFill>
+                    </a:lnL>
+                    <a:noFill/>
+                  </a:tcPr>
+                </a:tc>
+                <a:tc>
+                  <a:txBody>
+                    <a:bodyPr wrap="square"/>
+                    <a:lstStyle/>
+                    <a:p>
+                      <a:pPr>
+                        <a:lnSpc>
+                          <a:spcPct val="134000"/>
+                        </a:lnSpc>
+                      </a:pPr>
+                      <a:r>
+                        <a:rPr sz="900" b="0" spc="200">
+                          <a:solidFill>
+                            <a:srgbClr val="666666"/>
+                          </a:solidFill>
+                          <a:latin typeface="Poppins"/>
+                        </a:rPr>
+                        <a:t>WHAT CLOSES</a:t>
+                      </a:r>
+                    </a:p>
+                  </a:txBody>
+                  <a:tcPr marL="0" marR="128016" marT="36576" marB="54864" anchor="t">
+                    <a:lnB w="9525" cap="flat" cmpd="sng" algn="ctr">
+                      <a:solidFill>
+                        <a:srgbClr val="D4D2D0"/>
+                      </a:solidFill>
+                    </a:lnB>
+                    <a:lnT w="0" cap="flat" cmpd="sng" algn="ctr">
+                      <a:solidFill>
+                        <a:srgbClr val="FAF8F4"/>
+                      </a:solidFill>
+                    </a:lnT>
+                    <a:lnR w="0" cap="flat" cmpd="sng" algn="ctr">
+                      <a:solidFill>
+                        <a:srgbClr val="FAF8F4"/>
+                      </a:solidFill>
+                    </a:lnR>
+                    <a:lnL w="0" cap="flat" cmpd="sng" algn="ctr">
+                      <a:solidFill>
+                        <a:srgbClr val="FAF8F4"/>
+                      </a:solidFill>
+                    </a:lnL>
+                    <a:noFill/>
+                  </a:tcPr>
+                </a:tc>
+              </a:tr>
+              <a:tr h="329981">
+                <a:tc>
+                  <a:txBody>
+                    <a:bodyPr wrap="square"/>
+                    <a:lstStyle/>
+                    <a:p>
+                      <a:pPr>
+                        <a:lnSpc>
+                          <a:spcPct val="134000"/>
+                        </a:lnSpc>
+                      </a:pPr>
+                      <a:r>
+                        <a:rPr sz="1100" b="1">
+                          <a:solidFill>
+                            <a:srgbClr val="111111"/>
+                          </a:solidFill>
+                          <a:latin typeface="Poppins"/>
+                        </a:rPr>
+                        <a:t>01</a:t>
+                      </a:r>
+                    </a:p>
+                  </a:txBody>
+                  <a:tcPr marL="0" marR="128016" marT="36576" marB="54864" anchor="t">
+                    <a:lnB w="9525" cap="flat" cmpd="sng" algn="ctr">
+                      <a:solidFill>
+                        <a:srgbClr val="D4D2D0"/>
+                      </a:solidFill>
+                    </a:lnB>
+                    <a:lnT w="0" cap="flat" cmpd="sng" algn="ctr">
+                      <a:solidFill>
+                        <a:srgbClr val="FAF8F4"/>
+                      </a:solidFill>
+                    </a:lnT>
+                    <a:lnR w="0" cap="flat" cmpd="sng" algn="ctr">
+                      <a:solidFill>
+                        <a:srgbClr val="FAF8F4"/>
+                      </a:solidFill>
+                    </a:lnR>
+                    <a:lnL w="0" cap="flat" cmpd="sng" algn="ctr">
+                      <a:solidFill>
+                        <a:srgbClr val="FAF8F4"/>
+                      </a:solidFill>
+                    </a:lnL>
+                    <a:noFill/>
+                  </a:tcPr>
+                </a:tc>
+                <a:tc>
+                  <a:txBody>
+                    <a:bodyPr wrap="square"/>
+                    <a:lstStyle/>
+                    <a:p>
+                      <a:pPr>
+                        <a:lnSpc>
+                          <a:spcPct val="134000"/>
+                        </a:lnSpc>
+                      </a:pPr>
+                      <a:r>
+                        <a:rPr sz="1100" b="0">
+                          <a:solidFill>
+                            <a:srgbClr val="111111"/>
+                          </a:solidFill>
+                          <a:latin typeface="Poppins"/>
+                        </a:rPr>
+                        <a:t>The shape decision, finished. Showroom or event space</a:t>
+                      </a:r>
+                    </a:p>
+                  </a:txBody>
+                  <a:tcPr marL="0" marR="128016" marT="36576" marB="54864" anchor="t">
+                    <a:lnB w="9525" cap="flat" cmpd="sng" algn="ctr">
+                      <a:solidFill>
+                        <a:srgbClr val="D4D2D0"/>
+                      </a:solidFill>
+                    </a:lnB>
+                    <a:lnT w="0" cap="flat" cmpd="sng" algn="ctr">
+                      <a:solidFill>
+                        <a:srgbClr val="FAF8F4"/>
+                      </a:solidFill>
+                    </a:lnT>
+                    <a:lnR w="0" cap="flat" cmpd="sng" algn="ctr">
+                      <a:solidFill>
+                        <a:srgbClr val="FAF8F4"/>
+                      </a:solidFill>
+                    </a:lnR>
+                    <a:lnL w="0" cap="flat" cmpd="sng" algn="ctr">
+                      <a:solidFill>
+                        <a:srgbClr val="FAF8F4"/>
+                      </a:solidFill>
+                    </a:lnL>
+                    <a:noFill/>
+                  </a:tcPr>
+                </a:tc>
+              </a:tr>
+              <a:tr h="329981">
+                <a:tc>
+                  <a:txBody>
+                    <a:bodyPr wrap="square"/>
+                    <a:lstStyle/>
+                    <a:p>
+                      <a:pPr>
+                        <a:lnSpc>
+                          <a:spcPct val="134000"/>
+                        </a:lnSpc>
+                      </a:pPr>
+                      <a:r>
+                        <a:rPr sz="1100" b="1">
+                          <a:solidFill>
+                            <a:srgbClr val="111111"/>
+                          </a:solidFill>
+                          <a:latin typeface="Poppins"/>
+                        </a:rPr>
+                        <a:t>02</a:t>
+                      </a:r>
+                    </a:p>
+                  </a:txBody>
+                  <a:tcPr marL="0" marR="128016" marT="36576" marB="54864" anchor="t">
+                    <a:lnB w="9525" cap="flat" cmpd="sng" algn="ctr">
+                      <a:solidFill>
+                        <a:srgbClr val="D4D2D0"/>
+                      </a:solidFill>
+                    </a:lnB>
+                    <a:lnT w="0" cap="flat" cmpd="sng" algn="ctr">
+                      <a:solidFill>
+                        <a:srgbClr val="FAF8F4"/>
+                      </a:solidFill>
+                    </a:lnT>
+                    <a:lnR w="0" cap="flat" cmpd="sng" algn="ctr">
+                      <a:solidFill>
+                        <a:srgbClr val="FAF8F4"/>
+                      </a:solidFill>
+                    </a:lnR>
+                    <a:lnL w="0" cap="flat" cmpd="sng" algn="ctr">
+                      <a:solidFill>
+                        <a:srgbClr val="FAF8F4"/>
+                      </a:solidFill>
+                    </a:lnL>
+                    <a:noFill/>
+                  </a:tcPr>
+                </a:tc>
+                <a:tc>
+                  <a:txBody>
+                    <a:bodyPr wrap="square"/>
+                    <a:lstStyle/>
+                    <a:p>
+                      <a:pPr>
+                        <a:lnSpc>
+                          <a:spcPct val="134000"/>
+                        </a:lnSpc>
+                      </a:pPr>
+                      <a:r>
+                        <a:rPr sz="1100" b="0">
+                          <a:solidFill>
+                            <a:srgbClr val="111111"/>
+                          </a:solidFill>
+                          <a:latin typeface="Poppins"/>
+                        </a:rPr>
+                        <a:t>Residential versus commercial. Where the energy goes</a:t>
+                      </a:r>
+                    </a:p>
+                  </a:txBody>
+                  <a:tcPr marL="0" marR="128016" marT="36576" marB="54864" anchor="t">
+                    <a:lnB w="9525" cap="flat" cmpd="sng" algn="ctr">
+                      <a:solidFill>
+                        <a:srgbClr val="D4D2D0"/>
+                      </a:solidFill>
+                    </a:lnB>
+                    <a:lnT w="0" cap="flat" cmpd="sng" algn="ctr">
+                      <a:solidFill>
+                        <a:srgbClr val="FAF8F4"/>
+                      </a:solidFill>
+                    </a:lnT>
+                    <a:lnR w="0" cap="flat" cmpd="sng" algn="ctr">
+                      <a:solidFill>
+                        <a:srgbClr val="FAF8F4"/>
+                      </a:solidFill>
+                    </a:lnR>
+                    <a:lnL w="0" cap="flat" cmpd="sng" algn="ctr">
+                      <a:solidFill>
+                        <a:srgbClr val="FAF8F4"/>
+                      </a:solidFill>
+                    </a:lnL>
+                    <a:noFill/>
+                  </a:tcPr>
+                </a:tc>
+              </a:tr>
+              <a:tr h="329981">
+                <a:tc>
+                  <a:txBody>
+                    <a:bodyPr wrap="square"/>
+                    <a:lstStyle/>
+                    <a:p>
+                      <a:pPr>
+                        <a:lnSpc>
+                          <a:spcPct val="134000"/>
+                        </a:lnSpc>
+                      </a:pPr>
+                      <a:r>
+                        <a:rPr sz="1100" b="1">
+                          <a:solidFill>
+                            <a:srgbClr val="111111"/>
+                          </a:solidFill>
+                          <a:latin typeface="Poppins"/>
+                        </a:rPr>
+                        <a:t>03</a:t>
+                      </a:r>
+                    </a:p>
+                  </a:txBody>
+                  <a:tcPr marL="0" marR="128016" marT="36576" marB="54864" anchor="t">
+                    <a:lnB w="9525" cap="flat" cmpd="sng" algn="ctr">
+                      <a:solidFill>
+                        <a:srgbClr val="D4D2D0"/>
+                      </a:solidFill>
+                    </a:lnB>
+                    <a:lnT w="0" cap="flat" cmpd="sng" algn="ctr">
+                      <a:solidFill>
+                        <a:srgbClr val="FAF8F4"/>
+                      </a:solidFill>
+                    </a:lnT>
+                    <a:lnR w="0" cap="flat" cmpd="sng" algn="ctr">
+                      <a:solidFill>
+                        <a:srgbClr val="FAF8F4"/>
+                      </a:solidFill>
+                    </a:lnR>
+                    <a:lnL w="0" cap="flat" cmpd="sng" algn="ctr">
+                      <a:solidFill>
+                        <a:srgbClr val="FAF8F4"/>
+                      </a:solidFill>
+                    </a:lnL>
+                    <a:noFill/>
+                  </a:tcPr>
+                </a:tc>
+                <a:tc>
+                  <a:txBody>
+                    <a:bodyPr wrap="square"/>
+                    <a:lstStyle/>
+                    <a:p>
+                      <a:pPr>
+                        <a:lnSpc>
+                          <a:spcPct val="134000"/>
+                        </a:lnSpc>
+                      </a:pPr>
+                      <a:r>
+                        <a:rPr sz="1100" b="0">
+                          <a:solidFill>
+                            <a:srgbClr val="111111"/>
+                          </a:solidFill>
+                          <a:latin typeface="Poppins"/>
+                        </a:rPr>
+                        <a:t>Key messaging and the customer journey. Delivered by us, signed by you</a:t>
+                      </a:r>
+                    </a:p>
+                  </a:txBody>
+                  <a:tcPr marL="0" marR="128016" marT="36576" marB="54864" anchor="t">
+                    <a:lnB w="9525" cap="flat" cmpd="sng" algn="ctr">
+                      <a:solidFill>
+                        <a:srgbClr val="D4D2D0"/>
+                      </a:solidFill>
+                    </a:lnB>
+                    <a:lnT w="0" cap="flat" cmpd="sng" algn="ctr">
+                      <a:solidFill>
+                        <a:srgbClr val="FAF8F4"/>
+                      </a:solidFill>
+                    </a:lnT>
+                    <a:lnR w="0" cap="flat" cmpd="sng" algn="ctr">
+                      <a:solidFill>
+                        <a:srgbClr val="FAF8F4"/>
+                      </a:solidFill>
+                    </a:lnR>
+                    <a:lnL w="0" cap="flat" cmpd="sng" algn="ctr">
+                      <a:solidFill>
+                        <a:srgbClr val="FAF8F4"/>
+                      </a:solidFill>
+                    </a:lnL>
+                    <a:noFill/>
+                  </a:tcPr>
+                </a:tc>
+              </a:tr>
+              <a:tr h="329981">
+                <a:tc>
+                  <a:txBody>
+                    <a:bodyPr wrap="square"/>
+                    <a:lstStyle/>
+                    <a:p>
+                      <a:pPr>
+                        <a:lnSpc>
+                          <a:spcPct val="134000"/>
+                        </a:lnSpc>
+                      </a:pPr>
+                      <a:r>
+                        <a:rPr sz="1100" b="1">
+                          <a:solidFill>
+                            <a:srgbClr val="111111"/>
+                          </a:solidFill>
+                          <a:latin typeface="Poppins"/>
+                        </a:rPr>
+                        <a:t>04</a:t>
+                      </a:r>
+                    </a:p>
+                  </a:txBody>
+                  <a:tcPr marL="0" marR="128016" marT="36576" marB="54864" anchor="t">
+                    <a:lnB w="9525" cap="flat" cmpd="sng" algn="ctr">
+                      <a:solidFill>
+                        <a:srgbClr val="D4D2D0"/>
+                      </a:solidFill>
+                    </a:lnB>
+                    <a:lnT w="0" cap="flat" cmpd="sng" algn="ctr">
+                      <a:solidFill>
+                        <a:srgbClr val="FAF8F4"/>
+                      </a:solidFill>
+                    </a:lnT>
+                    <a:lnR w="0" cap="flat" cmpd="sng" algn="ctr">
+                      <a:solidFill>
+                        <a:srgbClr val="FAF8F4"/>
+                      </a:solidFill>
+                    </a:lnR>
+                    <a:lnL w="0" cap="flat" cmpd="sng" algn="ctr">
+                      <a:solidFill>
+                        <a:srgbClr val="FAF8F4"/>
+                      </a:solidFill>
+                    </a:lnL>
+                    <a:noFill/>
+                  </a:tcPr>
+                </a:tc>
+                <a:tc>
+                  <a:txBody>
+                    <a:bodyPr wrap="square"/>
+                    <a:lstStyle/>
+                    <a:p>
+                      <a:pPr>
+                        <a:lnSpc>
+                          <a:spcPct val="134000"/>
+                        </a:lnSpc>
+                      </a:pPr>
+                      <a:r>
+                        <a:rPr sz="1100" b="0">
+                          <a:solidFill>
+                            <a:srgbClr val="111111"/>
+                          </a:solidFill>
+                          <a:latin typeface="Poppins"/>
+                        </a:rPr>
+                        <a:t>KPIs and the meeting rhythm. Four numbers, one definition of active refiller</a:t>
+                      </a:r>
+                    </a:p>
+                  </a:txBody>
+                  <a:tcPr marL="0" marR="128016" marT="36576" marB="54864" anchor="t">
+                    <a:lnB w="9525" cap="flat" cmpd="sng" algn="ctr">
+                      <a:solidFill>
+                        <a:srgbClr val="D4D2D0"/>
+                      </a:solidFill>
+                    </a:lnB>
+                    <a:lnT w="0" cap="flat" cmpd="sng" algn="ctr">
+                      <a:solidFill>
+                        <a:srgbClr val="FAF8F4"/>
+                      </a:solidFill>
+                    </a:lnT>
+                    <a:lnR w="0" cap="flat" cmpd="sng" algn="ctr">
+                      <a:solidFill>
+                        <a:srgbClr val="FAF8F4"/>
+                      </a:solidFill>
+                    </a:lnR>
+                    <a:lnL w="0" cap="flat" cmpd="sng" algn="ctr">
+                      <a:solidFill>
+                        <a:srgbClr val="FAF8F4"/>
+                      </a:solidFill>
+                    </a:lnL>
+                    <a:noFill/>
+                  </a:tcPr>
+                </a:tc>
+              </a:tr>
+              <a:tr h="329981">
+                <a:tc>
+                  <a:txBody>
+                    <a:bodyPr wrap="square"/>
+                    <a:lstStyle/>
+                    <a:p>
+                      <a:pPr>
+                        <a:lnSpc>
+                          <a:spcPct val="134000"/>
+                        </a:lnSpc>
+                      </a:pPr>
+                      <a:r>
+                        <a:rPr sz="1100" b="1">
+                          <a:solidFill>
+                            <a:srgbClr val="111111"/>
+                          </a:solidFill>
+                          <a:latin typeface="Poppins"/>
+                        </a:rPr>
+                        <a:t>05</a:t>
+                      </a:r>
+                    </a:p>
+                  </a:txBody>
+                  <a:tcPr marL="0" marR="128016" marT="36576" marB="54864" anchor="t">
+                    <a:lnB w="9525" cap="flat" cmpd="sng" algn="ctr">
+                      <a:solidFill>
+                        <a:srgbClr val="D4D2D0"/>
+                      </a:solidFill>
+                    </a:lnB>
+                    <a:lnT w="0" cap="flat" cmpd="sng" algn="ctr">
+                      <a:solidFill>
+                        <a:srgbClr val="FAF8F4"/>
+                      </a:solidFill>
+                    </a:lnT>
+                    <a:lnR w="0" cap="flat" cmpd="sng" algn="ctr">
+                      <a:solidFill>
+                        <a:srgbClr val="FAF8F4"/>
+                      </a:solidFill>
+                    </a:lnR>
+                    <a:lnL w="0" cap="flat" cmpd="sng" algn="ctr">
+                      <a:solidFill>
+                        <a:srgbClr val="FAF8F4"/>
+                      </a:solidFill>
+                    </a:lnL>
+                    <a:noFill/>
+                  </a:tcPr>
+                </a:tc>
+                <a:tc>
+                  <a:txBody>
+                    <a:bodyPr wrap="square"/>
+                    <a:lstStyle/>
+                    <a:p>
+                      <a:pPr>
+                        <a:lnSpc>
+                          <a:spcPct val="134000"/>
+                        </a:lnSpc>
+                      </a:pPr>
+                      <a:r>
+                        <a:rPr sz="1100" b="0">
+                          <a:solidFill>
+                            <a:srgbClr val="111111"/>
+                          </a:solidFill>
+                          <a:latin typeface="Poppins"/>
+                        </a:rPr>
+                        <a:t>The Jewell split. What we own, what Harry and Justin keep</a:t>
+                      </a:r>
+                    </a:p>
+                  </a:txBody>
+                  <a:tcPr marL="0" marR="128016" marT="36576" marB="54864" anchor="t">
+                    <a:lnB w="9525" cap="flat" cmpd="sng" algn="ctr">
+                      <a:solidFill>
+                        <a:srgbClr val="D4D2D0"/>
+                      </a:solidFill>
+                    </a:lnB>
+                    <a:lnT w="0" cap="flat" cmpd="sng" algn="ctr">
+                      <a:solidFill>
+                        <a:srgbClr val="FAF8F4"/>
+                      </a:solidFill>
+                    </a:lnT>
+                    <a:lnR w="0" cap="flat" cmpd="sng" algn="ctr">
+                      <a:solidFill>
+                        <a:srgbClr val="FAF8F4"/>
+                      </a:solidFill>
+                    </a:lnR>
+                    <a:lnL w="0" cap="flat" cmpd="sng" algn="ctr">
+                      <a:solidFill>
+                        <a:srgbClr val="FAF8F4"/>
+                      </a:solidFill>
+                    </a:lnL>
+                    <a:noFill/>
+                  </a:tcPr>
+                </a:tc>
+              </a:tr>
+              <a:tr h="329981">
+                <a:tc>
+                  <a:txBody>
+                    <a:bodyPr wrap="square"/>
+                    <a:lstStyle/>
+                    <a:p>
+                      <a:pPr>
+                        <a:lnSpc>
+                          <a:spcPct val="134000"/>
+                        </a:lnSpc>
+                      </a:pPr>
+                      <a:r>
+                        <a:rPr sz="1100" b="1">
+                          <a:solidFill>
+                            <a:srgbClr val="111111"/>
+                          </a:solidFill>
+                          <a:latin typeface="Poppins"/>
+                        </a:rPr>
+                        <a:t>06</a:t>
+                      </a:r>
+                    </a:p>
+                  </a:txBody>
+                  <a:tcPr marL="0" marR="128016" marT="36576" marB="54864" anchor="t">
+                    <a:lnB w="9525" cap="flat" cmpd="sng" algn="ctr">
+                      <a:solidFill>
+                        <a:srgbClr val="D4D2D0"/>
+                      </a:solidFill>
+                    </a:lnB>
+                    <a:lnT w="0" cap="flat" cmpd="sng" algn="ctr">
+                      <a:solidFill>
+                        <a:srgbClr val="FAF8F4"/>
+                      </a:solidFill>
+                    </a:lnT>
+                    <a:lnR w="0" cap="flat" cmpd="sng" algn="ctr">
+                      <a:solidFill>
+                        <a:srgbClr val="FAF8F4"/>
+                      </a:solidFill>
+                    </a:lnR>
+                    <a:lnL w="0" cap="flat" cmpd="sng" algn="ctr">
+                      <a:solidFill>
+                        <a:srgbClr val="FAF8F4"/>
+                      </a:solidFill>
+                    </a:lnL>
+                    <a:noFill/>
+                  </a:tcPr>
+                </a:tc>
+                <a:tc>
+                  <a:txBody>
+                    <a:bodyPr wrap="square"/>
+                    <a:lstStyle/>
+                    <a:p>
+                      <a:pPr>
+                        <a:lnSpc>
+                          <a:spcPct val="134000"/>
+                        </a:lnSpc>
+                      </a:pPr>
+                      <a:r>
+                        <a:rPr sz="1100" b="0">
+                          <a:solidFill>
+                            <a:srgbClr val="111111"/>
+                          </a:solidFill>
+                          <a:latin typeface="Poppins"/>
+                        </a:rPr>
+                        <a:t>Ambassadors named, Oktoberfest run, giveaway entries in the CRM</a:t>
+                      </a:r>
+                    </a:p>
+                  </a:txBody>
+                  <a:tcPr marL="0" marR="128016" marT="36576" marB="54864" anchor="t">
+                    <a:lnB w="9525" cap="flat" cmpd="sng" algn="ctr">
+                      <a:solidFill>
+                        <a:srgbClr val="D4D2D0"/>
+                      </a:solidFill>
+                    </a:lnB>
+                    <a:lnT w="0" cap="flat" cmpd="sng" algn="ctr">
+                      <a:solidFill>
+                        <a:srgbClr val="FAF8F4"/>
+                      </a:solidFill>
+                    </a:lnT>
+                    <a:lnR w="0" cap="flat" cmpd="sng" algn="ctr">
+                      <a:solidFill>
+                        <a:srgbClr val="FAF8F4"/>
+                      </a:solidFill>
+                    </a:lnR>
+                    <a:lnL w="0" cap="flat" cmpd="sng" algn="ctr">
+                      <a:solidFill>
+                        <a:srgbClr val="FAF8F4"/>
+                      </a:solidFill>
+                    </a:lnL>
+                    <a:noFill/>
+                  </a:tcPr>
+                </a:tc>
+              </a:tr>
+              <a:tr h="329981">
+                <a:tc>
+                  <a:txBody>
+                    <a:bodyPr wrap="square"/>
+                    <a:lstStyle/>
+                    <a:p>
+                      <a:pPr>
+                        <a:lnSpc>
+                          <a:spcPct val="134000"/>
+                        </a:lnSpc>
+                      </a:pPr>
+                      <a:r>
+                        <a:rPr sz="1100" b="1">
+                          <a:solidFill>
+                            <a:srgbClr val="111111"/>
+                          </a:solidFill>
+                          <a:latin typeface="Poppins"/>
+                        </a:rPr>
+                        <a:t>07</a:t>
+                      </a:r>
+                    </a:p>
+                  </a:txBody>
+                  <a:tcPr marL="0" marR="128016" marT="36576" marB="54864" anchor="t">
+                    <a:lnB w="9525" cap="flat" cmpd="sng" algn="ctr">
+                      <a:solidFill>
+                        <a:srgbClr val="D4D2D0"/>
+                      </a:solidFill>
+                    </a:lnB>
+                    <a:lnT w="0" cap="flat" cmpd="sng" algn="ctr">
+                      <a:solidFill>
+                        <a:srgbClr val="FAF8F4"/>
+                      </a:solidFill>
+                    </a:lnT>
+                    <a:lnR w="0" cap="flat" cmpd="sng" algn="ctr">
+                      <a:solidFill>
+                        <a:srgbClr val="FAF8F4"/>
+                      </a:solidFill>
+                    </a:lnR>
+                    <a:lnL w="0" cap="flat" cmpd="sng" algn="ctr">
+                      <a:solidFill>
+                        <a:srgbClr val="FAF8F4"/>
+                      </a:solidFill>
+                    </a:lnL>
+                    <a:noFill/>
+                  </a:tcPr>
+                </a:tc>
+                <a:tc>
+                  <a:txBody>
+                    <a:bodyPr wrap="square"/>
+                    <a:lstStyle/>
+                    <a:p>
+                      <a:pPr>
+                        <a:lnSpc>
+                          <a:spcPct val="134000"/>
+                        </a:lnSpc>
+                      </a:pPr>
+                      <a:r>
+                        <a:rPr sz="1100" b="0">
+                          <a:solidFill>
+                            <a:srgbClr val="111111"/>
+                          </a:solidFill>
+                          <a:latin typeface="Poppins"/>
+                        </a:rPr>
+                        <a:t>Settle $2.55 as the per-schooner figure on the live ad</a:t>
+                      </a:r>
+                    </a:p>
+                  </a:txBody>
+                  <a:tcPr marL="0" marR="128016" marT="36576" marB="54864" anchor="t">
+                    <a:lnB w="9525" cap="flat" cmpd="sng" algn="ctr">
+                      <a:solidFill>
+                        <a:srgbClr val="D4D2D0"/>
+                      </a:solidFill>
+                    </a:lnB>
+                    <a:lnT w="0" cap="flat" cmpd="sng" algn="ctr">
+                      <a:solidFill>
+                        <a:srgbClr val="FAF8F4"/>
+                      </a:solidFill>
+                    </a:lnT>
+                    <a:lnR w="0" cap="flat" cmpd="sng" algn="ctr">
+                      <a:solidFill>
+                        <a:srgbClr val="FAF8F4"/>
+                      </a:solidFill>
+                    </a:lnR>
+                    <a:lnL w="0" cap="flat" cmpd="sng" algn="ctr">
+                      <a:solidFill>
+                        <a:srgbClr val="FAF8F4"/>
+                      </a:solidFill>
+                    </a:lnL>
+                    <a:noFill/>
+                  </a:tcPr>
+                </a:tc>
+              </a:tr>
+              <a:tr h="329981">
+                <a:tc>
+                  <a:txBody>
+                    <a:bodyPr wrap="square"/>
+                    <a:lstStyle/>
+                    <a:p>
+                      <a:pPr>
+                        <a:lnSpc>
+                          <a:spcPct val="134000"/>
+                        </a:lnSpc>
+                      </a:pPr>
+                      <a:r>
+                        <a:rPr sz="1100" b="1">
+                          <a:solidFill>
+                            <a:srgbClr val="111111"/>
+                          </a:solidFill>
+                          <a:latin typeface="Poppins"/>
+                        </a:rPr>
+                        <a:t>08</a:t>
+                      </a:r>
+                    </a:p>
+                  </a:txBody>
+                  <a:tcPr marL="0" marR="128016" marT="36576" marB="54864" anchor="t">
+                    <a:lnB w="9525" cap="flat" cmpd="sng" algn="ctr">
+                      <a:solidFill>
+                        <a:srgbClr val="D4D2D0"/>
+                      </a:solidFill>
+                    </a:lnB>
+                    <a:lnT w="0" cap="flat" cmpd="sng" algn="ctr">
+                      <a:solidFill>
+                        <a:srgbClr val="FAF8F4"/>
+                      </a:solidFill>
+                    </a:lnT>
+                    <a:lnR w="0" cap="flat" cmpd="sng" algn="ctr">
+                      <a:solidFill>
+                        <a:srgbClr val="FAF8F4"/>
+                      </a:solidFill>
+                    </a:lnR>
+                    <a:lnL w="0" cap="flat" cmpd="sng" algn="ctr">
+                      <a:solidFill>
+                        <a:srgbClr val="FAF8F4"/>
+                      </a:solidFill>
+                    </a:lnL>
+                    <a:noFill/>
+                  </a:tcPr>
+                </a:tc>
+                <a:tc>
+                  <a:txBody>
+                    <a:bodyPr wrap="square"/>
+                    <a:lstStyle/>
+                    <a:p>
+                      <a:pPr>
+                        <a:lnSpc>
+                          <a:spcPct val="134000"/>
+                        </a:lnSpc>
+                      </a:pPr>
+                      <a:r>
+                        <a:rPr sz="1100" b="0">
+                          <a:solidFill>
+                            <a:srgbClr val="111111"/>
+                          </a:solidFill>
+                          <a:latin typeface="Poppins"/>
+                        </a:rPr>
+                        <a:t>The 250 date. March 2027 or Christmas 2026</a:t>
+                      </a:r>
+                    </a:p>
+                  </a:txBody>
+                  <a:tcPr marL="0" marR="128016" marT="36576" marB="54864" anchor="t">
+                    <a:lnB w="9525" cap="flat" cmpd="sng" algn="ctr">
+                      <a:solidFill>
+                        <a:srgbClr val="D4D2D0"/>
+                      </a:solidFill>
+                    </a:lnB>
+                    <a:lnT w="0" cap="flat" cmpd="sng" algn="ctr">
+                      <a:solidFill>
+                        <a:srgbClr val="FAF8F4"/>
+                      </a:solidFill>
+                    </a:lnT>
+                    <a:lnR w="0" cap="flat" cmpd="sng" algn="ctr">
+                      <a:solidFill>
+                        <a:srgbClr val="FAF8F4"/>
+                      </a:solidFill>
+                    </a:lnR>
+                    <a:lnL w="0" cap="flat" cmpd="sng" algn="ctr">
+                      <a:solidFill>
+                        <a:srgbClr val="FAF8F4"/>
+                      </a:solidFill>
+                    </a:lnL>
+                    <a:noFill/>
+                  </a:tcPr>
+                </a:tc>
+              </a:tr>
+            </a:tbl>
+          </a:graphicData>
+        </a:graphic>
+      </p:graphicFrame>
+      <p:sp>
+        <p:nvSpPr>
+          <p:cNvPr id="5" name="TextBox 4"/>
+          <p:cNvSpPr txBox="1"/>
+          <p:nvPr/>
+        </p:nvSpPr>
+        <p:spPr>
+          <a:xfrm>
+            <a:off x="914400" y="6291072"/>
+            <a:ext cx="10362895" cy="274320"/>
+          </a:xfrm>
+          <a:prstGeom prst="rect">
+            <a:avLst/>
+          </a:prstGeom>
+          <a:noFill/>
+        </p:spPr>
+        <p:txBody>
+          <a:bodyPr wrap="square" lIns="0" rIns="0" tIns="0" bIns="0" anchor="t">
+            <a:spAutoFit/>
+          </a:bodyPr>
+          <a:lstStyle/>
+          <a:p>
+            <a:pPr algn="l">
+              <a:lnSpc>
+                <a:spcPct val="100000"/>
+              </a:lnSpc>
+            </a:pPr>
+            <a:r>
+              <a:rPr sz="900" b="0">
+                <a:solidFill>
+                  <a:srgbClr val="666666"/>
+                </a:solidFill>
+                <a:latin typeface="Poppins"/>
+              </a:rPr>
+              <a:t>We work it with you rather than around you.</a:t>
+            </a:r>
+          </a:p>
+        </p:txBody>
+      </p:sp>
+    </p:spTree>
+  </p:cSld>
+  <p:clrMapOvr>
+    <a:masterClrMapping/>
+  </p:clrMapOvr>
+</p:sld>
+</file>
+
+<file path=ppt/slides/slide22.xml><?xml version="1.0" encoding="utf-8"?>
+<p:sld xmlns:a="http://schemas.openxmlformats.org/drawingml/2006/main" xmlns:p="http://schemas.openxmlformats.org/presentationml/2006/main" xmlns:r="http://schemas.openxmlformats.org/officeDocument/2006/relationships">
+  <p:cSld>
+    <p:bg>
+      <p:bgPr>
+        <a:solidFill>
+          <a:srgbClr val="FAF8F4"/>
+        </a:solidFill>
+        <a:effectLst/>
+      </p:bgPr>
+    </p:bg>
+    <p:spTree>
+      <p:nvGrpSpPr>
+        <p:cNvPr id="1" name=""/>
+        <p:cNvGrpSpPr/>
+        <p:nvPr/>
+      </p:nvGrpSpPr>
+      <p:grpSpPr/>
+      <p:sp>
+        <p:nvSpPr>
+          <p:cNvPr id="2" name="TextBox 1"/>
+          <p:cNvSpPr txBox="1"/>
+          <p:nvPr/>
+        </p:nvSpPr>
+        <p:spPr>
+          <a:xfrm>
+            <a:off x="914400" y="914400"/>
+            <a:ext cx="10362895" cy="274320"/>
+          </a:xfrm>
+          <a:prstGeom prst="rect">
+            <a:avLst/>
+          </a:prstGeom>
+          <a:noFill/>
+        </p:spPr>
+        <p:txBody>
+          <a:bodyPr wrap="square" lIns="0" rIns="0" tIns="0" bIns="0" anchor="t">
+            <a:spAutoFit/>
+          </a:bodyPr>
+          <a:lstStyle/>
+          <a:p>
+            <a:pPr algn="l">
+              <a:lnSpc>
+                <a:spcPct val="100000"/>
+              </a:lnSpc>
+            </a:pPr>
+            <a:r>
+              <a:rPr sz="900" b="0" spc="200">
+                <a:solidFill>
+                  <a:srgbClr val="111111"/>
+                </a:solidFill>
+                <a:latin typeface="Poppins"/>
+              </a:rPr>
+              <a:t>TIMELINE</a:t>
+            </a:r>
+          </a:p>
+        </p:txBody>
+      </p:sp>
+      <p:sp>
+        <p:nvSpPr>
+          <p:cNvPr id="3" name="TextBox 2"/>
+          <p:cNvSpPr txBox="1"/>
+          <p:nvPr/>
+        </p:nvSpPr>
+        <p:spPr>
+          <a:xfrm>
+            <a:off x="914400" y="1371600"/>
+            <a:ext cx="10362895" cy="640080"/>
+          </a:xfrm>
+          <a:prstGeom prst="rect">
+            <a:avLst/>
+          </a:prstGeom>
+          <a:noFill/>
+        </p:spPr>
+        <p:txBody>
+          <a:bodyPr wrap="square" lIns="0" rIns="0" tIns="0" bIns="0" anchor="t">
+            <a:spAutoFit/>
+          </a:bodyPr>
+          <a:lstStyle/>
+          <a:p>
+            <a:pPr algn="l">
+              <a:lnSpc>
+                <a:spcPct val="112000"/>
+              </a:lnSpc>
+            </a:pPr>
+            <a:r>
+              <a:rPr sz="2800" b="0">
+                <a:solidFill>
+                  <a:srgbClr val="111111"/>
+                </a:solidFill>
+                <a:latin typeface="Poppins"/>
+              </a:rPr>
+              <a:t>On your ladder, not ours.</a:t>
+            </a:r>
+          </a:p>
+        </p:txBody>
+      </p:sp>
+      <p:graphicFrame>
+        <p:nvGraphicFramePr>
+          <p:cNvPr id="4" name="Table 3"/>
+          <p:cNvGraphicFramePr>
+            <a:graphicFrameLocks noGrp="1"/>
+          </p:cNvGraphicFramePr>
+          <p:nvPr/>
+        </p:nvGraphicFramePr>
+        <p:xfrm>
+          <a:off x="914400" y="2194560"/>
+          <a:ext cx="10362895" cy="2507772"/>
+        </p:xfrm>
+        <a:graphic>
+          <a:graphicData uri="http://schemas.openxmlformats.org/drawingml/2006/table">
+            <a:tbl>
+              <a:tblPr firstRow="0" bandRow="0">
+                <a:tableStyleId>{2D5ABB26-0587-4C30-8999-92F81FD0307C}</a:tableStyleId>
+              </a:tblPr>
+              <a:tblGrid>
+                <a:gridCol w="1761692"/>
+                <a:gridCol w="8601203"/>
+              </a:tblGrid>
+              <a:tr h="274320">
+                <a:tc>
+                  <a:txBody>
+                    <a:bodyPr wrap="square"/>
+                    <a:lstStyle/>
+                    <a:p>
+                      <a:pPr>
+                        <a:lnSpc>
+                          <a:spcPct val="134000"/>
+                        </a:lnSpc>
+                      </a:pPr>
+                      <a:r>
+                        <a:rPr sz="900" b="0" spc="200">
+                          <a:solidFill>
+                            <a:srgbClr val="666666"/>
+                          </a:solidFill>
+                          <a:latin typeface="Poppins"/>
+                        </a:rPr>
+                        <a:t>HORIZON</a:t>
+                      </a:r>
+                    </a:p>
+                  </a:txBody>
+                  <a:tcPr marL="0" marR="128016" marT="36576" marB="54864" anchor="t">
+                    <a:lnB w="9525" cap="flat" cmpd="sng" algn="ctr">
+                      <a:solidFill>
+                        <a:srgbClr val="D4D2D0"/>
+                      </a:solidFill>
+                    </a:lnB>
+                    <a:lnT w="0" cap="flat" cmpd="sng" algn="ctr">
+                      <a:solidFill>
+                        <a:srgbClr val="FAF8F4"/>
+                      </a:solidFill>
+                    </a:lnT>
+                    <a:lnR w="0" cap="flat" cmpd="sng" algn="ctr">
+                      <a:solidFill>
+                        <a:srgbClr val="FAF8F4"/>
+                      </a:solidFill>
+                    </a:lnR>
+                    <a:lnL w="0" cap="flat" cmpd="sng" algn="ctr">
+                      <a:solidFill>
+                        <a:srgbClr val="FAF8F4"/>
+                      </a:solidFill>
+                    </a:lnL>
+                    <a:noFill/>
+                  </a:tcPr>
+                </a:tc>
+                <a:tc>
+                  <a:txBody>
+                    <a:bodyPr wrap="square"/>
+                    <a:lstStyle/>
+                    <a:p>
+                      <a:pPr>
+                        <a:lnSpc>
+                          <a:spcPct val="134000"/>
+                        </a:lnSpc>
+                      </a:pPr>
+                      <a:r>
+                        <a:rPr sz="900" b="0" spc="200">
+                          <a:solidFill>
+                            <a:srgbClr val="666666"/>
+                          </a:solidFill>
+                          <a:latin typeface="Poppins"/>
+                        </a:rPr>
+                        <a:t>WHAT IS TRUE AT THE END OF IT</a:t>
+                      </a:r>
+                    </a:p>
+                  </a:txBody>
+                  <a:tcPr marL="0" marR="128016" marT="36576" marB="54864" anchor="t">
+                    <a:lnB w="9525" cap="flat" cmpd="sng" algn="ctr">
+                      <a:solidFill>
+                        <a:srgbClr val="D4D2D0"/>
+                      </a:solidFill>
+                    </a:lnB>
+                    <a:lnT w="0" cap="flat" cmpd="sng" algn="ctr">
+                      <a:solidFill>
+                        <a:srgbClr val="FAF8F4"/>
+                      </a:solidFill>
+                    </a:lnT>
+                    <a:lnR w="0" cap="flat" cmpd="sng" algn="ctr">
+                      <a:solidFill>
+                        <a:srgbClr val="FAF8F4"/>
+                      </a:solidFill>
+                    </a:lnR>
+                    <a:lnL w="0" cap="flat" cmpd="sng" algn="ctr">
+                      <a:solidFill>
+                        <a:srgbClr val="FAF8F4"/>
+                      </a:solidFill>
+                    </a:lnL>
+                    <a:noFill/>
+                  </a:tcPr>
+                </a:tc>
+              </a:tr>
+              <a:tr h="558363">
+                <a:tc>
+                  <a:txBody>
+                    <a:bodyPr wrap="square"/>
+                    <a:lstStyle/>
+                    <a:p>
+                      <a:pPr>
+                        <a:lnSpc>
+                          <a:spcPct val="134000"/>
+                        </a:lnSpc>
+                      </a:pPr>
+                      <a:r>
+                        <a:rPr sz="1100" b="1">
+                          <a:solidFill>
+                            <a:srgbClr val="111111"/>
+                          </a:solidFill>
+                          <a:latin typeface="Poppins"/>
+                        </a:rPr>
+                        <a:t>30 days
+Mid-October</a:t>
+                      </a:r>
+                    </a:p>
+                  </a:txBody>
+                  <a:tcPr marL="0" marR="128016" marT="36576" marB="54864" anchor="t">
+                    <a:lnB w="9525" cap="flat" cmpd="sng" algn="ctr">
+                      <a:solidFill>
+                        <a:srgbClr val="D4D2D0"/>
+                      </a:solidFill>
+                    </a:lnB>
+                    <a:lnT w="0" cap="flat" cmpd="sng" algn="ctr">
+                      <a:solidFill>
+                        <a:srgbClr val="FAF8F4"/>
+                      </a:solidFill>
+                    </a:lnT>
+                    <a:lnR w="0" cap="flat" cmpd="sng" algn="ctr">
+                      <a:solidFill>
+                        <a:srgbClr val="FAF8F4"/>
+                      </a:solidFill>
+                    </a:lnR>
+                    <a:lnL w="0" cap="flat" cmpd="sng" algn="ctr">
+                      <a:solidFill>
+                        <a:srgbClr val="FAF8F4"/>
+                      </a:solidFill>
+                    </a:lnL>
+                    <a:noFill/>
+                  </a:tcPr>
+                </a:tc>
+                <a:tc>
+                  <a:txBody>
+                    <a:bodyPr wrap="square"/>
+                    <a:lstStyle/>
+                    <a:p>
+                      <a:pPr>
+                        <a:lnSpc>
+                          <a:spcPct val="134000"/>
+                        </a:lnSpc>
+                      </a:pPr>
+                      <a:r>
+                        <a:rPr sz="1100" b="0">
+                          <a:solidFill>
+                            <a:srgbClr val="111111"/>
+                          </a:solidFill>
+                          <a:latin typeface="Poppins"/>
+                        </a:rPr>
+                        <a:t>Showroom or event space decided, and the Jewell split agreed. Messaging and journey signed on the home entertainment position. KPIs and the weekly rhythm set. Oktoberfest run. The 250 date chosen</a:t>
+                      </a:r>
+                    </a:p>
+                  </a:txBody>
+                  <a:tcPr marL="0" marR="128016" marT="36576" marB="54864" anchor="t">
+                    <a:lnB w="9525" cap="flat" cmpd="sng" algn="ctr">
+                      <a:solidFill>
+                        <a:srgbClr val="D4D2D0"/>
+                      </a:solidFill>
+                    </a:lnB>
+                    <a:lnT w="0" cap="flat" cmpd="sng" algn="ctr">
+                      <a:solidFill>
+                        <a:srgbClr val="FAF8F4"/>
+                      </a:solidFill>
+                    </a:lnT>
+                    <a:lnR w="0" cap="flat" cmpd="sng" algn="ctr">
+                      <a:solidFill>
+                        <a:srgbClr val="FAF8F4"/>
+                      </a:solidFill>
+                    </a:lnR>
+                    <a:lnL w="0" cap="flat" cmpd="sng" algn="ctr">
+                      <a:solidFill>
+                        <a:srgbClr val="FAF8F4"/>
+                      </a:solidFill>
+                    </a:lnL>
+                    <a:noFill/>
+                  </a:tcPr>
+                </a:tc>
+              </a:tr>
+              <a:tr h="558363">
+                <a:tc>
+                  <a:txBody>
+                    <a:bodyPr wrap="square"/>
+                    <a:lstStyle/>
+                    <a:p>
+                      <a:pPr>
+                        <a:lnSpc>
+                          <a:spcPct val="134000"/>
+                        </a:lnSpc>
+                      </a:pPr>
+                      <a:r>
+                        <a:rPr sz="1100" b="1">
+                          <a:solidFill>
+                            <a:srgbClr val="111111"/>
+                          </a:solidFill>
+                          <a:latin typeface="Poppins"/>
+                        </a:rPr>
+                        <a:t>3 months
+Mid-December</a:t>
+                      </a:r>
+                    </a:p>
+                  </a:txBody>
+                  <a:tcPr marL="0" marR="128016" marT="36576" marB="54864" anchor="t">
+                    <a:lnB w="9525" cap="flat" cmpd="sng" algn="ctr">
+                      <a:solidFill>
+                        <a:srgbClr val="D4D2D0"/>
+                      </a:solidFill>
+                    </a:lnB>
+                    <a:lnT w="0" cap="flat" cmpd="sng" algn="ctr">
+                      <a:solidFill>
+                        <a:srgbClr val="FAF8F4"/>
+                      </a:solidFill>
+                    </a:lnT>
+                    <a:lnR w="0" cap="flat" cmpd="sng" algn="ctr">
+                      <a:solidFill>
+                        <a:srgbClr val="FAF8F4"/>
+                      </a:solidFill>
+                    </a:lnR>
+                    <a:lnL w="0" cap="flat" cmpd="sng" algn="ctr">
+                      <a:solidFill>
+                        <a:srgbClr val="FAF8F4"/>
+                      </a:solidFill>
+                    </a:lnL>
+                    <a:noFill/>
+                  </a:tcPr>
+                </a:tc>
+                <a:tc>
+                  <a:txBody>
+                    <a:bodyPr wrap="square"/>
+                    <a:lstStyle/>
+                    <a:p>
+                      <a:pPr>
+                        <a:lnSpc>
+                          <a:spcPct val="134000"/>
+                        </a:lnSpc>
+                      </a:pPr>
+                      <a:r>
+                        <a:rPr sz="1100" b="0">
+                          <a:solidFill>
+                            <a:srgbClr val="111111"/>
+                          </a:solidFill>
+                          <a:latin typeface="Poppins"/>
+                        </a:rPr>
+                        <a:t>Website and SEM live. GoTab and Fishbowl connected, CRM triggers replacing the 90-day SMS. Lease-to-buy and delivery launched. Referral programme live, with trades carrying cards. Wholesale pipeline in the CRM. Next hire decided</a:t>
+                      </a:r>
+                    </a:p>
+                  </a:txBody>
+                  <a:tcPr marL="0" marR="128016" marT="36576" marB="54864" anchor="t">
+                    <a:lnB w="9525" cap="flat" cmpd="sng" algn="ctr">
+                      <a:solidFill>
+                        <a:srgbClr val="D4D2D0"/>
+                      </a:solidFill>
+                    </a:lnB>
+                    <a:lnT w="0" cap="flat" cmpd="sng" algn="ctr">
+                      <a:solidFill>
+                        <a:srgbClr val="FAF8F4"/>
+                      </a:solidFill>
+                    </a:lnT>
+                    <a:lnR w="0" cap="flat" cmpd="sng" algn="ctr">
+                      <a:solidFill>
+                        <a:srgbClr val="FAF8F4"/>
+                      </a:solidFill>
+                    </a:lnR>
+                    <a:lnL w="0" cap="flat" cmpd="sng" algn="ctr">
+                      <a:solidFill>
+                        <a:srgbClr val="FAF8F4"/>
+                      </a:solidFill>
+                    </a:lnL>
+                    <a:noFill/>
+                  </a:tcPr>
+                </a:tc>
+              </a:tr>
+              <a:tr h="558363">
+                <a:tc>
+                  <a:txBody>
+                    <a:bodyPr wrap="square"/>
+                    <a:lstStyle/>
+                    <a:p>
+                      <a:pPr>
+                        <a:lnSpc>
+                          <a:spcPct val="134000"/>
+                        </a:lnSpc>
+                      </a:pPr>
+                      <a:r>
+                        <a:rPr sz="1100" b="1">
+                          <a:solidFill>
+                            <a:srgbClr val="111111"/>
+                          </a:solidFill>
+                          <a:latin typeface="Poppins"/>
+                        </a:rPr>
+                        <a:t>6 months
+March 2027</a:t>
+                      </a:r>
+                    </a:p>
+                  </a:txBody>
+                  <a:tcPr marL="0" marR="128016" marT="36576" marB="54864" anchor="t">
+                    <a:lnB w="9525" cap="flat" cmpd="sng" algn="ctr">
+                      <a:solidFill>
+                        <a:srgbClr val="D4D2D0"/>
+                      </a:solidFill>
+                    </a:lnB>
+                    <a:lnT w="0" cap="flat" cmpd="sng" algn="ctr">
+                      <a:solidFill>
+                        <a:srgbClr val="FAF8F4"/>
+                      </a:solidFill>
+                    </a:lnT>
+                    <a:lnR w="0" cap="flat" cmpd="sng" algn="ctr">
+                      <a:solidFill>
+                        <a:srgbClr val="FAF8F4"/>
+                      </a:solidFill>
+                    </a:lnR>
+                    <a:lnL w="0" cap="flat" cmpd="sng" algn="ctr">
+                      <a:solidFill>
+                        <a:srgbClr val="FAF8F4"/>
+                      </a:solidFill>
+                    </a:lnL>
+                    <a:noFill/>
+                  </a:tcPr>
+                </a:tc>
+                <a:tc>
+                  <a:txBody>
+                    <a:bodyPr wrap="square"/>
+                    <a:lstStyle/>
+                    <a:p>
+                      <a:pPr>
+                        <a:lnSpc>
+                          <a:spcPct val="134000"/>
+                        </a:lnSpc>
+                      </a:pPr>
+                      <a:r>
+                        <a:rPr sz="1100" b="0">
+                          <a:solidFill>
+                            <a:srgbClr val="111111"/>
+                          </a:solidFill>
+                          <a:latin typeface="Poppins"/>
+                        </a:rPr>
+                        <a:t>250 active keg refillers, or December if you take the Christmas date. Weddings and functions selling. Membership redesigned. Designing-for-her and hardware-as-object briefs in market</a:t>
+                      </a:r>
+                    </a:p>
+                  </a:txBody>
+                  <a:tcPr marL="0" marR="128016" marT="36576" marB="54864" anchor="t">
+                    <a:lnB w="9525" cap="flat" cmpd="sng" algn="ctr">
+                      <a:solidFill>
+                        <a:srgbClr val="D4D2D0"/>
+                      </a:solidFill>
+                    </a:lnB>
+                    <a:lnT w="0" cap="flat" cmpd="sng" algn="ctr">
+                      <a:solidFill>
+                        <a:srgbClr val="FAF8F4"/>
+                      </a:solidFill>
+                    </a:lnT>
+                    <a:lnR w="0" cap="flat" cmpd="sng" algn="ctr">
+                      <a:solidFill>
+                        <a:srgbClr val="FAF8F4"/>
+                      </a:solidFill>
+                    </a:lnR>
+                    <a:lnL w="0" cap="flat" cmpd="sng" algn="ctr">
+                      <a:solidFill>
+                        <a:srgbClr val="FAF8F4"/>
+                      </a:solidFill>
+                    </a:lnL>
+                    <a:noFill/>
+                  </a:tcPr>
+                </a:tc>
+              </a:tr>
+              <a:tr h="558363">
+                <a:tc>
+                  <a:txBody>
+                    <a:bodyPr wrap="square"/>
+                    <a:lstStyle/>
+                    <a:p>
+                      <a:pPr>
+                        <a:lnSpc>
+                          <a:spcPct val="134000"/>
+                        </a:lnSpc>
+                      </a:pPr>
+                      <a:r>
+                        <a:rPr sz="1100" b="1">
+                          <a:solidFill>
+                            <a:srgbClr val="111111"/>
+                          </a:solidFill>
+                          <a:latin typeface="Poppins"/>
+                        </a:rPr>
+                        <a:t>1 year
+September 2027</a:t>
+                      </a:r>
+                    </a:p>
+                  </a:txBody>
+                  <a:tcPr marL="0" marR="128016" marT="36576" marB="54864" anchor="t">
+                    <a:lnB w="9525" cap="flat" cmpd="sng" algn="ctr">
+                      <a:solidFill>
+                        <a:srgbClr val="D4D2D0"/>
+                      </a:solidFill>
+                    </a:lnB>
+                    <a:lnT w="0" cap="flat" cmpd="sng" algn="ctr">
+                      <a:solidFill>
+                        <a:srgbClr val="FAF8F4"/>
+                      </a:solidFill>
+                    </a:lnT>
+                    <a:lnR w="0" cap="flat" cmpd="sng" algn="ctr">
+                      <a:solidFill>
+                        <a:srgbClr val="FAF8F4"/>
+                      </a:solidFill>
+                    </a:lnR>
+                    <a:lnL w="0" cap="flat" cmpd="sng" algn="ctr">
+                      <a:solidFill>
+                        <a:srgbClr val="FAF8F4"/>
+                      </a:solidFill>
+                    </a:lnL>
+                    <a:noFill/>
+                  </a:tcPr>
+                </a:tc>
+                <a:tc>
+                  <a:txBody>
+                    <a:bodyPr wrap="square"/>
+                    <a:lstStyle/>
+                    <a:p>
+                      <a:pPr>
+                        <a:lnSpc>
+                          <a:spcPct val="134000"/>
+                        </a:lnSpc>
+                      </a:pPr>
+                      <a:r>
+                        <a:rPr sz="1100" b="0">
+                          <a:solidFill>
+                            <a:srgbClr val="111111"/>
+                          </a:solidFill>
+                          <a:latin typeface="Poppins"/>
+                        </a:rPr>
+                        <a:t>Referrals, JVPs and online driving most system sales. Replicable events calendar running. Cashflow positive, Justin on a wage</a:t>
+                      </a:r>
+                    </a:p>
+                  </a:txBody>
+                  <a:tcPr marL="0" marR="128016" marT="36576" marB="54864" anchor="t">
+                    <a:lnB w="9525" cap="flat" cmpd="sng" algn="ctr">
+                      <a:solidFill>
+                        <a:srgbClr val="D4D2D0"/>
+                      </a:solidFill>
+                    </a:lnB>
+                    <a:lnT w="0" cap="flat" cmpd="sng" algn="ctr">
+                      <a:solidFill>
+                        <a:srgbClr val="FAF8F4"/>
+                      </a:solidFill>
+                    </a:lnT>
+                    <a:lnR w="0" cap="flat" cmpd="sng" algn="ctr">
+                      <a:solidFill>
+                        <a:srgbClr val="FAF8F4"/>
+                      </a:solidFill>
+                    </a:lnR>
+                    <a:lnL w="0" cap="flat" cmpd="sng" algn="ctr">
+                      <a:solidFill>
+                        <a:srgbClr val="FAF8F4"/>
+                      </a:solidFill>
+                    </a:lnL>
+                    <a:noFill/>
+                  </a:tcPr>
+                </a:tc>
+              </a:tr>
+            </a:tbl>
+          </a:graphicData>
+        </a:graphic>
+      </p:graphicFrame>
+      <p:sp>
+        <p:nvSpPr>
+          <p:cNvPr id="5" name="TextBox 4"/>
+          <p:cNvSpPr txBox="1"/>
+          <p:nvPr/>
+        </p:nvSpPr>
+        <p:spPr>
+          <a:xfrm>
+            <a:off x="914400" y="6291072"/>
+            <a:ext cx="10362895" cy="274320"/>
+          </a:xfrm>
+          <a:prstGeom prst="rect">
+            <a:avLst/>
+          </a:prstGeom>
+          <a:noFill/>
+        </p:spPr>
+        <p:txBody>
+          <a:bodyPr wrap="square" lIns="0" rIns="0" tIns="0" bIns="0" anchor="t">
+            <a:spAutoFit/>
+          </a:bodyPr>
+          <a:lstStyle/>
+          <a:p>
+            <a:pPr algn="l">
+              <a:lnSpc>
+                <a:spcPct val="100000"/>
+              </a:lnSpc>
+            </a:pPr>
+            <a:r>
+              <a:rPr sz="900" b="0">
+                <a:solidFill>
+                  <a:srgbClr val="666666"/>
+                </a:solidFill>
+                <a:latin typeface="Poppins"/>
+              </a:rPr>
+              <a:t>Three years, five years and the exit sit on the summary sheet. This covers the first year of the climb.</a:t>
+            </a:r>
+          </a:p>
+        </p:txBody>
+      </p:sp>
+    </p:spTree>
+  </p:cSld>
+  <p:clrMapOvr>
+    <a:masterClrMapping/>
+  </p:clrMapOvr>
+</p:sld>
+</file>
+
+<file path=ppt/slides/slide23.xml><?xml version="1.0" encoding="utf-8"?>
+<p:sld xmlns:a="http://schemas.openxmlformats.org/drawingml/2006/main" xmlns:p="http://schemas.openxmlformats.org/presentationml/2006/main" xmlns:r="http://schemas.openxmlformats.org/officeDocument/2006/relationships">
+  <p:cSld>
+    <p:bg>
+      <p:bgPr>
+        <a:solidFill>
           <a:srgbClr val="FAF8F4"/>
         </a:solidFill>
         <a:effectLst/>
@@ -13210,7 +15159,7 @@
 </p:sld>
 </file>
 
-<file path=ppt/slides/slide21.xml><?xml version="1.0" encoding="utf-8"?>
+<file path=ppt/slides/slide24.xml><?xml version="1.0" encoding="utf-8"?>
 <p:sld xmlns:a="http://schemas.openxmlformats.org/drawingml/2006/main" xmlns:p="http://schemas.openxmlformats.org/presentationml/2006/main" xmlns:r="http://schemas.openxmlformats.org/officeDocument/2006/relationships">
   <p:cSld>
     <p:bg>
@@ -14076,7 +16025,7 @@
 </p:sld>
 </file>
 
-<file path=ppt/slides/slide22.xml><?xml version="1.0" encoding="utf-8"?>
+<file path=ppt/slides/slide25.xml><?xml version="1.0" encoding="utf-8"?>
 <p:sld xmlns:a="http://schemas.openxmlformats.org/drawingml/2006/main" xmlns:p="http://schemas.openxmlformats.org/presentationml/2006/main" xmlns:r="http://schemas.openxmlformats.org/officeDocument/2006/relationships">
   <p:cSld>
     <p:bg>
@@ -14219,7 +16168,7 @@
 </p:sld>
 </file>
 
-<file path=ppt/slides/slide23.xml><?xml version="1.0" encoding="utf-8"?>
+<file path=ppt/slides/slide26.xml><?xml version="1.0" encoding="utf-8"?>
 <p:sld xmlns:a="http://schemas.openxmlformats.org/drawingml/2006/main" xmlns:p="http://schemas.openxmlformats.org/presentationml/2006/main" xmlns:r="http://schemas.openxmlformats.org/officeDocument/2006/relationships">
   <p:cSld>
     <p:bg>
@@ -14888,7 +16837,7 @@
 </p:sld>
 </file>
 
-<file path=ppt/slides/slide24.xml><?xml version="1.0" encoding="utf-8"?>
+<file path=ppt/slides/slide27.xml><?xml version="1.0" encoding="utf-8"?>
 <p:sld xmlns:a="http://schemas.openxmlformats.org/drawingml/2006/main" xmlns:p="http://schemas.openxmlformats.org/presentationml/2006/main" xmlns:r="http://schemas.openxmlformats.org/officeDocument/2006/relationships">
   <p:cSld>
     <p:bg>
@@ -15466,7 +17415,7 @@
 </p:sld>
 </file>
 
-<file path=ppt/slides/slide25.xml><?xml version="1.0" encoding="utf-8"?>
+<file path=ppt/slides/slide28.xml><?xml version="1.0" encoding="utf-8"?>
 <p:sld xmlns:a="http://schemas.openxmlformats.org/drawingml/2006/main" xmlns:p="http://schemas.openxmlformats.org/presentationml/2006/main" xmlns:r="http://schemas.openxmlformats.org/officeDocument/2006/relationships">
   <p:cSld>
     <p:bg>
@@ -16095,7 +18044,7 @@
 </p:sld>
 </file>
 
-<file path=ppt/slides/slide26.xml><?xml version="1.0" encoding="utf-8"?>
+<file path=ppt/slides/slide29.xml><?xml version="1.0" encoding="utf-8"?>
 <p:sld xmlns:a="http://schemas.openxmlformats.org/drawingml/2006/main" xmlns:p="http://schemas.openxmlformats.org/presentationml/2006/main" xmlns:r="http://schemas.openxmlformats.org/officeDocument/2006/relationships">
   <p:cSld>
     <p:bg>
@@ -16663,149 +18612,6 @@
 </p:sld>
 </file>
 
-<file path=ppt/slides/slide27.xml><?xml version="1.0" encoding="utf-8"?>
-<p:sld xmlns:a="http://schemas.openxmlformats.org/drawingml/2006/main" xmlns:p="http://schemas.openxmlformats.org/presentationml/2006/main" xmlns:r="http://schemas.openxmlformats.org/officeDocument/2006/relationships">
-  <p:cSld>
-    <p:bg>
-      <p:bgPr>
-        <a:solidFill>
-          <a:srgbClr val="FAF8F4"/>
-        </a:solidFill>
-        <a:effectLst/>
-      </p:bgPr>
-    </p:bg>
-    <p:spTree>
-      <p:nvGrpSpPr>
-        <p:cNvPr id="1" name=""/>
-        <p:cNvGrpSpPr/>
-        <p:nvPr/>
-      </p:nvGrpSpPr>
-      <p:grpSpPr/>
-      <p:sp>
-        <p:nvSpPr>
-          <p:cNvPr id="2" name="TextBox 1"/>
-          <p:cNvSpPr txBox="1"/>
-          <p:nvPr/>
-        </p:nvSpPr>
-        <p:spPr>
-          <a:xfrm>
-            <a:off x="914400" y="2011680"/>
-            <a:ext cx="10362895" cy="2011680"/>
-          </a:xfrm>
-          <a:prstGeom prst="rect">
-            <a:avLst/>
-          </a:prstGeom>
-          <a:noFill/>
-        </p:spPr>
-        <p:txBody>
-          <a:bodyPr wrap="square" lIns="0" rIns="0" tIns="0" bIns="0" anchor="t">
-            <a:spAutoFit/>
-          </a:bodyPr>
-          <a:lstStyle/>
-          <a:p>
-            <a:pPr algn="l">
-              <a:lnSpc>
-                <a:spcPct val="100000"/>
-              </a:lnSpc>
-            </a:pPr>
-            <a:r>
-              <a:rPr sz="12000" b="1">
-                <a:solidFill>
-                  <a:srgbClr val="111111"/>
-                </a:solidFill>
-                <a:latin typeface="Poppins"/>
-              </a:rPr>
-              <a:t>Next.</a:t>
-            </a:r>
-          </a:p>
-        </p:txBody>
-      </p:sp>
-      <p:sp>
-        <p:nvSpPr>
-          <p:cNvPr id="3" name="TextBox 2"/>
-          <p:cNvSpPr txBox="1"/>
-          <p:nvPr/>
-        </p:nvSpPr>
-        <p:spPr>
-          <a:xfrm>
-            <a:off x="914400" y="4389120"/>
-            <a:ext cx="10362895" cy="365760"/>
-          </a:xfrm>
-          <a:prstGeom prst="rect">
-            <a:avLst/>
-          </a:prstGeom>
-          <a:noFill/>
-        </p:spPr>
-        <p:txBody>
-          <a:bodyPr wrap="square" lIns="0" rIns="0" tIns="0" bIns="0" anchor="t">
-            <a:spAutoFit/>
-          </a:bodyPr>
-          <a:lstStyle/>
-          <a:p>
-            <a:pPr algn="l">
-              <a:lnSpc>
-                <a:spcPct val="140000"/>
-              </a:lnSpc>
-            </a:pPr>
-            <a:r>
-              <a:rPr sz="1400" b="0">
-                <a:solidFill>
-                  <a:srgbClr val="111111"/>
-                </a:solidFill>
-                <a:latin typeface="Poppins"/>
-              </a:rPr>
-              <a:t>Signed proposal back, and the first weekly check-in booked.</a:t>
-            </a:r>
-          </a:p>
-        </p:txBody>
-      </p:sp>
-      <p:sp>
-        <p:nvSpPr>
-          <p:cNvPr id="4" name="TextBox 3"/>
-          <p:cNvSpPr txBox="1"/>
-          <p:nvPr/>
-        </p:nvSpPr>
-        <p:spPr>
-          <a:xfrm>
-            <a:off x="914400" y="4800600"/>
-            <a:ext cx="10362895" cy="365760"/>
-          </a:xfrm>
-          <a:prstGeom prst="rect">
-            <a:avLst/>
-          </a:prstGeom>
-          <a:noFill/>
-        </p:spPr>
-        <p:txBody>
-          <a:bodyPr wrap="square" lIns="0" rIns="0" tIns="0" bIns="0" anchor="t">
-            <a:spAutoFit/>
-          </a:bodyPr>
-          <a:lstStyle/>
-          <a:p>
-            <a:pPr algn="l">
-              <a:lnSpc>
-                <a:spcPct val="140000"/>
-              </a:lnSpc>
-            </a:pPr>
-            <a:r>
-              <a:rPr sz="1400" b="0">
-                <a:solidFill>
-                  <a:srgbClr val="111111"/>
-                </a:solidFill>
-                <a:latin typeface="Poppins"/>
-              </a:rPr>
-              <a:t>Christy Kilmartin leads it · Clent Jewell · clent@jewellprojects.com</a:t>
-            </a:r>
-          </a:p>
-        </p:txBody>
-      </p:sp>
-    </p:spTree>
-  </p:cSld>
-  <p:clrMapOvr>
-    <a:masterClrMapping/>
-  </p:clrMapOvr>
-</p:sld>
-</file>
-
 <file path=ppt/slides/slide3.xml><?xml version="1.0" encoding="utf-8"?>
 <p:sld xmlns:a="http://schemas.openxmlformats.org/drawingml/2006/main" xmlns:p="http://schemas.openxmlformats.org/presentationml/2006/main" xmlns:r="http://schemas.openxmlformats.org/officeDocument/2006/relationships">
   <p:cSld>
@@ -16959,6 +18765,149 @@
                 <a:latin typeface="Poppins"/>
               </a:rPr>
               <a:t>The constraint is hands, not ideas. We said that in August. Nothing since has changed it.</a:t>
+            </a:r>
+          </a:p>
+        </p:txBody>
+      </p:sp>
+    </p:spTree>
+  </p:cSld>
+  <p:clrMapOvr>
+    <a:masterClrMapping/>
+  </p:clrMapOvr>
+</p:sld>
+</file>
+
+<file path=ppt/slides/slide30.xml><?xml version="1.0" encoding="utf-8"?>
+<p:sld xmlns:a="http://schemas.openxmlformats.org/drawingml/2006/main" xmlns:p="http://schemas.openxmlformats.org/presentationml/2006/main" xmlns:r="http://schemas.openxmlformats.org/officeDocument/2006/relationships">
+  <p:cSld>
+    <p:bg>
+      <p:bgPr>
+        <a:solidFill>
+          <a:srgbClr val="FAF8F4"/>
+        </a:solidFill>
+        <a:effectLst/>
+      </p:bgPr>
+    </p:bg>
+    <p:spTree>
+      <p:nvGrpSpPr>
+        <p:cNvPr id="1" name=""/>
+        <p:cNvGrpSpPr/>
+        <p:nvPr/>
+      </p:nvGrpSpPr>
+      <p:grpSpPr/>
+      <p:sp>
+        <p:nvSpPr>
+          <p:cNvPr id="2" name="TextBox 1"/>
+          <p:cNvSpPr txBox="1"/>
+          <p:nvPr/>
+        </p:nvSpPr>
+        <p:spPr>
+          <a:xfrm>
+            <a:off x="914400" y="2011680"/>
+            <a:ext cx="10362895" cy="2011680"/>
+          </a:xfrm>
+          <a:prstGeom prst="rect">
+            <a:avLst/>
+          </a:prstGeom>
+          <a:noFill/>
+        </p:spPr>
+        <p:txBody>
+          <a:bodyPr wrap="square" lIns="0" rIns="0" tIns="0" bIns="0" anchor="t">
+            <a:spAutoFit/>
+          </a:bodyPr>
+          <a:lstStyle/>
+          <a:p>
+            <a:pPr algn="l">
+              <a:lnSpc>
+                <a:spcPct val="100000"/>
+              </a:lnSpc>
+            </a:pPr>
+            <a:r>
+              <a:rPr sz="12000" b="1">
+                <a:solidFill>
+                  <a:srgbClr val="111111"/>
+                </a:solidFill>
+                <a:latin typeface="Poppins"/>
+              </a:rPr>
+              <a:t>Next.</a:t>
+            </a:r>
+          </a:p>
+        </p:txBody>
+      </p:sp>
+      <p:sp>
+        <p:nvSpPr>
+          <p:cNvPr id="3" name="TextBox 2"/>
+          <p:cNvSpPr txBox="1"/>
+          <p:nvPr/>
+        </p:nvSpPr>
+        <p:spPr>
+          <a:xfrm>
+            <a:off x="914400" y="4389120"/>
+            <a:ext cx="10362895" cy="365760"/>
+          </a:xfrm>
+          <a:prstGeom prst="rect">
+            <a:avLst/>
+          </a:prstGeom>
+          <a:noFill/>
+        </p:spPr>
+        <p:txBody>
+          <a:bodyPr wrap="square" lIns="0" rIns="0" tIns="0" bIns="0" anchor="t">
+            <a:spAutoFit/>
+          </a:bodyPr>
+          <a:lstStyle/>
+          <a:p>
+            <a:pPr algn="l">
+              <a:lnSpc>
+                <a:spcPct val="140000"/>
+              </a:lnSpc>
+            </a:pPr>
+            <a:r>
+              <a:rPr sz="1400" b="0">
+                <a:solidFill>
+                  <a:srgbClr val="111111"/>
+                </a:solidFill>
+                <a:latin typeface="Poppins"/>
+              </a:rPr>
+              <a:t>Signed proposal back, and the first weekly check-in booked.</a:t>
+            </a:r>
+          </a:p>
+        </p:txBody>
+      </p:sp>
+      <p:sp>
+        <p:nvSpPr>
+          <p:cNvPr id="4" name="TextBox 3"/>
+          <p:cNvSpPr txBox="1"/>
+          <p:nvPr/>
+        </p:nvSpPr>
+        <p:spPr>
+          <a:xfrm>
+            <a:off x="914400" y="4800600"/>
+            <a:ext cx="10362895" cy="365760"/>
+          </a:xfrm>
+          <a:prstGeom prst="rect">
+            <a:avLst/>
+          </a:prstGeom>
+          <a:noFill/>
+        </p:spPr>
+        <p:txBody>
+          <a:bodyPr wrap="square" lIns="0" rIns="0" tIns="0" bIns="0" anchor="t">
+            <a:spAutoFit/>
+          </a:bodyPr>
+          <a:lstStyle/>
+          <a:p>
+            <a:pPr algn="l">
+              <a:lnSpc>
+                <a:spcPct val="140000"/>
+              </a:lnSpc>
+            </a:pPr>
+            <a:r>
+              <a:rPr sz="1400" b="0">
+                <a:solidFill>
+                  <a:srgbClr val="111111"/>
+                </a:solidFill>
+                <a:latin typeface="Poppins"/>
+              </a:rPr>
+              <a:t>Christy Kilmartin leads it · Clent Jewell · clent@jewellprojects.com</a:t>
             </a:r>
           </a:p>
         </p:txBody>
@@ -18166,7 +20115,7 @@
                 </a:solidFill>
                 <a:latin typeface="Poppins"/>
               </a:rPr>
-              <a:t>SETTLED 18 SEPTEMBER · THREE OF THREE</a:t>
+              <a:t>THE POSITION</a:t>
             </a:r>
           </a:p>
         </p:txBody>
@@ -18205,7 +20154,7 @@
                 </a:solidFill>
                 <a:latin typeface="Poppins"/>
               </a:rPr>
-              <a:t>250 refillers is also the money number.</a:t>
+              <a:t>Tap That is not in the beer business.</a:t>
             </a:r>
           </a:p>
         </p:txBody>
@@ -18247,7 +20196,7 @@
                 </a:solidFill>
                 <a:latin typeface="Poppins"/>
               </a:rPr>
-              <a:t>Break-even is about $50,000 a month against a current run rate of $35,000 to $45,000, and one month has already hit it. You confirmed that 250 active refillers clears it. The six-month number and the money number are the same number.</a:t>
+              <a:t>It is in home entertainment, and in the business of bringing people together. The product does not just put beer in a glass at home. It turns an ordinary get-together into an occasion worth hosting.</a:t>
             </a:r>
           </a:p>
           <a:p>
@@ -18266,7 +20215,7 @@
                 </a:solidFill>
                 <a:latin typeface="Poppins"/>
               </a:rPr>
-              <a:t>Which opens the one question this proposal cannot answer for you. Christy has put 250 by Christmas on the table given the outdoor entertaining season. March 2027 or Christmas 2026 should be settled before this is signed.</a:t>
+              <a:t>Every household deserves beer on tap stays as the ambition. It describes what you want to be true rather than why anyone buys. The brand idea sits underneath it, and it is the one that sells.</a:t>
             </a:r>
           </a:p>
         </p:txBody>
@@ -18285,7 +20234,7 @@
     <p:bg>
       <p:bgPr>
         <a:solidFill>
-          <a:srgbClr val="111111"/>
+          <a:srgbClr val="FAF8F4"/>
         </a:solidFill>
         <a:effectLst/>
       </p:bgPr>
@@ -18325,13 +20274,13 @@
               </a:lnSpc>
             </a:pPr>
             <a:r>
-              <a:rPr sz="1400" b="0" spc="200">
+              <a:rPr sz="900" b="0" spc="200">
                 <a:solidFill>
-                  <a:srgbClr val="FAF8F4"/>
+                  <a:srgbClr val="111111"/>
                 </a:solidFill>
                 <a:latin typeface="Poppins"/>
               </a:rPr>
-              <a:t>PART 02</a:t>
+              <a:t>THE POSITION · WHAT IT CHANGES</a:t>
             </a:r>
           </a:p>
         </p:txBody>
@@ -18344,47 +20293,8 @@
         </p:nvSpPr>
         <p:spPr>
           <a:xfrm>
-            <a:off x="914400" y="2194560"/>
-            <a:ext cx="10362895" cy="2377440"/>
-          </a:xfrm>
-          <a:prstGeom prst="rect">
-            <a:avLst/>
-          </a:prstGeom>
-          <a:noFill/>
-        </p:spPr>
-        <p:txBody>
-          <a:bodyPr wrap="square" lIns="0" rIns="0" tIns="0" bIns="0" anchor="ctr">
-            <a:spAutoFit/>
-          </a:bodyPr>
-          <a:lstStyle/>
-          <a:p>
-            <a:pPr algn="l">
-              <a:lnSpc>
-                <a:spcPct val="100000"/>
-              </a:lnSpc>
-            </a:pPr>
-            <a:r>
-              <a:rPr sz="9600" b="0">
-                <a:solidFill>
-                  <a:srgbClr val="FAF8F4"/>
-                </a:solidFill>
-                <a:latin typeface="Poppins"/>
-              </a:rPr>
-              <a:t>The work.</a:t>
-            </a:r>
-          </a:p>
-        </p:txBody>
-      </p:sp>
-      <p:sp>
-        <p:nvSpPr>
-          <p:cNvPr id="4" name="TextBox 3"/>
-          <p:cNvSpPr txBox="1"/>
-          <p:nvPr/>
-        </p:nvSpPr>
-        <p:spPr>
-          <a:xfrm>
-            <a:off x="914400" y="5212080"/>
-            <a:ext cx="10362895" cy="457200"/>
+            <a:off x="914400" y="1691640"/>
+            <a:ext cx="10362895" cy="2103120"/>
           </a:xfrm>
           <a:prstGeom prst="rect">
             <a:avLst/>
@@ -18399,17 +20309,78 @@
           <a:p>
             <a:pPr algn="l">
               <a:lnSpc>
-                <a:spcPct val="130000"/>
+                <a:spcPct val="112000"/>
               </a:lnSpc>
             </a:pPr>
             <a:r>
-              <a:rPr sz="1600" b="0">
+              <a:rPr sz="4200" b="0">
                 <a:solidFill>
-                  <a:srgbClr val="FAF8F4"/>
+                  <a:srgbClr val="111111"/>
                 </a:solidFill>
                 <a:latin typeface="Poppins"/>
               </a:rPr>
-              <a:t>Seven workstreams, on your horizons.</a:t>
+              <a:t>A design brief as much as a marketing one.</a:t>
+            </a:r>
+          </a:p>
+        </p:txBody>
+      </p:sp>
+      <p:sp>
+        <p:nvSpPr>
+          <p:cNvPr id="4" name="TextBox 3"/>
+          <p:cNvSpPr txBox="1"/>
+          <p:nvPr/>
+        </p:nvSpPr>
+        <p:spPr>
+          <a:xfrm>
+            <a:off x="914400" y="4114800"/>
+            <a:ext cx="7863840" cy="2011680"/>
+          </a:xfrm>
+          <a:prstGeom prst="rect">
+            <a:avLst/>
+          </a:prstGeom>
+          <a:noFill/>
+        </p:spPr>
+        <p:txBody>
+          <a:bodyPr wrap="square" lIns="0" rIns="0" tIns="0" bIns="0" anchor="t">
+            <a:spAutoFit/>
+          </a:bodyPr>
+          <a:lstStyle/>
+          <a:p>
+            <a:pPr algn="l">
+              <a:lnSpc>
+                <a:spcPct val="150000"/>
+              </a:lnSpc>
+              <a:spcAft>
+                <a:spcPts val="800"/>
+              </a:spcAft>
+            </a:pPr>
+            <a:r>
+              <a:rPr sz="1400" b="0">
+                <a:solidFill>
+                  <a:srgbClr val="111111"/>
+                </a:solidFill>
+                <a:latin typeface="Poppins"/>
+              </a:rPr>
+              <a:t>If the category is home entertainment, a keg system belongs beside the outdoor kitchen, the high-end barbecue and the coffee machine, rather than beside the bar fridge.</a:t>
+            </a:r>
+          </a:p>
+          <a:p>
+            <a:pPr algn="l">
+              <a:lnSpc>
+                <a:spcPct val="150000"/>
+              </a:lnSpc>
+              <a:spcAft>
+                <a:spcPts val="800"/>
+              </a:spcAft>
+            </a:pPr>
+            <a:r>
+              <a:rPr sz="1400" b="0">
+                <a:solidFill>
+                  <a:srgbClr val="111111"/>
+                </a:solidFill>
+                <a:latin typeface="Poppins"/>
+              </a:rPr>
+              <a:t>The systems on the market today read as appliances. Stand one next to a premium outdoor kitchen and it looks like equipment rather than something you chose. The comparison worth studying is the premium filtered-water tap: people pay for it because it looks right on the bench and they show it to visitors.</a:t>
             </a:r>
           </a:p>
         </p:txBody>
@@ -18474,7 +20445,7 @@
                 </a:solidFill>
                 <a:latin typeface="Poppins"/>
               </a:rPr>
-              <a:t>AT A GLANCE</a:t>
+              <a:t>THE POSITION · FOR YOU TO CHOOSE</a:t>
             </a:r>
           </a:p>
         </p:txBody>
@@ -18513,22 +20484,61 @@
                 </a:solidFill>
                 <a:latin typeface="Poppins"/>
               </a:rPr>
-              <a:t>Seven workstreams. The first carries the other six.</a:t>
+              <a:t>Three lines. None of them final.</a:t>
+            </a:r>
+          </a:p>
+        </p:txBody>
+      </p:sp>
+      <p:sp>
+        <p:nvSpPr>
+          <p:cNvPr id="4" name="TextBox 3"/>
+          <p:cNvSpPr txBox="1"/>
+          <p:nvPr/>
+        </p:nvSpPr>
+        <p:spPr>
+          <a:xfrm>
+            <a:off x="914400" y="2084831"/>
+            <a:ext cx="8778240" cy="548640"/>
+          </a:xfrm>
+          <a:prstGeom prst="rect">
+            <a:avLst/>
+          </a:prstGeom>
+          <a:noFill/>
+        </p:spPr>
+        <p:txBody>
+          <a:bodyPr wrap="square" lIns="0" rIns="0" tIns="0" bIns="0" anchor="t">
+            <a:spAutoFit/>
+          </a:bodyPr>
+          <a:lstStyle/>
+          <a:p>
+            <a:pPr algn="l">
+              <a:lnSpc>
+                <a:spcPct val="140000"/>
+              </a:lnSpc>
+            </a:pPr>
+            <a:r>
+              <a:rPr sz="1300" b="0">
+                <a:solidFill>
+                  <a:srgbClr val="666666"/>
+                </a:solidFill>
+                <a:latin typeface="Poppins"/>
+              </a:rPr>
+              <a:t>Pick one, or take the one closest and we will work it up.</a:t>
             </a:r>
           </a:p>
         </p:txBody>
       </p:sp>
       <p:graphicFrame>
         <p:nvGraphicFramePr>
-          <p:cNvPr id="4" name="Table 3"/>
+          <p:cNvPr id="5" name="Table 4"/>
           <p:cNvGraphicFramePr>
             <a:graphicFrameLocks noGrp="1"/>
           </p:cNvGraphicFramePr>
           <p:nvPr/>
         </p:nvGraphicFramePr>
         <p:xfrm>
-          <a:off x="914400" y="2194560"/>
-          <a:ext cx="10362893" cy="2584187"/>
+          <a:off x="914400" y="2880360"/>
+          <a:ext cx="10362894" cy="1721027"/>
         </p:xfrm>
         <a:graphic>
           <a:graphicData uri="http://schemas.openxmlformats.org/drawingml/2006/table">
@@ -18538,8 +20548,8 @@
               </a:tblPr>
               <a:tblGrid>
                 <a:gridCol w="518144"/>
-                <a:gridCol w="2901610"/>
-                <a:gridCol w="6943139"/>
+                <a:gridCol w="3834271"/>
+                <a:gridCol w="6010479"/>
               </a:tblGrid>
               <a:tr h="274320">
                 <a:tc>
@@ -18604,7 +20614,7 @@
                           </a:solidFill>
                           <a:latin typeface="Poppins"/>
                         </a:rPr>
-                        <a:t>WORKSTREAM</a:t>
+                        <a:t>THE LINE</a:t>
                       </a:r>
                     </a:p>
                   </a:txBody>
@@ -18649,7 +20659,144 @@
                           </a:solidFill>
                           <a:latin typeface="Poppins"/>
                         </a:rPr>
-                        <a:t>THE MOVE</a:t>
+                        <a:t>WHAT IT LEANS ON</a:t>
+                      </a:r>
+                    </a:p>
+                  </a:txBody>
+                  <a:tcPr marL="0" marR="128016" marT="36576" marB="54864" anchor="t">
+                    <a:lnB w="9525" cap="flat" cmpd="sng" algn="ctr">
+                      <a:solidFill>
+                        <a:srgbClr val="D4D2D0"/>
+                      </a:solidFill>
+                    </a:lnB>
+                    <a:lnT w="0" cap="flat" cmpd="sng" algn="ctr">
+                      <a:solidFill>
+                        <a:srgbClr val="FAF8F4"/>
+                      </a:solidFill>
+                    </a:lnT>
+                    <a:lnR w="0" cap="flat" cmpd="sng" algn="ctr">
+                      <a:solidFill>
+                        <a:srgbClr val="FAF8F4"/>
+                      </a:solidFill>
+                    </a:lnR>
+                    <a:lnL w="0" cap="flat" cmpd="sng" algn="ctr">
+                      <a:solidFill>
+                        <a:srgbClr val="FAF8F4"/>
+                      </a:solidFill>
+                    </a:lnL>
+                    <a:noFill/>
+                  </a:tcPr>
+                </a:tc>
+              </a:tr>
+              <a:tr h="558363">
+                <a:tc>
+                  <a:txBody>
+                    <a:bodyPr wrap="square"/>
+                    <a:lstStyle/>
+                    <a:p>
+                      <a:pPr>
+                        <a:lnSpc>
+                          <a:spcPct val="134000"/>
+                        </a:lnSpc>
+                      </a:pPr>
+                      <a:r>
+                        <a:rPr sz="1100" b="1">
+                          <a:solidFill>
+                            <a:srgbClr val="111111"/>
+                          </a:solidFill>
+                          <a:latin typeface="Poppins"/>
+                        </a:rPr>
+                        <a:t>A</a:t>
+                      </a:r>
+                    </a:p>
+                  </a:txBody>
+                  <a:tcPr marL="0" marR="128016" marT="36576" marB="54864" anchor="t">
+                    <a:lnB w="9525" cap="flat" cmpd="sng" algn="ctr">
+                      <a:solidFill>
+                        <a:srgbClr val="D4D2D0"/>
+                      </a:solidFill>
+                    </a:lnB>
+                    <a:lnT w="0" cap="flat" cmpd="sng" algn="ctr">
+                      <a:solidFill>
+                        <a:srgbClr val="FAF8F4"/>
+                      </a:solidFill>
+                    </a:lnT>
+                    <a:lnR w="0" cap="flat" cmpd="sng" algn="ctr">
+                      <a:solidFill>
+                        <a:srgbClr val="FAF8F4"/>
+                      </a:solidFill>
+                    </a:lnR>
+                    <a:lnL w="0" cap="flat" cmpd="sng" algn="ctr">
+                      <a:solidFill>
+                        <a:srgbClr val="FAF8F4"/>
+                      </a:solidFill>
+                    </a:lnL>
+                    <a:noFill/>
+                  </a:tcPr>
+                </a:tc>
+                <a:tc>
+                  <a:txBody>
+                    <a:bodyPr wrap="square"/>
+                    <a:lstStyle/>
+                    <a:p>
+                      <a:pPr>
+                        <a:lnSpc>
+                          <a:spcPct val="134000"/>
+                        </a:lnSpc>
+                      </a:pPr>
+                      <a:r>
+                        <a:rPr sz="1100" b="0">
+                          <a:solidFill>
+                            <a:srgbClr val="111111"/>
+                          </a:solidFill>
+                          <a:latin typeface="Poppins"/>
+                        </a:rPr>
+                        <a:t>The best night in, on tap.</a:t>
+                      </a:r>
+                    </a:p>
+                  </a:txBody>
+                  <a:tcPr marL="0" marR="128016" marT="36576" marB="54864" anchor="t">
+                    <a:lnB w="9525" cap="flat" cmpd="sng" algn="ctr">
+                      <a:solidFill>
+                        <a:srgbClr val="D4D2D0"/>
+                      </a:solidFill>
+                    </a:lnB>
+                    <a:lnT w="0" cap="flat" cmpd="sng" algn="ctr">
+                      <a:solidFill>
+                        <a:srgbClr val="FAF8F4"/>
+                      </a:solidFill>
+                    </a:lnT>
+                    <a:lnR w="0" cap="flat" cmpd="sng" algn="ctr">
+                      <a:solidFill>
+                        <a:srgbClr val="FAF8F4"/>
+                      </a:solidFill>
+                    </a:lnR>
+                    <a:lnL w="0" cap="flat" cmpd="sng" algn="ctr">
+                      <a:solidFill>
+                        <a:srgbClr val="FAF8F4"/>
+                      </a:solidFill>
+                    </a:lnL>
+                    <a:noFill/>
+                  </a:tcPr>
+                </a:tc>
+                <a:tc>
+                  <a:txBody>
+                    <a:bodyPr wrap="square"/>
+                    <a:lstStyle/>
+                    <a:p>
+                      <a:pPr>
+                        <a:lnSpc>
+                          <a:spcPct val="134000"/>
+                        </a:lnSpc>
+                      </a:pPr>
+                      <a:r>
+                        <a:rPr sz="1100" b="0">
+                          <a:solidFill>
+                            <a:srgbClr val="111111"/>
+                          </a:solidFill>
+                          <a:latin typeface="Poppins"/>
+                        </a:rPr>
+                        <a:t>Occasion and hosting. Closest to the home entertainment idea, and the easiest to build a campaign around</a:t>
                       </a:r>
                     </a:p>
                   </a:txBody>
@@ -18696,7 +20843,7 @@
                           </a:solidFill>
                           <a:latin typeface="Poppins"/>
                         </a:rPr>
-                        <a:t>01</a:t>
+                        <a:t>B</a:t>
                       </a:r>
                     </a:p>
                   </a:txBody>
@@ -18741,7 +20888,7 @@
                           </a:solidFill>
                           <a:latin typeface="Poppins"/>
                         </a:rPr>
-                        <a:t>Connect the system</a:t>
+                        <a:t>Your place. The one everyone wants to be at.</a:t>
                       </a:r>
                     </a:p>
                   </a:txBody>
@@ -18786,7 +20933,7 @@
                           </a:solidFill>
                           <a:latin typeface="Poppins"/>
                         </a:rPr>
-                        <a:t>Nothing compounds until the website, POS and CRM talk</a:t>
+                        <a:t>Social proof. Strongest for the be-the-envy-of-your-friends register you already use</a:t>
                       </a:r>
                     </a:p>
                   </a:txBody>
@@ -18815,7 +20962,7 @@
                   </a:tcPr>
                 </a:tc>
               </a:tr>
-              <a:tr h="329981">
+              <a:tr h="558363">
                 <a:tc>
                   <a:txBody>
                     <a:bodyPr wrap="square"/>
@@ -18833,7 +20980,7 @@
                           </a:solidFill>
                           <a:latin typeface="Poppins"/>
                         </a:rPr>
-                        <a:t>02</a:t>
+                        <a:t>C</a:t>
                       </a:r>
                     </a:p>
                   </a:txBody>
@@ -18878,7 +21025,7 @@
                           </a:solidFill>
                           <a:latin typeface="Poppins"/>
                         </a:rPr>
-                        <a:t>Switch existing owners</a:t>
+                        <a:t>Pour like a pub. Host like a home.</a:t>
                       </a:r>
                     </a:p>
                   </a:txBody>
@@ -18923,692 +21070,7 @@
                           </a:solidFill>
                           <a:latin typeface="Poppins"/>
                         </a:rPr>
-                        <a:t>Your number one. They have already bought the hardware</a:t>
-                      </a:r>
-                    </a:p>
-                  </a:txBody>
-                  <a:tcPr marL="0" marR="128016" marT="36576" marB="54864" anchor="t">
-                    <a:lnB w="9525" cap="flat" cmpd="sng" algn="ctr">
-                      <a:solidFill>
-                        <a:srgbClr val="D4D2D0"/>
-                      </a:solidFill>
-                    </a:lnB>
-                    <a:lnT w="0" cap="flat" cmpd="sng" algn="ctr">
-                      <a:solidFill>
-                        <a:srgbClr val="FAF8F4"/>
-                      </a:solidFill>
-                    </a:lnT>
-                    <a:lnR w="0" cap="flat" cmpd="sng" algn="ctr">
-                      <a:solidFill>
-                        <a:srgbClr val="FAF8F4"/>
-                      </a:solidFill>
-                    </a:lnR>
-                    <a:lnL w="0" cap="flat" cmpd="sng" algn="ctr">
-                      <a:solidFill>
-                        <a:srgbClr val="FAF8F4"/>
-                      </a:solidFill>
-                    </a:lnL>
-                    <a:noFill/>
-                  </a:tcPr>
-                </a:tc>
-              </a:tr>
-              <a:tr h="329981">
-                <a:tc>
-                  <a:txBody>
-                    <a:bodyPr wrap="square"/>
-                    <a:lstStyle/>
-                    <a:p>
-                      <a:pPr>
-                        <a:lnSpc>
-                          <a:spcPct val="134000"/>
-                        </a:lnSpc>
-                      </a:pPr>
-                      <a:r>
-                        <a:rPr sz="1100" b="1">
-                          <a:solidFill>
-                            <a:srgbClr val="111111"/>
-                          </a:solidFill>
-                          <a:latin typeface="Poppins"/>
-                        </a:rPr>
-                        <a:t>03</a:t>
-                      </a:r>
-                    </a:p>
-                  </a:txBody>
-                  <a:tcPr marL="0" marR="128016" marT="36576" marB="54864" anchor="t">
-                    <a:lnB w="9525" cap="flat" cmpd="sng" algn="ctr">
-                      <a:solidFill>
-                        <a:srgbClr val="D4D2D0"/>
-                      </a:solidFill>
-                    </a:lnB>
-                    <a:lnT w="0" cap="flat" cmpd="sng" algn="ctr">
-                      <a:solidFill>
-                        <a:srgbClr val="FAF8F4"/>
-                      </a:solidFill>
-                    </a:lnT>
-                    <a:lnR w="0" cap="flat" cmpd="sng" algn="ctr">
-                      <a:solidFill>
-                        <a:srgbClr val="FAF8F4"/>
-                      </a:solidFill>
-                    </a:lnR>
-                    <a:lnL w="0" cap="flat" cmpd="sng" algn="ctr">
-                      <a:solidFill>
-                        <a:srgbClr val="FAF8F4"/>
-                      </a:solidFill>
-                    </a:lnL>
-                    <a:noFill/>
-                  </a:tcPr>
-                </a:tc>
-                <a:tc>
-                  <a:txBody>
-                    <a:bodyPr wrap="square"/>
-                    <a:lstStyle/>
-                    <a:p>
-                      <a:pPr>
-                        <a:lnSpc>
-                          <a:spcPct val="134000"/>
-                        </a:lnSpc>
-                      </a:pPr>
-                      <a:r>
-                        <a:rPr sz="1100" b="0">
-                          <a:solidFill>
-                            <a:srgbClr val="111111"/>
-                          </a:solidFill>
-                          <a:latin typeface="Poppins"/>
-                        </a:rPr>
-                        <a:t>Referrals, JVPs, ambassadors</a:t>
-                      </a:r>
-                    </a:p>
-                  </a:txBody>
-                  <a:tcPr marL="0" marR="128016" marT="36576" marB="54864" anchor="t">
-                    <a:lnB w="9525" cap="flat" cmpd="sng" algn="ctr">
-                      <a:solidFill>
-                        <a:srgbClr val="D4D2D0"/>
-                      </a:solidFill>
-                    </a:lnB>
-                    <a:lnT w="0" cap="flat" cmpd="sng" algn="ctr">
-                      <a:solidFill>
-                        <a:srgbClr val="FAF8F4"/>
-                      </a:solidFill>
-                    </a:lnT>
-                    <a:lnR w="0" cap="flat" cmpd="sng" algn="ctr">
-                      <a:solidFill>
-                        <a:srgbClr val="FAF8F4"/>
-                      </a:solidFill>
-                    </a:lnR>
-                    <a:lnL w="0" cap="flat" cmpd="sng" algn="ctr">
-                      <a:solidFill>
-                        <a:srgbClr val="FAF8F4"/>
-                      </a:solidFill>
-                    </a:lnL>
-                    <a:noFill/>
-                  </a:tcPr>
-                </a:tc>
-                <a:tc>
-                  <a:txBody>
-                    <a:bodyPr wrap="square"/>
-                    <a:lstStyle/>
-                    <a:p>
-                      <a:pPr>
-                        <a:lnSpc>
-                          <a:spcPct val="134000"/>
-                        </a:lnSpc>
-                      </a:pPr>
-                      <a:r>
-                        <a:rPr sz="1100" b="0">
-                          <a:solidFill>
-                            <a:srgbClr val="111111"/>
-                          </a:solidFill>
-                          <a:latin typeface="Poppins"/>
-                        </a:rPr>
-                        <a:t>18% of sales already, on a programme nobody can hold</a:t>
-                      </a:r>
-                    </a:p>
-                  </a:txBody>
-                  <a:tcPr marL="0" marR="128016" marT="36576" marB="54864" anchor="t">
-                    <a:lnB w="9525" cap="flat" cmpd="sng" algn="ctr">
-                      <a:solidFill>
-                        <a:srgbClr val="D4D2D0"/>
-                      </a:solidFill>
-                    </a:lnB>
-                    <a:lnT w="0" cap="flat" cmpd="sng" algn="ctr">
-                      <a:solidFill>
-                        <a:srgbClr val="FAF8F4"/>
-                      </a:solidFill>
-                    </a:lnT>
-                    <a:lnR w="0" cap="flat" cmpd="sng" algn="ctr">
-                      <a:solidFill>
-                        <a:srgbClr val="FAF8F4"/>
-                      </a:solidFill>
-                    </a:lnR>
-                    <a:lnL w="0" cap="flat" cmpd="sng" algn="ctr">
-                      <a:solidFill>
-                        <a:srgbClr val="FAF8F4"/>
-                      </a:solidFill>
-                    </a:lnL>
-                    <a:noFill/>
-                  </a:tcPr>
-                </a:tc>
-              </a:tr>
-              <a:tr h="329981">
-                <a:tc>
-                  <a:txBody>
-                    <a:bodyPr wrap="square"/>
-                    <a:lstStyle/>
-                    <a:p>
-                      <a:pPr>
-                        <a:lnSpc>
-                          <a:spcPct val="134000"/>
-                        </a:lnSpc>
-                      </a:pPr>
-                      <a:r>
-                        <a:rPr sz="1100" b="1">
-                          <a:solidFill>
-                            <a:srgbClr val="111111"/>
-                          </a:solidFill>
-                          <a:latin typeface="Poppins"/>
-                        </a:rPr>
-                        <a:t>04</a:t>
-                      </a:r>
-                    </a:p>
-                  </a:txBody>
-                  <a:tcPr marL="0" marR="128016" marT="36576" marB="54864" anchor="t">
-                    <a:lnB w="9525" cap="flat" cmpd="sng" algn="ctr">
-                      <a:solidFill>
-                        <a:srgbClr val="D4D2D0"/>
-                      </a:solidFill>
-                    </a:lnB>
-                    <a:lnT w="0" cap="flat" cmpd="sng" algn="ctr">
-                      <a:solidFill>
-                        <a:srgbClr val="FAF8F4"/>
-                      </a:solidFill>
-                    </a:lnT>
-                    <a:lnR w="0" cap="flat" cmpd="sng" algn="ctr">
-                      <a:solidFill>
-                        <a:srgbClr val="FAF8F4"/>
-                      </a:solidFill>
-                    </a:lnR>
-                    <a:lnL w="0" cap="flat" cmpd="sng" algn="ctr">
-                      <a:solidFill>
-                        <a:srgbClr val="FAF8F4"/>
-                      </a:solidFill>
-                    </a:lnL>
-                    <a:noFill/>
-                  </a:tcPr>
-                </a:tc>
-                <a:tc>
-                  <a:txBody>
-                    <a:bodyPr wrap="square"/>
-                    <a:lstStyle/>
-                    <a:p>
-                      <a:pPr>
-                        <a:lnSpc>
-                          <a:spcPct val="134000"/>
-                        </a:lnSpc>
-                      </a:pPr>
-                      <a:r>
-                        <a:rPr sz="1100" b="0">
-                          <a:solidFill>
-                            <a:srgbClr val="111111"/>
-                          </a:solidFill>
-                          <a:latin typeface="Poppins"/>
-                        </a:rPr>
-                        <a:t>The Tap Room as a destination</a:t>
-                      </a:r>
-                    </a:p>
-                  </a:txBody>
-                  <a:tcPr marL="0" marR="128016" marT="36576" marB="54864" anchor="t">
-                    <a:lnB w="9525" cap="flat" cmpd="sng" algn="ctr">
-                      <a:solidFill>
-                        <a:srgbClr val="D4D2D0"/>
-                      </a:solidFill>
-                    </a:lnB>
-                    <a:lnT w="0" cap="flat" cmpd="sng" algn="ctr">
-                      <a:solidFill>
-                        <a:srgbClr val="FAF8F4"/>
-                      </a:solidFill>
-                    </a:lnT>
-                    <a:lnR w="0" cap="flat" cmpd="sng" algn="ctr">
-                      <a:solidFill>
-                        <a:srgbClr val="FAF8F4"/>
-                      </a:solidFill>
-                    </a:lnR>
-                    <a:lnL w="0" cap="flat" cmpd="sng" algn="ctr">
-                      <a:solidFill>
-                        <a:srgbClr val="FAF8F4"/>
-                      </a:solidFill>
-                    </a:lnL>
-                    <a:noFill/>
-                  </a:tcPr>
-                </a:tc>
-                <a:tc>
-                  <a:txBody>
-                    <a:bodyPr wrap="square"/>
-                    <a:lstStyle/>
-                    <a:p>
-                      <a:pPr>
-                        <a:lnSpc>
-                          <a:spcPct val="134000"/>
-                        </a:lnSpc>
-                      </a:pPr>
-                      <a:r>
-                        <a:rPr sz="1100" b="0">
-                          <a:solidFill>
-                            <a:srgbClr val="111111"/>
-                          </a:solidFill>
-                          <a:latin typeface="Poppins"/>
-                        </a:rPr>
-                        <a:t>Events, functions, ticketed music and local business</a:t>
-                      </a:r>
-                    </a:p>
-                  </a:txBody>
-                  <a:tcPr marL="0" marR="128016" marT="36576" marB="54864" anchor="t">
-                    <a:lnB w="9525" cap="flat" cmpd="sng" algn="ctr">
-                      <a:solidFill>
-                        <a:srgbClr val="D4D2D0"/>
-                      </a:solidFill>
-                    </a:lnB>
-                    <a:lnT w="0" cap="flat" cmpd="sng" algn="ctr">
-                      <a:solidFill>
-                        <a:srgbClr val="FAF8F4"/>
-                      </a:solidFill>
-                    </a:lnT>
-                    <a:lnR w="0" cap="flat" cmpd="sng" algn="ctr">
-                      <a:solidFill>
-                        <a:srgbClr val="FAF8F4"/>
-                      </a:solidFill>
-                    </a:lnR>
-                    <a:lnL w="0" cap="flat" cmpd="sng" algn="ctr">
-                      <a:solidFill>
-                        <a:srgbClr val="FAF8F4"/>
-                      </a:solidFill>
-                    </a:lnL>
-                    <a:noFill/>
-                  </a:tcPr>
-                </a:tc>
-              </a:tr>
-              <a:tr h="329981">
-                <a:tc>
-                  <a:txBody>
-                    <a:bodyPr wrap="square"/>
-                    <a:lstStyle/>
-                    <a:p>
-                      <a:pPr>
-                        <a:lnSpc>
-                          <a:spcPct val="134000"/>
-                        </a:lnSpc>
-                      </a:pPr>
-                      <a:r>
-                        <a:rPr sz="1100" b="1">
-                          <a:solidFill>
-                            <a:srgbClr val="111111"/>
-                          </a:solidFill>
-                          <a:latin typeface="Poppins"/>
-                        </a:rPr>
-                        <a:t>05</a:t>
-                      </a:r>
-                    </a:p>
-                  </a:txBody>
-                  <a:tcPr marL="0" marR="128016" marT="36576" marB="54864" anchor="t">
-                    <a:lnB w="9525" cap="flat" cmpd="sng" algn="ctr">
-                      <a:solidFill>
-                        <a:srgbClr val="D4D2D0"/>
-                      </a:solidFill>
-                    </a:lnB>
-                    <a:lnT w="0" cap="flat" cmpd="sng" algn="ctr">
-                      <a:solidFill>
-                        <a:srgbClr val="FAF8F4"/>
-                      </a:solidFill>
-                    </a:lnT>
-                    <a:lnR w="0" cap="flat" cmpd="sng" algn="ctr">
-                      <a:solidFill>
-                        <a:srgbClr val="FAF8F4"/>
-                      </a:solidFill>
-                    </a:lnR>
-                    <a:lnL w="0" cap="flat" cmpd="sng" algn="ctr">
-                      <a:solidFill>
-                        <a:srgbClr val="FAF8F4"/>
-                      </a:solidFill>
-                    </a:lnL>
-                    <a:noFill/>
-                  </a:tcPr>
-                </a:tc>
-                <a:tc>
-                  <a:txBody>
-                    <a:bodyPr wrap="square"/>
-                    <a:lstStyle/>
-                    <a:p>
-                      <a:pPr>
-                        <a:lnSpc>
-                          <a:spcPct val="134000"/>
-                        </a:lnSpc>
-                      </a:pPr>
-                      <a:r>
-                        <a:rPr sz="1100" b="0">
-                          <a:solidFill>
-                            <a:srgbClr val="111111"/>
-                          </a:solidFill>
-                          <a:latin typeface="Poppins"/>
-                        </a:rPr>
-                        <a:t>Wholesale as a function</a:t>
-                      </a:r>
-                    </a:p>
-                  </a:txBody>
-                  <a:tcPr marL="0" marR="128016" marT="36576" marB="54864" anchor="t">
-                    <a:lnB w="9525" cap="flat" cmpd="sng" algn="ctr">
-                      <a:solidFill>
-                        <a:srgbClr val="D4D2D0"/>
-                      </a:solidFill>
-                    </a:lnB>
-                    <a:lnT w="0" cap="flat" cmpd="sng" algn="ctr">
-                      <a:solidFill>
-                        <a:srgbClr val="FAF8F4"/>
-                      </a:solidFill>
-                    </a:lnT>
-                    <a:lnR w="0" cap="flat" cmpd="sng" algn="ctr">
-                      <a:solidFill>
-                        <a:srgbClr val="FAF8F4"/>
-                      </a:solidFill>
-                    </a:lnR>
-                    <a:lnL w="0" cap="flat" cmpd="sng" algn="ctr">
-                      <a:solidFill>
-                        <a:srgbClr val="FAF8F4"/>
-                      </a:solidFill>
-                    </a:lnL>
-                    <a:noFill/>
-                  </a:tcPr>
-                </a:tc>
-                <a:tc>
-                  <a:txBody>
-                    <a:bodyPr wrap="square"/>
-                    <a:lstStyle/>
-                    <a:p>
-                      <a:pPr>
-                        <a:lnSpc>
-                          <a:spcPct val="134000"/>
-                        </a:lnSpc>
-                      </a:pPr>
-                      <a:r>
-                        <a:rPr sz="1100" b="0">
-                          <a:solidFill>
-                            <a:srgbClr val="111111"/>
-                          </a:solidFill>
-                          <a:latin typeface="Poppins"/>
-                        </a:rPr>
-                        <a:t>Demand exists. Follow-up does not</a:t>
-                      </a:r>
-                    </a:p>
-                  </a:txBody>
-                  <a:tcPr marL="0" marR="128016" marT="36576" marB="54864" anchor="t">
-                    <a:lnB w="9525" cap="flat" cmpd="sng" algn="ctr">
-                      <a:solidFill>
-                        <a:srgbClr val="D4D2D0"/>
-                      </a:solidFill>
-                    </a:lnB>
-                    <a:lnT w="0" cap="flat" cmpd="sng" algn="ctr">
-                      <a:solidFill>
-                        <a:srgbClr val="FAF8F4"/>
-                      </a:solidFill>
-                    </a:lnT>
-                    <a:lnR w="0" cap="flat" cmpd="sng" algn="ctr">
-                      <a:solidFill>
-                        <a:srgbClr val="FAF8F4"/>
-                      </a:solidFill>
-                    </a:lnR>
-                    <a:lnL w="0" cap="flat" cmpd="sng" algn="ctr">
-                      <a:solidFill>
-                        <a:srgbClr val="FAF8F4"/>
-                      </a:solidFill>
-                    </a:lnL>
-                    <a:noFill/>
-                  </a:tcPr>
-                </a:tc>
-              </a:tr>
-              <a:tr h="329981">
-                <a:tc>
-                  <a:txBody>
-                    <a:bodyPr wrap="square"/>
-                    <a:lstStyle/>
-                    <a:p>
-                      <a:pPr>
-                        <a:lnSpc>
-                          <a:spcPct val="134000"/>
-                        </a:lnSpc>
-                      </a:pPr>
-                      <a:r>
-                        <a:rPr sz="1100" b="1">
-                          <a:solidFill>
-                            <a:srgbClr val="111111"/>
-                          </a:solidFill>
-                          <a:latin typeface="Poppins"/>
-                        </a:rPr>
-                        <a:t>06</a:t>
-                      </a:r>
-                    </a:p>
-                  </a:txBody>
-                  <a:tcPr marL="0" marR="128016" marT="36576" marB="54864" anchor="t">
-                    <a:lnB w="9525" cap="flat" cmpd="sng" algn="ctr">
-                      <a:solidFill>
-                        <a:srgbClr val="D4D2D0"/>
-                      </a:solidFill>
-                    </a:lnB>
-                    <a:lnT w="0" cap="flat" cmpd="sng" algn="ctr">
-                      <a:solidFill>
-                        <a:srgbClr val="FAF8F4"/>
-                      </a:solidFill>
-                    </a:lnT>
-                    <a:lnR w="0" cap="flat" cmpd="sng" algn="ctr">
-                      <a:solidFill>
-                        <a:srgbClr val="FAF8F4"/>
-                      </a:solidFill>
-                    </a:lnR>
-                    <a:lnL w="0" cap="flat" cmpd="sng" algn="ctr">
-                      <a:solidFill>
-                        <a:srgbClr val="FAF8F4"/>
-                      </a:solidFill>
-                    </a:lnL>
-                    <a:noFill/>
-                  </a:tcPr>
-                </a:tc>
-                <a:tc>
-                  <a:txBody>
-                    <a:bodyPr wrap="square"/>
-                    <a:lstStyle/>
-                    <a:p>
-                      <a:pPr>
-                        <a:lnSpc>
-                          <a:spcPct val="134000"/>
-                        </a:lnSpc>
-                      </a:pPr>
-                      <a:r>
-                        <a:rPr sz="1100" b="0">
-                          <a:solidFill>
-                            <a:srgbClr val="111111"/>
-                          </a:solidFill>
-                          <a:latin typeface="Poppins"/>
-                        </a:rPr>
-                        <a:t>Brand, range and proof</a:t>
-                      </a:r>
-                    </a:p>
-                  </a:txBody>
-                  <a:tcPr marL="0" marR="128016" marT="36576" marB="54864" anchor="t">
-                    <a:lnB w="9525" cap="flat" cmpd="sng" algn="ctr">
-                      <a:solidFill>
-                        <a:srgbClr val="D4D2D0"/>
-                      </a:solidFill>
-                    </a:lnB>
-                    <a:lnT w="0" cap="flat" cmpd="sng" algn="ctr">
-                      <a:solidFill>
-                        <a:srgbClr val="FAF8F4"/>
-                      </a:solidFill>
-                    </a:lnT>
-                    <a:lnR w="0" cap="flat" cmpd="sng" algn="ctr">
-                      <a:solidFill>
-                        <a:srgbClr val="FAF8F4"/>
-                      </a:solidFill>
-                    </a:lnR>
-                    <a:lnL w="0" cap="flat" cmpd="sng" algn="ctr">
-                      <a:solidFill>
-                        <a:srgbClr val="FAF8F4"/>
-                      </a:solidFill>
-                    </a:lnL>
-                    <a:noFill/>
-                  </a:tcPr>
-                </a:tc>
-                <a:tc>
-                  <a:txBody>
-                    <a:bodyPr wrap="square"/>
-                    <a:lstStyle/>
-                    <a:p>
-                      <a:pPr>
-                        <a:lnSpc>
-                          <a:spcPct val="134000"/>
-                        </a:lnSpc>
-                      </a:pPr>
-                      <a:r>
-                        <a:rPr sz="1100" b="0">
-                          <a:solidFill>
-                            <a:srgbClr val="111111"/>
-                          </a:solidFill>
-                          <a:latin typeface="Poppins"/>
-                        </a:rPr>
-                        <a:t>Sharpened, not rebuilt. Proof you own and barely use</a:t>
-                      </a:r>
-                    </a:p>
-                  </a:txBody>
-                  <a:tcPr marL="0" marR="128016" marT="36576" marB="54864" anchor="t">
-                    <a:lnB w="9525" cap="flat" cmpd="sng" algn="ctr">
-                      <a:solidFill>
-                        <a:srgbClr val="D4D2D0"/>
-                      </a:solidFill>
-                    </a:lnB>
-                    <a:lnT w="0" cap="flat" cmpd="sng" algn="ctr">
-                      <a:solidFill>
-                        <a:srgbClr val="FAF8F4"/>
-                      </a:solidFill>
-                    </a:lnT>
-                    <a:lnR w="0" cap="flat" cmpd="sng" algn="ctr">
-                      <a:solidFill>
-                        <a:srgbClr val="FAF8F4"/>
-                      </a:solidFill>
-                    </a:lnR>
-                    <a:lnL w="0" cap="flat" cmpd="sng" algn="ctr">
-                      <a:solidFill>
-                        <a:srgbClr val="FAF8F4"/>
-                      </a:solidFill>
-                    </a:lnL>
-                    <a:noFill/>
-                  </a:tcPr>
-                </a:tc>
-              </a:tr>
-              <a:tr h="329981">
-                <a:tc>
-                  <a:txBody>
-                    <a:bodyPr wrap="square"/>
-                    <a:lstStyle/>
-                    <a:p>
-                      <a:pPr>
-                        <a:lnSpc>
-                          <a:spcPct val="134000"/>
-                        </a:lnSpc>
-                      </a:pPr>
-                      <a:r>
-                        <a:rPr sz="1100" b="1">
-                          <a:solidFill>
-                            <a:srgbClr val="111111"/>
-                          </a:solidFill>
-                          <a:latin typeface="Poppins"/>
-                        </a:rPr>
-                        <a:t>07</a:t>
-                      </a:r>
-                    </a:p>
-                  </a:txBody>
-                  <a:tcPr marL="0" marR="128016" marT="36576" marB="54864" anchor="t">
-                    <a:lnB w="9525" cap="flat" cmpd="sng" algn="ctr">
-                      <a:solidFill>
-                        <a:srgbClr val="D4D2D0"/>
-                      </a:solidFill>
-                    </a:lnB>
-                    <a:lnT w="0" cap="flat" cmpd="sng" algn="ctr">
-                      <a:solidFill>
-                        <a:srgbClr val="FAF8F4"/>
-                      </a:solidFill>
-                    </a:lnT>
-                    <a:lnR w="0" cap="flat" cmpd="sng" algn="ctr">
-                      <a:solidFill>
-                        <a:srgbClr val="FAF8F4"/>
-                      </a:solidFill>
-                    </a:lnR>
-                    <a:lnL w="0" cap="flat" cmpd="sng" algn="ctr">
-                      <a:solidFill>
-                        <a:srgbClr val="FAF8F4"/>
-                      </a:solidFill>
-                    </a:lnL>
-                    <a:noFill/>
-                  </a:tcPr>
-                </a:tc>
-                <a:tc>
-                  <a:txBody>
-                    <a:bodyPr wrap="square"/>
-                    <a:lstStyle/>
-                    <a:p>
-                      <a:pPr>
-                        <a:lnSpc>
-                          <a:spcPct val="134000"/>
-                        </a:lnSpc>
-                      </a:pPr>
-                      <a:r>
-                        <a:rPr sz="1100" b="0">
-                          <a:solidFill>
-                            <a:srgbClr val="111111"/>
-                          </a:solidFill>
-                          <a:latin typeface="Poppins"/>
-                        </a:rPr>
-                        <a:t>Governance</a:t>
-                      </a:r>
-                    </a:p>
-                  </a:txBody>
-                  <a:tcPr marL="0" marR="128016" marT="36576" marB="54864" anchor="t">
-                    <a:lnB w="9525" cap="flat" cmpd="sng" algn="ctr">
-                      <a:solidFill>
-                        <a:srgbClr val="D4D2D0"/>
-                      </a:solidFill>
-                    </a:lnB>
-                    <a:lnT w="0" cap="flat" cmpd="sng" algn="ctr">
-                      <a:solidFill>
-                        <a:srgbClr val="FAF8F4"/>
-                      </a:solidFill>
-                    </a:lnT>
-                    <a:lnR w="0" cap="flat" cmpd="sng" algn="ctr">
-                      <a:solidFill>
-                        <a:srgbClr val="FAF8F4"/>
-                      </a:solidFill>
-                    </a:lnR>
-                    <a:lnL w="0" cap="flat" cmpd="sng" algn="ctr">
-                      <a:solidFill>
-                        <a:srgbClr val="FAF8F4"/>
-                      </a:solidFill>
-                    </a:lnL>
-                    <a:noFill/>
-                  </a:tcPr>
-                </a:tc>
-                <a:tc>
-                  <a:txBody>
-                    <a:bodyPr wrap="square"/>
-                    <a:lstStyle/>
-                    <a:p>
-                      <a:pPr>
-                        <a:lnSpc>
-                          <a:spcPct val="134000"/>
-                        </a:lnSpc>
-                      </a:pPr>
-                      <a:r>
-                        <a:rPr sz="1100" b="0">
-                          <a:solidFill>
-                            <a:srgbClr val="111111"/>
-                          </a:solidFill>
-                          <a:latin typeface="Poppins"/>
-                        </a:rPr>
-                        <a:t>Four numbers, one page, one rhythm</a:t>
+                        <a:t>Product and craft. Keeps the beer quality argument visible for the people who buy on taste</a:t>
                       </a:r>
                     </a:p>
                   </a:txBody>
@@ -19643,7 +21105,7 @@
       </p:graphicFrame>
       <p:sp>
         <p:nvSpPr>
-          <p:cNvPr id="5" name="TextBox 4"/>
+          <p:cNvPr id="6" name="TextBox 5"/>
           <p:cNvSpPr txBox="1"/>
           <p:nvPr/>
         </p:nvSpPr>
@@ -19675,7 +21137,7 @@
                 </a:solidFill>
                 <a:latin typeface="Poppins"/>
               </a:rPr>
-              <a:t>Horizons are your own: 30 days to mid-October, three months to mid-December, six months to March 2027, one year to September 2027.</a:t>
+              <a:t>Options for discussion, not approved copy. Christy owns the final wording, and it should be settled before key messaging is written.</a:t>
             </a:r>
           </a:p>
         </p:txBody>

--- a/00 Admin/04 Commercial + SOW/JP_TapThat_ProposalDeck_v03.pptx
+++ b/00 Admin/04 Commercial + SOW/JP_TapThat_ProposalDeck_v03.pptx
@@ -10493,7 +10493,7 @@
         </p:nvGraphicFramePr>
         <p:xfrm>
           <a:off x="914400" y="2880360"/>
-          <a:ext cx="10362893" cy="3370932"/>
+          <a:ext cx="10362893" cy="3142550"/>
         </p:xfrm>
         <a:graphic>
           <a:graphicData uri="http://schemas.openxmlformats.org/drawingml/2006/table">
@@ -10643,7 +10643,7 @@
                   </a:tcPr>
                 </a:tc>
               </a:tr>
-              <a:tr h="558363">
+              <a:tr h="329981">
                 <a:tc>
                   <a:txBody>
                     <a:bodyPr wrap="square"/>
@@ -10706,7 +10706,7 @@
                           </a:solidFill>
                           <a:latin typeface="Poppins"/>
                         </a:rPr>
-                        <a:t>The position, worked into a line you sign off, then into key messaging. Christy owns the wording</a:t>
+                        <a:t>Settled: the best night in, on tap. Christy works it into key messaging and into every brief</a:t>
                       </a:r>
                     </a:p>
                   </a:txBody>
@@ -20445,7 +20445,7 @@
                 </a:solidFill>
                 <a:latin typeface="Poppins"/>
               </a:rPr>
-              <a:t>THE POSITION · FOR YOU TO CHOOSE</a:t>
+              <a:t>THE POSITION · THE LINE</a:t>
             </a:r>
           </a:p>
         </p:txBody>
@@ -20458,8 +20458,8 @@
         </p:nvSpPr>
         <p:spPr>
           <a:xfrm>
-            <a:off x="914400" y="1371600"/>
-            <a:ext cx="10362895" cy="640080"/>
+            <a:off x="914400" y="1691640"/>
+            <a:ext cx="10362895" cy="2103120"/>
           </a:xfrm>
           <a:prstGeom prst="rect">
             <a:avLst/>
@@ -20478,13 +20478,13 @@
               </a:lnSpc>
             </a:pPr>
             <a:r>
-              <a:rPr sz="2800" b="0">
+              <a:rPr sz="4200" b="0">
                 <a:solidFill>
                   <a:srgbClr val="111111"/>
                 </a:solidFill>
                 <a:latin typeface="Poppins"/>
               </a:rPr>
-              <a:t>Three lines. None of them final.</a:t>
+              <a:t>The best night in, on tap.</a:t>
             </a:r>
           </a:p>
         </p:txBody>
@@ -20497,8 +20497,8 @@
         </p:nvSpPr>
         <p:spPr>
           <a:xfrm>
-            <a:off x="914400" y="2084831"/>
-            <a:ext cx="8778240" cy="548640"/>
+            <a:off x="914400" y="4114800"/>
+            <a:ext cx="7863840" cy="2011680"/>
           </a:xfrm>
           <a:prstGeom prst="rect">
             <a:avLst/>
@@ -20513,631 +20513,39 @@
           <a:p>
             <a:pPr algn="l">
               <a:lnSpc>
-                <a:spcPct val="140000"/>
+                <a:spcPct val="150000"/>
               </a:lnSpc>
+              <a:spcAft>
+                <a:spcPts val="800"/>
+              </a:spcAft>
             </a:pPr>
             <a:r>
-              <a:rPr sz="1300" b="0">
+              <a:rPr sz="1400" b="0">
                 <a:solidFill>
-                  <a:srgbClr val="666666"/>
+                  <a:srgbClr val="111111"/>
                 </a:solidFill>
                 <a:latin typeface="Poppins"/>
               </a:rPr>
-              <a:t>Pick one, or take the one closest and we will work it up.</a:t>
+              <a:t>Chosen on 24 September from three drafts. It leans on occasion and hosting, which is the closest of the three to the idea underneath it and the easiest to build a campaign around.</a:t>
             </a:r>
           </a:p>
-        </p:txBody>
-      </p:sp>
-      <p:graphicFrame>
-        <p:nvGraphicFramePr>
-          <p:cNvPr id="5" name="Table 4"/>
-          <p:cNvGraphicFramePr>
-            <a:graphicFrameLocks noGrp="1"/>
-          </p:cNvGraphicFramePr>
-          <p:nvPr/>
-        </p:nvGraphicFramePr>
-        <p:xfrm>
-          <a:off x="914400" y="2880360"/>
-          <a:ext cx="10362894" cy="1721027"/>
-        </p:xfrm>
-        <a:graphic>
-          <a:graphicData uri="http://schemas.openxmlformats.org/drawingml/2006/table">
-            <a:tbl>
-              <a:tblPr firstRow="0" bandRow="0">
-                <a:tableStyleId>{2D5ABB26-0587-4C30-8999-92F81FD0307C}</a:tableStyleId>
-              </a:tblPr>
-              <a:tblGrid>
-                <a:gridCol w="518144"/>
-                <a:gridCol w="3834271"/>
-                <a:gridCol w="6010479"/>
-              </a:tblGrid>
-              <a:tr h="274320">
-                <a:tc>
-                  <a:txBody>
-                    <a:bodyPr wrap="square"/>
-                    <a:lstStyle/>
-                    <a:p>
-                      <a:pPr>
-                        <a:lnSpc>
-                          <a:spcPct val="134000"/>
-                        </a:lnSpc>
-                      </a:pPr>
-                      <a:r>
-                        <a:rPr sz="900" b="0" spc="200">
-                          <a:solidFill>
-                            <a:srgbClr val="666666"/>
-                          </a:solidFill>
-                          <a:latin typeface="Poppins"/>
-                        </a:rPr>
-                        <a:t/>
-                      </a:r>
-                    </a:p>
-                  </a:txBody>
-                  <a:tcPr marL="0" marR="128016" marT="36576" marB="54864" anchor="t">
-                    <a:lnB w="9525" cap="flat" cmpd="sng" algn="ctr">
-                      <a:solidFill>
-                        <a:srgbClr val="D4D2D0"/>
-                      </a:solidFill>
-                    </a:lnB>
-                    <a:lnT w="0" cap="flat" cmpd="sng" algn="ctr">
-                      <a:solidFill>
-                        <a:srgbClr val="FAF8F4"/>
-                      </a:solidFill>
-                    </a:lnT>
-                    <a:lnR w="0" cap="flat" cmpd="sng" algn="ctr">
-                      <a:solidFill>
-                        <a:srgbClr val="FAF8F4"/>
-                      </a:solidFill>
-                    </a:lnR>
-                    <a:lnL w="0" cap="flat" cmpd="sng" algn="ctr">
-                      <a:solidFill>
-                        <a:srgbClr val="FAF8F4"/>
-                      </a:solidFill>
-                    </a:lnL>
-                    <a:noFill/>
-                  </a:tcPr>
-                </a:tc>
-                <a:tc>
-                  <a:txBody>
-                    <a:bodyPr wrap="square"/>
-                    <a:lstStyle/>
-                    <a:p>
-                      <a:pPr>
-                        <a:lnSpc>
-                          <a:spcPct val="134000"/>
-                        </a:lnSpc>
-                      </a:pPr>
-                      <a:r>
-                        <a:rPr sz="900" b="0" spc="200">
-                          <a:solidFill>
-                            <a:srgbClr val="666666"/>
-                          </a:solidFill>
-                          <a:latin typeface="Poppins"/>
-                        </a:rPr>
-                        <a:t>THE LINE</a:t>
-                      </a:r>
-                    </a:p>
-                  </a:txBody>
-                  <a:tcPr marL="0" marR="128016" marT="36576" marB="54864" anchor="t">
-                    <a:lnB w="9525" cap="flat" cmpd="sng" algn="ctr">
-                      <a:solidFill>
-                        <a:srgbClr val="D4D2D0"/>
-                      </a:solidFill>
-                    </a:lnB>
-                    <a:lnT w="0" cap="flat" cmpd="sng" algn="ctr">
-                      <a:solidFill>
-                        <a:srgbClr val="FAF8F4"/>
-                      </a:solidFill>
-                    </a:lnT>
-                    <a:lnR w="0" cap="flat" cmpd="sng" algn="ctr">
-                      <a:solidFill>
-                        <a:srgbClr val="FAF8F4"/>
-                      </a:solidFill>
-                    </a:lnR>
-                    <a:lnL w="0" cap="flat" cmpd="sng" algn="ctr">
-                      <a:solidFill>
-                        <a:srgbClr val="FAF8F4"/>
-                      </a:solidFill>
-                    </a:lnL>
-                    <a:noFill/>
-                  </a:tcPr>
-                </a:tc>
-                <a:tc>
-                  <a:txBody>
-                    <a:bodyPr wrap="square"/>
-                    <a:lstStyle/>
-                    <a:p>
-                      <a:pPr>
-                        <a:lnSpc>
-                          <a:spcPct val="134000"/>
-                        </a:lnSpc>
-                      </a:pPr>
-                      <a:r>
-                        <a:rPr sz="900" b="0" spc="200">
-                          <a:solidFill>
-                            <a:srgbClr val="666666"/>
-                          </a:solidFill>
-                          <a:latin typeface="Poppins"/>
-                        </a:rPr>
-                        <a:t>WHAT IT LEANS ON</a:t>
-                      </a:r>
-                    </a:p>
-                  </a:txBody>
-                  <a:tcPr marL="0" marR="128016" marT="36576" marB="54864" anchor="t">
-                    <a:lnB w="9525" cap="flat" cmpd="sng" algn="ctr">
-                      <a:solidFill>
-                        <a:srgbClr val="D4D2D0"/>
-                      </a:solidFill>
-                    </a:lnB>
-                    <a:lnT w="0" cap="flat" cmpd="sng" algn="ctr">
-                      <a:solidFill>
-                        <a:srgbClr val="FAF8F4"/>
-                      </a:solidFill>
-                    </a:lnT>
-                    <a:lnR w="0" cap="flat" cmpd="sng" algn="ctr">
-                      <a:solidFill>
-                        <a:srgbClr val="FAF8F4"/>
-                      </a:solidFill>
-                    </a:lnR>
-                    <a:lnL w="0" cap="flat" cmpd="sng" algn="ctr">
-                      <a:solidFill>
-                        <a:srgbClr val="FAF8F4"/>
-                      </a:solidFill>
-                    </a:lnL>
-                    <a:noFill/>
-                  </a:tcPr>
-                </a:tc>
-              </a:tr>
-              <a:tr h="558363">
-                <a:tc>
-                  <a:txBody>
-                    <a:bodyPr wrap="square"/>
-                    <a:lstStyle/>
-                    <a:p>
-                      <a:pPr>
-                        <a:lnSpc>
-                          <a:spcPct val="134000"/>
-                        </a:lnSpc>
-                      </a:pPr>
-                      <a:r>
-                        <a:rPr sz="1100" b="1">
-                          <a:solidFill>
-                            <a:srgbClr val="111111"/>
-                          </a:solidFill>
-                          <a:latin typeface="Poppins"/>
-                        </a:rPr>
-                        <a:t>A</a:t>
-                      </a:r>
-                    </a:p>
-                  </a:txBody>
-                  <a:tcPr marL="0" marR="128016" marT="36576" marB="54864" anchor="t">
-                    <a:lnB w="9525" cap="flat" cmpd="sng" algn="ctr">
-                      <a:solidFill>
-                        <a:srgbClr val="D4D2D0"/>
-                      </a:solidFill>
-                    </a:lnB>
-                    <a:lnT w="0" cap="flat" cmpd="sng" algn="ctr">
-                      <a:solidFill>
-                        <a:srgbClr val="FAF8F4"/>
-                      </a:solidFill>
-                    </a:lnT>
-                    <a:lnR w="0" cap="flat" cmpd="sng" algn="ctr">
-                      <a:solidFill>
-                        <a:srgbClr val="FAF8F4"/>
-                      </a:solidFill>
-                    </a:lnR>
-                    <a:lnL w="0" cap="flat" cmpd="sng" algn="ctr">
-                      <a:solidFill>
-                        <a:srgbClr val="FAF8F4"/>
-                      </a:solidFill>
-                    </a:lnL>
-                    <a:noFill/>
-                  </a:tcPr>
-                </a:tc>
-                <a:tc>
-                  <a:txBody>
-                    <a:bodyPr wrap="square"/>
-                    <a:lstStyle/>
-                    <a:p>
-                      <a:pPr>
-                        <a:lnSpc>
-                          <a:spcPct val="134000"/>
-                        </a:lnSpc>
-                      </a:pPr>
-                      <a:r>
-                        <a:rPr sz="1100" b="0">
-                          <a:solidFill>
-                            <a:srgbClr val="111111"/>
-                          </a:solidFill>
-                          <a:latin typeface="Poppins"/>
-                        </a:rPr>
-                        <a:t>The best night in, on tap.</a:t>
-                      </a:r>
-                    </a:p>
-                  </a:txBody>
-                  <a:tcPr marL="0" marR="128016" marT="36576" marB="54864" anchor="t">
-                    <a:lnB w="9525" cap="flat" cmpd="sng" algn="ctr">
-                      <a:solidFill>
-                        <a:srgbClr val="D4D2D0"/>
-                      </a:solidFill>
-                    </a:lnB>
-                    <a:lnT w="0" cap="flat" cmpd="sng" algn="ctr">
-                      <a:solidFill>
-                        <a:srgbClr val="FAF8F4"/>
-                      </a:solidFill>
-                    </a:lnT>
-                    <a:lnR w="0" cap="flat" cmpd="sng" algn="ctr">
-                      <a:solidFill>
-                        <a:srgbClr val="FAF8F4"/>
-                      </a:solidFill>
-                    </a:lnR>
-                    <a:lnL w="0" cap="flat" cmpd="sng" algn="ctr">
-                      <a:solidFill>
-                        <a:srgbClr val="FAF8F4"/>
-                      </a:solidFill>
-                    </a:lnL>
-                    <a:noFill/>
-                  </a:tcPr>
-                </a:tc>
-                <a:tc>
-                  <a:txBody>
-                    <a:bodyPr wrap="square"/>
-                    <a:lstStyle/>
-                    <a:p>
-                      <a:pPr>
-                        <a:lnSpc>
-                          <a:spcPct val="134000"/>
-                        </a:lnSpc>
-                      </a:pPr>
-                      <a:r>
-                        <a:rPr sz="1100" b="0">
-                          <a:solidFill>
-                            <a:srgbClr val="111111"/>
-                          </a:solidFill>
-                          <a:latin typeface="Poppins"/>
-                        </a:rPr>
-                        <a:t>Occasion and hosting. Closest to the home entertainment idea, and the easiest to build a campaign around</a:t>
-                      </a:r>
-                    </a:p>
-                  </a:txBody>
-                  <a:tcPr marL="0" marR="128016" marT="36576" marB="54864" anchor="t">
-                    <a:lnB w="9525" cap="flat" cmpd="sng" algn="ctr">
-                      <a:solidFill>
-                        <a:srgbClr val="D4D2D0"/>
-                      </a:solidFill>
-                    </a:lnB>
-                    <a:lnT w="0" cap="flat" cmpd="sng" algn="ctr">
-                      <a:solidFill>
-                        <a:srgbClr val="FAF8F4"/>
-                      </a:solidFill>
-                    </a:lnT>
-                    <a:lnR w="0" cap="flat" cmpd="sng" algn="ctr">
-                      <a:solidFill>
-                        <a:srgbClr val="FAF8F4"/>
-                      </a:solidFill>
-                    </a:lnR>
-                    <a:lnL w="0" cap="flat" cmpd="sng" algn="ctr">
-                      <a:solidFill>
-                        <a:srgbClr val="FAF8F4"/>
-                      </a:solidFill>
-                    </a:lnL>
-                    <a:noFill/>
-                  </a:tcPr>
-                </a:tc>
-              </a:tr>
-              <a:tr h="329981">
-                <a:tc>
-                  <a:txBody>
-                    <a:bodyPr wrap="square"/>
-                    <a:lstStyle/>
-                    <a:p>
-                      <a:pPr>
-                        <a:lnSpc>
-                          <a:spcPct val="134000"/>
-                        </a:lnSpc>
-                      </a:pPr>
-                      <a:r>
-                        <a:rPr sz="1100" b="1">
-                          <a:solidFill>
-                            <a:srgbClr val="111111"/>
-                          </a:solidFill>
-                          <a:latin typeface="Poppins"/>
-                        </a:rPr>
-                        <a:t>B</a:t>
-                      </a:r>
-                    </a:p>
-                  </a:txBody>
-                  <a:tcPr marL="0" marR="128016" marT="36576" marB="54864" anchor="t">
-                    <a:lnB w="9525" cap="flat" cmpd="sng" algn="ctr">
-                      <a:solidFill>
-                        <a:srgbClr val="D4D2D0"/>
-                      </a:solidFill>
-                    </a:lnB>
-                    <a:lnT w="0" cap="flat" cmpd="sng" algn="ctr">
-                      <a:solidFill>
-                        <a:srgbClr val="FAF8F4"/>
-                      </a:solidFill>
-                    </a:lnT>
-                    <a:lnR w="0" cap="flat" cmpd="sng" algn="ctr">
-                      <a:solidFill>
-                        <a:srgbClr val="FAF8F4"/>
-                      </a:solidFill>
-                    </a:lnR>
-                    <a:lnL w="0" cap="flat" cmpd="sng" algn="ctr">
-                      <a:solidFill>
-                        <a:srgbClr val="FAF8F4"/>
-                      </a:solidFill>
-                    </a:lnL>
-                    <a:noFill/>
-                  </a:tcPr>
-                </a:tc>
-                <a:tc>
-                  <a:txBody>
-                    <a:bodyPr wrap="square"/>
-                    <a:lstStyle/>
-                    <a:p>
-                      <a:pPr>
-                        <a:lnSpc>
-                          <a:spcPct val="134000"/>
-                        </a:lnSpc>
-                      </a:pPr>
-                      <a:r>
-                        <a:rPr sz="1100" b="0">
-                          <a:solidFill>
-                            <a:srgbClr val="111111"/>
-                          </a:solidFill>
-                          <a:latin typeface="Poppins"/>
-                        </a:rPr>
-                        <a:t>Your place. The one everyone wants to be at.</a:t>
-                      </a:r>
-                    </a:p>
-                  </a:txBody>
-                  <a:tcPr marL="0" marR="128016" marT="36576" marB="54864" anchor="t">
-                    <a:lnB w="9525" cap="flat" cmpd="sng" algn="ctr">
-                      <a:solidFill>
-                        <a:srgbClr val="D4D2D0"/>
-                      </a:solidFill>
-                    </a:lnB>
-                    <a:lnT w="0" cap="flat" cmpd="sng" algn="ctr">
-                      <a:solidFill>
-                        <a:srgbClr val="FAF8F4"/>
-                      </a:solidFill>
-                    </a:lnT>
-                    <a:lnR w="0" cap="flat" cmpd="sng" algn="ctr">
-                      <a:solidFill>
-                        <a:srgbClr val="FAF8F4"/>
-                      </a:solidFill>
-                    </a:lnR>
-                    <a:lnL w="0" cap="flat" cmpd="sng" algn="ctr">
-                      <a:solidFill>
-                        <a:srgbClr val="FAF8F4"/>
-                      </a:solidFill>
-                    </a:lnL>
-                    <a:noFill/>
-                  </a:tcPr>
-                </a:tc>
-                <a:tc>
-                  <a:txBody>
-                    <a:bodyPr wrap="square"/>
-                    <a:lstStyle/>
-                    <a:p>
-                      <a:pPr>
-                        <a:lnSpc>
-                          <a:spcPct val="134000"/>
-                        </a:lnSpc>
-                      </a:pPr>
-                      <a:r>
-                        <a:rPr sz="1100" b="0">
-                          <a:solidFill>
-                            <a:srgbClr val="111111"/>
-                          </a:solidFill>
-                          <a:latin typeface="Poppins"/>
-                        </a:rPr>
-                        <a:t>Social proof. Strongest for the be-the-envy-of-your-friends register you already use</a:t>
-                      </a:r>
-                    </a:p>
-                  </a:txBody>
-                  <a:tcPr marL="0" marR="128016" marT="36576" marB="54864" anchor="t">
-                    <a:lnB w="9525" cap="flat" cmpd="sng" algn="ctr">
-                      <a:solidFill>
-                        <a:srgbClr val="D4D2D0"/>
-                      </a:solidFill>
-                    </a:lnB>
-                    <a:lnT w="0" cap="flat" cmpd="sng" algn="ctr">
-                      <a:solidFill>
-                        <a:srgbClr val="FAF8F4"/>
-                      </a:solidFill>
-                    </a:lnT>
-                    <a:lnR w="0" cap="flat" cmpd="sng" algn="ctr">
-                      <a:solidFill>
-                        <a:srgbClr val="FAF8F4"/>
-                      </a:solidFill>
-                    </a:lnR>
-                    <a:lnL w="0" cap="flat" cmpd="sng" algn="ctr">
-                      <a:solidFill>
-                        <a:srgbClr val="FAF8F4"/>
-                      </a:solidFill>
-                    </a:lnL>
-                    <a:noFill/>
-                  </a:tcPr>
-                </a:tc>
-              </a:tr>
-              <a:tr h="558363">
-                <a:tc>
-                  <a:txBody>
-                    <a:bodyPr wrap="square"/>
-                    <a:lstStyle/>
-                    <a:p>
-                      <a:pPr>
-                        <a:lnSpc>
-                          <a:spcPct val="134000"/>
-                        </a:lnSpc>
-                      </a:pPr>
-                      <a:r>
-                        <a:rPr sz="1100" b="1">
-                          <a:solidFill>
-                            <a:srgbClr val="111111"/>
-                          </a:solidFill>
-                          <a:latin typeface="Poppins"/>
-                        </a:rPr>
-                        <a:t>C</a:t>
-                      </a:r>
-                    </a:p>
-                  </a:txBody>
-                  <a:tcPr marL="0" marR="128016" marT="36576" marB="54864" anchor="t">
-                    <a:lnB w="9525" cap="flat" cmpd="sng" algn="ctr">
-                      <a:solidFill>
-                        <a:srgbClr val="D4D2D0"/>
-                      </a:solidFill>
-                    </a:lnB>
-                    <a:lnT w="0" cap="flat" cmpd="sng" algn="ctr">
-                      <a:solidFill>
-                        <a:srgbClr val="FAF8F4"/>
-                      </a:solidFill>
-                    </a:lnT>
-                    <a:lnR w="0" cap="flat" cmpd="sng" algn="ctr">
-                      <a:solidFill>
-                        <a:srgbClr val="FAF8F4"/>
-                      </a:solidFill>
-                    </a:lnR>
-                    <a:lnL w="0" cap="flat" cmpd="sng" algn="ctr">
-                      <a:solidFill>
-                        <a:srgbClr val="FAF8F4"/>
-                      </a:solidFill>
-                    </a:lnL>
-                    <a:noFill/>
-                  </a:tcPr>
-                </a:tc>
-                <a:tc>
-                  <a:txBody>
-                    <a:bodyPr wrap="square"/>
-                    <a:lstStyle/>
-                    <a:p>
-                      <a:pPr>
-                        <a:lnSpc>
-                          <a:spcPct val="134000"/>
-                        </a:lnSpc>
-                      </a:pPr>
-                      <a:r>
-                        <a:rPr sz="1100" b="0">
-                          <a:solidFill>
-                            <a:srgbClr val="111111"/>
-                          </a:solidFill>
-                          <a:latin typeface="Poppins"/>
-                        </a:rPr>
-                        <a:t>Pour like a pub. Host like a home.</a:t>
-                      </a:r>
-                    </a:p>
-                  </a:txBody>
-                  <a:tcPr marL="0" marR="128016" marT="36576" marB="54864" anchor="t">
-                    <a:lnB w="9525" cap="flat" cmpd="sng" algn="ctr">
-                      <a:solidFill>
-                        <a:srgbClr val="D4D2D0"/>
-                      </a:solidFill>
-                    </a:lnB>
-                    <a:lnT w="0" cap="flat" cmpd="sng" algn="ctr">
-                      <a:solidFill>
-                        <a:srgbClr val="FAF8F4"/>
-                      </a:solidFill>
-                    </a:lnT>
-                    <a:lnR w="0" cap="flat" cmpd="sng" algn="ctr">
-                      <a:solidFill>
-                        <a:srgbClr val="FAF8F4"/>
-                      </a:solidFill>
-                    </a:lnR>
-                    <a:lnL w="0" cap="flat" cmpd="sng" algn="ctr">
-                      <a:solidFill>
-                        <a:srgbClr val="FAF8F4"/>
-                      </a:solidFill>
-                    </a:lnL>
-                    <a:noFill/>
-                  </a:tcPr>
-                </a:tc>
-                <a:tc>
-                  <a:txBody>
-                    <a:bodyPr wrap="square"/>
-                    <a:lstStyle/>
-                    <a:p>
-                      <a:pPr>
-                        <a:lnSpc>
-                          <a:spcPct val="134000"/>
-                        </a:lnSpc>
-                      </a:pPr>
-                      <a:r>
-                        <a:rPr sz="1100" b="0">
-                          <a:solidFill>
-                            <a:srgbClr val="111111"/>
-                          </a:solidFill>
-                          <a:latin typeface="Poppins"/>
-                        </a:rPr>
-                        <a:t>Product and craft. Keeps the beer quality argument visible for the people who buy on taste</a:t>
-                      </a:r>
-                    </a:p>
-                  </a:txBody>
-                  <a:tcPr marL="0" marR="128016" marT="36576" marB="54864" anchor="t">
-                    <a:lnB w="9525" cap="flat" cmpd="sng" algn="ctr">
-                      <a:solidFill>
-                        <a:srgbClr val="D4D2D0"/>
-                      </a:solidFill>
-                    </a:lnB>
-                    <a:lnT w="0" cap="flat" cmpd="sng" algn="ctr">
-                      <a:solidFill>
-                        <a:srgbClr val="FAF8F4"/>
-                      </a:solidFill>
-                    </a:lnT>
-                    <a:lnR w="0" cap="flat" cmpd="sng" algn="ctr">
-                      <a:solidFill>
-                        <a:srgbClr val="FAF8F4"/>
-                      </a:solidFill>
-                    </a:lnR>
-                    <a:lnL w="0" cap="flat" cmpd="sng" algn="ctr">
-                      <a:solidFill>
-                        <a:srgbClr val="FAF8F4"/>
-                      </a:solidFill>
-                    </a:lnL>
-                    <a:noFill/>
-                  </a:tcPr>
-                </a:tc>
-              </a:tr>
-            </a:tbl>
-          </a:graphicData>
-        </a:graphic>
-      </p:graphicFrame>
-      <p:sp>
-        <p:nvSpPr>
-          <p:cNvPr id="6" name="TextBox 5"/>
-          <p:cNvSpPr txBox="1"/>
-          <p:nvPr/>
-        </p:nvSpPr>
-        <p:spPr>
-          <a:xfrm>
-            <a:off x="914400" y="6291072"/>
-            <a:ext cx="10362895" cy="274320"/>
-          </a:xfrm>
-          <a:prstGeom prst="rect">
-            <a:avLst/>
-          </a:prstGeom>
-          <a:noFill/>
-        </p:spPr>
-        <p:txBody>
-          <a:bodyPr wrap="square" lIns="0" rIns="0" tIns="0" bIns="0" anchor="t">
-            <a:spAutoFit/>
-          </a:bodyPr>
-          <a:lstStyle/>
           <a:p>
             <a:pPr algn="l">
               <a:lnSpc>
-                <a:spcPct val="100000"/>
+                <a:spcPct val="150000"/>
               </a:lnSpc>
+              <a:spcAft>
+                <a:spcPts val="800"/>
+              </a:spcAft>
             </a:pPr>
             <a:r>
-              <a:rPr sz="900" b="0">
+              <a:rPr sz="1400" b="0">
                 <a:solidFill>
-                  <a:srgbClr val="666666"/>
+                  <a:srgbClr val="111111"/>
                 </a:solidFill>
                 <a:latin typeface="Poppins"/>
               </a:rPr>
-              <a:t>Options for discussion, not approved copy. Christy owns the final wording, and it should be settled before key messaging is written.</a:t>
+              <a:t>The two it beat name arguments the work still has to carry: social proof and the be-the-envy-of-your-friends register, and the beer quality argument for the people who buy on taste. Christy works the line into key messaging inside 30 days.</a:t>
             </a:r>
           </a:p>
         </p:txBody>

--- a/00 Admin/04 Commercial + SOW/JP_TapThat_ProposalDeck_v03.pptx
+++ b/00 Admin/04 Commercial + SOW/JP_TapThat_ProposalDeck_v03.pptx
@@ -35,6 +35,7 @@
     <p:sldId id="283" r:id="rId34"/>
     <p:sldId id="284" r:id="rId35"/>
     <p:sldId id="285" r:id="rId36"/>
+    <p:sldId id="286" r:id="rId37"/>
   </p:sldIdLst>
   <p:sldSz cx="12191695" cy="6858000" type="screen4x3"/>
   <p:notesSz cx="6858000" cy="9144000"/>
@@ -12618,6 +12619,210 @@
     <p:bg>
       <p:bgPr>
         <a:solidFill>
+          <a:srgbClr val="FAF8F4"/>
+        </a:solidFill>
+        <a:effectLst/>
+      </p:bgPr>
+    </p:bg>
+    <p:spTree>
+      <p:nvGrpSpPr>
+        <p:cNvPr id="1" name=""/>
+        <p:cNvGrpSpPr/>
+        <p:nvPr/>
+      </p:nvGrpSpPr>
+      <p:grpSpPr/>
+      <p:sp>
+        <p:nvSpPr>
+          <p:cNvPr id="2" name="TextBox 1"/>
+          <p:cNvSpPr txBox="1"/>
+          <p:nvPr/>
+        </p:nvSpPr>
+        <p:spPr>
+          <a:xfrm>
+            <a:off x="914400" y="914400"/>
+            <a:ext cx="10362895" cy="274320"/>
+          </a:xfrm>
+          <a:prstGeom prst="rect">
+            <a:avLst/>
+          </a:prstGeom>
+          <a:noFill/>
+        </p:spPr>
+        <p:txBody>
+          <a:bodyPr wrap="square" lIns="0" rIns="0" tIns="0" bIns="0" anchor="t">
+            <a:spAutoFit/>
+          </a:bodyPr>
+          <a:lstStyle/>
+          <a:p>
+            <a:pPr algn="l">
+              <a:lnSpc>
+                <a:spcPct val="100000"/>
+              </a:lnSpc>
+            </a:pPr>
+            <a:r>
+              <a:rPr sz="900" b="0" spc="200">
+                <a:solidFill>
+                  <a:srgbClr val="111111"/>
+                </a:solidFill>
+                <a:latin typeface="Poppins"/>
+              </a:rPr>
+              <a:t>BEYOND THIS ENGAGEMENT</a:t>
+            </a:r>
+          </a:p>
+        </p:txBody>
+      </p:sp>
+      <p:sp>
+        <p:nvSpPr>
+          <p:cNvPr id="3" name="TextBox 2"/>
+          <p:cNvSpPr txBox="1"/>
+          <p:nvPr/>
+        </p:nvSpPr>
+        <p:spPr>
+          <a:xfrm>
+            <a:off x="914400" y="1691640"/>
+            <a:ext cx="10362895" cy="2103120"/>
+          </a:xfrm>
+          <a:prstGeom prst="rect">
+            <a:avLst/>
+          </a:prstGeom>
+          <a:noFill/>
+        </p:spPr>
+        <p:txBody>
+          <a:bodyPr wrap="square" lIns="0" rIns="0" tIns="0" bIns="0" anchor="t">
+            <a:spAutoFit/>
+          </a:bodyPr>
+          <a:lstStyle/>
+          <a:p>
+            <a:pPr algn="l">
+              <a:lnSpc>
+                <a:spcPct val="112000"/>
+              </a:lnSpc>
+            </a:pPr>
+            <a:r>
+              <a:rPr sz="4200" b="0">
+                <a:solidFill>
+                  <a:srgbClr val="111111"/>
+                </a:solidFill>
+                <a:latin typeface="Poppins"/>
+              </a:rPr>
+              <a:t>Two of these are briefs, not the work itself.</a:t>
+            </a:r>
+          </a:p>
+        </p:txBody>
+      </p:sp>
+      <p:sp>
+        <p:nvSpPr>
+          <p:cNvPr id="4" name="TextBox 3"/>
+          <p:cNvSpPr txBox="1"/>
+          <p:nvPr/>
+        </p:nvSpPr>
+        <p:spPr>
+          <a:xfrm>
+            <a:off x="914400" y="4114800"/>
+            <a:ext cx="7863840" cy="2011680"/>
+          </a:xfrm>
+          <a:prstGeom prst="rect">
+            <a:avLst/>
+          </a:prstGeom>
+          <a:noFill/>
+        </p:spPr>
+        <p:txBody>
+          <a:bodyPr wrap="square" lIns="0" rIns="0" tIns="0" bIns="0" anchor="t">
+            <a:spAutoFit/>
+          </a:bodyPr>
+          <a:lstStyle/>
+          <a:p>
+            <a:pPr algn="l">
+              <a:lnSpc>
+                <a:spcPct val="150000"/>
+              </a:lnSpc>
+              <a:spcAft>
+                <a:spcPts val="800"/>
+              </a:spcAft>
+            </a:pPr>
+            <a:r>
+              <a:rPr sz="1400" b="0">
+                <a:solidFill>
+                  <a:srgbClr val="111111"/>
+                </a:solidFill>
+                <a:latin typeface="Poppins"/>
+              </a:rPr>
+              <a:t>Designing for her, and the unit as an object worth owning. Writing a brief is a month. Acting on one is product and industrial design, with different people in it and a different order of spend.</a:t>
+            </a:r>
+          </a:p>
+          <a:p>
+            <a:pPr algn="l">
+              <a:lnSpc>
+                <a:spcPct val="150000"/>
+              </a:lnSpc>
+              <a:spcAft>
+                <a:spcPts val="800"/>
+              </a:spcAft>
+            </a:pPr>
+            <a:r>
+              <a:rPr sz="1400" b="0">
+                <a:solidFill>
+                  <a:srgbClr val="111111"/>
+                </a:solidFill>
+                <a:latin typeface="Poppins"/>
+              </a:rPr>
+              <a:t>Both are scoped as a separate project in the Product Design Brief, on the delivery site at /product-design-brief. It runs alongside this engagement rather than inside it and is quoted separately. Nothing in it changes what is covered here or what it costs.</a:t>
+            </a:r>
+          </a:p>
+        </p:txBody>
+      </p:sp>
+      <p:sp>
+        <p:nvSpPr>
+          <p:cNvPr id="5" name="TextBox 4"/>
+          <p:cNvSpPr txBox="1"/>
+          <p:nvPr/>
+        </p:nvSpPr>
+        <p:spPr>
+          <a:xfrm>
+            <a:off x="914400" y="6291072"/>
+            <a:ext cx="10362895" cy="274320"/>
+          </a:xfrm>
+          <a:prstGeom prst="rect">
+            <a:avLst/>
+          </a:prstGeom>
+          <a:noFill/>
+        </p:spPr>
+        <p:txBody>
+          <a:bodyPr wrap="square" lIns="0" rIns="0" tIns="0" bIns="0" anchor="t">
+            <a:spAutoFit/>
+          </a:bodyPr>
+          <a:lstStyle/>
+          <a:p>
+            <a:pPr algn="l">
+              <a:lnSpc>
+                <a:spcPct val="100000"/>
+              </a:lnSpc>
+            </a:pPr>
+            <a:r>
+              <a:rPr sz="900" b="0">
+                <a:solidFill>
+                  <a:srgbClr val="666666"/>
+                </a:solidFill>
+                <a:latin typeface="Poppins"/>
+              </a:rPr>
+              <a:t>The decision it needs first is whether Tap That makes hardware, specifies it with a manufacturer, or licences the design.</a:t>
+            </a:r>
+          </a:p>
+        </p:txBody>
+      </p:sp>
+    </p:spTree>
+  </p:cSld>
+  <p:clrMapOvr>
+    <a:masterClrMapping/>
+  </p:clrMapOvr>
+</p:sld>
+</file>
+
+<file path=ppt/slides/slide21.xml><?xml version="1.0" encoding="utf-8"?>
+<p:sld xmlns:a="http://schemas.openxmlformats.org/drawingml/2006/main" xmlns:p="http://schemas.openxmlformats.org/presentationml/2006/main" xmlns:r="http://schemas.openxmlformats.org/officeDocument/2006/relationships">
+  <p:cSld>
+    <p:bg>
+      <p:bgPr>
+        <a:solidFill>
           <a:srgbClr val="111111"/>
         </a:solidFill>
         <a:effectLst/>
@@ -12743,1003 +12948,6 @@
                 <a:latin typeface="Poppins"/>
               </a:rPr>
               <a:t>The first sprint, the ladder, and what we need from you.</a:t>
-            </a:r>
-          </a:p>
-        </p:txBody>
-      </p:sp>
-    </p:spTree>
-  </p:cSld>
-  <p:clrMapOvr>
-    <a:masterClrMapping/>
-  </p:clrMapOvr>
-</p:sld>
-</file>
-
-<file path=ppt/slides/slide21.xml><?xml version="1.0" encoding="utf-8"?>
-<p:sld xmlns:a="http://schemas.openxmlformats.org/drawingml/2006/main" xmlns:p="http://schemas.openxmlformats.org/presentationml/2006/main" xmlns:r="http://schemas.openxmlformats.org/officeDocument/2006/relationships">
-  <p:cSld>
-    <p:bg>
-      <p:bgPr>
-        <a:solidFill>
-          <a:srgbClr val="FAF8F4"/>
-        </a:solidFill>
-        <a:effectLst/>
-      </p:bgPr>
-    </p:bg>
-    <p:spTree>
-      <p:nvGrpSpPr>
-        <p:cNvPr id="1" name=""/>
-        <p:cNvGrpSpPr/>
-        <p:nvPr/>
-      </p:nvGrpSpPr>
-      <p:grpSpPr/>
-      <p:sp>
-        <p:nvSpPr>
-          <p:cNvPr id="2" name="TextBox 1"/>
-          <p:cNvSpPr txBox="1"/>
-          <p:nvPr/>
-        </p:nvSpPr>
-        <p:spPr>
-          <a:xfrm>
-            <a:off x="914400" y="914400"/>
-            <a:ext cx="10362895" cy="274320"/>
-          </a:xfrm>
-          <a:prstGeom prst="rect">
-            <a:avLst/>
-          </a:prstGeom>
-          <a:noFill/>
-        </p:spPr>
-        <p:txBody>
-          <a:bodyPr wrap="square" lIns="0" rIns="0" tIns="0" bIns="0" anchor="t">
-            <a:spAutoFit/>
-          </a:bodyPr>
-          <a:lstStyle/>
-          <a:p>
-            <a:pPr algn="l">
-              <a:lnSpc>
-                <a:spcPct val="100000"/>
-              </a:lnSpc>
-            </a:pPr>
-            <a:r>
-              <a:rPr sz="900" b="0" spc="200">
-                <a:solidFill>
-                  <a:srgbClr val="111111"/>
-                </a:solidFill>
-                <a:latin typeface="Poppins"/>
-              </a:rPr>
-              <a:t>THE FIRST 30 DAYS</a:t>
-            </a:r>
-          </a:p>
-        </p:txBody>
-      </p:sp>
-      <p:sp>
-        <p:nvSpPr>
-          <p:cNvPr id="3" name="TextBox 2"/>
-          <p:cNvSpPr txBox="1"/>
-          <p:nvPr/>
-        </p:nvSpPr>
-        <p:spPr>
-          <a:xfrm>
-            <a:off x="914400" y="1371600"/>
-            <a:ext cx="10362895" cy="640080"/>
-          </a:xfrm>
-          <a:prstGeom prst="rect">
-            <a:avLst/>
-          </a:prstGeom>
-          <a:noFill/>
-        </p:spPr>
-        <p:txBody>
-          <a:bodyPr wrap="square" lIns="0" rIns="0" tIns="0" bIns="0" anchor="t">
-            <a:spAutoFit/>
-          </a:bodyPr>
-          <a:lstStyle/>
-          <a:p>
-            <a:pPr algn="l">
-              <a:lnSpc>
-                <a:spcPct val="112000"/>
-              </a:lnSpc>
-            </a:pPr>
-            <a:r>
-              <a:rPr sz="2800" b="0">
-                <a:solidFill>
-                  <a:srgbClr val="111111"/>
-                </a:solidFill>
-                <a:latin typeface="Poppins"/>
-              </a:rPr>
-              <a:t>Your own 30-day list is the first sprint.</a:t>
-            </a:r>
-          </a:p>
-        </p:txBody>
-      </p:sp>
-      <p:graphicFrame>
-        <p:nvGraphicFramePr>
-          <p:cNvPr id="4" name="Table 3"/>
-          <p:cNvGraphicFramePr>
-            <a:graphicFrameLocks noGrp="1"/>
-          </p:cNvGraphicFramePr>
-          <p:nvPr/>
-        </p:nvGraphicFramePr>
-        <p:xfrm>
-          <a:off x="914400" y="2194560"/>
-          <a:ext cx="10362894" cy="2914168"/>
-        </p:xfrm>
-        <a:graphic>
-          <a:graphicData uri="http://schemas.openxmlformats.org/drawingml/2006/table">
-            <a:tbl>
-              <a:tblPr firstRow="0" bandRow="0">
-                <a:tableStyleId>{2D5ABB26-0587-4C30-8999-92F81FD0307C}</a:tableStyleId>
-              </a:tblPr>
-              <a:tblGrid>
-                <a:gridCol w="518144"/>
-                <a:gridCol w="9844750"/>
-              </a:tblGrid>
-              <a:tr h="274320">
-                <a:tc>
-                  <a:txBody>
-                    <a:bodyPr wrap="square"/>
-                    <a:lstStyle/>
-                    <a:p>
-                      <a:pPr>
-                        <a:lnSpc>
-                          <a:spcPct val="134000"/>
-                        </a:lnSpc>
-                      </a:pPr>
-                      <a:r>
-                        <a:rPr sz="900" b="0" spc="200">
-                          <a:solidFill>
-                            <a:srgbClr val="666666"/>
-                          </a:solidFill>
-                          <a:latin typeface="Poppins"/>
-                        </a:rPr>
-                        <a:t/>
-                      </a:r>
-                    </a:p>
-                  </a:txBody>
-                  <a:tcPr marL="0" marR="128016" marT="36576" marB="54864" anchor="t">
-                    <a:lnB w="9525" cap="flat" cmpd="sng" algn="ctr">
-                      <a:solidFill>
-                        <a:srgbClr val="D4D2D0"/>
-                      </a:solidFill>
-                    </a:lnB>
-                    <a:lnT w="0" cap="flat" cmpd="sng" algn="ctr">
-                      <a:solidFill>
-                        <a:srgbClr val="FAF8F4"/>
-                      </a:solidFill>
-                    </a:lnT>
-                    <a:lnR w="0" cap="flat" cmpd="sng" algn="ctr">
-                      <a:solidFill>
-                        <a:srgbClr val="FAF8F4"/>
-                      </a:solidFill>
-                    </a:lnR>
-                    <a:lnL w="0" cap="flat" cmpd="sng" algn="ctr">
-                      <a:solidFill>
-                        <a:srgbClr val="FAF8F4"/>
-                      </a:solidFill>
-                    </a:lnL>
-                    <a:noFill/>
-                  </a:tcPr>
-                </a:tc>
-                <a:tc>
-                  <a:txBody>
-                    <a:bodyPr wrap="square"/>
-                    <a:lstStyle/>
-                    <a:p>
-                      <a:pPr>
-                        <a:lnSpc>
-                          <a:spcPct val="134000"/>
-                        </a:lnSpc>
-                      </a:pPr>
-                      <a:r>
-                        <a:rPr sz="900" b="0" spc="200">
-                          <a:solidFill>
-                            <a:srgbClr val="666666"/>
-                          </a:solidFill>
-                          <a:latin typeface="Poppins"/>
-                        </a:rPr>
-                        <a:t>WHAT CLOSES</a:t>
-                      </a:r>
-                    </a:p>
-                  </a:txBody>
-                  <a:tcPr marL="0" marR="128016" marT="36576" marB="54864" anchor="t">
-                    <a:lnB w="9525" cap="flat" cmpd="sng" algn="ctr">
-                      <a:solidFill>
-                        <a:srgbClr val="D4D2D0"/>
-                      </a:solidFill>
-                    </a:lnB>
-                    <a:lnT w="0" cap="flat" cmpd="sng" algn="ctr">
-                      <a:solidFill>
-                        <a:srgbClr val="FAF8F4"/>
-                      </a:solidFill>
-                    </a:lnT>
-                    <a:lnR w="0" cap="flat" cmpd="sng" algn="ctr">
-                      <a:solidFill>
-                        <a:srgbClr val="FAF8F4"/>
-                      </a:solidFill>
-                    </a:lnR>
-                    <a:lnL w="0" cap="flat" cmpd="sng" algn="ctr">
-                      <a:solidFill>
-                        <a:srgbClr val="FAF8F4"/>
-                      </a:solidFill>
-                    </a:lnL>
-                    <a:noFill/>
-                  </a:tcPr>
-                </a:tc>
-              </a:tr>
-              <a:tr h="329981">
-                <a:tc>
-                  <a:txBody>
-                    <a:bodyPr wrap="square"/>
-                    <a:lstStyle/>
-                    <a:p>
-                      <a:pPr>
-                        <a:lnSpc>
-                          <a:spcPct val="134000"/>
-                        </a:lnSpc>
-                      </a:pPr>
-                      <a:r>
-                        <a:rPr sz="1100" b="1">
-                          <a:solidFill>
-                            <a:srgbClr val="111111"/>
-                          </a:solidFill>
-                          <a:latin typeface="Poppins"/>
-                        </a:rPr>
-                        <a:t>01</a:t>
-                      </a:r>
-                    </a:p>
-                  </a:txBody>
-                  <a:tcPr marL="0" marR="128016" marT="36576" marB="54864" anchor="t">
-                    <a:lnB w="9525" cap="flat" cmpd="sng" algn="ctr">
-                      <a:solidFill>
-                        <a:srgbClr val="D4D2D0"/>
-                      </a:solidFill>
-                    </a:lnB>
-                    <a:lnT w="0" cap="flat" cmpd="sng" algn="ctr">
-                      <a:solidFill>
-                        <a:srgbClr val="FAF8F4"/>
-                      </a:solidFill>
-                    </a:lnT>
-                    <a:lnR w="0" cap="flat" cmpd="sng" algn="ctr">
-                      <a:solidFill>
-                        <a:srgbClr val="FAF8F4"/>
-                      </a:solidFill>
-                    </a:lnR>
-                    <a:lnL w="0" cap="flat" cmpd="sng" algn="ctr">
-                      <a:solidFill>
-                        <a:srgbClr val="FAF8F4"/>
-                      </a:solidFill>
-                    </a:lnL>
-                    <a:noFill/>
-                  </a:tcPr>
-                </a:tc>
-                <a:tc>
-                  <a:txBody>
-                    <a:bodyPr wrap="square"/>
-                    <a:lstStyle/>
-                    <a:p>
-                      <a:pPr>
-                        <a:lnSpc>
-                          <a:spcPct val="134000"/>
-                        </a:lnSpc>
-                      </a:pPr>
-                      <a:r>
-                        <a:rPr sz="1100" b="0">
-                          <a:solidFill>
-                            <a:srgbClr val="111111"/>
-                          </a:solidFill>
-                          <a:latin typeface="Poppins"/>
-                        </a:rPr>
-                        <a:t>The shape decision, finished. Showroom or event space</a:t>
-                      </a:r>
-                    </a:p>
-                  </a:txBody>
-                  <a:tcPr marL="0" marR="128016" marT="36576" marB="54864" anchor="t">
-                    <a:lnB w="9525" cap="flat" cmpd="sng" algn="ctr">
-                      <a:solidFill>
-                        <a:srgbClr val="D4D2D0"/>
-                      </a:solidFill>
-                    </a:lnB>
-                    <a:lnT w="0" cap="flat" cmpd="sng" algn="ctr">
-                      <a:solidFill>
-                        <a:srgbClr val="FAF8F4"/>
-                      </a:solidFill>
-                    </a:lnT>
-                    <a:lnR w="0" cap="flat" cmpd="sng" algn="ctr">
-                      <a:solidFill>
-                        <a:srgbClr val="FAF8F4"/>
-                      </a:solidFill>
-                    </a:lnR>
-                    <a:lnL w="0" cap="flat" cmpd="sng" algn="ctr">
-                      <a:solidFill>
-                        <a:srgbClr val="FAF8F4"/>
-                      </a:solidFill>
-                    </a:lnL>
-                    <a:noFill/>
-                  </a:tcPr>
-                </a:tc>
-              </a:tr>
-              <a:tr h="329981">
-                <a:tc>
-                  <a:txBody>
-                    <a:bodyPr wrap="square"/>
-                    <a:lstStyle/>
-                    <a:p>
-                      <a:pPr>
-                        <a:lnSpc>
-                          <a:spcPct val="134000"/>
-                        </a:lnSpc>
-                      </a:pPr>
-                      <a:r>
-                        <a:rPr sz="1100" b="1">
-                          <a:solidFill>
-                            <a:srgbClr val="111111"/>
-                          </a:solidFill>
-                          <a:latin typeface="Poppins"/>
-                        </a:rPr>
-                        <a:t>02</a:t>
-                      </a:r>
-                    </a:p>
-                  </a:txBody>
-                  <a:tcPr marL="0" marR="128016" marT="36576" marB="54864" anchor="t">
-                    <a:lnB w="9525" cap="flat" cmpd="sng" algn="ctr">
-                      <a:solidFill>
-                        <a:srgbClr val="D4D2D0"/>
-                      </a:solidFill>
-                    </a:lnB>
-                    <a:lnT w="0" cap="flat" cmpd="sng" algn="ctr">
-                      <a:solidFill>
-                        <a:srgbClr val="FAF8F4"/>
-                      </a:solidFill>
-                    </a:lnT>
-                    <a:lnR w="0" cap="flat" cmpd="sng" algn="ctr">
-                      <a:solidFill>
-                        <a:srgbClr val="FAF8F4"/>
-                      </a:solidFill>
-                    </a:lnR>
-                    <a:lnL w="0" cap="flat" cmpd="sng" algn="ctr">
-                      <a:solidFill>
-                        <a:srgbClr val="FAF8F4"/>
-                      </a:solidFill>
-                    </a:lnL>
-                    <a:noFill/>
-                  </a:tcPr>
-                </a:tc>
-                <a:tc>
-                  <a:txBody>
-                    <a:bodyPr wrap="square"/>
-                    <a:lstStyle/>
-                    <a:p>
-                      <a:pPr>
-                        <a:lnSpc>
-                          <a:spcPct val="134000"/>
-                        </a:lnSpc>
-                      </a:pPr>
-                      <a:r>
-                        <a:rPr sz="1100" b="0">
-                          <a:solidFill>
-                            <a:srgbClr val="111111"/>
-                          </a:solidFill>
-                          <a:latin typeface="Poppins"/>
-                        </a:rPr>
-                        <a:t>Residential versus commercial. Where the energy goes</a:t>
-                      </a:r>
-                    </a:p>
-                  </a:txBody>
-                  <a:tcPr marL="0" marR="128016" marT="36576" marB="54864" anchor="t">
-                    <a:lnB w="9525" cap="flat" cmpd="sng" algn="ctr">
-                      <a:solidFill>
-                        <a:srgbClr val="D4D2D0"/>
-                      </a:solidFill>
-                    </a:lnB>
-                    <a:lnT w="0" cap="flat" cmpd="sng" algn="ctr">
-                      <a:solidFill>
-                        <a:srgbClr val="FAF8F4"/>
-                      </a:solidFill>
-                    </a:lnT>
-                    <a:lnR w="0" cap="flat" cmpd="sng" algn="ctr">
-                      <a:solidFill>
-                        <a:srgbClr val="FAF8F4"/>
-                      </a:solidFill>
-                    </a:lnR>
-                    <a:lnL w="0" cap="flat" cmpd="sng" algn="ctr">
-                      <a:solidFill>
-                        <a:srgbClr val="FAF8F4"/>
-                      </a:solidFill>
-                    </a:lnL>
-                    <a:noFill/>
-                  </a:tcPr>
-                </a:tc>
-              </a:tr>
-              <a:tr h="329981">
-                <a:tc>
-                  <a:txBody>
-                    <a:bodyPr wrap="square"/>
-                    <a:lstStyle/>
-                    <a:p>
-                      <a:pPr>
-                        <a:lnSpc>
-                          <a:spcPct val="134000"/>
-                        </a:lnSpc>
-                      </a:pPr>
-                      <a:r>
-                        <a:rPr sz="1100" b="1">
-                          <a:solidFill>
-                            <a:srgbClr val="111111"/>
-                          </a:solidFill>
-                          <a:latin typeface="Poppins"/>
-                        </a:rPr>
-                        <a:t>03</a:t>
-                      </a:r>
-                    </a:p>
-                  </a:txBody>
-                  <a:tcPr marL="0" marR="128016" marT="36576" marB="54864" anchor="t">
-                    <a:lnB w="9525" cap="flat" cmpd="sng" algn="ctr">
-                      <a:solidFill>
-                        <a:srgbClr val="D4D2D0"/>
-                      </a:solidFill>
-                    </a:lnB>
-                    <a:lnT w="0" cap="flat" cmpd="sng" algn="ctr">
-                      <a:solidFill>
-                        <a:srgbClr val="FAF8F4"/>
-                      </a:solidFill>
-                    </a:lnT>
-                    <a:lnR w="0" cap="flat" cmpd="sng" algn="ctr">
-                      <a:solidFill>
-                        <a:srgbClr val="FAF8F4"/>
-                      </a:solidFill>
-                    </a:lnR>
-                    <a:lnL w="0" cap="flat" cmpd="sng" algn="ctr">
-                      <a:solidFill>
-                        <a:srgbClr val="FAF8F4"/>
-                      </a:solidFill>
-                    </a:lnL>
-                    <a:noFill/>
-                  </a:tcPr>
-                </a:tc>
-                <a:tc>
-                  <a:txBody>
-                    <a:bodyPr wrap="square"/>
-                    <a:lstStyle/>
-                    <a:p>
-                      <a:pPr>
-                        <a:lnSpc>
-                          <a:spcPct val="134000"/>
-                        </a:lnSpc>
-                      </a:pPr>
-                      <a:r>
-                        <a:rPr sz="1100" b="0">
-                          <a:solidFill>
-                            <a:srgbClr val="111111"/>
-                          </a:solidFill>
-                          <a:latin typeface="Poppins"/>
-                        </a:rPr>
-                        <a:t>Key messaging and the customer journey. Delivered by us, signed by you</a:t>
-                      </a:r>
-                    </a:p>
-                  </a:txBody>
-                  <a:tcPr marL="0" marR="128016" marT="36576" marB="54864" anchor="t">
-                    <a:lnB w="9525" cap="flat" cmpd="sng" algn="ctr">
-                      <a:solidFill>
-                        <a:srgbClr val="D4D2D0"/>
-                      </a:solidFill>
-                    </a:lnB>
-                    <a:lnT w="0" cap="flat" cmpd="sng" algn="ctr">
-                      <a:solidFill>
-                        <a:srgbClr val="FAF8F4"/>
-                      </a:solidFill>
-                    </a:lnT>
-                    <a:lnR w="0" cap="flat" cmpd="sng" algn="ctr">
-                      <a:solidFill>
-                        <a:srgbClr val="FAF8F4"/>
-                      </a:solidFill>
-                    </a:lnR>
-                    <a:lnL w="0" cap="flat" cmpd="sng" algn="ctr">
-                      <a:solidFill>
-                        <a:srgbClr val="FAF8F4"/>
-                      </a:solidFill>
-                    </a:lnL>
-                    <a:noFill/>
-                  </a:tcPr>
-                </a:tc>
-              </a:tr>
-              <a:tr h="329981">
-                <a:tc>
-                  <a:txBody>
-                    <a:bodyPr wrap="square"/>
-                    <a:lstStyle/>
-                    <a:p>
-                      <a:pPr>
-                        <a:lnSpc>
-                          <a:spcPct val="134000"/>
-                        </a:lnSpc>
-                      </a:pPr>
-                      <a:r>
-                        <a:rPr sz="1100" b="1">
-                          <a:solidFill>
-                            <a:srgbClr val="111111"/>
-                          </a:solidFill>
-                          <a:latin typeface="Poppins"/>
-                        </a:rPr>
-                        <a:t>04</a:t>
-                      </a:r>
-                    </a:p>
-                  </a:txBody>
-                  <a:tcPr marL="0" marR="128016" marT="36576" marB="54864" anchor="t">
-                    <a:lnB w="9525" cap="flat" cmpd="sng" algn="ctr">
-                      <a:solidFill>
-                        <a:srgbClr val="D4D2D0"/>
-                      </a:solidFill>
-                    </a:lnB>
-                    <a:lnT w="0" cap="flat" cmpd="sng" algn="ctr">
-                      <a:solidFill>
-                        <a:srgbClr val="FAF8F4"/>
-                      </a:solidFill>
-                    </a:lnT>
-                    <a:lnR w="0" cap="flat" cmpd="sng" algn="ctr">
-                      <a:solidFill>
-                        <a:srgbClr val="FAF8F4"/>
-                      </a:solidFill>
-                    </a:lnR>
-                    <a:lnL w="0" cap="flat" cmpd="sng" algn="ctr">
-                      <a:solidFill>
-                        <a:srgbClr val="FAF8F4"/>
-                      </a:solidFill>
-                    </a:lnL>
-                    <a:noFill/>
-                  </a:tcPr>
-                </a:tc>
-                <a:tc>
-                  <a:txBody>
-                    <a:bodyPr wrap="square"/>
-                    <a:lstStyle/>
-                    <a:p>
-                      <a:pPr>
-                        <a:lnSpc>
-                          <a:spcPct val="134000"/>
-                        </a:lnSpc>
-                      </a:pPr>
-                      <a:r>
-                        <a:rPr sz="1100" b="0">
-                          <a:solidFill>
-                            <a:srgbClr val="111111"/>
-                          </a:solidFill>
-                          <a:latin typeface="Poppins"/>
-                        </a:rPr>
-                        <a:t>KPIs and the meeting rhythm. Four numbers, one definition of active refiller</a:t>
-                      </a:r>
-                    </a:p>
-                  </a:txBody>
-                  <a:tcPr marL="0" marR="128016" marT="36576" marB="54864" anchor="t">
-                    <a:lnB w="9525" cap="flat" cmpd="sng" algn="ctr">
-                      <a:solidFill>
-                        <a:srgbClr val="D4D2D0"/>
-                      </a:solidFill>
-                    </a:lnB>
-                    <a:lnT w="0" cap="flat" cmpd="sng" algn="ctr">
-                      <a:solidFill>
-                        <a:srgbClr val="FAF8F4"/>
-                      </a:solidFill>
-                    </a:lnT>
-                    <a:lnR w="0" cap="flat" cmpd="sng" algn="ctr">
-                      <a:solidFill>
-                        <a:srgbClr val="FAF8F4"/>
-                      </a:solidFill>
-                    </a:lnR>
-                    <a:lnL w="0" cap="flat" cmpd="sng" algn="ctr">
-                      <a:solidFill>
-                        <a:srgbClr val="FAF8F4"/>
-                      </a:solidFill>
-                    </a:lnL>
-                    <a:noFill/>
-                  </a:tcPr>
-                </a:tc>
-              </a:tr>
-              <a:tr h="329981">
-                <a:tc>
-                  <a:txBody>
-                    <a:bodyPr wrap="square"/>
-                    <a:lstStyle/>
-                    <a:p>
-                      <a:pPr>
-                        <a:lnSpc>
-                          <a:spcPct val="134000"/>
-                        </a:lnSpc>
-                      </a:pPr>
-                      <a:r>
-                        <a:rPr sz="1100" b="1">
-                          <a:solidFill>
-                            <a:srgbClr val="111111"/>
-                          </a:solidFill>
-                          <a:latin typeface="Poppins"/>
-                        </a:rPr>
-                        <a:t>05</a:t>
-                      </a:r>
-                    </a:p>
-                  </a:txBody>
-                  <a:tcPr marL="0" marR="128016" marT="36576" marB="54864" anchor="t">
-                    <a:lnB w="9525" cap="flat" cmpd="sng" algn="ctr">
-                      <a:solidFill>
-                        <a:srgbClr val="D4D2D0"/>
-                      </a:solidFill>
-                    </a:lnB>
-                    <a:lnT w="0" cap="flat" cmpd="sng" algn="ctr">
-                      <a:solidFill>
-                        <a:srgbClr val="FAF8F4"/>
-                      </a:solidFill>
-                    </a:lnT>
-                    <a:lnR w="0" cap="flat" cmpd="sng" algn="ctr">
-                      <a:solidFill>
-                        <a:srgbClr val="FAF8F4"/>
-                      </a:solidFill>
-                    </a:lnR>
-                    <a:lnL w="0" cap="flat" cmpd="sng" algn="ctr">
-                      <a:solidFill>
-                        <a:srgbClr val="FAF8F4"/>
-                      </a:solidFill>
-                    </a:lnL>
-                    <a:noFill/>
-                  </a:tcPr>
-                </a:tc>
-                <a:tc>
-                  <a:txBody>
-                    <a:bodyPr wrap="square"/>
-                    <a:lstStyle/>
-                    <a:p>
-                      <a:pPr>
-                        <a:lnSpc>
-                          <a:spcPct val="134000"/>
-                        </a:lnSpc>
-                      </a:pPr>
-                      <a:r>
-                        <a:rPr sz="1100" b="0">
-                          <a:solidFill>
-                            <a:srgbClr val="111111"/>
-                          </a:solidFill>
-                          <a:latin typeface="Poppins"/>
-                        </a:rPr>
-                        <a:t>The Jewell split. What we own, what Harry and Justin keep</a:t>
-                      </a:r>
-                    </a:p>
-                  </a:txBody>
-                  <a:tcPr marL="0" marR="128016" marT="36576" marB="54864" anchor="t">
-                    <a:lnB w="9525" cap="flat" cmpd="sng" algn="ctr">
-                      <a:solidFill>
-                        <a:srgbClr val="D4D2D0"/>
-                      </a:solidFill>
-                    </a:lnB>
-                    <a:lnT w="0" cap="flat" cmpd="sng" algn="ctr">
-                      <a:solidFill>
-                        <a:srgbClr val="FAF8F4"/>
-                      </a:solidFill>
-                    </a:lnT>
-                    <a:lnR w="0" cap="flat" cmpd="sng" algn="ctr">
-                      <a:solidFill>
-                        <a:srgbClr val="FAF8F4"/>
-                      </a:solidFill>
-                    </a:lnR>
-                    <a:lnL w="0" cap="flat" cmpd="sng" algn="ctr">
-                      <a:solidFill>
-                        <a:srgbClr val="FAF8F4"/>
-                      </a:solidFill>
-                    </a:lnL>
-                    <a:noFill/>
-                  </a:tcPr>
-                </a:tc>
-              </a:tr>
-              <a:tr h="329981">
-                <a:tc>
-                  <a:txBody>
-                    <a:bodyPr wrap="square"/>
-                    <a:lstStyle/>
-                    <a:p>
-                      <a:pPr>
-                        <a:lnSpc>
-                          <a:spcPct val="134000"/>
-                        </a:lnSpc>
-                      </a:pPr>
-                      <a:r>
-                        <a:rPr sz="1100" b="1">
-                          <a:solidFill>
-                            <a:srgbClr val="111111"/>
-                          </a:solidFill>
-                          <a:latin typeface="Poppins"/>
-                        </a:rPr>
-                        <a:t>06</a:t>
-                      </a:r>
-                    </a:p>
-                  </a:txBody>
-                  <a:tcPr marL="0" marR="128016" marT="36576" marB="54864" anchor="t">
-                    <a:lnB w="9525" cap="flat" cmpd="sng" algn="ctr">
-                      <a:solidFill>
-                        <a:srgbClr val="D4D2D0"/>
-                      </a:solidFill>
-                    </a:lnB>
-                    <a:lnT w="0" cap="flat" cmpd="sng" algn="ctr">
-                      <a:solidFill>
-                        <a:srgbClr val="FAF8F4"/>
-                      </a:solidFill>
-                    </a:lnT>
-                    <a:lnR w="0" cap="flat" cmpd="sng" algn="ctr">
-                      <a:solidFill>
-                        <a:srgbClr val="FAF8F4"/>
-                      </a:solidFill>
-                    </a:lnR>
-                    <a:lnL w="0" cap="flat" cmpd="sng" algn="ctr">
-                      <a:solidFill>
-                        <a:srgbClr val="FAF8F4"/>
-                      </a:solidFill>
-                    </a:lnL>
-                    <a:noFill/>
-                  </a:tcPr>
-                </a:tc>
-                <a:tc>
-                  <a:txBody>
-                    <a:bodyPr wrap="square"/>
-                    <a:lstStyle/>
-                    <a:p>
-                      <a:pPr>
-                        <a:lnSpc>
-                          <a:spcPct val="134000"/>
-                        </a:lnSpc>
-                      </a:pPr>
-                      <a:r>
-                        <a:rPr sz="1100" b="0">
-                          <a:solidFill>
-                            <a:srgbClr val="111111"/>
-                          </a:solidFill>
-                          <a:latin typeface="Poppins"/>
-                        </a:rPr>
-                        <a:t>Ambassadors named, Oktoberfest run, giveaway entries in the CRM</a:t>
-                      </a:r>
-                    </a:p>
-                  </a:txBody>
-                  <a:tcPr marL="0" marR="128016" marT="36576" marB="54864" anchor="t">
-                    <a:lnB w="9525" cap="flat" cmpd="sng" algn="ctr">
-                      <a:solidFill>
-                        <a:srgbClr val="D4D2D0"/>
-                      </a:solidFill>
-                    </a:lnB>
-                    <a:lnT w="0" cap="flat" cmpd="sng" algn="ctr">
-                      <a:solidFill>
-                        <a:srgbClr val="FAF8F4"/>
-                      </a:solidFill>
-                    </a:lnT>
-                    <a:lnR w="0" cap="flat" cmpd="sng" algn="ctr">
-                      <a:solidFill>
-                        <a:srgbClr val="FAF8F4"/>
-                      </a:solidFill>
-                    </a:lnR>
-                    <a:lnL w="0" cap="flat" cmpd="sng" algn="ctr">
-                      <a:solidFill>
-                        <a:srgbClr val="FAF8F4"/>
-                      </a:solidFill>
-                    </a:lnL>
-                    <a:noFill/>
-                  </a:tcPr>
-                </a:tc>
-              </a:tr>
-              <a:tr h="329981">
-                <a:tc>
-                  <a:txBody>
-                    <a:bodyPr wrap="square"/>
-                    <a:lstStyle/>
-                    <a:p>
-                      <a:pPr>
-                        <a:lnSpc>
-                          <a:spcPct val="134000"/>
-                        </a:lnSpc>
-                      </a:pPr>
-                      <a:r>
-                        <a:rPr sz="1100" b="1">
-                          <a:solidFill>
-                            <a:srgbClr val="111111"/>
-                          </a:solidFill>
-                          <a:latin typeface="Poppins"/>
-                        </a:rPr>
-                        <a:t>07</a:t>
-                      </a:r>
-                    </a:p>
-                  </a:txBody>
-                  <a:tcPr marL="0" marR="128016" marT="36576" marB="54864" anchor="t">
-                    <a:lnB w="9525" cap="flat" cmpd="sng" algn="ctr">
-                      <a:solidFill>
-                        <a:srgbClr val="D4D2D0"/>
-                      </a:solidFill>
-                    </a:lnB>
-                    <a:lnT w="0" cap="flat" cmpd="sng" algn="ctr">
-                      <a:solidFill>
-                        <a:srgbClr val="FAF8F4"/>
-                      </a:solidFill>
-                    </a:lnT>
-                    <a:lnR w="0" cap="flat" cmpd="sng" algn="ctr">
-                      <a:solidFill>
-                        <a:srgbClr val="FAF8F4"/>
-                      </a:solidFill>
-                    </a:lnR>
-                    <a:lnL w="0" cap="flat" cmpd="sng" algn="ctr">
-                      <a:solidFill>
-                        <a:srgbClr val="FAF8F4"/>
-                      </a:solidFill>
-                    </a:lnL>
-                    <a:noFill/>
-                  </a:tcPr>
-                </a:tc>
-                <a:tc>
-                  <a:txBody>
-                    <a:bodyPr wrap="square"/>
-                    <a:lstStyle/>
-                    <a:p>
-                      <a:pPr>
-                        <a:lnSpc>
-                          <a:spcPct val="134000"/>
-                        </a:lnSpc>
-                      </a:pPr>
-                      <a:r>
-                        <a:rPr sz="1100" b="0">
-                          <a:solidFill>
-                            <a:srgbClr val="111111"/>
-                          </a:solidFill>
-                          <a:latin typeface="Poppins"/>
-                        </a:rPr>
-                        <a:t>Settle $2.55 as the per-schooner figure on the live ad</a:t>
-                      </a:r>
-                    </a:p>
-                  </a:txBody>
-                  <a:tcPr marL="0" marR="128016" marT="36576" marB="54864" anchor="t">
-                    <a:lnB w="9525" cap="flat" cmpd="sng" algn="ctr">
-                      <a:solidFill>
-                        <a:srgbClr val="D4D2D0"/>
-                      </a:solidFill>
-                    </a:lnB>
-                    <a:lnT w="0" cap="flat" cmpd="sng" algn="ctr">
-                      <a:solidFill>
-                        <a:srgbClr val="FAF8F4"/>
-                      </a:solidFill>
-                    </a:lnT>
-                    <a:lnR w="0" cap="flat" cmpd="sng" algn="ctr">
-                      <a:solidFill>
-                        <a:srgbClr val="FAF8F4"/>
-                      </a:solidFill>
-                    </a:lnR>
-                    <a:lnL w="0" cap="flat" cmpd="sng" algn="ctr">
-                      <a:solidFill>
-                        <a:srgbClr val="FAF8F4"/>
-                      </a:solidFill>
-                    </a:lnL>
-                    <a:noFill/>
-                  </a:tcPr>
-                </a:tc>
-              </a:tr>
-              <a:tr h="329981">
-                <a:tc>
-                  <a:txBody>
-                    <a:bodyPr wrap="square"/>
-                    <a:lstStyle/>
-                    <a:p>
-                      <a:pPr>
-                        <a:lnSpc>
-                          <a:spcPct val="134000"/>
-                        </a:lnSpc>
-                      </a:pPr>
-                      <a:r>
-                        <a:rPr sz="1100" b="1">
-                          <a:solidFill>
-                            <a:srgbClr val="111111"/>
-                          </a:solidFill>
-                          <a:latin typeface="Poppins"/>
-                        </a:rPr>
-                        <a:t>08</a:t>
-                      </a:r>
-                    </a:p>
-                  </a:txBody>
-                  <a:tcPr marL="0" marR="128016" marT="36576" marB="54864" anchor="t">
-                    <a:lnB w="9525" cap="flat" cmpd="sng" algn="ctr">
-                      <a:solidFill>
-                        <a:srgbClr val="D4D2D0"/>
-                      </a:solidFill>
-                    </a:lnB>
-                    <a:lnT w="0" cap="flat" cmpd="sng" algn="ctr">
-                      <a:solidFill>
-                        <a:srgbClr val="FAF8F4"/>
-                      </a:solidFill>
-                    </a:lnT>
-                    <a:lnR w="0" cap="flat" cmpd="sng" algn="ctr">
-                      <a:solidFill>
-                        <a:srgbClr val="FAF8F4"/>
-                      </a:solidFill>
-                    </a:lnR>
-                    <a:lnL w="0" cap="flat" cmpd="sng" algn="ctr">
-                      <a:solidFill>
-                        <a:srgbClr val="FAF8F4"/>
-                      </a:solidFill>
-                    </a:lnL>
-                    <a:noFill/>
-                  </a:tcPr>
-                </a:tc>
-                <a:tc>
-                  <a:txBody>
-                    <a:bodyPr wrap="square"/>
-                    <a:lstStyle/>
-                    <a:p>
-                      <a:pPr>
-                        <a:lnSpc>
-                          <a:spcPct val="134000"/>
-                        </a:lnSpc>
-                      </a:pPr>
-                      <a:r>
-                        <a:rPr sz="1100" b="0">
-                          <a:solidFill>
-                            <a:srgbClr val="111111"/>
-                          </a:solidFill>
-                          <a:latin typeface="Poppins"/>
-                        </a:rPr>
-                        <a:t>The 250 date. March 2027 or Christmas 2026</a:t>
-                      </a:r>
-                    </a:p>
-                  </a:txBody>
-                  <a:tcPr marL="0" marR="128016" marT="36576" marB="54864" anchor="t">
-                    <a:lnB w="9525" cap="flat" cmpd="sng" algn="ctr">
-                      <a:solidFill>
-                        <a:srgbClr val="D4D2D0"/>
-                      </a:solidFill>
-                    </a:lnB>
-                    <a:lnT w="0" cap="flat" cmpd="sng" algn="ctr">
-                      <a:solidFill>
-                        <a:srgbClr val="FAF8F4"/>
-                      </a:solidFill>
-                    </a:lnT>
-                    <a:lnR w="0" cap="flat" cmpd="sng" algn="ctr">
-                      <a:solidFill>
-                        <a:srgbClr val="FAF8F4"/>
-                      </a:solidFill>
-                    </a:lnR>
-                    <a:lnL w="0" cap="flat" cmpd="sng" algn="ctr">
-                      <a:solidFill>
-                        <a:srgbClr val="FAF8F4"/>
-                      </a:solidFill>
-                    </a:lnL>
-                    <a:noFill/>
-                  </a:tcPr>
-                </a:tc>
-              </a:tr>
-            </a:tbl>
-          </a:graphicData>
-        </a:graphic>
-      </p:graphicFrame>
-      <p:sp>
-        <p:nvSpPr>
-          <p:cNvPr id="5" name="TextBox 4"/>
-          <p:cNvSpPr txBox="1"/>
-          <p:nvPr/>
-        </p:nvSpPr>
-        <p:spPr>
-          <a:xfrm>
-            <a:off x="914400" y="6291072"/>
-            <a:ext cx="10362895" cy="274320"/>
-          </a:xfrm>
-          <a:prstGeom prst="rect">
-            <a:avLst/>
-          </a:prstGeom>
-          <a:noFill/>
-        </p:spPr>
-        <p:txBody>
-          <a:bodyPr wrap="square" lIns="0" rIns="0" tIns="0" bIns="0" anchor="t">
-            <a:spAutoFit/>
-          </a:bodyPr>
-          <a:lstStyle/>
-          <a:p>
-            <a:pPr algn="l">
-              <a:lnSpc>
-                <a:spcPct val="100000"/>
-              </a:lnSpc>
-            </a:pPr>
-            <a:r>
-              <a:rPr sz="900" b="0">
-                <a:solidFill>
-                  <a:srgbClr val="666666"/>
-                </a:solidFill>
-                <a:latin typeface="Poppins"/>
-              </a:rPr>
-              <a:t>We work it with you rather than around you.</a:t>
             </a:r>
           </a:p>
         </p:txBody>
@@ -13804,7 +13012,7 @@
                 </a:solidFill>
                 <a:latin typeface="Poppins"/>
               </a:rPr>
-              <a:t>TIMELINE</a:t>
+              <a:t>THE FIRST 30 DAYS</a:t>
             </a:r>
           </a:p>
         </p:txBody>
@@ -13843,7 +13051,7 @@
                 </a:solidFill>
                 <a:latin typeface="Poppins"/>
               </a:rPr>
-              <a:t>On your ladder, not ours.</a:t>
+              <a:t>Your own 30-day list is the first sprint.</a:t>
             </a:r>
           </a:p>
         </p:txBody>
@@ -13858,7 +13066,7 @@
         </p:nvGraphicFramePr>
         <p:xfrm>
           <a:off x="914400" y="2194560"/>
-          <a:ext cx="10362895" cy="2507772"/>
+          <a:ext cx="10362894" cy="2914168"/>
         </p:xfrm>
         <a:graphic>
           <a:graphicData uri="http://schemas.openxmlformats.org/drawingml/2006/table">
@@ -13867,8 +13075,8 @@
                 <a:tableStyleId>{2D5ABB26-0587-4C30-8999-92F81FD0307C}</a:tableStyleId>
               </a:tblPr>
               <a:tblGrid>
-                <a:gridCol w="1761692"/>
-                <a:gridCol w="8601203"/>
+                <a:gridCol w="518144"/>
+                <a:gridCol w="9844750"/>
               </a:tblGrid>
               <a:tr h="274320">
                 <a:tc>
@@ -13888,7 +13096,7 @@
                           </a:solidFill>
                           <a:latin typeface="Poppins"/>
                         </a:rPr>
-                        <a:t>HORIZON</a:t>
+                        <a:t/>
                       </a:r>
                     </a:p>
                   </a:txBody>
@@ -13933,7 +13141,7 @@
                           </a:solidFill>
                           <a:latin typeface="Poppins"/>
                         </a:rPr>
-                        <a:t>WHAT IS TRUE AT THE END OF IT</a:t>
+                        <a:t>WHAT CLOSES</a:t>
                       </a:r>
                     </a:p>
                   </a:txBody>
@@ -13962,7 +13170,7 @@
                   </a:tcPr>
                 </a:tc>
               </a:tr>
-              <a:tr h="558363">
+              <a:tr h="329981">
                 <a:tc>
                   <a:txBody>
                     <a:bodyPr wrap="square"/>
@@ -13980,8 +13188,7 @@
                           </a:solidFill>
                           <a:latin typeface="Poppins"/>
                         </a:rPr>
-                        <a:t>30 days
-Mid-October</a:t>
+                        <a:t>01</a:t>
                       </a:r>
                     </a:p>
                   </a:txBody>
@@ -14026,7 +13233,7 @@
                           </a:solidFill>
                           <a:latin typeface="Poppins"/>
                         </a:rPr>
-                        <a:t>Showroom or event space decided, and the Jewell split agreed. Messaging and journey signed on the home entertainment position. KPIs and the weekly rhythm set. Oktoberfest run. The 250 date chosen</a:t>
+                        <a:t>The shape decision, finished. Showroom or event space</a:t>
                       </a:r>
                     </a:p>
                   </a:txBody>
@@ -14055,7 +13262,7 @@
                   </a:tcPr>
                 </a:tc>
               </a:tr>
-              <a:tr h="558363">
+              <a:tr h="329981">
                 <a:tc>
                   <a:txBody>
                     <a:bodyPr wrap="square"/>
@@ -14073,8 +13280,7 @@
                           </a:solidFill>
                           <a:latin typeface="Poppins"/>
                         </a:rPr>
-                        <a:t>3 months
-Mid-December</a:t>
+                        <a:t>02</a:t>
                       </a:r>
                     </a:p>
                   </a:txBody>
@@ -14119,7 +13325,7 @@
                           </a:solidFill>
                           <a:latin typeface="Poppins"/>
                         </a:rPr>
-                        <a:t>Website and SEM live. GoTab and Fishbowl connected, CRM triggers replacing the 90-day SMS. Lease-to-buy and delivery launched. Referral programme live, with trades carrying cards. Wholesale pipeline in the CRM. Next hire decided</a:t>
+                        <a:t>Residential versus commercial. Where the energy goes</a:t>
                       </a:r>
                     </a:p>
                   </a:txBody>
@@ -14148,7 +13354,7 @@
                   </a:tcPr>
                 </a:tc>
               </a:tr>
-              <a:tr h="558363">
+              <a:tr h="329981">
                 <a:tc>
                   <a:txBody>
                     <a:bodyPr wrap="square"/>
@@ -14166,8 +13372,7 @@
                           </a:solidFill>
                           <a:latin typeface="Poppins"/>
                         </a:rPr>
-                        <a:t>6 months
-March 2027</a:t>
+                        <a:t>03</a:t>
                       </a:r>
                     </a:p>
                   </a:txBody>
@@ -14212,7 +13417,7 @@
                           </a:solidFill>
                           <a:latin typeface="Poppins"/>
                         </a:rPr>
-                        <a:t>250 active keg refillers, or December if you take the Christmas date. Weddings and functions selling. Membership redesigned. Designing-for-her and hardware-as-object briefs in market</a:t>
+                        <a:t>Key messaging and the customer journey. Delivered by us, signed by you</a:t>
                       </a:r>
                     </a:p>
                   </a:txBody>
@@ -14241,7 +13446,7 @@
                   </a:tcPr>
                 </a:tc>
               </a:tr>
-              <a:tr h="558363">
+              <a:tr h="329981">
                 <a:tc>
                   <a:txBody>
                     <a:bodyPr wrap="square"/>
@@ -14259,8 +13464,7 @@
                           </a:solidFill>
                           <a:latin typeface="Poppins"/>
                         </a:rPr>
-                        <a:t>1 year
-September 2027</a:t>
+                        <a:t>04</a:t>
                       </a:r>
                     </a:p>
                   </a:txBody>
@@ -14305,7 +13509,375 @@
                           </a:solidFill>
                           <a:latin typeface="Poppins"/>
                         </a:rPr>
-                        <a:t>Referrals, JVPs and online driving most system sales. Replicable events calendar running. Cashflow positive, Justin on a wage</a:t>
+                        <a:t>KPIs and the meeting rhythm. Four numbers, one definition of active refiller</a:t>
+                      </a:r>
+                    </a:p>
+                  </a:txBody>
+                  <a:tcPr marL="0" marR="128016" marT="36576" marB="54864" anchor="t">
+                    <a:lnB w="9525" cap="flat" cmpd="sng" algn="ctr">
+                      <a:solidFill>
+                        <a:srgbClr val="D4D2D0"/>
+                      </a:solidFill>
+                    </a:lnB>
+                    <a:lnT w="0" cap="flat" cmpd="sng" algn="ctr">
+                      <a:solidFill>
+                        <a:srgbClr val="FAF8F4"/>
+                      </a:solidFill>
+                    </a:lnT>
+                    <a:lnR w="0" cap="flat" cmpd="sng" algn="ctr">
+                      <a:solidFill>
+                        <a:srgbClr val="FAF8F4"/>
+                      </a:solidFill>
+                    </a:lnR>
+                    <a:lnL w="0" cap="flat" cmpd="sng" algn="ctr">
+                      <a:solidFill>
+                        <a:srgbClr val="FAF8F4"/>
+                      </a:solidFill>
+                    </a:lnL>
+                    <a:noFill/>
+                  </a:tcPr>
+                </a:tc>
+              </a:tr>
+              <a:tr h="329981">
+                <a:tc>
+                  <a:txBody>
+                    <a:bodyPr wrap="square"/>
+                    <a:lstStyle/>
+                    <a:p>
+                      <a:pPr>
+                        <a:lnSpc>
+                          <a:spcPct val="134000"/>
+                        </a:lnSpc>
+                      </a:pPr>
+                      <a:r>
+                        <a:rPr sz="1100" b="1">
+                          <a:solidFill>
+                            <a:srgbClr val="111111"/>
+                          </a:solidFill>
+                          <a:latin typeface="Poppins"/>
+                        </a:rPr>
+                        <a:t>05</a:t>
+                      </a:r>
+                    </a:p>
+                  </a:txBody>
+                  <a:tcPr marL="0" marR="128016" marT="36576" marB="54864" anchor="t">
+                    <a:lnB w="9525" cap="flat" cmpd="sng" algn="ctr">
+                      <a:solidFill>
+                        <a:srgbClr val="D4D2D0"/>
+                      </a:solidFill>
+                    </a:lnB>
+                    <a:lnT w="0" cap="flat" cmpd="sng" algn="ctr">
+                      <a:solidFill>
+                        <a:srgbClr val="FAF8F4"/>
+                      </a:solidFill>
+                    </a:lnT>
+                    <a:lnR w="0" cap="flat" cmpd="sng" algn="ctr">
+                      <a:solidFill>
+                        <a:srgbClr val="FAF8F4"/>
+                      </a:solidFill>
+                    </a:lnR>
+                    <a:lnL w="0" cap="flat" cmpd="sng" algn="ctr">
+                      <a:solidFill>
+                        <a:srgbClr val="FAF8F4"/>
+                      </a:solidFill>
+                    </a:lnL>
+                    <a:noFill/>
+                  </a:tcPr>
+                </a:tc>
+                <a:tc>
+                  <a:txBody>
+                    <a:bodyPr wrap="square"/>
+                    <a:lstStyle/>
+                    <a:p>
+                      <a:pPr>
+                        <a:lnSpc>
+                          <a:spcPct val="134000"/>
+                        </a:lnSpc>
+                      </a:pPr>
+                      <a:r>
+                        <a:rPr sz="1100" b="0">
+                          <a:solidFill>
+                            <a:srgbClr val="111111"/>
+                          </a:solidFill>
+                          <a:latin typeface="Poppins"/>
+                        </a:rPr>
+                        <a:t>The Jewell split. What we own, what Harry and Justin keep</a:t>
+                      </a:r>
+                    </a:p>
+                  </a:txBody>
+                  <a:tcPr marL="0" marR="128016" marT="36576" marB="54864" anchor="t">
+                    <a:lnB w="9525" cap="flat" cmpd="sng" algn="ctr">
+                      <a:solidFill>
+                        <a:srgbClr val="D4D2D0"/>
+                      </a:solidFill>
+                    </a:lnB>
+                    <a:lnT w="0" cap="flat" cmpd="sng" algn="ctr">
+                      <a:solidFill>
+                        <a:srgbClr val="FAF8F4"/>
+                      </a:solidFill>
+                    </a:lnT>
+                    <a:lnR w="0" cap="flat" cmpd="sng" algn="ctr">
+                      <a:solidFill>
+                        <a:srgbClr val="FAF8F4"/>
+                      </a:solidFill>
+                    </a:lnR>
+                    <a:lnL w="0" cap="flat" cmpd="sng" algn="ctr">
+                      <a:solidFill>
+                        <a:srgbClr val="FAF8F4"/>
+                      </a:solidFill>
+                    </a:lnL>
+                    <a:noFill/>
+                  </a:tcPr>
+                </a:tc>
+              </a:tr>
+              <a:tr h="329981">
+                <a:tc>
+                  <a:txBody>
+                    <a:bodyPr wrap="square"/>
+                    <a:lstStyle/>
+                    <a:p>
+                      <a:pPr>
+                        <a:lnSpc>
+                          <a:spcPct val="134000"/>
+                        </a:lnSpc>
+                      </a:pPr>
+                      <a:r>
+                        <a:rPr sz="1100" b="1">
+                          <a:solidFill>
+                            <a:srgbClr val="111111"/>
+                          </a:solidFill>
+                          <a:latin typeface="Poppins"/>
+                        </a:rPr>
+                        <a:t>06</a:t>
+                      </a:r>
+                    </a:p>
+                  </a:txBody>
+                  <a:tcPr marL="0" marR="128016" marT="36576" marB="54864" anchor="t">
+                    <a:lnB w="9525" cap="flat" cmpd="sng" algn="ctr">
+                      <a:solidFill>
+                        <a:srgbClr val="D4D2D0"/>
+                      </a:solidFill>
+                    </a:lnB>
+                    <a:lnT w="0" cap="flat" cmpd="sng" algn="ctr">
+                      <a:solidFill>
+                        <a:srgbClr val="FAF8F4"/>
+                      </a:solidFill>
+                    </a:lnT>
+                    <a:lnR w="0" cap="flat" cmpd="sng" algn="ctr">
+                      <a:solidFill>
+                        <a:srgbClr val="FAF8F4"/>
+                      </a:solidFill>
+                    </a:lnR>
+                    <a:lnL w="0" cap="flat" cmpd="sng" algn="ctr">
+                      <a:solidFill>
+                        <a:srgbClr val="FAF8F4"/>
+                      </a:solidFill>
+                    </a:lnL>
+                    <a:noFill/>
+                  </a:tcPr>
+                </a:tc>
+                <a:tc>
+                  <a:txBody>
+                    <a:bodyPr wrap="square"/>
+                    <a:lstStyle/>
+                    <a:p>
+                      <a:pPr>
+                        <a:lnSpc>
+                          <a:spcPct val="134000"/>
+                        </a:lnSpc>
+                      </a:pPr>
+                      <a:r>
+                        <a:rPr sz="1100" b="0">
+                          <a:solidFill>
+                            <a:srgbClr val="111111"/>
+                          </a:solidFill>
+                          <a:latin typeface="Poppins"/>
+                        </a:rPr>
+                        <a:t>Ambassadors named, Oktoberfest run, giveaway entries in the CRM</a:t>
+                      </a:r>
+                    </a:p>
+                  </a:txBody>
+                  <a:tcPr marL="0" marR="128016" marT="36576" marB="54864" anchor="t">
+                    <a:lnB w="9525" cap="flat" cmpd="sng" algn="ctr">
+                      <a:solidFill>
+                        <a:srgbClr val="D4D2D0"/>
+                      </a:solidFill>
+                    </a:lnB>
+                    <a:lnT w="0" cap="flat" cmpd="sng" algn="ctr">
+                      <a:solidFill>
+                        <a:srgbClr val="FAF8F4"/>
+                      </a:solidFill>
+                    </a:lnT>
+                    <a:lnR w="0" cap="flat" cmpd="sng" algn="ctr">
+                      <a:solidFill>
+                        <a:srgbClr val="FAF8F4"/>
+                      </a:solidFill>
+                    </a:lnR>
+                    <a:lnL w="0" cap="flat" cmpd="sng" algn="ctr">
+                      <a:solidFill>
+                        <a:srgbClr val="FAF8F4"/>
+                      </a:solidFill>
+                    </a:lnL>
+                    <a:noFill/>
+                  </a:tcPr>
+                </a:tc>
+              </a:tr>
+              <a:tr h="329981">
+                <a:tc>
+                  <a:txBody>
+                    <a:bodyPr wrap="square"/>
+                    <a:lstStyle/>
+                    <a:p>
+                      <a:pPr>
+                        <a:lnSpc>
+                          <a:spcPct val="134000"/>
+                        </a:lnSpc>
+                      </a:pPr>
+                      <a:r>
+                        <a:rPr sz="1100" b="1">
+                          <a:solidFill>
+                            <a:srgbClr val="111111"/>
+                          </a:solidFill>
+                          <a:latin typeface="Poppins"/>
+                        </a:rPr>
+                        <a:t>07</a:t>
+                      </a:r>
+                    </a:p>
+                  </a:txBody>
+                  <a:tcPr marL="0" marR="128016" marT="36576" marB="54864" anchor="t">
+                    <a:lnB w="9525" cap="flat" cmpd="sng" algn="ctr">
+                      <a:solidFill>
+                        <a:srgbClr val="D4D2D0"/>
+                      </a:solidFill>
+                    </a:lnB>
+                    <a:lnT w="0" cap="flat" cmpd="sng" algn="ctr">
+                      <a:solidFill>
+                        <a:srgbClr val="FAF8F4"/>
+                      </a:solidFill>
+                    </a:lnT>
+                    <a:lnR w="0" cap="flat" cmpd="sng" algn="ctr">
+                      <a:solidFill>
+                        <a:srgbClr val="FAF8F4"/>
+                      </a:solidFill>
+                    </a:lnR>
+                    <a:lnL w="0" cap="flat" cmpd="sng" algn="ctr">
+                      <a:solidFill>
+                        <a:srgbClr val="FAF8F4"/>
+                      </a:solidFill>
+                    </a:lnL>
+                    <a:noFill/>
+                  </a:tcPr>
+                </a:tc>
+                <a:tc>
+                  <a:txBody>
+                    <a:bodyPr wrap="square"/>
+                    <a:lstStyle/>
+                    <a:p>
+                      <a:pPr>
+                        <a:lnSpc>
+                          <a:spcPct val="134000"/>
+                        </a:lnSpc>
+                      </a:pPr>
+                      <a:r>
+                        <a:rPr sz="1100" b="0">
+                          <a:solidFill>
+                            <a:srgbClr val="111111"/>
+                          </a:solidFill>
+                          <a:latin typeface="Poppins"/>
+                        </a:rPr>
+                        <a:t>Settle $2.55 as the per-schooner figure on the live ad</a:t>
+                      </a:r>
+                    </a:p>
+                  </a:txBody>
+                  <a:tcPr marL="0" marR="128016" marT="36576" marB="54864" anchor="t">
+                    <a:lnB w="9525" cap="flat" cmpd="sng" algn="ctr">
+                      <a:solidFill>
+                        <a:srgbClr val="D4D2D0"/>
+                      </a:solidFill>
+                    </a:lnB>
+                    <a:lnT w="0" cap="flat" cmpd="sng" algn="ctr">
+                      <a:solidFill>
+                        <a:srgbClr val="FAF8F4"/>
+                      </a:solidFill>
+                    </a:lnT>
+                    <a:lnR w="0" cap="flat" cmpd="sng" algn="ctr">
+                      <a:solidFill>
+                        <a:srgbClr val="FAF8F4"/>
+                      </a:solidFill>
+                    </a:lnR>
+                    <a:lnL w="0" cap="flat" cmpd="sng" algn="ctr">
+                      <a:solidFill>
+                        <a:srgbClr val="FAF8F4"/>
+                      </a:solidFill>
+                    </a:lnL>
+                    <a:noFill/>
+                  </a:tcPr>
+                </a:tc>
+              </a:tr>
+              <a:tr h="329981">
+                <a:tc>
+                  <a:txBody>
+                    <a:bodyPr wrap="square"/>
+                    <a:lstStyle/>
+                    <a:p>
+                      <a:pPr>
+                        <a:lnSpc>
+                          <a:spcPct val="134000"/>
+                        </a:lnSpc>
+                      </a:pPr>
+                      <a:r>
+                        <a:rPr sz="1100" b="1">
+                          <a:solidFill>
+                            <a:srgbClr val="111111"/>
+                          </a:solidFill>
+                          <a:latin typeface="Poppins"/>
+                        </a:rPr>
+                        <a:t>08</a:t>
+                      </a:r>
+                    </a:p>
+                  </a:txBody>
+                  <a:tcPr marL="0" marR="128016" marT="36576" marB="54864" anchor="t">
+                    <a:lnB w="9525" cap="flat" cmpd="sng" algn="ctr">
+                      <a:solidFill>
+                        <a:srgbClr val="D4D2D0"/>
+                      </a:solidFill>
+                    </a:lnB>
+                    <a:lnT w="0" cap="flat" cmpd="sng" algn="ctr">
+                      <a:solidFill>
+                        <a:srgbClr val="FAF8F4"/>
+                      </a:solidFill>
+                    </a:lnT>
+                    <a:lnR w="0" cap="flat" cmpd="sng" algn="ctr">
+                      <a:solidFill>
+                        <a:srgbClr val="FAF8F4"/>
+                      </a:solidFill>
+                    </a:lnR>
+                    <a:lnL w="0" cap="flat" cmpd="sng" algn="ctr">
+                      <a:solidFill>
+                        <a:srgbClr val="FAF8F4"/>
+                      </a:solidFill>
+                    </a:lnL>
+                    <a:noFill/>
+                  </a:tcPr>
+                </a:tc>
+                <a:tc>
+                  <a:txBody>
+                    <a:bodyPr wrap="square"/>
+                    <a:lstStyle/>
+                    <a:p>
+                      <a:pPr>
+                        <a:lnSpc>
+                          <a:spcPct val="134000"/>
+                        </a:lnSpc>
+                      </a:pPr>
+                      <a:r>
+                        <a:rPr sz="1100" b="0">
+                          <a:solidFill>
+                            <a:srgbClr val="111111"/>
+                          </a:solidFill>
+                          <a:latin typeface="Poppins"/>
+                        </a:rPr>
+                        <a:t>The 250 date. March 2027 or Christmas 2026</a:t>
                       </a:r>
                     </a:p>
                   </a:txBody>
@@ -14372,7 +13944,7 @@
                 </a:solidFill>
                 <a:latin typeface="Poppins"/>
               </a:rPr>
-              <a:t>Three years, five years and the exit sit on the summary sheet. This covers the first year of the climb.</a:t>
+              <a:t>We work it with you rather than around you.</a:t>
             </a:r>
           </a:p>
         </p:txBody>
@@ -14437,7 +14009,7 @@
                 </a:solidFill>
                 <a:latin typeface="Poppins"/>
               </a:rPr>
-              <a:t>WAYS OF WORKING</a:t>
+              <a:t>TIMELINE</a:t>
             </a:r>
           </a:p>
         </p:txBody>
@@ -14476,7 +14048,7 @@
                 </a:solidFill>
                 <a:latin typeface="Poppins"/>
               </a:rPr>
-              <a:t>Who does what, and how often.</a:t>
+              <a:t>On your ladder, not ours.</a:t>
             </a:r>
           </a:p>
         </p:txBody>
@@ -14491,7 +14063,7 @@
         </p:nvGraphicFramePr>
         <p:xfrm>
           <a:off x="914400" y="2194560"/>
-          <a:ext cx="10362895" cy="2710970"/>
+          <a:ext cx="10362895" cy="2507772"/>
         </p:xfrm>
         <a:graphic>
           <a:graphicData uri="http://schemas.openxmlformats.org/drawingml/2006/table">
@@ -14500,8 +14072,8 @@
                 <a:tableStyleId>{2D5ABB26-0587-4C30-8999-92F81FD0307C}</a:tableStyleId>
               </a:tblPr>
               <a:tblGrid>
-                <a:gridCol w="1865321"/>
-                <a:gridCol w="8497574"/>
+                <a:gridCol w="1761692"/>
+                <a:gridCol w="8601203"/>
               </a:tblGrid>
               <a:tr h="274320">
                 <a:tc>
@@ -14521,7 +14093,7 @@
                           </a:solidFill>
                           <a:latin typeface="Poppins"/>
                         </a:rPr>
-                        <a:t/>
+                        <a:t>HORIZON</a:t>
                       </a:r>
                     </a:p>
                   </a:txBody>
@@ -14566,7 +14138,7 @@
                           </a:solidFill>
                           <a:latin typeface="Poppins"/>
                         </a:rPr>
-                        <a:t>HOW IT RUNS</a:t>
+                        <a:t>WHAT IS TRUE AT THE END OF IT</a:t>
                       </a:r>
                     </a:p>
                   </a:txBody>
@@ -14613,7 +14185,8 @@
                           </a:solidFill>
                           <a:latin typeface="Poppins"/>
                         </a:rPr>
-                        <a:t>Christy runs it</a:t>
+                        <a:t>30 days
+Mid-October</a:t>
                       </a:r>
                     </a:p>
                   </a:txBody>
@@ -14658,375 +14231,7 @@
                           </a:solidFill>
                           <a:latin typeface="Poppins"/>
                         </a:rPr>
-                        <a:t>Christy Kilmartin leads the engagement: strategy, direction, and the call on what gets built next. Your first call on anything</a:t>
-                      </a:r>
-                    </a:p>
-                  </a:txBody>
-                  <a:tcPr marL="0" marR="128016" marT="36576" marB="54864" anchor="t">
-                    <a:lnB w="9525" cap="flat" cmpd="sng" algn="ctr">
-                      <a:solidFill>
-                        <a:srgbClr val="D4D2D0"/>
-                      </a:solidFill>
-                    </a:lnB>
-                    <a:lnT w="0" cap="flat" cmpd="sng" algn="ctr">
-                      <a:solidFill>
-                        <a:srgbClr val="FAF8F4"/>
-                      </a:solidFill>
-                    </a:lnT>
-                    <a:lnR w="0" cap="flat" cmpd="sng" algn="ctr">
-                      <a:solidFill>
-                        <a:srgbClr val="FAF8F4"/>
-                      </a:solidFill>
-                    </a:lnR>
-                    <a:lnL w="0" cap="flat" cmpd="sng" algn="ctr">
-                      <a:solidFill>
-                        <a:srgbClr val="FAF8F4"/>
-                      </a:solidFill>
-                    </a:lnL>
-                    <a:noFill/>
-                  </a:tcPr>
-                </a:tc>
-              </a:tr>
-              <a:tr h="329981">
-                <a:tc>
-                  <a:txBody>
-                    <a:bodyPr wrap="square"/>
-                    <a:lstStyle/>
-                    <a:p>
-                      <a:pPr>
-                        <a:lnSpc>
-                          <a:spcPct val="134000"/>
-                        </a:lnSpc>
-                      </a:pPr>
-                      <a:r>
-                        <a:rPr sz="1100" b="1">
-                          <a:solidFill>
-                            <a:srgbClr val="111111"/>
-                          </a:solidFill>
-                          <a:latin typeface="Poppins"/>
-                        </a:rPr>
-                        <a:t>Harry executes</a:t>
-                      </a:r>
-                    </a:p>
-                  </a:txBody>
-                  <a:tcPr marL="0" marR="128016" marT="36576" marB="54864" anchor="t">
-                    <a:lnB w="9525" cap="flat" cmpd="sng" algn="ctr">
-                      <a:solidFill>
-                        <a:srgbClr val="D4D2D0"/>
-                      </a:solidFill>
-                    </a:lnB>
-                    <a:lnT w="0" cap="flat" cmpd="sng" algn="ctr">
-                      <a:solidFill>
-                        <a:srgbClr val="FAF8F4"/>
-                      </a:solidFill>
-                    </a:lnT>
-                    <a:lnR w="0" cap="flat" cmpd="sng" algn="ctr">
-                      <a:solidFill>
-                        <a:srgbClr val="FAF8F4"/>
-                      </a:solidFill>
-                    </a:lnR>
-                    <a:lnL w="0" cap="flat" cmpd="sng" algn="ctr">
-                      <a:solidFill>
-                        <a:srgbClr val="FAF8F4"/>
-                      </a:solidFill>
-                    </a:lnL>
-                    <a:noFill/>
-                  </a:tcPr>
-                </a:tc>
-                <a:tc>
-                  <a:txBody>
-                    <a:bodyPr wrap="square"/>
-                    <a:lstStyle/>
-                    <a:p>
-                      <a:pPr>
-                        <a:lnSpc>
-                          <a:spcPct val="134000"/>
-                        </a:lnSpc>
-                      </a:pPr>
-                      <a:r>
-                        <a:rPr sz="1100" b="0">
-                          <a:solidFill>
-                            <a:srgbClr val="111111"/>
-                          </a:solidFill>
-                          <a:latin typeface="Poppins"/>
-                        </a:rPr>
-                        <a:t>Harry is the operator inside Tap That. Everything we design is built to be run from that seat</a:t>
-                      </a:r>
-                    </a:p>
-                  </a:txBody>
-                  <a:tcPr marL="0" marR="128016" marT="36576" marB="54864" anchor="t">
-                    <a:lnB w="9525" cap="flat" cmpd="sng" algn="ctr">
-                      <a:solidFill>
-                        <a:srgbClr val="D4D2D0"/>
-                      </a:solidFill>
-                    </a:lnB>
-                    <a:lnT w="0" cap="flat" cmpd="sng" algn="ctr">
-                      <a:solidFill>
-                        <a:srgbClr val="FAF8F4"/>
-                      </a:solidFill>
-                    </a:lnT>
-                    <a:lnR w="0" cap="flat" cmpd="sng" algn="ctr">
-                      <a:solidFill>
-                        <a:srgbClr val="FAF8F4"/>
-                      </a:solidFill>
-                    </a:lnR>
-                    <a:lnL w="0" cap="flat" cmpd="sng" algn="ctr">
-                      <a:solidFill>
-                        <a:srgbClr val="FAF8F4"/>
-                      </a:solidFill>
-                    </a:lnL>
-                    <a:noFill/>
-                  </a:tcPr>
-                </a:tc>
-              </a:tr>
-              <a:tr h="329981">
-                <a:tc>
-                  <a:txBody>
-                    <a:bodyPr wrap="square"/>
-                    <a:lstStyle/>
-                    <a:p>
-                      <a:pPr>
-                        <a:lnSpc>
-                          <a:spcPct val="134000"/>
-                        </a:lnSpc>
-                      </a:pPr>
-                      <a:r>
-                        <a:rPr sz="1100" b="1">
-                          <a:solidFill>
-                            <a:srgbClr val="111111"/>
-                          </a:solidFill>
-                          <a:latin typeface="Poppins"/>
-                        </a:rPr>
-                        <a:t>Weekly</a:t>
-                      </a:r>
-                    </a:p>
-                  </a:txBody>
-                  <a:tcPr marL="0" marR="128016" marT="36576" marB="54864" anchor="t">
-                    <a:lnB w="9525" cap="flat" cmpd="sng" algn="ctr">
-                      <a:solidFill>
-                        <a:srgbClr val="D4D2D0"/>
-                      </a:solidFill>
-                    </a:lnB>
-                    <a:lnT w="0" cap="flat" cmpd="sng" algn="ctr">
-                      <a:solidFill>
-                        <a:srgbClr val="FAF8F4"/>
-                      </a:solidFill>
-                    </a:lnT>
-                    <a:lnR w="0" cap="flat" cmpd="sng" algn="ctr">
-                      <a:solidFill>
-                        <a:srgbClr val="FAF8F4"/>
-                      </a:solidFill>
-                    </a:lnR>
-                    <a:lnL w="0" cap="flat" cmpd="sng" algn="ctr">
-                      <a:solidFill>
-                        <a:srgbClr val="FAF8F4"/>
-                      </a:solidFill>
-                    </a:lnL>
-                    <a:noFill/>
-                  </a:tcPr>
-                </a:tc>
-                <a:tc>
-                  <a:txBody>
-                    <a:bodyPr wrap="square"/>
-                    <a:lstStyle/>
-                    <a:p>
-                      <a:pPr>
-                        <a:lnSpc>
-                          <a:spcPct val="134000"/>
-                        </a:lnSpc>
-                      </a:pPr>
-                      <a:r>
-                        <a:rPr sz="1100" b="0">
-                          <a:solidFill>
-                            <a:srgbClr val="111111"/>
-                          </a:solidFill>
-                          <a:latin typeface="Poppins"/>
-                        </a:rPr>
-                        <a:t>Forty-five minutes with Harry and Justin, led by Christy. Ronnie locks the standing day</a:t>
-                      </a:r>
-                    </a:p>
-                  </a:txBody>
-                  <a:tcPr marL="0" marR="128016" marT="36576" marB="54864" anchor="t">
-                    <a:lnB w="9525" cap="flat" cmpd="sng" algn="ctr">
-                      <a:solidFill>
-                        <a:srgbClr val="D4D2D0"/>
-                      </a:solidFill>
-                    </a:lnB>
-                    <a:lnT w="0" cap="flat" cmpd="sng" algn="ctr">
-                      <a:solidFill>
-                        <a:srgbClr val="FAF8F4"/>
-                      </a:solidFill>
-                    </a:lnT>
-                    <a:lnR w="0" cap="flat" cmpd="sng" algn="ctr">
-                      <a:solidFill>
-                        <a:srgbClr val="FAF8F4"/>
-                      </a:solidFill>
-                    </a:lnR>
-                    <a:lnL w="0" cap="flat" cmpd="sng" algn="ctr">
-                      <a:solidFill>
-                        <a:srgbClr val="FAF8F4"/>
-                      </a:solidFill>
-                    </a:lnL>
-                    <a:noFill/>
-                  </a:tcPr>
-                </a:tc>
-              </a:tr>
-              <a:tr h="329981">
-                <a:tc>
-                  <a:txBody>
-                    <a:bodyPr wrap="square"/>
-                    <a:lstStyle/>
-                    <a:p>
-                      <a:pPr>
-                        <a:lnSpc>
-                          <a:spcPct val="134000"/>
-                        </a:lnSpc>
-                      </a:pPr>
-                      <a:r>
-                        <a:rPr sz="1100" b="1">
-                          <a:solidFill>
-                            <a:srgbClr val="111111"/>
-                          </a:solidFill>
-                          <a:latin typeface="Poppins"/>
-                        </a:rPr>
-                        <a:t>Monthly</a:t>
-                      </a:r>
-                    </a:p>
-                  </a:txBody>
-                  <a:tcPr marL="0" marR="128016" marT="36576" marB="54864" anchor="t">
-                    <a:lnB w="9525" cap="flat" cmpd="sng" algn="ctr">
-                      <a:solidFill>
-                        <a:srgbClr val="D4D2D0"/>
-                      </a:solidFill>
-                    </a:lnB>
-                    <a:lnT w="0" cap="flat" cmpd="sng" algn="ctr">
-                      <a:solidFill>
-                        <a:srgbClr val="FAF8F4"/>
-                      </a:solidFill>
-                    </a:lnT>
-                    <a:lnR w="0" cap="flat" cmpd="sng" algn="ctr">
-                      <a:solidFill>
-                        <a:srgbClr val="FAF8F4"/>
-                      </a:solidFill>
-                    </a:lnR>
-                    <a:lnL w="0" cap="flat" cmpd="sng" algn="ctr">
-                      <a:solidFill>
-                        <a:srgbClr val="FAF8F4"/>
-                      </a:solidFill>
-                    </a:lnL>
-                    <a:noFill/>
-                  </a:tcPr>
-                </a:tc>
-                <a:tc>
-                  <a:txBody>
-                    <a:bodyPr wrap="square"/>
-                    <a:lstStyle/>
-                    <a:p>
-                      <a:pPr>
-                        <a:lnSpc>
-                          <a:spcPct val="134000"/>
-                        </a:lnSpc>
-                      </a:pPr>
-                      <a:r>
-                        <a:rPr sz="1100" b="0">
-                          <a:solidFill>
-                            <a:srgbClr val="111111"/>
-                          </a:solidFill>
-                          <a:latin typeface="Poppins"/>
-                        </a:rPr>
-                        <a:t>One hour with both founders on the four numbers. Decisions taken in the room and recorded</a:t>
-                      </a:r>
-                    </a:p>
-                  </a:txBody>
-                  <a:tcPr marL="0" marR="128016" marT="36576" marB="54864" anchor="t">
-                    <a:lnB w="9525" cap="flat" cmpd="sng" algn="ctr">
-                      <a:solidFill>
-                        <a:srgbClr val="D4D2D0"/>
-                      </a:solidFill>
-                    </a:lnB>
-                    <a:lnT w="0" cap="flat" cmpd="sng" algn="ctr">
-                      <a:solidFill>
-                        <a:srgbClr val="FAF8F4"/>
-                      </a:solidFill>
-                    </a:lnT>
-                    <a:lnR w="0" cap="flat" cmpd="sng" algn="ctr">
-                      <a:solidFill>
-                        <a:srgbClr val="FAF8F4"/>
-                      </a:solidFill>
-                    </a:lnR>
-                    <a:lnL w="0" cap="flat" cmpd="sng" algn="ctr">
-                      <a:solidFill>
-                        <a:srgbClr val="FAF8F4"/>
-                      </a:solidFill>
-                    </a:lnL>
-                    <a:noFill/>
-                  </a:tcPr>
-                </a:tc>
-              </a:tr>
-              <a:tr h="329981">
-                <a:tc>
-                  <a:txBody>
-                    <a:bodyPr wrap="square"/>
-                    <a:lstStyle/>
-                    <a:p>
-                      <a:pPr>
-                        <a:lnSpc>
-                          <a:spcPct val="134000"/>
-                        </a:lnSpc>
-                      </a:pPr>
-                      <a:r>
-                        <a:rPr sz="1100" b="1">
-                          <a:solidFill>
-                            <a:srgbClr val="111111"/>
-                          </a:solidFill>
-                          <a:latin typeface="Poppins"/>
-                        </a:rPr>
-                        <a:t>Reviews</a:t>
-                      </a:r>
-                    </a:p>
-                  </a:txBody>
-                  <a:tcPr marL="0" marR="128016" marT="36576" marB="54864" anchor="t">
-                    <a:lnB w="9525" cap="flat" cmpd="sng" algn="ctr">
-                      <a:solidFill>
-                        <a:srgbClr val="D4D2D0"/>
-                      </a:solidFill>
-                    </a:lnB>
-                    <a:lnT w="0" cap="flat" cmpd="sng" algn="ctr">
-                      <a:solidFill>
-                        <a:srgbClr val="FAF8F4"/>
-                      </a:solidFill>
-                    </a:lnT>
-                    <a:lnR w="0" cap="flat" cmpd="sng" algn="ctr">
-                      <a:solidFill>
-                        <a:srgbClr val="FAF8F4"/>
-                      </a:solidFill>
-                    </a:lnR>
-                    <a:lnL w="0" cap="flat" cmpd="sng" algn="ctr">
-                      <a:solidFill>
-                        <a:srgbClr val="FAF8F4"/>
-                      </a:solidFill>
-                    </a:lnL>
-                    <a:noFill/>
-                  </a:tcPr>
-                </a:tc>
-                <a:tc>
-                  <a:txBody>
-                    <a:bodyPr wrap="square"/>
-                    <a:lstStyle/>
-                    <a:p>
-                      <a:pPr>
-                        <a:lnSpc>
-                          <a:spcPct val="134000"/>
-                        </a:lnSpc>
-                      </a:pPr>
-                      <a:r>
-                        <a:rPr sz="1100" b="0">
-                          <a:solidFill>
-                            <a:srgbClr val="111111"/>
-                          </a:solidFill>
-                          <a:latin typeface="Poppins"/>
-                        </a:rPr>
-                        <a:t>Mid-October, mid-December, March, September. A written review and a stop-or-continue conversation at each</a:t>
+                        <a:t>Showroom or event space decided, and the Jewell split agreed. Messaging and journey signed on the home entertainment position. KPIs and the weekly rhythm set. Oktoberfest run. The 250 date chosen</a:t>
                       </a:r>
                     </a:p>
                   </a:txBody>
@@ -15073,7 +14278,8 @@
                           </a:solidFill>
                           <a:latin typeface="Poppins"/>
                         </a:rPr>
-                        <a:t>Sign-off</a:t>
+                        <a:t>3 months
+Mid-December</a:t>
                       </a:r>
                     </a:p>
                   </a:txBody>
@@ -15118,7 +14324,193 @@
                           </a:solidFill>
                           <a:latin typeface="Poppins"/>
                         </a:rPr>
-                        <a:t>One named person approves messaging, offers and anything that goes to market. We suggest Justin, with Chris consulted on brand and product</a:t>
+                        <a:t>Website and SEM live. GoTab and Fishbowl connected, CRM triggers replacing the 90-day SMS. Lease-to-buy and delivery launched. Referral programme live, with trades carrying cards. Wholesale pipeline in the CRM. Next hire decided</a:t>
+                      </a:r>
+                    </a:p>
+                  </a:txBody>
+                  <a:tcPr marL="0" marR="128016" marT="36576" marB="54864" anchor="t">
+                    <a:lnB w="9525" cap="flat" cmpd="sng" algn="ctr">
+                      <a:solidFill>
+                        <a:srgbClr val="D4D2D0"/>
+                      </a:solidFill>
+                    </a:lnB>
+                    <a:lnT w="0" cap="flat" cmpd="sng" algn="ctr">
+                      <a:solidFill>
+                        <a:srgbClr val="FAF8F4"/>
+                      </a:solidFill>
+                    </a:lnT>
+                    <a:lnR w="0" cap="flat" cmpd="sng" algn="ctr">
+                      <a:solidFill>
+                        <a:srgbClr val="FAF8F4"/>
+                      </a:solidFill>
+                    </a:lnR>
+                    <a:lnL w="0" cap="flat" cmpd="sng" algn="ctr">
+                      <a:solidFill>
+                        <a:srgbClr val="FAF8F4"/>
+                      </a:solidFill>
+                    </a:lnL>
+                    <a:noFill/>
+                  </a:tcPr>
+                </a:tc>
+              </a:tr>
+              <a:tr h="558363">
+                <a:tc>
+                  <a:txBody>
+                    <a:bodyPr wrap="square"/>
+                    <a:lstStyle/>
+                    <a:p>
+                      <a:pPr>
+                        <a:lnSpc>
+                          <a:spcPct val="134000"/>
+                        </a:lnSpc>
+                      </a:pPr>
+                      <a:r>
+                        <a:rPr sz="1100" b="1">
+                          <a:solidFill>
+                            <a:srgbClr val="111111"/>
+                          </a:solidFill>
+                          <a:latin typeface="Poppins"/>
+                        </a:rPr>
+                        <a:t>6 months
+March 2027</a:t>
+                      </a:r>
+                    </a:p>
+                  </a:txBody>
+                  <a:tcPr marL="0" marR="128016" marT="36576" marB="54864" anchor="t">
+                    <a:lnB w="9525" cap="flat" cmpd="sng" algn="ctr">
+                      <a:solidFill>
+                        <a:srgbClr val="D4D2D0"/>
+                      </a:solidFill>
+                    </a:lnB>
+                    <a:lnT w="0" cap="flat" cmpd="sng" algn="ctr">
+                      <a:solidFill>
+                        <a:srgbClr val="FAF8F4"/>
+                      </a:solidFill>
+                    </a:lnT>
+                    <a:lnR w="0" cap="flat" cmpd="sng" algn="ctr">
+                      <a:solidFill>
+                        <a:srgbClr val="FAF8F4"/>
+                      </a:solidFill>
+                    </a:lnR>
+                    <a:lnL w="0" cap="flat" cmpd="sng" algn="ctr">
+                      <a:solidFill>
+                        <a:srgbClr val="FAF8F4"/>
+                      </a:solidFill>
+                    </a:lnL>
+                    <a:noFill/>
+                  </a:tcPr>
+                </a:tc>
+                <a:tc>
+                  <a:txBody>
+                    <a:bodyPr wrap="square"/>
+                    <a:lstStyle/>
+                    <a:p>
+                      <a:pPr>
+                        <a:lnSpc>
+                          <a:spcPct val="134000"/>
+                        </a:lnSpc>
+                      </a:pPr>
+                      <a:r>
+                        <a:rPr sz="1100" b="0">
+                          <a:solidFill>
+                            <a:srgbClr val="111111"/>
+                          </a:solidFill>
+                          <a:latin typeface="Poppins"/>
+                        </a:rPr>
+                        <a:t>250 active keg refillers, or December if you take the Christmas date. Weddings and functions selling. Membership redesigned. Designing-for-her and hardware-as-object briefs in market</a:t>
+                      </a:r>
+                    </a:p>
+                  </a:txBody>
+                  <a:tcPr marL="0" marR="128016" marT="36576" marB="54864" anchor="t">
+                    <a:lnB w="9525" cap="flat" cmpd="sng" algn="ctr">
+                      <a:solidFill>
+                        <a:srgbClr val="D4D2D0"/>
+                      </a:solidFill>
+                    </a:lnB>
+                    <a:lnT w="0" cap="flat" cmpd="sng" algn="ctr">
+                      <a:solidFill>
+                        <a:srgbClr val="FAF8F4"/>
+                      </a:solidFill>
+                    </a:lnT>
+                    <a:lnR w="0" cap="flat" cmpd="sng" algn="ctr">
+                      <a:solidFill>
+                        <a:srgbClr val="FAF8F4"/>
+                      </a:solidFill>
+                    </a:lnR>
+                    <a:lnL w="0" cap="flat" cmpd="sng" algn="ctr">
+                      <a:solidFill>
+                        <a:srgbClr val="FAF8F4"/>
+                      </a:solidFill>
+                    </a:lnL>
+                    <a:noFill/>
+                  </a:tcPr>
+                </a:tc>
+              </a:tr>
+              <a:tr h="558363">
+                <a:tc>
+                  <a:txBody>
+                    <a:bodyPr wrap="square"/>
+                    <a:lstStyle/>
+                    <a:p>
+                      <a:pPr>
+                        <a:lnSpc>
+                          <a:spcPct val="134000"/>
+                        </a:lnSpc>
+                      </a:pPr>
+                      <a:r>
+                        <a:rPr sz="1100" b="1">
+                          <a:solidFill>
+                            <a:srgbClr val="111111"/>
+                          </a:solidFill>
+                          <a:latin typeface="Poppins"/>
+                        </a:rPr>
+                        <a:t>1 year
+September 2027</a:t>
+                      </a:r>
+                    </a:p>
+                  </a:txBody>
+                  <a:tcPr marL="0" marR="128016" marT="36576" marB="54864" anchor="t">
+                    <a:lnB w="9525" cap="flat" cmpd="sng" algn="ctr">
+                      <a:solidFill>
+                        <a:srgbClr val="D4D2D0"/>
+                      </a:solidFill>
+                    </a:lnB>
+                    <a:lnT w="0" cap="flat" cmpd="sng" algn="ctr">
+                      <a:solidFill>
+                        <a:srgbClr val="FAF8F4"/>
+                      </a:solidFill>
+                    </a:lnT>
+                    <a:lnR w="0" cap="flat" cmpd="sng" algn="ctr">
+                      <a:solidFill>
+                        <a:srgbClr val="FAF8F4"/>
+                      </a:solidFill>
+                    </a:lnR>
+                    <a:lnL w="0" cap="flat" cmpd="sng" algn="ctr">
+                      <a:solidFill>
+                        <a:srgbClr val="FAF8F4"/>
+                      </a:solidFill>
+                    </a:lnL>
+                    <a:noFill/>
+                  </a:tcPr>
+                </a:tc>
+                <a:tc>
+                  <a:txBody>
+                    <a:bodyPr wrap="square"/>
+                    <a:lstStyle/>
+                    <a:p>
+                      <a:pPr>
+                        <a:lnSpc>
+                          <a:spcPct val="134000"/>
+                        </a:lnSpc>
+                      </a:pPr>
+                      <a:r>
+                        <a:rPr sz="1100" b="0">
+                          <a:solidFill>
+                            <a:srgbClr val="111111"/>
+                          </a:solidFill>
+                          <a:latin typeface="Poppins"/>
+                        </a:rPr>
+                        <a:t>Referrals, JVPs and online driving most system sales. Replicable events calendar running. Cashflow positive, Justin on a wage</a:t>
                       </a:r>
                     </a:p>
                   </a:txBody>
@@ -15151,6 +14543,45 @@
           </a:graphicData>
         </a:graphic>
       </p:graphicFrame>
+      <p:sp>
+        <p:nvSpPr>
+          <p:cNvPr id="5" name="TextBox 4"/>
+          <p:cNvSpPr txBox="1"/>
+          <p:nvPr/>
+        </p:nvSpPr>
+        <p:spPr>
+          <a:xfrm>
+            <a:off x="914400" y="6291072"/>
+            <a:ext cx="10362895" cy="274320"/>
+          </a:xfrm>
+          <a:prstGeom prst="rect">
+            <a:avLst/>
+          </a:prstGeom>
+          <a:noFill/>
+        </p:spPr>
+        <p:txBody>
+          <a:bodyPr wrap="square" lIns="0" rIns="0" tIns="0" bIns="0" anchor="t">
+            <a:spAutoFit/>
+          </a:bodyPr>
+          <a:lstStyle/>
+          <a:p>
+            <a:pPr algn="l">
+              <a:lnSpc>
+                <a:spcPct val="100000"/>
+              </a:lnSpc>
+            </a:pPr>
+            <a:r>
+              <a:rPr sz="900" b="0">
+                <a:solidFill>
+                  <a:srgbClr val="666666"/>
+                </a:solidFill>
+                <a:latin typeface="Poppins"/>
+              </a:rPr>
+              <a:t>Three years, five years and the exit sit on the summary sheet. This covers the first year of the climb.</a:t>
+            </a:r>
+          </a:p>
+        </p:txBody>
+      </p:sp>
     </p:spTree>
   </p:cSld>
   <p:clrMapOvr>
@@ -15211,6 +14642,780 @@
                 </a:solidFill>
                 <a:latin typeface="Poppins"/>
               </a:rPr>
+              <a:t>WAYS OF WORKING</a:t>
+            </a:r>
+          </a:p>
+        </p:txBody>
+      </p:sp>
+      <p:sp>
+        <p:nvSpPr>
+          <p:cNvPr id="3" name="TextBox 2"/>
+          <p:cNvSpPr txBox="1"/>
+          <p:nvPr/>
+        </p:nvSpPr>
+        <p:spPr>
+          <a:xfrm>
+            <a:off x="914400" y="1371600"/>
+            <a:ext cx="10362895" cy="640080"/>
+          </a:xfrm>
+          <a:prstGeom prst="rect">
+            <a:avLst/>
+          </a:prstGeom>
+          <a:noFill/>
+        </p:spPr>
+        <p:txBody>
+          <a:bodyPr wrap="square" lIns="0" rIns="0" tIns="0" bIns="0" anchor="t">
+            <a:spAutoFit/>
+          </a:bodyPr>
+          <a:lstStyle/>
+          <a:p>
+            <a:pPr algn="l">
+              <a:lnSpc>
+                <a:spcPct val="112000"/>
+              </a:lnSpc>
+            </a:pPr>
+            <a:r>
+              <a:rPr sz="2800" b="0">
+                <a:solidFill>
+                  <a:srgbClr val="111111"/>
+                </a:solidFill>
+                <a:latin typeface="Poppins"/>
+              </a:rPr>
+              <a:t>Who does what, and how often.</a:t>
+            </a:r>
+          </a:p>
+        </p:txBody>
+      </p:sp>
+      <p:graphicFrame>
+        <p:nvGraphicFramePr>
+          <p:cNvPr id="4" name="Table 3"/>
+          <p:cNvGraphicFramePr>
+            <a:graphicFrameLocks noGrp="1"/>
+          </p:cNvGraphicFramePr>
+          <p:nvPr/>
+        </p:nvGraphicFramePr>
+        <p:xfrm>
+          <a:off x="914400" y="2194560"/>
+          <a:ext cx="10362895" cy="2710970"/>
+        </p:xfrm>
+        <a:graphic>
+          <a:graphicData uri="http://schemas.openxmlformats.org/drawingml/2006/table">
+            <a:tbl>
+              <a:tblPr firstRow="0" bandRow="0">
+                <a:tableStyleId>{2D5ABB26-0587-4C30-8999-92F81FD0307C}</a:tableStyleId>
+              </a:tblPr>
+              <a:tblGrid>
+                <a:gridCol w="1865321"/>
+                <a:gridCol w="8497574"/>
+              </a:tblGrid>
+              <a:tr h="274320">
+                <a:tc>
+                  <a:txBody>
+                    <a:bodyPr wrap="square"/>
+                    <a:lstStyle/>
+                    <a:p>
+                      <a:pPr>
+                        <a:lnSpc>
+                          <a:spcPct val="134000"/>
+                        </a:lnSpc>
+                      </a:pPr>
+                      <a:r>
+                        <a:rPr sz="900" b="0" spc="200">
+                          <a:solidFill>
+                            <a:srgbClr val="666666"/>
+                          </a:solidFill>
+                          <a:latin typeface="Poppins"/>
+                        </a:rPr>
+                        <a:t/>
+                      </a:r>
+                    </a:p>
+                  </a:txBody>
+                  <a:tcPr marL="0" marR="128016" marT="36576" marB="54864" anchor="t">
+                    <a:lnB w="9525" cap="flat" cmpd="sng" algn="ctr">
+                      <a:solidFill>
+                        <a:srgbClr val="D4D2D0"/>
+                      </a:solidFill>
+                    </a:lnB>
+                    <a:lnT w="0" cap="flat" cmpd="sng" algn="ctr">
+                      <a:solidFill>
+                        <a:srgbClr val="FAF8F4"/>
+                      </a:solidFill>
+                    </a:lnT>
+                    <a:lnR w="0" cap="flat" cmpd="sng" algn="ctr">
+                      <a:solidFill>
+                        <a:srgbClr val="FAF8F4"/>
+                      </a:solidFill>
+                    </a:lnR>
+                    <a:lnL w="0" cap="flat" cmpd="sng" algn="ctr">
+                      <a:solidFill>
+                        <a:srgbClr val="FAF8F4"/>
+                      </a:solidFill>
+                    </a:lnL>
+                    <a:noFill/>
+                  </a:tcPr>
+                </a:tc>
+                <a:tc>
+                  <a:txBody>
+                    <a:bodyPr wrap="square"/>
+                    <a:lstStyle/>
+                    <a:p>
+                      <a:pPr>
+                        <a:lnSpc>
+                          <a:spcPct val="134000"/>
+                        </a:lnSpc>
+                      </a:pPr>
+                      <a:r>
+                        <a:rPr sz="900" b="0" spc="200">
+                          <a:solidFill>
+                            <a:srgbClr val="666666"/>
+                          </a:solidFill>
+                          <a:latin typeface="Poppins"/>
+                        </a:rPr>
+                        <a:t>HOW IT RUNS</a:t>
+                      </a:r>
+                    </a:p>
+                  </a:txBody>
+                  <a:tcPr marL="0" marR="128016" marT="36576" marB="54864" anchor="t">
+                    <a:lnB w="9525" cap="flat" cmpd="sng" algn="ctr">
+                      <a:solidFill>
+                        <a:srgbClr val="D4D2D0"/>
+                      </a:solidFill>
+                    </a:lnB>
+                    <a:lnT w="0" cap="flat" cmpd="sng" algn="ctr">
+                      <a:solidFill>
+                        <a:srgbClr val="FAF8F4"/>
+                      </a:solidFill>
+                    </a:lnT>
+                    <a:lnR w="0" cap="flat" cmpd="sng" algn="ctr">
+                      <a:solidFill>
+                        <a:srgbClr val="FAF8F4"/>
+                      </a:solidFill>
+                    </a:lnR>
+                    <a:lnL w="0" cap="flat" cmpd="sng" algn="ctr">
+                      <a:solidFill>
+                        <a:srgbClr val="FAF8F4"/>
+                      </a:solidFill>
+                    </a:lnL>
+                    <a:noFill/>
+                  </a:tcPr>
+                </a:tc>
+              </a:tr>
+              <a:tr h="558363">
+                <a:tc>
+                  <a:txBody>
+                    <a:bodyPr wrap="square"/>
+                    <a:lstStyle/>
+                    <a:p>
+                      <a:pPr>
+                        <a:lnSpc>
+                          <a:spcPct val="134000"/>
+                        </a:lnSpc>
+                      </a:pPr>
+                      <a:r>
+                        <a:rPr sz="1100" b="1">
+                          <a:solidFill>
+                            <a:srgbClr val="111111"/>
+                          </a:solidFill>
+                          <a:latin typeface="Poppins"/>
+                        </a:rPr>
+                        <a:t>Christy runs it</a:t>
+                      </a:r>
+                    </a:p>
+                  </a:txBody>
+                  <a:tcPr marL="0" marR="128016" marT="36576" marB="54864" anchor="t">
+                    <a:lnB w="9525" cap="flat" cmpd="sng" algn="ctr">
+                      <a:solidFill>
+                        <a:srgbClr val="D4D2D0"/>
+                      </a:solidFill>
+                    </a:lnB>
+                    <a:lnT w="0" cap="flat" cmpd="sng" algn="ctr">
+                      <a:solidFill>
+                        <a:srgbClr val="FAF8F4"/>
+                      </a:solidFill>
+                    </a:lnT>
+                    <a:lnR w="0" cap="flat" cmpd="sng" algn="ctr">
+                      <a:solidFill>
+                        <a:srgbClr val="FAF8F4"/>
+                      </a:solidFill>
+                    </a:lnR>
+                    <a:lnL w="0" cap="flat" cmpd="sng" algn="ctr">
+                      <a:solidFill>
+                        <a:srgbClr val="FAF8F4"/>
+                      </a:solidFill>
+                    </a:lnL>
+                    <a:noFill/>
+                  </a:tcPr>
+                </a:tc>
+                <a:tc>
+                  <a:txBody>
+                    <a:bodyPr wrap="square"/>
+                    <a:lstStyle/>
+                    <a:p>
+                      <a:pPr>
+                        <a:lnSpc>
+                          <a:spcPct val="134000"/>
+                        </a:lnSpc>
+                      </a:pPr>
+                      <a:r>
+                        <a:rPr sz="1100" b="0">
+                          <a:solidFill>
+                            <a:srgbClr val="111111"/>
+                          </a:solidFill>
+                          <a:latin typeface="Poppins"/>
+                        </a:rPr>
+                        <a:t>Christy Kilmartin leads the engagement: strategy, direction, and the call on what gets built next. Your first call on anything</a:t>
+                      </a:r>
+                    </a:p>
+                  </a:txBody>
+                  <a:tcPr marL="0" marR="128016" marT="36576" marB="54864" anchor="t">
+                    <a:lnB w="9525" cap="flat" cmpd="sng" algn="ctr">
+                      <a:solidFill>
+                        <a:srgbClr val="D4D2D0"/>
+                      </a:solidFill>
+                    </a:lnB>
+                    <a:lnT w="0" cap="flat" cmpd="sng" algn="ctr">
+                      <a:solidFill>
+                        <a:srgbClr val="FAF8F4"/>
+                      </a:solidFill>
+                    </a:lnT>
+                    <a:lnR w="0" cap="flat" cmpd="sng" algn="ctr">
+                      <a:solidFill>
+                        <a:srgbClr val="FAF8F4"/>
+                      </a:solidFill>
+                    </a:lnR>
+                    <a:lnL w="0" cap="flat" cmpd="sng" algn="ctr">
+                      <a:solidFill>
+                        <a:srgbClr val="FAF8F4"/>
+                      </a:solidFill>
+                    </a:lnL>
+                    <a:noFill/>
+                  </a:tcPr>
+                </a:tc>
+              </a:tr>
+              <a:tr h="329981">
+                <a:tc>
+                  <a:txBody>
+                    <a:bodyPr wrap="square"/>
+                    <a:lstStyle/>
+                    <a:p>
+                      <a:pPr>
+                        <a:lnSpc>
+                          <a:spcPct val="134000"/>
+                        </a:lnSpc>
+                      </a:pPr>
+                      <a:r>
+                        <a:rPr sz="1100" b="1">
+                          <a:solidFill>
+                            <a:srgbClr val="111111"/>
+                          </a:solidFill>
+                          <a:latin typeface="Poppins"/>
+                        </a:rPr>
+                        <a:t>Harry executes</a:t>
+                      </a:r>
+                    </a:p>
+                  </a:txBody>
+                  <a:tcPr marL="0" marR="128016" marT="36576" marB="54864" anchor="t">
+                    <a:lnB w="9525" cap="flat" cmpd="sng" algn="ctr">
+                      <a:solidFill>
+                        <a:srgbClr val="D4D2D0"/>
+                      </a:solidFill>
+                    </a:lnB>
+                    <a:lnT w="0" cap="flat" cmpd="sng" algn="ctr">
+                      <a:solidFill>
+                        <a:srgbClr val="FAF8F4"/>
+                      </a:solidFill>
+                    </a:lnT>
+                    <a:lnR w="0" cap="flat" cmpd="sng" algn="ctr">
+                      <a:solidFill>
+                        <a:srgbClr val="FAF8F4"/>
+                      </a:solidFill>
+                    </a:lnR>
+                    <a:lnL w="0" cap="flat" cmpd="sng" algn="ctr">
+                      <a:solidFill>
+                        <a:srgbClr val="FAF8F4"/>
+                      </a:solidFill>
+                    </a:lnL>
+                    <a:noFill/>
+                  </a:tcPr>
+                </a:tc>
+                <a:tc>
+                  <a:txBody>
+                    <a:bodyPr wrap="square"/>
+                    <a:lstStyle/>
+                    <a:p>
+                      <a:pPr>
+                        <a:lnSpc>
+                          <a:spcPct val="134000"/>
+                        </a:lnSpc>
+                      </a:pPr>
+                      <a:r>
+                        <a:rPr sz="1100" b="0">
+                          <a:solidFill>
+                            <a:srgbClr val="111111"/>
+                          </a:solidFill>
+                          <a:latin typeface="Poppins"/>
+                        </a:rPr>
+                        <a:t>Harry is the operator inside Tap That. Everything we design is built to be run from that seat</a:t>
+                      </a:r>
+                    </a:p>
+                  </a:txBody>
+                  <a:tcPr marL="0" marR="128016" marT="36576" marB="54864" anchor="t">
+                    <a:lnB w="9525" cap="flat" cmpd="sng" algn="ctr">
+                      <a:solidFill>
+                        <a:srgbClr val="D4D2D0"/>
+                      </a:solidFill>
+                    </a:lnB>
+                    <a:lnT w="0" cap="flat" cmpd="sng" algn="ctr">
+                      <a:solidFill>
+                        <a:srgbClr val="FAF8F4"/>
+                      </a:solidFill>
+                    </a:lnT>
+                    <a:lnR w="0" cap="flat" cmpd="sng" algn="ctr">
+                      <a:solidFill>
+                        <a:srgbClr val="FAF8F4"/>
+                      </a:solidFill>
+                    </a:lnR>
+                    <a:lnL w="0" cap="flat" cmpd="sng" algn="ctr">
+                      <a:solidFill>
+                        <a:srgbClr val="FAF8F4"/>
+                      </a:solidFill>
+                    </a:lnL>
+                    <a:noFill/>
+                  </a:tcPr>
+                </a:tc>
+              </a:tr>
+              <a:tr h="329981">
+                <a:tc>
+                  <a:txBody>
+                    <a:bodyPr wrap="square"/>
+                    <a:lstStyle/>
+                    <a:p>
+                      <a:pPr>
+                        <a:lnSpc>
+                          <a:spcPct val="134000"/>
+                        </a:lnSpc>
+                      </a:pPr>
+                      <a:r>
+                        <a:rPr sz="1100" b="1">
+                          <a:solidFill>
+                            <a:srgbClr val="111111"/>
+                          </a:solidFill>
+                          <a:latin typeface="Poppins"/>
+                        </a:rPr>
+                        <a:t>Weekly</a:t>
+                      </a:r>
+                    </a:p>
+                  </a:txBody>
+                  <a:tcPr marL="0" marR="128016" marT="36576" marB="54864" anchor="t">
+                    <a:lnB w="9525" cap="flat" cmpd="sng" algn="ctr">
+                      <a:solidFill>
+                        <a:srgbClr val="D4D2D0"/>
+                      </a:solidFill>
+                    </a:lnB>
+                    <a:lnT w="0" cap="flat" cmpd="sng" algn="ctr">
+                      <a:solidFill>
+                        <a:srgbClr val="FAF8F4"/>
+                      </a:solidFill>
+                    </a:lnT>
+                    <a:lnR w="0" cap="flat" cmpd="sng" algn="ctr">
+                      <a:solidFill>
+                        <a:srgbClr val="FAF8F4"/>
+                      </a:solidFill>
+                    </a:lnR>
+                    <a:lnL w="0" cap="flat" cmpd="sng" algn="ctr">
+                      <a:solidFill>
+                        <a:srgbClr val="FAF8F4"/>
+                      </a:solidFill>
+                    </a:lnL>
+                    <a:noFill/>
+                  </a:tcPr>
+                </a:tc>
+                <a:tc>
+                  <a:txBody>
+                    <a:bodyPr wrap="square"/>
+                    <a:lstStyle/>
+                    <a:p>
+                      <a:pPr>
+                        <a:lnSpc>
+                          <a:spcPct val="134000"/>
+                        </a:lnSpc>
+                      </a:pPr>
+                      <a:r>
+                        <a:rPr sz="1100" b="0">
+                          <a:solidFill>
+                            <a:srgbClr val="111111"/>
+                          </a:solidFill>
+                          <a:latin typeface="Poppins"/>
+                        </a:rPr>
+                        <a:t>Forty-five minutes with Harry and Justin, led by Christy. Ronnie locks the standing day</a:t>
+                      </a:r>
+                    </a:p>
+                  </a:txBody>
+                  <a:tcPr marL="0" marR="128016" marT="36576" marB="54864" anchor="t">
+                    <a:lnB w="9525" cap="flat" cmpd="sng" algn="ctr">
+                      <a:solidFill>
+                        <a:srgbClr val="D4D2D0"/>
+                      </a:solidFill>
+                    </a:lnB>
+                    <a:lnT w="0" cap="flat" cmpd="sng" algn="ctr">
+                      <a:solidFill>
+                        <a:srgbClr val="FAF8F4"/>
+                      </a:solidFill>
+                    </a:lnT>
+                    <a:lnR w="0" cap="flat" cmpd="sng" algn="ctr">
+                      <a:solidFill>
+                        <a:srgbClr val="FAF8F4"/>
+                      </a:solidFill>
+                    </a:lnR>
+                    <a:lnL w="0" cap="flat" cmpd="sng" algn="ctr">
+                      <a:solidFill>
+                        <a:srgbClr val="FAF8F4"/>
+                      </a:solidFill>
+                    </a:lnL>
+                    <a:noFill/>
+                  </a:tcPr>
+                </a:tc>
+              </a:tr>
+              <a:tr h="329981">
+                <a:tc>
+                  <a:txBody>
+                    <a:bodyPr wrap="square"/>
+                    <a:lstStyle/>
+                    <a:p>
+                      <a:pPr>
+                        <a:lnSpc>
+                          <a:spcPct val="134000"/>
+                        </a:lnSpc>
+                      </a:pPr>
+                      <a:r>
+                        <a:rPr sz="1100" b="1">
+                          <a:solidFill>
+                            <a:srgbClr val="111111"/>
+                          </a:solidFill>
+                          <a:latin typeface="Poppins"/>
+                        </a:rPr>
+                        <a:t>Monthly</a:t>
+                      </a:r>
+                    </a:p>
+                  </a:txBody>
+                  <a:tcPr marL="0" marR="128016" marT="36576" marB="54864" anchor="t">
+                    <a:lnB w="9525" cap="flat" cmpd="sng" algn="ctr">
+                      <a:solidFill>
+                        <a:srgbClr val="D4D2D0"/>
+                      </a:solidFill>
+                    </a:lnB>
+                    <a:lnT w="0" cap="flat" cmpd="sng" algn="ctr">
+                      <a:solidFill>
+                        <a:srgbClr val="FAF8F4"/>
+                      </a:solidFill>
+                    </a:lnT>
+                    <a:lnR w="0" cap="flat" cmpd="sng" algn="ctr">
+                      <a:solidFill>
+                        <a:srgbClr val="FAF8F4"/>
+                      </a:solidFill>
+                    </a:lnR>
+                    <a:lnL w="0" cap="flat" cmpd="sng" algn="ctr">
+                      <a:solidFill>
+                        <a:srgbClr val="FAF8F4"/>
+                      </a:solidFill>
+                    </a:lnL>
+                    <a:noFill/>
+                  </a:tcPr>
+                </a:tc>
+                <a:tc>
+                  <a:txBody>
+                    <a:bodyPr wrap="square"/>
+                    <a:lstStyle/>
+                    <a:p>
+                      <a:pPr>
+                        <a:lnSpc>
+                          <a:spcPct val="134000"/>
+                        </a:lnSpc>
+                      </a:pPr>
+                      <a:r>
+                        <a:rPr sz="1100" b="0">
+                          <a:solidFill>
+                            <a:srgbClr val="111111"/>
+                          </a:solidFill>
+                          <a:latin typeface="Poppins"/>
+                        </a:rPr>
+                        <a:t>One hour with both founders on the four numbers. Decisions taken in the room and recorded</a:t>
+                      </a:r>
+                    </a:p>
+                  </a:txBody>
+                  <a:tcPr marL="0" marR="128016" marT="36576" marB="54864" anchor="t">
+                    <a:lnB w="9525" cap="flat" cmpd="sng" algn="ctr">
+                      <a:solidFill>
+                        <a:srgbClr val="D4D2D0"/>
+                      </a:solidFill>
+                    </a:lnB>
+                    <a:lnT w="0" cap="flat" cmpd="sng" algn="ctr">
+                      <a:solidFill>
+                        <a:srgbClr val="FAF8F4"/>
+                      </a:solidFill>
+                    </a:lnT>
+                    <a:lnR w="0" cap="flat" cmpd="sng" algn="ctr">
+                      <a:solidFill>
+                        <a:srgbClr val="FAF8F4"/>
+                      </a:solidFill>
+                    </a:lnR>
+                    <a:lnL w="0" cap="flat" cmpd="sng" algn="ctr">
+                      <a:solidFill>
+                        <a:srgbClr val="FAF8F4"/>
+                      </a:solidFill>
+                    </a:lnL>
+                    <a:noFill/>
+                  </a:tcPr>
+                </a:tc>
+              </a:tr>
+              <a:tr h="329981">
+                <a:tc>
+                  <a:txBody>
+                    <a:bodyPr wrap="square"/>
+                    <a:lstStyle/>
+                    <a:p>
+                      <a:pPr>
+                        <a:lnSpc>
+                          <a:spcPct val="134000"/>
+                        </a:lnSpc>
+                      </a:pPr>
+                      <a:r>
+                        <a:rPr sz="1100" b="1">
+                          <a:solidFill>
+                            <a:srgbClr val="111111"/>
+                          </a:solidFill>
+                          <a:latin typeface="Poppins"/>
+                        </a:rPr>
+                        <a:t>Reviews</a:t>
+                      </a:r>
+                    </a:p>
+                  </a:txBody>
+                  <a:tcPr marL="0" marR="128016" marT="36576" marB="54864" anchor="t">
+                    <a:lnB w="9525" cap="flat" cmpd="sng" algn="ctr">
+                      <a:solidFill>
+                        <a:srgbClr val="D4D2D0"/>
+                      </a:solidFill>
+                    </a:lnB>
+                    <a:lnT w="0" cap="flat" cmpd="sng" algn="ctr">
+                      <a:solidFill>
+                        <a:srgbClr val="FAF8F4"/>
+                      </a:solidFill>
+                    </a:lnT>
+                    <a:lnR w="0" cap="flat" cmpd="sng" algn="ctr">
+                      <a:solidFill>
+                        <a:srgbClr val="FAF8F4"/>
+                      </a:solidFill>
+                    </a:lnR>
+                    <a:lnL w="0" cap="flat" cmpd="sng" algn="ctr">
+                      <a:solidFill>
+                        <a:srgbClr val="FAF8F4"/>
+                      </a:solidFill>
+                    </a:lnL>
+                    <a:noFill/>
+                  </a:tcPr>
+                </a:tc>
+                <a:tc>
+                  <a:txBody>
+                    <a:bodyPr wrap="square"/>
+                    <a:lstStyle/>
+                    <a:p>
+                      <a:pPr>
+                        <a:lnSpc>
+                          <a:spcPct val="134000"/>
+                        </a:lnSpc>
+                      </a:pPr>
+                      <a:r>
+                        <a:rPr sz="1100" b="0">
+                          <a:solidFill>
+                            <a:srgbClr val="111111"/>
+                          </a:solidFill>
+                          <a:latin typeface="Poppins"/>
+                        </a:rPr>
+                        <a:t>Mid-October, mid-December, March, September. A written review and a stop-or-continue conversation at each</a:t>
+                      </a:r>
+                    </a:p>
+                  </a:txBody>
+                  <a:tcPr marL="0" marR="128016" marT="36576" marB="54864" anchor="t">
+                    <a:lnB w="9525" cap="flat" cmpd="sng" algn="ctr">
+                      <a:solidFill>
+                        <a:srgbClr val="D4D2D0"/>
+                      </a:solidFill>
+                    </a:lnB>
+                    <a:lnT w="0" cap="flat" cmpd="sng" algn="ctr">
+                      <a:solidFill>
+                        <a:srgbClr val="FAF8F4"/>
+                      </a:solidFill>
+                    </a:lnT>
+                    <a:lnR w="0" cap="flat" cmpd="sng" algn="ctr">
+                      <a:solidFill>
+                        <a:srgbClr val="FAF8F4"/>
+                      </a:solidFill>
+                    </a:lnR>
+                    <a:lnL w="0" cap="flat" cmpd="sng" algn="ctr">
+                      <a:solidFill>
+                        <a:srgbClr val="FAF8F4"/>
+                      </a:solidFill>
+                    </a:lnL>
+                    <a:noFill/>
+                  </a:tcPr>
+                </a:tc>
+              </a:tr>
+              <a:tr h="558363">
+                <a:tc>
+                  <a:txBody>
+                    <a:bodyPr wrap="square"/>
+                    <a:lstStyle/>
+                    <a:p>
+                      <a:pPr>
+                        <a:lnSpc>
+                          <a:spcPct val="134000"/>
+                        </a:lnSpc>
+                      </a:pPr>
+                      <a:r>
+                        <a:rPr sz="1100" b="1">
+                          <a:solidFill>
+                            <a:srgbClr val="111111"/>
+                          </a:solidFill>
+                          <a:latin typeface="Poppins"/>
+                        </a:rPr>
+                        <a:t>Sign-off</a:t>
+                      </a:r>
+                    </a:p>
+                  </a:txBody>
+                  <a:tcPr marL="0" marR="128016" marT="36576" marB="54864" anchor="t">
+                    <a:lnB w="9525" cap="flat" cmpd="sng" algn="ctr">
+                      <a:solidFill>
+                        <a:srgbClr val="D4D2D0"/>
+                      </a:solidFill>
+                    </a:lnB>
+                    <a:lnT w="0" cap="flat" cmpd="sng" algn="ctr">
+                      <a:solidFill>
+                        <a:srgbClr val="FAF8F4"/>
+                      </a:solidFill>
+                    </a:lnT>
+                    <a:lnR w="0" cap="flat" cmpd="sng" algn="ctr">
+                      <a:solidFill>
+                        <a:srgbClr val="FAF8F4"/>
+                      </a:solidFill>
+                    </a:lnR>
+                    <a:lnL w="0" cap="flat" cmpd="sng" algn="ctr">
+                      <a:solidFill>
+                        <a:srgbClr val="FAF8F4"/>
+                      </a:solidFill>
+                    </a:lnL>
+                    <a:noFill/>
+                  </a:tcPr>
+                </a:tc>
+                <a:tc>
+                  <a:txBody>
+                    <a:bodyPr wrap="square"/>
+                    <a:lstStyle/>
+                    <a:p>
+                      <a:pPr>
+                        <a:lnSpc>
+                          <a:spcPct val="134000"/>
+                        </a:lnSpc>
+                      </a:pPr>
+                      <a:r>
+                        <a:rPr sz="1100" b="0">
+                          <a:solidFill>
+                            <a:srgbClr val="111111"/>
+                          </a:solidFill>
+                          <a:latin typeface="Poppins"/>
+                        </a:rPr>
+                        <a:t>One named person approves messaging, offers and anything that goes to market. We suggest Justin, with Chris consulted on brand and product</a:t>
+                      </a:r>
+                    </a:p>
+                  </a:txBody>
+                  <a:tcPr marL="0" marR="128016" marT="36576" marB="54864" anchor="t">
+                    <a:lnB w="9525" cap="flat" cmpd="sng" algn="ctr">
+                      <a:solidFill>
+                        <a:srgbClr val="D4D2D0"/>
+                      </a:solidFill>
+                    </a:lnB>
+                    <a:lnT w="0" cap="flat" cmpd="sng" algn="ctr">
+                      <a:solidFill>
+                        <a:srgbClr val="FAF8F4"/>
+                      </a:solidFill>
+                    </a:lnT>
+                    <a:lnR w="0" cap="flat" cmpd="sng" algn="ctr">
+                      <a:solidFill>
+                        <a:srgbClr val="FAF8F4"/>
+                      </a:solidFill>
+                    </a:lnR>
+                    <a:lnL w="0" cap="flat" cmpd="sng" algn="ctr">
+                      <a:solidFill>
+                        <a:srgbClr val="FAF8F4"/>
+                      </a:solidFill>
+                    </a:lnL>
+                    <a:noFill/>
+                  </a:tcPr>
+                </a:tc>
+              </a:tr>
+            </a:tbl>
+          </a:graphicData>
+        </a:graphic>
+      </p:graphicFrame>
+    </p:spTree>
+  </p:cSld>
+  <p:clrMapOvr>
+    <a:masterClrMapping/>
+  </p:clrMapOvr>
+</p:sld>
+</file>
+
+<file path=ppt/slides/slide25.xml><?xml version="1.0" encoding="utf-8"?>
+<p:sld xmlns:a="http://schemas.openxmlformats.org/drawingml/2006/main" xmlns:p="http://schemas.openxmlformats.org/presentationml/2006/main" xmlns:r="http://schemas.openxmlformats.org/officeDocument/2006/relationships">
+  <p:cSld>
+    <p:bg>
+      <p:bgPr>
+        <a:solidFill>
+          <a:srgbClr val="FAF8F4"/>
+        </a:solidFill>
+        <a:effectLst/>
+      </p:bgPr>
+    </p:bg>
+    <p:spTree>
+      <p:nvGrpSpPr>
+        <p:cNvPr id="1" name=""/>
+        <p:cNvGrpSpPr/>
+        <p:nvPr/>
+      </p:nvGrpSpPr>
+      <p:grpSpPr/>
+      <p:sp>
+        <p:nvSpPr>
+          <p:cNvPr id="2" name="TextBox 1"/>
+          <p:cNvSpPr txBox="1"/>
+          <p:nvPr/>
+        </p:nvSpPr>
+        <p:spPr>
+          <a:xfrm>
+            <a:off x="914400" y="914400"/>
+            <a:ext cx="10362895" cy="274320"/>
+          </a:xfrm>
+          <a:prstGeom prst="rect">
+            <a:avLst/>
+          </a:prstGeom>
+          <a:noFill/>
+        </p:spPr>
+        <p:txBody>
+          <a:bodyPr wrap="square" lIns="0" rIns="0" tIns="0" bIns="0" anchor="t">
+            <a:spAutoFit/>
+          </a:bodyPr>
+          <a:lstStyle/>
+          <a:p>
+            <a:pPr algn="l">
+              <a:lnSpc>
+                <a:spcPct val="100000"/>
+              </a:lnSpc>
+            </a:pPr>
+            <a:r>
+              <a:rPr sz="900" b="0" spc="200">
+                <a:solidFill>
+                  <a:srgbClr val="111111"/>
+                </a:solidFill>
+                <a:latin typeface="Poppins"/>
+              </a:rPr>
               <a:t>WHAT WE NEED FROM YOU</a:t>
             </a:r>
           </a:p>
@@ -16025,7 +16230,7 @@
 </p:sld>
 </file>
 
-<file path=ppt/slides/slide25.xml><?xml version="1.0" encoding="utf-8"?>
+<file path=ppt/slides/slide26.xml><?xml version="1.0" encoding="utf-8"?>
 <p:sld xmlns:a="http://schemas.openxmlformats.org/drawingml/2006/main" xmlns:p="http://schemas.openxmlformats.org/presentationml/2006/main" xmlns:r="http://schemas.openxmlformats.org/officeDocument/2006/relationships">
   <p:cSld>
     <p:bg>
@@ -16156,675 +16361,6 @@
                 <a:latin typeface="Poppins"/>
               </a:rPr>
               <a:t>Two options, one plan, one rhythm.</a:t>
-            </a:r>
-          </a:p>
-        </p:txBody>
-      </p:sp>
-    </p:spTree>
-  </p:cSld>
-  <p:clrMapOvr>
-    <a:masterClrMapping/>
-  </p:clrMapOvr>
-</p:sld>
-</file>
-
-<file path=ppt/slides/slide26.xml><?xml version="1.0" encoding="utf-8"?>
-<p:sld xmlns:a="http://schemas.openxmlformats.org/drawingml/2006/main" xmlns:p="http://schemas.openxmlformats.org/presentationml/2006/main" xmlns:r="http://schemas.openxmlformats.org/officeDocument/2006/relationships">
-  <p:cSld>
-    <p:bg>
-      <p:bgPr>
-        <a:solidFill>
-          <a:srgbClr val="FAF8F4"/>
-        </a:solidFill>
-        <a:effectLst/>
-      </p:bgPr>
-    </p:bg>
-    <p:spTree>
-      <p:nvGrpSpPr>
-        <p:cNvPr id="1" name=""/>
-        <p:cNvGrpSpPr/>
-        <p:nvPr/>
-      </p:nvGrpSpPr>
-      <p:grpSpPr/>
-      <p:sp>
-        <p:nvSpPr>
-          <p:cNvPr id="2" name="TextBox 1"/>
-          <p:cNvSpPr txBox="1"/>
-          <p:nvPr/>
-        </p:nvSpPr>
-        <p:spPr>
-          <a:xfrm>
-            <a:off x="914400" y="914400"/>
-            <a:ext cx="10362895" cy="274320"/>
-          </a:xfrm>
-          <a:prstGeom prst="rect">
-            <a:avLst/>
-          </a:prstGeom>
-          <a:noFill/>
-        </p:spPr>
-        <p:txBody>
-          <a:bodyPr wrap="square" lIns="0" rIns="0" tIns="0" bIns="0" anchor="t">
-            <a:spAutoFit/>
-          </a:bodyPr>
-          <a:lstStyle/>
-          <a:p>
-            <a:pPr algn="l">
-              <a:lnSpc>
-                <a:spcPct val="100000"/>
-              </a:lnSpc>
-            </a:pPr>
-            <a:r>
-              <a:rPr sz="900" b="0" spc="200">
-                <a:solidFill>
-                  <a:srgbClr val="111111"/>
-                </a:solidFill>
-                <a:latin typeface="Poppins"/>
-              </a:rPr>
-              <a:t>OPTION A</a:t>
-            </a:r>
-          </a:p>
-        </p:txBody>
-      </p:sp>
-      <p:sp>
-        <p:nvSpPr>
-          <p:cNvPr id="3" name="TextBox 2"/>
-          <p:cNvSpPr txBox="1"/>
-          <p:nvPr/>
-        </p:nvSpPr>
-        <p:spPr>
-          <a:xfrm>
-            <a:off x="914400" y="1371600"/>
-            <a:ext cx="10362895" cy="640080"/>
-          </a:xfrm>
-          <a:prstGeom prst="rect">
-            <a:avLst/>
-          </a:prstGeom>
-          <a:noFill/>
-        </p:spPr>
-        <p:txBody>
-          <a:bodyPr wrap="square" lIns="0" rIns="0" tIns="0" bIns="0" anchor="t">
-            <a:spAutoFit/>
-          </a:bodyPr>
-          <a:lstStyle/>
-          <a:p>
-            <a:pPr algn="l">
-              <a:lnSpc>
-                <a:spcPct val="112000"/>
-              </a:lnSpc>
-            </a:pPr>
-            <a:r>
-              <a:rPr sz="2800" b="0">
-                <a:solidFill>
-                  <a:srgbClr val="111111"/>
-                </a:solidFill>
-                <a:latin typeface="Poppins"/>
-              </a:rPr>
-              <a:t>The ninety-day sprint.</a:t>
-            </a:r>
-          </a:p>
-        </p:txBody>
-      </p:sp>
-      <p:sp>
-        <p:nvSpPr>
-          <p:cNvPr id="4" name="TextBox 3"/>
-          <p:cNvSpPr txBox="1"/>
-          <p:nvPr/>
-        </p:nvSpPr>
-        <p:spPr>
-          <a:xfrm>
-            <a:off x="914400" y="2084831"/>
-            <a:ext cx="8778240" cy="548640"/>
-          </a:xfrm>
-          <a:prstGeom prst="rect">
-            <a:avLst/>
-          </a:prstGeom>
-          <a:noFill/>
-        </p:spPr>
-        <p:txBody>
-          <a:bodyPr wrap="square" lIns="0" rIns="0" tIns="0" bIns="0" anchor="t">
-            <a:spAutoFit/>
-          </a:bodyPr>
-          <a:lstStyle/>
-          <a:p>
-            <a:pPr algn="l">
-              <a:lnSpc>
-                <a:spcPct val="140000"/>
-              </a:lnSpc>
-            </a:pPr>
-            <a:r>
-              <a:rPr sz="1300" b="0">
-                <a:solidFill>
-                  <a:srgbClr val="666666"/>
-                </a:solidFill>
-                <a:latin typeface="Poppins"/>
-              </a:rPr>
-              <a:t>Discover and Design already delivered, rack value $20,000, charged at $4,995 on acceptance of either option.</a:t>
-            </a:r>
-          </a:p>
-        </p:txBody>
-      </p:sp>
-      <p:graphicFrame>
-        <p:nvGraphicFramePr>
-          <p:cNvPr id="5" name="Table 4"/>
-          <p:cNvGraphicFramePr>
-            <a:graphicFrameLocks noGrp="1"/>
-          </p:cNvGraphicFramePr>
-          <p:nvPr/>
-        </p:nvGraphicFramePr>
-        <p:xfrm>
-          <a:off x="914400" y="2880360"/>
-          <a:ext cx="10362894" cy="2507772"/>
-        </p:xfrm>
-        <a:graphic>
-          <a:graphicData uri="http://schemas.openxmlformats.org/drawingml/2006/table">
-            <a:tbl>
-              <a:tblPr firstRow="0" bandRow="0">
-                <a:tableStyleId>{2D5ABB26-0587-4C30-8999-92F81FD0307C}</a:tableStyleId>
-              </a:tblPr>
-              <a:tblGrid>
-                <a:gridCol w="8083058"/>
-                <a:gridCol w="2279836"/>
-              </a:tblGrid>
-              <a:tr h="274320">
-                <a:tc>
-                  <a:txBody>
-                    <a:bodyPr wrap="square"/>
-                    <a:lstStyle/>
-                    <a:p>
-                      <a:pPr>
-                        <a:lnSpc>
-                          <a:spcPct val="134000"/>
-                        </a:lnSpc>
-                      </a:pPr>
-                      <a:r>
-                        <a:rPr sz="900" b="0" spc="200">
-                          <a:solidFill>
-                            <a:srgbClr val="666666"/>
-                          </a:solidFill>
-                          <a:latin typeface="Poppins"/>
-                        </a:rPr>
-                        <a:t>LINE</a:t>
-                      </a:r>
-                    </a:p>
-                  </a:txBody>
-                  <a:tcPr marL="0" marR="128016" marT="36576" marB="54864" anchor="t">
-                    <a:lnB w="9525" cap="flat" cmpd="sng" algn="ctr">
-                      <a:solidFill>
-                        <a:srgbClr val="D4D2D0"/>
-                      </a:solidFill>
-                    </a:lnB>
-                    <a:lnT w="0" cap="flat" cmpd="sng" algn="ctr">
-                      <a:solidFill>
-                        <a:srgbClr val="FAF8F4"/>
-                      </a:solidFill>
-                    </a:lnT>
-                    <a:lnR w="0" cap="flat" cmpd="sng" algn="ctr">
-                      <a:solidFill>
-                        <a:srgbClr val="FAF8F4"/>
-                      </a:solidFill>
-                    </a:lnR>
-                    <a:lnL w="0" cap="flat" cmpd="sng" algn="ctr">
-                      <a:solidFill>
-                        <a:srgbClr val="FAF8F4"/>
-                      </a:solidFill>
-                    </a:lnL>
-                    <a:noFill/>
-                  </a:tcPr>
-                </a:tc>
-                <a:tc>
-                  <a:txBody>
-                    <a:bodyPr wrap="square"/>
-                    <a:lstStyle/>
-                    <a:p>
-                      <a:pPr>
-                        <a:lnSpc>
-                          <a:spcPct val="134000"/>
-                        </a:lnSpc>
-                      </a:pPr>
-                      <a:r>
-                        <a:rPr sz="900" b="0" spc="200">
-                          <a:solidFill>
-                            <a:srgbClr val="666666"/>
-                          </a:solidFill>
-                          <a:latin typeface="Poppins"/>
-                        </a:rPr>
-                        <a:t>FEE</a:t>
-                      </a:r>
-                    </a:p>
-                  </a:txBody>
-                  <a:tcPr marL="0" marR="128016" marT="36576" marB="54864" anchor="t">
-                    <a:lnB w="9525" cap="flat" cmpd="sng" algn="ctr">
-                      <a:solidFill>
-                        <a:srgbClr val="D4D2D0"/>
-                      </a:solidFill>
-                    </a:lnB>
-                    <a:lnT w="0" cap="flat" cmpd="sng" algn="ctr">
-                      <a:solidFill>
-                        <a:srgbClr val="FAF8F4"/>
-                      </a:solidFill>
-                    </a:lnT>
-                    <a:lnR w="0" cap="flat" cmpd="sng" algn="ctr">
-                      <a:solidFill>
-                        <a:srgbClr val="FAF8F4"/>
-                      </a:solidFill>
-                    </a:lnR>
-                    <a:lnL w="0" cap="flat" cmpd="sng" algn="ctr">
-                      <a:solidFill>
-                        <a:srgbClr val="FAF8F4"/>
-                      </a:solidFill>
-                    </a:lnL>
-                    <a:noFill/>
-                  </a:tcPr>
-                </a:tc>
-              </a:tr>
-              <a:tr h="558363">
-                <a:tc>
-                  <a:txBody>
-                    <a:bodyPr wrap="square"/>
-                    <a:lstStyle/>
-                    <a:p>
-                      <a:pPr>
-                        <a:lnSpc>
-                          <a:spcPct val="134000"/>
-                        </a:lnSpc>
-                      </a:pPr>
-                      <a:r>
-                        <a:rPr sz="1100" b="1">
-                          <a:solidFill>
-                            <a:srgbClr val="111111"/>
-                          </a:solidFill>
-                          <a:latin typeface="Poppins"/>
-                        </a:rPr>
-                        <a:t>Foundation builds. Website rebuild with the buy path and proof pages, SEM set-up, trigger-based CRM with segments, three campaign landing pages</a:t>
-                      </a:r>
-                    </a:p>
-                  </a:txBody>
-                  <a:tcPr marL="0" marR="128016" marT="36576" marB="54864" anchor="t">
-                    <a:lnB w="9525" cap="flat" cmpd="sng" algn="ctr">
-                      <a:solidFill>
-                        <a:srgbClr val="D4D2D0"/>
-                      </a:solidFill>
-                    </a:lnB>
-                    <a:lnT w="0" cap="flat" cmpd="sng" algn="ctr">
-                      <a:solidFill>
-                        <a:srgbClr val="FAF8F4"/>
-                      </a:solidFill>
-                    </a:lnT>
-                    <a:lnR w="0" cap="flat" cmpd="sng" algn="ctr">
-                      <a:solidFill>
-                        <a:srgbClr val="FAF8F4"/>
-                      </a:solidFill>
-                    </a:lnR>
-                    <a:lnL w="0" cap="flat" cmpd="sng" algn="ctr">
-                      <a:solidFill>
-                        <a:srgbClr val="FAF8F4"/>
-                      </a:solidFill>
-                    </a:lnL>
-                    <a:noFill/>
-                  </a:tcPr>
-                </a:tc>
-                <a:tc>
-                  <a:txBody>
-                    <a:bodyPr wrap="square"/>
-                    <a:lstStyle/>
-                    <a:p>
-                      <a:pPr>
-                        <a:lnSpc>
-                          <a:spcPct val="134000"/>
-                        </a:lnSpc>
-                      </a:pPr>
-                      <a:r>
-                        <a:rPr sz="1100" b="0">
-                          <a:solidFill>
-                            <a:srgbClr val="111111"/>
-                          </a:solidFill>
-                          <a:latin typeface="Poppins"/>
-                        </a:rPr>
-                        <a:t>$9,250</a:t>
-                      </a:r>
-                    </a:p>
-                  </a:txBody>
-                  <a:tcPr marL="0" marR="128016" marT="36576" marB="54864" anchor="t">
-                    <a:lnB w="9525" cap="flat" cmpd="sng" algn="ctr">
-                      <a:solidFill>
-                        <a:srgbClr val="D4D2D0"/>
-                      </a:solidFill>
-                    </a:lnB>
-                    <a:lnT w="0" cap="flat" cmpd="sng" algn="ctr">
-                      <a:solidFill>
-                        <a:srgbClr val="FAF8F4"/>
-                      </a:solidFill>
-                    </a:lnT>
-                    <a:lnR w="0" cap="flat" cmpd="sng" algn="ctr">
-                      <a:solidFill>
-                        <a:srgbClr val="FAF8F4"/>
-                      </a:solidFill>
-                    </a:lnR>
-                    <a:lnL w="0" cap="flat" cmpd="sng" algn="ctr">
-                      <a:solidFill>
-                        <a:srgbClr val="FAF8F4"/>
-                      </a:solidFill>
-                    </a:lnL>
-                    <a:noFill/>
-                  </a:tcPr>
-                </a:tc>
-              </a:tr>
-              <a:tr h="558363">
-                <a:tc>
-                  <a:txBody>
-                    <a:bodyPr wrap="square"/>
-                    <a:lstStyle/>
-                    <a:p>
-                      <a:pPr>
-                        <a:lnSpc>
-                          <a:spcPct val="134000"/>
-                        </a:lnSpc>
-                      </a:pPr>
-                      <a:r>
-                        <a:rPr sz="1100" b="1">
-                          <a:solidFill>
-                            <a:srgbClr val="111111"/>
-                          </a:solidFill>
-                          <a:latin typeface="Poppins"/>
-                        </a:rPr>
-                        <a:t>Programme design. Switcher offer and partner approach, referral programme, wholesale structure and hire brief, key messaging and the customer journey, Oktoberfest</a:t>
-                      </a:r>
-                    </a:p>
-                  </a:txBody>
-                  <a:tcPr marL="0" marR="128016" marT="36576" marB="54864" anchor="t">
-                    <a:lnB w="9525" cap="flat" cmpd="sng" algn="ctr">
-                      <a:solidFill>
-                        <a:srgbClr val="D4D2D0"/>
-                      </a:solidFill>
-                    </a:lnB>
-                    <a:lnT w="0" cap="flat" cmpd="sng" algn="ctr">
-                      <a:solidFill>
-                        <a:srgbClr val="FAF8F4"/>
-                      </a:solidFill>
-                    </a:lnT>
-                    <a:lnR w="0" cap="flat" cmpd="sng" algn="ctr">
-                      <a:solidFill>
-                        <a:srgbClr val="FAF8F4"/>
-                      </a:solidFill>
-                    </a:lnR>
-                    <a:lnL w="0" cap="flat" cmpd="sng" algn="ctr">
-                      <a:solidFill>
-                        <a:srgbClr val="FAF8F4"/>
-                      </a:solidFill>
-                    </a:lnL>
-                    <a:noFill/>
-                  </a:tcPr>
-                </a:tc>
-                <a:tc>
-                  <a:txBody>
-                    <a:bodyPr wrap="square"/>
-                    <a:lstStyle/>
-                    <a:p>
-                      <a:pPr>
-                        <a:lnSpc>
-                          <a:spcPct val="134000"/>
-                        </a:lnSpc>
-                      </a:pPr>
-                      <a:r>
-                        <a:rPr sz="1100" b="0">
-                          <a:solidFill>
-                            <a:srgbClr val="111111"/>
-                          </a:solidFill>
-                          <a:latin typeface="Poppins"/>
-                        </a:rPr>
-                        <a:t>$8,500</a:t>
-                      </a:r>
-                    </a:p>
-                  </a:txBody>
-                  <a:tcPr marL="0" marR="128016" marT="36576" marB="54864" anchor="t">
-                    <a:lnB w="9525" cap="flat" cmpd="sng" algn="ctr">
-                      <a:solidFill>
-                        <a:srgbClr val="D4D2D0"/>
-                      </a:solidFill>
-                    </a:lnB>
-                    <a:lnT w="0" cap="flat" cmpd="sng" algn="ctr">
-                      <a:solidFill>
-                        <a:srgbClr val="FAF8F4"/>
-                      </a:solidFill>
-                    </a:lnT>
-                    <a:lnR w="0" cap="flat" cmpd="sng" algn="ctr">
-                      <a:solidFill>
-                        <a:srgbClr val="FAF8F4"/>
-                      </a:solidFill>
-                    </a:lnR>
-                    <a:lnL w="0" cap="flat" cmpd="sng" algn="ctr">
-                      <a:solidFill>
-                        <a:srgbClr val="FAF8F4"/>
-                      </a:solidFill>
-                    </a:lnL>
-                    <a:noFill/>
-                  </a:tcPr>
-                </a:tc>
-              </a:tr>
-              <a:tr h="558363">
-                <a:tc>
-                  <a:txBody>
-                    <a:bodyPr wrap="square"/>
-                    <a:lstStyle/>
-                    <a:p>
-                      <a:pPr>
-                        <a:lnSpc>
-                          <a:spcPct val="134000"/>
-                        </a:lnSpc>
-                      </a:pPr>
-                      <a:r>
-                        <a:rPr sz="1100" b="1">
-                          <a:solidFill>
-                            <a:srgbClr val="111111"/>
-                          </a:solidFill>
-                          <a:latin typeface="Poppins"/>
-                        </a:rPr>
-                        <a:t>Running the sprint, three months. SEM and Meta management, JVP and wholesale outreach, content and artwork, the rhythm and the report</a:t>
-                      </a:r>
-                    </a:p>
-                  </a:txBody>
-                  <a:tcPr marL="0" marR="128016" marT="36576" marB="54864" anchor="t">
-                    <a:lnB w="9525" cap="flat" cmpd="sng" algn="ctr">
-                      <a:solidFill>
-                        <a:srgbClr val="D4D2D0"/>
-                      </a:solidFill>
-                    </a:lnB>
-                    <a:lnT w="0" cap="flat" cmpd="sng" algn="ctr">
-                      <a:solidFill>
-                        <a:srgbClr val="FAF8F4"/>
-                      </a:solidFill>
-                    </a:lnT>
-                    <a:lnR w="0" cap="flat" cmpd="sng" algn="ctr">
-                      <a:solidFill>
-                        <a:srgbClr val="FAF8F4"/>
-                      </a:solidFill>
-                    </a:lnR>
-                    <a:lnL w="0" cap="flat" cmpd="sng" algn="ctr">
-                      <a:solidFill>
-                        <a:srgbClr val="FAF8F4"/>
-                      </a:solidFill>
-                    </a:lnL>
-                    <a:noFill/>
-                  </a:tcPr>
-                </a:tc>
-                <a:tc>
-                  <a:txBody>
-                    <a:bodyPr wrap="square"/>
-                    <a:lstStyle/>
-                    <a:p>
-                      <a:pPr>
-                        <a:lnSpc>
-                          <a:spcPct val="134000"/>
-                        </a:lnSpc>
-                      </a:pPr>
-                      <a:r>
-                        <a:rPr sz="1100" b="0">
-                          <a:solidFill>
-                            <a:srgbClr val="111111"/>
-                          </a:solidFill>
-                          <a:latin typeface="Poppins"/>
-                        </a:rPr>
-                        <a:t>$3,250 a month, $9,750</a:t>
-                      </a:r>
-                    </a:p>
-                  </a:txBody>
-                  <a:tcPr marL="0" marR="128016" marT="36576" marB="54864" anchor="t">
-                    <a:lnB w="9525" cap="flat" cmpd="sng" algn="ctr">
-                      <a:solidFill>
-                        <a:srgbClr val="D4D2D0"/>
-                      </a:solidFill>
-                    </a:lnB>
-                    <a:lnT w="0" cap="flat" cmpd="sng" algn="ctr">
-                      <a:solidFill>
-                        <a:srgbClr val="FAF8F4"/>
-                      </a:solidFill>
-                    </a:lnT>
-                    <a:lnR w="0" cap="flat" cmpd="sng" algn="ctr">
-                      <a:solidFill>
-                        <a:srgbClr val="FAF8F4"/>
-                      </a:solidFill>
-                    </a:lnR>
-                    <a:lnL w="0" cap="flat" cmpd="sng" algn="ctr">
-                      <a:solidFill>
-                        <a:srgbClr val="FAF8F4"/>
-                      </a:solidFill>
-                    </a:lnL>
-                    <a:noFill/>
-                  </a:tcPr>
-                </a:tc>
-              </a:tr>
-              <a:tr h="558363">
-                <a:tc>
-                  <a:txBody>
-                    <a:bodyPr wrap="square"/>
-                    <a:lstStyle/>
-                    <a:p>
-                      <a:pPr>
-                        <a:lnSpc>
-                          <a:spcPct val="134000"/>
-                        </a:lnSpc>
-                      </a:pPr>
-                      <a:r>
-                        <a:rPr sz="1100" b="1">
-                          <a:solidFill>
-                            <a:srgbClr val="111111"/>
-                          </a:solidFill>
-                          <a:latin typeface="Poppins"/>
-                        </a:rPr>
-                        <a:t>Option A total</a:t>
-                      </a:r>
-                    </a:p>
-                  </a:txBody>
-                  <a:tcPr marL="0" marR="128016" marT="36576" marB="54864" anchor="t">
-                    <a:lnB w="9525" cap="flat" cmpd="sng" algn="ctr">
-                      <a:solidFill>
-                        <a:srgbClr val="D4D2D0"/>
-                      </a:solidFill>
-                    </a:lnB>
-                    <a:lnT w="0" cap="flat" cmpd="sng" algn="ctr">
-                      <a:solidFill>
-                        <a:srgbClr val="FAF8F4"/>
-                      </a:solidFill>
-                    </a:lnT>
-                    <a:lnR w="0" cap="flat" cmpd="sng" algn="ctr">
-                      <a:solidFill>
-                        <a:srgbClr val="FAF8F4"/>
-                      </a:solidFill>
-                    </a:lnR>
-                    <a:lnL w="0" cap="flat" cmpd="sng" algn="ctr">
-                      <a:solidFill>
-                        <a:srgbClr val="FAF8F4"/>
-                      </a:solidFill>
-                    </a:lnL>
-                    <a:noFill/>
-                  </a:tcPr>
-                </a:tc>
-                <a:tc>
-                  <a:txBody>
-                    <a:bodyPr wrap="square"/>
-                    <a:lstStyle/>
-                    <a:p>
-                      <a:pPr>
-                        <a:lnSpc>
-                          <a:spcPct val="134000"/>
-                        </a:lnSpc>
-                      </a:pPr>
-                      <a:r>
-                        <a:rPr sz="1100" b="0">
-                          <a:solidFill>
-                            <a:srgbClr val="111111"/>
-                          </a:solidFill>
-                          <a:latin typeface="Poppins"/>
-                        </a:rPr>
-                        <a:t>$12,500 + GST
-normally $27,500</a:t>
-                      </a:r>
-                    </a:p>
-                  </a:txBody>
-                  <a:tcPr marL="0" marR="128016" marT="36576" marB="54864" anchor="t">
-                    <a:lnB w="9525" cap="flat" cmpd="sng" algn="ctr">
-                      <a:solidFill>
-                        <a:srgbClr val="D4D2D0"/>
-                      </a:solidFill>
-                    </a:lnB>
-                    <a:lnT w="0" cap="flat" cmpd="sng" algn="ctr">
-                      <a:solidFill>
-                        <a:srgbClr val="FAF8F4"/>
-                      </a:solidFill>
-                    </a:lnT>
-                    <a:lnR w="0" cap="flat" cmpd="sng" algn="ctr">
-                      <a:solidFill>
-                        <a:srgbClr val="FAF8F4"/>
-                      </a:solidFill>
-                    </a:lnR>
-                    <a:lnL w="0" cap="flat" cmpd="sng" algn="ctr">
-                      <a:solidFill>
-                        <a:srgbClr val="FAF8F4"/>
-                      </a:solidFill>
-                    </a:lnL>
-                    <a:noFill/>
-                  </a:tcPr>
-                </a:tc>
-              </a:tr>
-            </a:tbl>
-          </a:graphicData>
-        </a:graphic>
-      </p:graphicFrame>
-      <p:sp>
-        <p:nvSpPr>
-          <p:cNvPr id="6" name="TextBox 5"/>
-          <p:cNvSpPr txBox="1"/>
-          <p:nvPr/>
-        </p:nvSpPr>
-        <p:spPr>
-          <a:xfrm>
-            <a:off x="914400" y="6291072"/>
-            <a:ext cx="10362895" cy="274320"/>
-          </a:xfrm>
-          <a:prstGeom prst="rect">
-            <a:avLst/>
-          </a:prstGeom>
-          <a:noFill/>
-        </p:spPr>
-        <p:txBody>
-          <a:bodyPr wrap="square" lIns="0" rIns="0" tIns="0" bIns="0" anchor="t">
-            <a:spAutoFit/>
-          </a:bodyPr>
-          <a:lstStyle/>
-          <a:p>
-            <a:pPr algn="l">
-              <a:lnSpc>
-                <a:spcPct val="100000"/>
-              </a:lnSpc>
-            </a:pPr>
-            <a:r>
-              <a:rPr sz="900" b="0">
-                <a:solidFill>
-                  <a:srgbClr val="666666"/>
-                </a:solidFill>
-                <a:latin typeface="Poppins"/>
-              </a:rPr>
-              <a:t>50% on acceptance, 50% at the mid-December review. Stop or continue at that review. The line fees are the standard rate and sum to $27,500; the discount is applied to the total.</a:t>
             </a:r>
           </a:p>
         </p:txBody>
@@ -16889,7 +16425,7 @@
                 </a:solidFill>
                 <a:latin typeface="Poppins"/>
               </a:rPr>
-              <a:t>OPTION B</a:t>
+              <a:t>OPTION A</a:t>
             </a:r>
           </a:p>
         </p:txBody>
@@ -16928,7 +16464,7 @@
                 </a:solidFill>
                 <a:latin typeface="Poppins"/>
               </a:rPr>
-              <a:t>Twelve months.</a:t>
+              <a:t>The ninety-day sprint.</a:t>
             </a:r>
           </a:p>
         </p:txBody>
@@ -16967,7 +16503,7 @@
                 </a:solidFill>
                 <a:latin typeface="Poppins"/>
               </a:rPr>
-              <a:t>An active refill customer is worth about $2,400 a year. Option B pays for itself at thirteen additional refillers held for a year, and your own six-month target adds about 145.</a:t>
+              <a:t>Discover and Design already delivered, rack value $20,000, charged at $4,995 on acceptance of either option.</a:t>
             </a:r>
           </a:p>
         </p:txBody>
@@ -16982,7 +16518,7 @@
         </p:nvGraphicFramePr>
         <p:xfrm>
           <a:off x="914400" y="2880360"/>
-          <a:ext cx="10362894" cy="2177789"/>
+          <a:ext cx="10362894" cy="2507772"/>
         </p:xfrm>
         <a:graphic>
           <a:graphicData uri="http://schemas.openxmlformats.org/drawingml/2006/table">
@@ -16991,8 +16527,8 @@
                 <a:tableStyleId>{2D5ABB26-0587-4C30-8999-92F81FD0307C}</a:tableStyleId>
               </a:tblPr>
               <a:tblGrid>
-                <a:gridCol w="7046768"/>
-                <a:gridCol w="3316126"/>
+                <a:gridCol w="8083058"/>
+                <a:gridCol w="2279836"/>
               </a:tblGrid>
               <a:tr h="274320">
                 <a:tc>
@@ -17086,7 +16622,7 @@
                   </a:tcPr>
                 </a:tc>
               </a:tr>
-              <a:tr h="329981">
+              <a:tr h="558363">
                 <a:tc>
                   <a:txBody>
                     <a:bodyPr wrap="square"/>
@@ -17104,7 +16640,7 @@
                           </a:solidFill>
                           <a:latin typeface="Poppins"/>
                         </a:rPr>
-                        <a:t>Everything in Option A, delivered in the first three months</a:t>
+                        <a:t>Foundation builds. Website rebuild with the buy path and proof pages, SEM set-up, trigger-based CRM with segments, three campaign landing pages</a:t>
                       </a:r>
                     </a:p>
                   </a:txBody>
@@ -17149,7 +16685,7 @@
                           </a:solidFill>
                           <a:latin typeface="Poppins"/>
                         </a:rPr>
-                        <a:t>Included</a:t>
+                        <a:t>$9,250</a:t>
                       </a:r>
                     </a:p>
                   </a:txBody>
@@ -17178,7 +16714,7 @@
                   </a:tcPr>
                 </a:tc>
               </a:tr>
-              <a:tr h="786744">
+              <a:tr h="558363">
                 <a:tc>
                   <a:txBody>
                     <a:bodyPr wrap="square"/>
@@ -17196,7 +16732,7 @@
                           </a:solidFill>
                           <a:latin typeface="Poppins"/>
                         </a:rPr>
-                        <a:t>Months four to twelve. Weddings and functions, membership redesign, the designing-for-her brief, range and hero marketing, club and venue offers, the events calendar, SEM, outreach, content and artwork continuing, the reviews at March and September</a:t>
+                        <a:t>Programme design. Switcher offer and partner approach, referral programme, wholesale structure and hire brief, key messaging and the customer journey, Oktoberfest</a:t>
                       </a:r>
                     </a:p>
                   </a:txBody>
@@ -17241,7 +16777,7 @@
                           </a:solidFill>
                           <a:latin typeface="Poppins"/>
                         </a:rPr>
-                        <a:t>Included</a:t>
+                        <a:t>$8,500</a:t>
                       </a:r>
                     </a:p>
                   </a:txBody>
@@ -17270,7 +16806,7 @@
                   </a:tcPr>
                 </a:tc>
               </a:tr>
-              <a:tr h="786744">
+              <a:tr h="558363">
                 <a:tc>
                   <a:txBody>
                     <a:bodyPr wrap="square"/>
@@ -17288,7 +16824,7 @@
                           </a:solidFill>
                           <a:latin typeface="Poppins"/>
                         </a:rPr>
-                        <a:t>Option B total</a:t>
+                        <a:t>Running the sprint, three months. SEM and Meta management, JVP and wholesale outreach, content and artwork, the rhythm and the report</a:t>
                       </a:r>
                     </a:p>
                   </a:txBody>
@@ -17333,9 +16869,100 @@
                           </a:solidFill>
                           <a:latin typeface="Poppins"/>
                         </a:rPr>
-                        <a:t>$2,500 a month + GST
-normally $5,500
-$30,000 over twelve months</a:t>
+                        <a:t>$3,250 a month, $9,750</a:t>
+                      </a:r>
+                    </a:p>
+                  </a:txBody>
+                  <a:tcPr marL="0" marR="128016" marT="36576" marB="54864" anchor="t">
+                    <a:lnB w="9525" cap="flat" cmpd="sng" algn="ctr">
+                      <a:solidFill>
+                        <a:srgbClr val="D4D2D0"/>
+                      </a:solidFill>
+                    </a:lnB>
+                    <a:lnT w="0" cap="flat" cmpd="sng" algn="ctr">
+                      <a:solidFill>
+                        <a:srgbClr val="FAF8F4"/>
+                      </a:solidFill>
+                    </a:lnT>
+                    <a:lnR w="0" cap="flat" cmpd="sng" algn="ctr">
+                      <a:solidFill>
+                        <a:srgbClr val="FAF8F4"/>
+                      </a:solidFill>
+                    </a:lnR>
+                    <a:lnL w="0" cap="flat" cmpd="sng" algn="ctr">
+                      <a:solidFill>
+                        <a:srgbClr val="FAF8F4"/>
+                      </a:solidFill>
+                    </a:lnL>
+                    <a:noFill/>
+                  </a:tcPr>
+                </a:tc>
+              </a:tr>
+              <a:tr h="558363">
+                <a:tc>
+                  <a:txBody>
+                    <a:bodyPr wrap="square"/>
+                    <a:lstStyle/>
+                    <a:p>
+                      <a:pPr>
+                        <a:lnSpc>
+                          <a:spcPct val="134000"/>
+                        </a:lnSpc>
+                      </a:pPr>
+                      <a:r>
+                        <a:rPr sz="1100" b="1">
+                          <a:solidFill>
+                            <a:srgbClr val="111111"/>
+                          </a:solidFill>
+                          <a:latin typeface="Poppins"/>
+                        </a:rPr>
+                        <a:t>Option A total</a:t>
+                      </a:r>
+                    </a:p>
+                  </a:txBody>
+                  <a:tcPr marL="0" marR="128016" marT="36576" marB="54864" anchor="t">
+                    <a:lnB w="9525" cap="flat" cmpd="sng" algn="ctr">
+                      <a:solidFill>
+                        <a:srgbClr val="D4D2D0"/>
+                      </a:solidFill>
+                    </a:lnB>
+                    <a:lnT w="0" cap="flat" cmpd="sng" algn="ctr">
+                      <a:solidFill>
+                        <a:srgbClr val="FAF8F4"/>
+                      </a:solidFill>
+                    </a:lnT>
+                    <a:lnR w="0" cap="flat" cmpd="sng" algn="ctr">
+                      <a:solidFill>
+                        <a:srgbClr val="FAF8F4"/>
+                      </a:solidFill>
+                    </a:lnR>
+                    <a:lnL w="0" cap="flat" cmpd="sng" algn="ctr">
+                      <a:solidFill>
+                        <a:srgbClr val="FAF8F4"/>
+                      </a:solidFill>
+                    </a:lnL>
+                    <a:noFill/>
+                  </a:tcPr>
+                </a:tc>
+                <a:tc>
+                  <a:txBody>
+                    <a:bodyPr wrap="square"/>
+                    <a:lstStyle/>
+                    <a:p>
+                      <a:pPr>
+                        <a:lnSpc>
+                          <a:spcPct val="134000"/>
+                        </a:lnSpc>
+                      </a:pPr>
+                      <a:r>
+                        <a:rPr sz="1100" b="0">
+                          <a:solidFill>
+                            <a:srgbClr val="111111"/>
+                          </a:solidFill>
+                          <a:latin typeface="Poppins"/>
+                        </a:rPr>
+                        <a:t>$12,500 + GST
+normally $27,500</a:t>
                       </a:r>
                     </a:p>
                   </a:txBody>
@@ -17402,7 +17029,7 @@
                 </a:solidFill>
                 <a:latin typeface="Poppins"/>
               </a:rPr>
-              <a:t>Monthly in advance. Minimum three months, then stop at any review with a month's notice. Rates behind every figure: Client Director $1,500 a day, Client Manager $1,250 a day.</a:t>
+              <a:t>50% on acceptance, 50% at the mid-December review. Stop or continue at that review. The line fees are the standard rate and sum to $27,500; the discount is applied to the total.</a:t>
             </a:r>
           </a:p>
         </p:txBody>
@@ -17467,6 +17094,584 @@
                 </a:solidFill>
                 <a:latin typeface="Poppins"/>
               </a:rPr>
+              <a:t>OPTION B</a:t>
+            </a:r>
+          </a:p>
+        </p:txBody>
+      </p:sp>
+      <p:sp>
+        <p:nvSpPr>
+          <p:cNvPr id="3" name="TextBox 2"/>
+          <p:cNvSpPr txBox="1"/>
+          <p:nvPr/>
+        </p:nvSpPr>
+        <p:spPr>
+          <a:xfrm>
+            <a:off x="914400" y="1371600"/>
+            <a:ext cx="10362895" cy="640080"/>
+          </a:xfrm>
+          <a:prstGeom prst="rect">
+            <a:avLst/>
+          </a:prstGeom>
+          <a:noFill/>
+        </p:spPr>
+        <p:txBody>
+          <a:bodyPr wrap="square" lIns="0" rIns="0" tIns="0" bIns="0" anchor="t">
+            <a:spAutoFit/>
+          </a:bodyPr>
+          <a:lstStyle/>
+          <a:p>
+            <a:pPr algn="l">
+              <a:lnSpc>
+                <a:spcPct val="112000"/>
+              </a:lnSpc>
+            </a:pPr>
+            <a:r>
+              <a:rPr sz="2800" b="0">
+                <a:solidFill>
+                  <a:srgbClr val="111111"/>
+                </a:solidFill>
+                <a:latin typeface="Poppins"/>
+              </a:rPr>
+              <a:t>Twelve months.</a:t>
+            </a:r>
+          </a:p>
+        </p:txBody>
+      </p:sp>
+      <p:sp>
+        <p:nvSpPr>
+          <p:cNvPr id="4" name="TextBox 3"/>
+          <p:cNvSpPr txBox="1"/>
+          <p:nvPr/>
+        </p:nvSpPr>
+        <p:spPr>
+          <a:xfrm>
+            <a:off x="914400" y="2084831"/>
+            <a:ext cx="8778240" cy="548640"/>
+          </a:xfrm>
+          <a:prstGeom prst="rect">
+            <a:avLst/>
+          </a:prstGeom>
+          <a:noFill/>
+        </p:spPr>
+        <p:txBody>
+          <a:bodyPr wrap="square" lIns="0" rIns="0" tIns="0" bIns="0" anchor="t">
+            <a:spAutoFit/>
+          </a:bodyPr>
+          <a:lstStyle/>
+          <a:p>
+            <a:pPr algn="l">
+              <a:lnSpc>
+                <a:spcPct val="140000"/>
+              </a:lnSpc>
+            </a:pPr>
+            <a:r>
+              <a:rPr sz="1300" b="0">
+                <a:solidFill>
+                  <a:srgbClr val="666666"/>
+                </a:solidFill>
+                <a:latin typeface="Poppins"/>
+              </a:rPr>
+              <a:t>An active refill customer is worth about $2,400 a year. Option B pays for itself at thirteen additional refillers held for a year, and your own six-month target adds about 145.</a:t>
+            </a:r>
+          </a:p>
+        </p:txBody>
+      </p:sp>
+      <p:graphicFrame>
+        <p:nvGraphicFramePr>
+          <p:cNvPr id="5" name="Table 4"/>
+          <p:cNvGraphicFramePr>
+            <a:graphicFrameLocks noGrp="1"/>
+          </p:cNvGraphicFramePr>
+          <p:nvPr/>
+        </p:nvGraphicFramePr>
+        <p:xfrm>
+          <a:off x="914400" y="2880360"/>
+          <a:ext cx="10362894" cy="2177789"/>
+        </p:xfrm>
+        <a:graphic>
+          <a:graphicData uri="http://schemas.openxmlformats.org/drawingml/2006/table">
+            <a:tbl>
+              <a:tblPr firstRow="0" bandRow="0">
+                <a:tableStyleId>{2D5ABB26-0587-4C30-8999-92F81FD0307C}</a:tableStyleId>
+              </a:tblPr>
+              <a:tblGrid>
+                <a:gridCol w="7046768"/>
+                <a:gridCol w="3316126"/>
+              </a:tblGrid>
+              <a:tr h="274320">
+                <a:tc>
+                  <a:txBody>
+                    <a:bodyPr wrap="square"/>
+                    <a:lstStyle/>
+                    <a:p>
+                      <a:pPr>
+                        <a:lnSpc>
+                          <a:spcPct val="134000"/>
+                        </a:lnSpc>
+                      </a:pPr>
+                      <a:r>
+                        <a:rPr sz="900" b="0" spc="200">
+                          <a:solidFill>
+                            <a:srgbClr val="666666"/>
+                          </a:solidFill>
+                          <a:latin typeface="Poppins"/>
+                        </a:rPr>
+                        <a:t>LINE</a:t>
+                      </a:r>
+                    </a:p>
+                  </a:txBody>
+                  <a:tcPr marL="0" marR="128016" marT="36576" marB="54864" anchor="t">
+                    <a:lnB w="9525" cap="flat" cmpd="sng" algn="ctr">
+                      <a:solidFill>
+                        <a:srgbClr val="D4D2D0"/>
+                      </a:solidFill>
+                    </a:lnB>
+                    <a:lnT w="0" cap="flat" cmpd="sng" algn="ctr">
+                      <a:solidFill>
+                        <a:srgbClr val="FAF8F4"/>
+                      </a:solidFill>
+                    </a:lnT>
+                    <a:lnR w="0" cap="flat" cmpd="sng" algn="ctr">
+                      <a:solidFill>
+                        <a:srgbClr val="FAF8F4"/>
+                      </a:solidFill>
+                    </a:lnR>
+                    <a:lnL w="0" cap="flat" cmpd="sng" algn="ctr">
+                      <a:solidFill>
+                        <a:srgbClr val="FAF8F4"/>
+                      </a:solidFill>
+                    </a:lnL>
+                    <a:noFill/>
+                  </a:tcPr>
+                </a:tc>
+                <a:tc>
+                  <a:txBody>
+                    <a:bodyPr wrap="square"/>
+                    <a:lstStyle/>
+                    <a:p>
+                      <a:pPr>
+                        <a:lnSpc>
+                          <a:spcPct val="134000"/>
+                        </a:lnSpc>
+                      </a:pPr>
+                      <a:r>
+                        <a:rPr sz="900" b="0" spc="200">
+                          <a:solidFill>
+                            <a:srgbClr val="666666"/>
+                          </a:solidFill>
+                          <a:latin typeface="Poppins"/>
+                        </a:rPr>
+                        <a:t>FEE</a:t>
+                      </a:r>
+                    </a:p>
+                  </a:txBody>
+                  <a:tcPr marL="0" marR="128016" marT="36576" marB="54864" anchor="t">
+                    <a:lnB w="9525" cap="flat" cmpd="sng" algn="ctr">
+                      <a:solidFill>
+                        <a:srgbClr val="D4D2D0"/>
+                      </a:solidFill>
+                    </a:lnB>
+                    <a:lnT w="0" cap="flat" cmpd="sng" algn="ctr">
+                      <a:solidFill>
+                        <a:srgbClr val="FAF8F4"/>
+                      </a:solidFill>
+                    </a:lnT>
+                    <a:lnR w="0" cap="flat" cmpd="sng" algn="ctr">
+                      <a:solidFill>
+                        <a:srgbClr val="FAF8F4"/>
+                      </a:solidFill>
+                    </a:lnR>
+                    <a:lnL w="0" cap="flat" cmpd="sng" algn="ctr">
+                      <a:solidFill>
+                        <a:srgbClr val="FAF8F4"/>
+                      </a:solidFill>
+                    </a:lnL>
+                    <a:noFill/>
+                  </a:tcPr>
+                </a:tc>
+              </a:tr>
+              <a:tr h="329981">
+                <a:tc>
+                  <a:txBody>
+                    <a:bodyPr wrap="square"/>
+                    <a:lstStyle/>
+                    <a:p>
+                      <a:pPr>
+                        <a:lnSpc>
+                          <a:spcPct val="134000"/>
+                        </a:lnSpc>
+                      </a:pPr>
+                      <a:r>
+                        <a:rPr sz="1100" b="1">
+                          <a:solidFill>
+                            <a:srgbClr val="111111"/>
+                          </a:solidFill>
+                          <a:latin typeface="Poppins"/>
+                        </a:rPr>
+                        <a:t>Everything in Option A, delivered in the first three months</a:t>
+                      </a:r>
+                    </a:p>
+                  </a:txBody>
+                  <a:tcPr marL="0" marR="128016" marT="36576" marB="54864" anchor="t">
+                    <a:lnB w="9525" cap="flat" cmpd="sng" algn="ctr">
+                      <a:solidFill>
+                        <a:srgbClr val="D4D2D0"/>
+                      </a:solidFill>
+                    </a:lnB>
+                    <a:lnT w="0" cap="flat" cmpd="sng" algn="ctr">
+                      <a:solidFill>
+                        <a:srgbClr val="FAF8F4"/>
+                      </a:solidFill>
+                    </a:lnT>
+                    <a:lnR w="0" cap="flat" cmpd="sng" algn="ctr">
+                      <a:solidFill>
+                        <a:srgbClr val="FAF8F4"/>
+                      </a:solidFill>
+                    </a:lnR>
+                    <a:lnL w="0" cap="flat" cmpd="sng" algn="ctr">
+                      <a:solidFill>
+                        <a:srgbClr val="FAF8F4"/>
+                      </a:solidFill>
+                    </a:lnL>
+                    <a:noFill/>
+                  </a:tcPr>
+                </a:tc>
+                <a:tc>
+                  <a:txBody>
+                    <a:bodyPr wrap="square"/>
+                    <a:lstStyle/>
+                    <a:p>
+                      <a:pPr>
+                        <a:lnSpc>
+                          <a:spcPct val="134000"/>
+                        </a:lnSpc>
+                      </a:pPr>
+                      <a:r>
+                        <a:rPr sz="1100" b="0">
+                          <a:solidFill>
+                            <a:srgbClr val="111111"/>
+                          </a:solidFill>
+                          <a:latin typeface="Poppins"/>
+                        </a:rPr>
+                        <a:t>Included</a:t>
+                      </a:r>
+                    </a:p>
+                  </a:txBody>
+                  <a:tcPr marL="0" marR="128016" marT="36576" marB="54864" anchor="t">
+                    <a:lnB w="9525" cap="flat" cmpd="sng" algn="ctr">
+                      <a:solidFill>
+                        <a:srgbClr val="D4D2D0"/>
+                      </a:solidFill>
+                    </a:lnB>
+                    <a:lnT w="0" cap="flat" cmpd="sng" algn="ctr">
+                      <a:solidFill>
+                        <a:srgbClr val="FAF8F4"/>
+                      </a:solidFill>
+                    </a:lnT>
+                    <a:lnR w="0" cap="flat" cmpd="sng" algn="ctr">
+                      <a:solidFill>
+                        <a:srgbClr val="FAF8F4"/>
+                      </a:solidFill>
+                    </a:lnR>
+                    <a:lnL w="0" cap="flat" cmpd="sng" algn="ctr">
+                      <a:solidFill>
+                        <a:srgbClr val="FAF8F4"/>
+                      </a:solidFill>
+                    </a:lnL>
+                    <a:noFill/>
+                  </a:tcPr>
+                </a:tc>
+              </a:tr>
+              <a:tr h="786744">
+                <a:tc>
+                  <a:txBody>
+                    <a:bodyPr wrap="square"/>
+                    <a:lstStyle/>
+                    <a:p>
+                      <a:pPr>
+                        <a:lnSpc>
+                          <a:spcPct val="134000"/>
+                        </a:lnSpc>
+                      </a:pPr>
+                      <a:r>
+                        <a:rPr sz="1100" b="1">
+                          <a:solidFill>
+                            <a:srgbClr val="111111"/>
+                          </a:solidFill>
+                          <a:latin typeface="Poppins"/>
+                        </a:rPr>
+                        <a:t>Months four to twelve. Weddings and functions, membership redesign, the designing-for-her brief, range and hero marketing, club and venue offers, the events calendar, SEM, outreach, content and artwork continuing, the reviews at March and September</a:t>
+                      </a:r>
+                    </a:p>
+                  </a:txBody>
+                  <a:tcPr marL="0" marR="128016" marT="36576" marB="54864" anchor="t">
+                    <a:lnB w="9525" cap="flat" cmpd="sng" algn="ctr">
+                      <a:solidFill>
+                        <a:srgbClr val="D4D2D0"/>
+                      </a:solidFill>
+                    </a:lnB>
+                    <a:lnT w="0" cap="flat" cmpd="sng" algn="ctr">
+                      <a:solidFill>
+                        <a:srgbClr val="FAF8F4"/>
+                      </a:solidFill>
+                    </a:lnT>
+                    <a:lnR w="0" cap="flat" cmpd="sng" algn="ctr">
+                      <a:solidFill>
+                        <a:srgbClr val="FAF8F4"/>
+                      </a:solidFill>
+                    </a:lnR>
+                    <a:lnL w="0" cap="flat" cmpd="sng" algn="ctr">
+                      <a:solidFill>
+                        <a:srgbClr val="FAF8F4"/>
+                      </a:solidFill>
+                    </a:lnL>
+                    <a:noFill/>
+                  </a:tcPr>
+                </a:tc>
+                <a:tc>
+                  <a:txBody>
+                    <a:bodyPr wrap="square"/>
+                    <a:lstStyle/>
+                    <a:p>
+                      <a:pPr>
+                        <a:lnSpc>
+                          <a:spcPct val="134000"/>
+                        </a:lnSpc>
+                      </a:pPr>
+                      <a:r>
+                        <a:rPr sz="1100" b="0">
+                          <a:solidFill>
+                            <a:srgbClr val="111111"/>
+                          </a:solidFill>
+                          <a:latin typeface="Poppins"/>
+                        </a:rPr>
+                        <a:t>Included</a:t>
+                      </a:r>
+                    </a:p>
+                  </a:txBody>
+                  <a:tcPr marL="0" marR="128016" marT="36576" marB="54864" anchor="t">
+                    <a:lnB w="9525" cap="flat" cmpd="sng" algn="ctr">
+                      <a:solidFill>
+                        <a:srgbClr val="D4D2D0"/>
+                      </a:solidFill>
+                    </a:lnB>
+                    <a:lnT w="0" cap="flat" cmpd="sng" algn="ctr">
+                      <a:solidFill>
+                        <a:srgbClr val="FAF8F4"/>
+                      </a:solidFill>
+                    </a:lnT>
+                    <a:lnR w="0" cap="flat" cmpd="sng" algn="ctr">
+                      <a:solidFill>
+                        <a:srgbClr val="FAF8F4"/>
+                      </a:solidFill>
+                    </a:lnR>
+                    <a:lnL w="0" cap="flat" cmpd="sng" algn="ctr">
+                      <a:solidFill>
+                        <a:srgbClr val="FAF8F4"/>
+                      </a:solidFill>
+                    </a:lnL>
+                    <a:noFill/>
+                  </a:tcPr>
+                </a:tc>
+              </a:tr>
+              <a:tr h="786744">
+                <a:tc>
+                  <a:txBody>
+                    <a:bodyPr wrap="square"/>
+                    <a:lstStyle/>
+                    <a:p>
+                      <a:pPr>
+                        <a:lnSpc>
+                          <a:spcPct val="134000"/>
+                        </a:lnSpc>
+                      </a:pPr>
+                      <a:r>
+                        <a:rPr sz="1100" b="1">
+                          <a:solidFill>
+                            <a:srgbClr val="111111"/>
+                          </a:solidFill>
+                          <a:latin typeface="Poppins"/>
+                        </a:rPr>
+                        <a:t>Option B total</a:t>
+                      </a:r>
+                    </a:p>
+                  </a:txBody>
+                  <a:tcPr marL="0" marR="128016" marT="36576" marB="54864" anchor="t">
+                    <a:lnB w="9525" cap="flat" cmpd="sng" algn="ctr">
+                      <a:solidFill>
+                        <a:srgbClr val="D4D2D0"/>
+                      </a:solidFill>
+                    </a:lnB>
+                    <a:lnT w="0" cap="flat" cmpd="sng" algn="ctr">
+                      <a:solidFill>
+                        <a:srgbClr val="FAF8F4"/>
+                      </a:solidFill>
+                    </a:lnT>
+                    <a:lnR w="0" cap="flat" cmpd="sng" algn="ctr">
+                      <a:solidFill>
+                        <a:srgbClr val="FAF8F4"/>
+                      </a:solidFill>
+                    </a:lnR>
+                    <a:lnL w="0" cap="flat" cmpd="sng" algn="ctr">
+                      <a:solidFill>
+                        <a:srgbClr val="FAF8F4"/>
+                      </a:solidFill>
+                    </a:lnL>
+                    <a:noFill/>
+                  </a:tcPr>
+                </a:tc>
+                <a:tc>
+                  <a:txBody>
+                    <a:bodyPr wrap="square"/>
+                    <a:lstStyle/>
+                    <a:p>
+                      <a:pPr>
+                        <a:lnSpc>
+                          <a:spcPct val="134000"/>
+                        </a:lnSpc>
+                      </a:pPr>
+                      <a:r>
+                        <a:rPr sz="1100" b="0">
+                          <a:solidFill>
+                            <a:srgbClr val="111111"/>
+                          </a:solidFill>
+                          <a:latin typeface="Poppins"/>
+                        </a:rPr>
+                        <a:t>$2,500 a month + GST
+normally $5,500
+$30,000 over twelve months</a:t>
+                      </a:r>
+                    </a:p>
+                  </a:txBody>
+                  <a:tcPr marL="0" marR="128016" marT="36576" marB="54864" anchor="t">
+                    <a:lnB w="9525" cap="flat" cmpd="sng" algn="ctr">
+                      <a:solidFill>
+                        <a:srgbClr val="D4D2D0"/>
+                      </a:solidFill>
+                    </a:lnB>
+                    <a:lnT w="0" cap="flat" cmpd="sng" algn="ctr">
+                      <a:solidFill>
+                        <a:srgbClr val="FAF8F4"/>
+                      </a:solidFill>
+                    </a:lnT>
+                    <a:lnR w="0" cap="flat" cmpd="sng" algn="ctr">
+                      <a:solidFill>
+                        <a:srgbClr val="FAF8F4"/>
+                      </a:solidFill>
+                    </a:lnR>
+                    <a:lnL w="0" cap="flat" cmpd="sng" algn="ctr">
+                      <a:solidFill>
+                        <a:srgbClr val="FAF8F4"/>
+                      </a:solidFill>
+                    </a:lnL>
+                    <a:noFill/>
+                  </a:tcPr>
+                </a:tc>
+              </a:tr>
+            </a:tbl>
+          </a:graphicData>
+        </a:graphic>
+      </p:graphicFrame>
+      <p:sp>
+        <p:nvSpPr>
+          <p:cNvPr id="6" name="TextBox 5"/>
+          <p:cNvSpPr txBox="1"/>
+          <p:nvPr/>
+        </p:nvSpPr>
+        <p:spPr>
+          <a:xfrm>
+            <a:off x="914400" y="6291072"/>
+            <a:ext cx="10362895" cy="274320"/>
+          </a:xfrm>
+          <a:prstGeom prst="rect">
+            <a:avLst/>
+          </a:prstGeom>
+          <a:noFill/>
+        </p:spPr>
+        <p:txBody>
+          <a:bodyPr wrap="square" lIns="0" rIns="0" tIns="0" bIns="0" anchor="t">
+            <a:spAutoFit/>
+          </a:bodyPr>
+          <a:lstStyle/>
+          <a:p>
+            <a:pPr algn="l">
+              <a:lnSpc>
+                <a:spcPct val="100000"/>
+              </a:lnSpc>
+            </a:pPr>
+            <a:r>
+              <a:rPr sz="900" b="0">
+                <a:solidFill>
+                  <a:srgbClr val="666666"/>
+                </a:solidFill>
+                <a:latin typeface="Poppins"/>
+              </a:rPr>
+              <a:t>Monthly in advance. Minimum three months, then stop at any review with a month's notice. Rates behind every figure: Client Director $1,500 a day, Client Manager $1,250 a day.</a:t>
+            </a:r>
+          </a:p>
+        </p:txBody>
+      </p:sp>
+    </p:spTree>
+  </p:cSld>
+  <p:clrMapOvr>
+    <a:masterClrMapping/>
+  </p:clrMapOvr>
+</p:sld>
+</file>
+
+<file path=ppt/slides/slide29.xml><?xml version="1.0" encoding="utf-8"?>
+<p:sld xmlns:a="http://schemas.openxmlformats.org/drawingml/2006/main" xmlns:p="http://schemas.openxmlformats.org/presentationml/2006/main" xmlns:r="http://schemas.openxmlformats.org/officeDocument/2006/relationships">
+  <p:cSld>
+    <p:bg>
+      <p:bgPr>
+        <a:solidFill>
+          <a:srgbClr val="FAF8F4"/>
+        </a:solidFill>
+        <a:effectLst/>
+      </p:bgPr>
+    </p:bg>
+    <p:spTree>
+      <p:nvGrpSpPr>
+        <p:cNvPr id="1" name=""/>
+        <p:cNvGrpSpPr/>
+        <p:nvPr/>
+      </p:nvGrpSpPr>
+      <p:grpSpPr/>
+      <p:sp>
+        <p:nvSpPr>
+          <p:cNvPr id="2" name="TextBox 1"/>
+          <p:cNvSpPr txBox="1"/>
+          <p:nvPr/>
+        </p:nvSpPr>
+        <p:spPr>
+          <a:xfrm>
+            <a:off x="914400" y="914400"/>
+            <a:ext cx="10362895" cy="274320"/>
+          </a:xfrm>
+          <a:prstGeom prst="rect">
+            <a:avLst/>
+          </a:prstGeom>
+          <a:noFill/>
+        </p:spPr>
+        <p:txBody>
+          <a:bodyPr wrap="square" lIns="0" rIns="0" tIns="0" bIns="0" anchor="t">
+            <a:spAutoFit/>
+          </a:bodyPr>
+          <a:lstStyle/>
+          <a:p>
+            <a:pPr algn="l">
+              <a:lnSpc>
+                <a:spcPct val="100000"/>
+              </a:lnSpc>
+            </a:pPr>
+            <a:r>
+              <a:rPr sz="900" b="0" spc="200">
+                <a:solidFill>
+                  <a:srgbClr val="111111"/>
+                </a:solidFill>
+                <a:latin typeface="Poppins"/>
+              </a:rPr>
               <a:t>NOT INCLUDED</a:t>
             </a:r>
           </a:p>
@@ -18044,7 +18249,172 @@
 </p:sld>
 </file>
 
-<file path=ppt/slides/slide29.xml><?xml version="1.0" encoding="utf-8"?>
+<file path=ppt/slides/slide3.xml><?xml version="1.0" encoding="utf-8"?>
+<p:sld xmlns:a="http://schemas.openxmlformats.org/drawingml/2006/main" xmlns:p="http://schemas.openxmlformats.org/presentationml/2006/main" xmlns:r="http://schemas.openxmlformats.org/officeDocument/2006/relationships">
+  <p:cSld>
+    <p:bg>
+      <p:bgPr>
+        <a:solidFill>
+          <a:srgbClr val="FAF8F4"/>
+        </a:solidFill>
+        <a:effectLst/>
+      </p:bgPr>
+    </p:bg>
+    <p:spTree>
+      <p:nvGrpSpPr>
+        <p:cNvPr id="1" name=""/>
+        <p:cNvGrpSpPr/>
+        <p:nvPr/>
+      </p:nvGrpSpPr>
+      <p:grpSpPr/>
+      <p:sp>
+        <p:nvSpPr>
+          <p:cNvPr id="2" name="TextBox 1"/>
+          <p:cNvSpPr txBox="1"/>
+          <p:nvPr/>
+        </p:nvSpPr>
+        <p:spPr>
+          <a:xfrm>
+            <a:off x="914400" y="914400"/>
+            <a:ext cx="10362895" cy="274320"/>
+          </a:xfrm>
+          <a:prstGeom prst="rect">
+            <a:avLst/>
+          </a:prstGeom>
+          <a:noFill/>
+        </p:spPr>
+        <p:txBody>
+          <a:bodyPr wrap="square" lIns="0" rIns="0" tIns="0" bIns="0" anchor="t">
+            <a:spAutoFit/>
+          </a:bodyPr>
+          <a:lstStyle/>
+          <a:p>
+            <a:pPr algn="l">
+              <a:lnSpc>
+                <a:spcPct val="100000"/>
+              </a:lnSpc>
+            </a:pPr>
+            <a:r>
+              <a:rPr sz="900" b="0" spc="200">
+                <a:solidFill>
+                  <a:srgbClr val="111111"/>
+                </a:solidFill>
+                <a:latin typeface="Poppins"/>
+              </a:rPr>
+              <a:t>THE DIAGNOSIS</a:t>
+            </a:r>
+          </a:p>
+        </p:txBody>
+      </p:sp>
+      <p:sp>
+        <p:nvSpPr>
+          <p:cNvPr id="3" name="TextBox 2"/>
+          <p:cNvSpPr txBox="1"/>
+          <p:nvPr/>
+        </p:nvSpPr>
+        <p:spPr>
+          <a:xfrm>
+            <a:off x="914400" y="1691640"/>
+            <a:ext cx="10362895" cy="2103120"/>
+          </a:xfrm>
+          <a:prstGeom prst="rect">
+            <a:avLst/>
+          </a:prstGeom>
+          <a:noFill/>
+        </p:spPr>
+        <p:txBody>
+          <a:bodyPr wrap="square" lIns="0" rIns="0" tIns="0" bIns="0" anchor="t">
+            <a:spAutoFit/>
+          </a:bodyPr>
+          <a:lstStyle/>
+          <a:p>
+            <a:pPr algn="l">
+              <a:lnSpc>
+                <a:spcPct val="112000"/>
+              </a:lnSpc>
+            </a:pPr>
+            <a:r>
+              <a:rPr sz="4200" b="0">
+                <a:solidFill>
+                  <a:srgbClr val="111111"/>
+                </a:solidFill>
+                <a:latin typeface="Poppins"/>
+              </a:rPr>
+              <a:t>You do not have a strategy problem. You have an execution problem.</a:t>
+            </a:r>
+          </a:p>
+        </p:txBody>
+      </p:sp>
+      <p:sp>
+        <p:nvSpPr>
+          <p:cNvPr id="4" name="TextBox 3"/>
+          <p:cNvSpPr txBox="1"/>
+          <p:nvPr/>
+        </p:nvSpPr>
+        <p:spPr>
+          <a:xfrm>
+            <a:off x="914400" y="4114800"/>
+            <a:ext cx="7863840" cy="2011680"/>
+          </a:xfrm>
+          <a:prstGeom prst="rect">
+            <a:avLst/>
+          </a:prstGeom>
+          <a:noFill/>
+        </p:spPr>
+        <p:txBody>
+          <a:bodyPr wrap="square" lIns="0" rIns="0" tIns="0" bIns="0" anchor="t">
+            <a:spAutoFit/>
+          </a:bodyPr>
+          <a:lstStyle/>
+          <a:p>
+            <a:pPr algn="l">
+              <a:lnSpc>
+                <a:spcPct val="150000"/>
+              </a:lnSpc>
+              <a:spcAft>
+                <a:spcPts val="800"/>
+              </a:spcAft>
+            </a:pPr>
+            <a:r>
+              <a:rPr sz="1400" b="0">
+                <a:solidFill>
+                  <a:srgbClr val="111111"/>
+                </a:solidFill>
+                <a:latin typeface="Poppins"/>
+              </a:rPr>
+              <a:t>Three weeks on, that still holds. The refill business reached 96 to 113 active customers without a marketing push. Meta ads are working and there is nowhere to send the traffic. The website, POS and CRM do not talk to each other, so every campaign underperforms before it launches.</a:t>
+            </a:r>
+          </a:p>
+          <a:p>
+            <a:pPr algn="l">
+              <a:lnSpc>
+                <a:spcPct val="150000"/>
+              </a:lnSpc>
+              <a:spcAft>
+                <a:spcPts val="800"/>
+              </a:spcAft>
+            </a:pPr>
+            <a:r>
+              <a:rPr sz="1400" b="0">
+                <a:solidFill>
+                  <a:srgbClr val="111111"/>
+                </a:solidFill>
+                <a:latin typeface="Poppins"/>
+              </a:rPr>
+              <a:t>The constraint is hands, not ideas. We said that in August. Nothing since has changed it.</a:t>
+            </a:r>
+          </a:p>
+        </p:txBody>
+      </p:sp>
+    </p:spTree>
+  </p:cSld>
+  <p:clrMapOvr>
+    <a:masterClrMapping/>
+  </p:clrMapOvr>
+</p:sld>
+</file>
+
+<file path=ppt/slides/slide30.xml><?xml version="1.0" encoding="utf-8"?>
 <p:sld xmlns:a="http://schemas.openxmlformats.org/drawingml/2006/main" xmlns:p="http://schemas.openxmlformats.org/presentationml/2006/main" xmlns:r="http://schemas.openxmlformats.org/officeDocument/2006/relationships">
   <p:cSld>
     <p:bg>
@@ -18612,172 +18982,7 @@
 </p:sld>
 </file>
 
-<file path=ppt/slides/slide3.xml><?xml version="1.0" encoding="utf-8"?>
-<p:sld xmlns:a="http://schemas.openxmlformats.org/drawingml/2006/main" xmlns:p="http://schemas.openxmlformats.org/presentationml/2006/main" xmlns:r="http://schemas.openxmlformats.org/officeDocument/2006/relationships">
-  <p:cSld>
-    <p:bg>
-      <p:bgPr>
-        <a:solidFill>
-          <a:srgbClr val="FAF8F4"/>
-        </a:solidFill>
-        <a:effectLst/>
-      </p:bgPr>
-    </p:bg>
-    <p:spTree>
-      <p:nvGrpSpPr>
-        <p:cNvPr id="1" name=""/>
-        <p:cNvGrpSpPr/>
-        <p:nvPr/>
-      </p:nvGrpSpPr>
-      <p:grpSpPr/>
-      <p:sp>
-        <p:nvSpPr>
-          <p:cNvPr id="2" name="TextBox 1"/>
-          <p:cNvSpPr txBox="1"/>
-          <p:nvPr/>
-        </p:nvSpPr>
-        <p:spPr>
-          <a:xfrm>
-            <a:off x="914400" y="914400"/>
-            <a:ext cx="10362895" cy="274320"/>
-          </a:xfrm>
-          <a:prstGeom prst="rect">
-            <a:avLst/>
-          </a:prstGeom>
-          <a:noFill/>
-        </p:spPr>
-        <p:txBody>
-          <a:bodyPr wrap="square" lIns="0" rIns="0" tIns="0" bIns="0" anchor="t">
-            <a:spAutoFit/>
-          </a:bodyPr>
-          <a:lstStyle/>
-          <a:p>
-            <a:pPr algn="l">
-              <a:lnSpc>
-                <a:spcPct val="100000"/>
-              </a:lnSpc>
-            </a:pPr>
-            <a:r>
-              <a:rPr sz="900" b="0" spc="200">
-                <a:solidFill>
-                  <a:srgbClr val="111111"/>
-                </a:solidFill>
-                <a:latin typeface="Poppins"/>
-              </a:rPr>
-              <a:t>THE DIAGNOSIS</a:t>
-            </a:r>
-          </a:p>
-        </p:txBody>
-      </p:sp>
-      <p:sp>
-        <p:nvSpPr>
-          <p:cNvPr id="3" name="TextBox 2"/>
-          <p:cNvSpPr txBox="1"/>
-          <p:nvPr/>
-        </p:nvSpPr>
-        <p:spPr>
-          <a:xfrm>
-            <a:off x="914400" y="1691640"/>
-            <a:ext cx="10362895" cy="2103120"/>
-          </a:xfrm>
-          <a:prstGeom prst="rect">
-            <a:avLst/>
-          </a:prstGeom>
-          <a:noFill/>
-        </p:spPr>
-        <p:txBody>
-          <a:bodyPr wrap="square" lIns="0" rIns="0" tIns="0" bIns="0" anchor="t">
-            <a:spAutoFit/>
-          </a:bodyPr>
-          <a:lstStyle/>
-          <a:p>
-            <a:pPr algn="l">
-              <a:lnSpc>
-                <a:spcPct val="112000"/>
-              </a:lnSpc>
-            </a:pPr>
-            <a:r>
-              <a:rPr sz="4200" b="0">
-                <a:solidFill>
-                  <a:srgbClr val="111111"/>
-                </a:solidFill>
-                <a:latin typeface="Poppins"/>
-              </a:rPr>
-              <a:t>You do not have a strategy problem. You have an execution problem.</a:t>
-            </a:r>
-          </a:p>
-        </p:txBody>
-      </p:sp>
-      <p:sp>
-        <p:nvSpPr>
-          <p:cNvPr id="4" name="TextBox 3"/>
-          <p:cNvSpPr txBox="1"/>
-          <p:nvPr/>
-        </p:nvSpPr>
-        <p:spPr>
-          <a:xfrm>
-            <a:off x="914400" y="4114800"/>
-            <a:ext cx="7863840" cy="2011680"/>
-          </a:xfrm>
-          <a:prstGeom prst="rect">
-            <a:avLst/>
-          </a:prstGeom>
-          <a:noFill/>
-        </p:spPr>
-        <p:txBody>
-          <a:bodyPr wrap="square" lIns="0" rIns="0" tIns="0" bIns="0" anchor="t">
-            <a:spAutoFit/>
-          </a:bodyPr>
-          <a:lstStyle/>
-          <a:p>
-            <a:pPr algn="l">
-              <a:lnSpc>
-                <a:spcPct val="150000"/>
-              </a:lnSpc>
-              <a:spcAft>
-                <a:spcPts val="800"/>
-              </a:spcAft>
-            </a:pPr>
-            <a:r>
-              <a:rPr sz="1400" b="0">
-                <a:solidFill>
-                  <a:srgbClr val="111111"/>
-                </a:solidFill>
-                <a:latin typeface="Poppins"/>
-              </a:rPr>
-              <a:t>Three weeks on, that still holds. The refill business reached 96 to 113 active customers without a marketing push. Meta ads are working and there is nowhere to send the traffic. The website, POS and CRM do not talk to each other, so every campaign underperforms before it launches.</a:t>
-            </a:r>
-          </a:p>
-          <a:p>
-            <a:pPr algn="l">
-              <a:lnSpc>
-                <a:spcPct val="150000"/>
-              </a:lnSpc>
-              <a:spcAft>
-                <a:spcPts val="800"/>
-              </a:spcAft>
-            </a:pPr>
-            <a:r>
-              <a:rPr sz="1400" b="0">
-                <a:solidFill>
-                  <a:srgbClr val="111111"/>
-                </a:solidFill>
-                <a:latin typeface="Poppins"/>
-              </a:rPr>
-              <a:t>The constraint is hands, not ideas. We said that in August. Nothing since has changed it.</a:t>
-            </a:r>
-          </a:p>
-        </p:txBody>
-      </p:sp>
-    </p:spTree>
-  </p:cSld>
-  <p:clrMapOvr>
-    <a:masterClrMapping/>
-  </p:clrMapOvr>
-</p:sld>
-</file>
-
-<file path=ppt/slides/slide30.xml><?xml version="1.0" encoding="utf-8"?>
+<file path=ppt/slides/slide31.xml><?xml version="1.0" encoding="utf-8"?>
 <p:sld xmlns:a="http://schemas.openxmlformats.org/drawingml/2006/main" xmlns:p="http://schemas.openxmlformats.org/presentationml/2006/main" xmlns:r="http://schemas.openxmlformats.org/officeDocument/2006/relationships">
   <p:cSld>
     <p:bg>

--- a/00 Admin/04 Commercial + SOW/JP_TapThat_ProposalDeck_v03.pptx
+++ b/00 Admin/04 Commercial + SOW/JP_TapThat_ProposalDeck_v03.pptx
@@ -8461,56 +8461,17 @@
           </a:p>
         </p:txBody>
       </p:sp>
-      <p:sp>
-        <p:nvSpPr>
-          <p:cNvPr id="4" name="TextBox 3"/>
-          <p:cNvSpPr txBox="1"/>
-          <p:nvPr/>
-        </p:nvSpPr>
-        <p:spPr>
-          <a:xfrm>
-            <a:off x="914400" y="2084831"/>
-            <a:ext cx="8778240" cy="548640"/>
-          </a:xfrm>
-          <a:prstGeom prst="rect">
-            <a:avLst/>
-          </a:prstGeom>
-          <a:noFill/>
-        </p:spPr>
-        <p:txBody>
-          <a:bodyPr wrap="square" lIns="0" rIns="0" tIns="0" bIns="0" anchor="t">
-            <a:spAutoFit/>
-          </a:bodyPr>
-          <a:lstStyle/>
-          <a:p>
-            <a:pPr algn="l">
-              <a:lnSpc>
-                <a:spcPct val="140000"/>
-              </a:lnSpc>
-            </a:pPr>
-            <a:r>
-              <a:rPr sz="1300" b="0">
-                <a:solidFill>
-                  <a:srgbClr val="666666"/>
-                </a:solidFill>
-                <a:latin typeface="Poppins"/>
-              </a:rPr>
-              <a:t>Settled: the room is a destination. Showroom or event space is still your call.</a:t>
-            </a:r>
-          </a:p>
-        </p:txBody>
-      </p:sp>
       <p:graphicFrame>
         <p:nvGraphicFramePr>
-          <p:cNvPr id="5" name="Table 4"/>
+          <p:cNvPr id="4" name="Table 3"/>
           <p:cNvGraphicFramePr>
             <a:graphicFrameLocks noGrp="1"/>
           </p:cNvGraphicFramePr>
           <p:nvPr/>
         </p:nvGraphicFramePr>
         <p:xfrm>
-          <a:off x="914400" y="2880360"/>
-          <a:ext cx="10362893" cy="2812569"/>
+          <a:off x="914400" y="2194560"/>
+          <a:ext cx="10362893" cy="3599314"/>
         </p:xfrm>
         <a:graphic>
           <a:graphicData uri="http://schemas.openxmlformats.org/drawingml/2006/table">
@@ -9482,7 +9443,7 @@
                   </a:tcPr>
                 </a:tc>
               </a:tr>
-              <a:tr h="329981">
+              <a:tr h="558363">
                 <a:tc>
                   <a:txBody>
                     <a:bodyPr wrap="square"/>
@@ -9500,7 +9461,7 @@
                           </a:solidFill>
                           <a:latin typeface="Poppins"/>
                         </a:rPr>
-                        <a:t>Party rental and membership</a:t>
+                        <a:t>Party rental</a:t>
                       </a:r>
                     </a:p>
                   </a:txBody>
@@ -9545,7 +9506,144 @@
                           </a:solidFill>
                           <a:latin typeface="Poppins"/>
                         </a:rPr>
-                        <a:t>A minimum keg guarantee replaces the $75 barrier. One membership, not two</a:t>
+                        <a:t>A system in a house for a weekend is a demo the host runs. A keg guarantee replaces the $75 barrier</a:t>
+                      </a:r>
+                    </a:p>
+                  </a:txBody>
+                  <a:tcPr marL="0" marR="128016" marT="36576" marB="54864" anchor="t">
+                    <a:lnB w="9525" cap="flat" cmpd="sng" algn="ctr">
+                      <a:solidFill>
+                        <a:srgbClr val="D4D2D0"/>
+                      </a:solidFill>
+                    </a:lnB>
+                    <a:lnT w="0" cap="flat" cmpd="sng" algn="ctr">
+                      <a:solidFill>
+                        <a:srgbClr val="FAF8F4"/>
+                      </a:solidFill>
+                    </a:lnT>
+                    <a:lnR w="0" cap="flat" cmpd="sng" algn="ctr">
+                      <a:solidFill>
+                        <a:srgbClr val="FAF8F4"/>
+                      </a:solidFill>
+                    </a:lnR>
+                    <a:lnL w="0" cap="flat" cmpd="sng" algn="ctr">
+                      <a:solidFill>
+                        <a:srgbClr val="FAF8F4"/>
+                      </a:solidFill>
+                    </a:lnL>
+                    <a:noFill/>
+                  </a:tcPr>
+                </a:tc>
+                <a:tc>
+                  <a:txBody>
+                    <a:bodyPr wrap="square"/>
+                    <a:lstStyle/>
+                    <a:p>
+                      <a:pPr>
+                        <a:lnSpc>
+                          <a:spcPct val="134000"/>
+                        </a:lnSpc>
+                      </a:pPr>
+                      <a:r>
+                        <a:rPr sz="1100" b="0">
+                          <a:solidFill>
+                            <a:srgbClr val="111111"/>
+                          </a:solidFill>
+                          <a:latin typeface="Poppins"/>
+                        </a:rPr>
+                        <a:t>6 months</a:t>
+                      </a:r>
+                    </a:p>
+                  </a:txBody>
+                  <a:tcPr marL="0" marR="128016" marT="36576" marB="54864" anchor="t">
+                    <a:lnB w="9525" cap="flat" cmpd="sng" algn="ctr">
+                      <a:solidFill>
+                        <a:srgbClr val="D4D2D0"/>
+                      </a:solidFill>
+                    </a:lnB>
+                    <a:lnT w="0" cap="flat" cmpd="sng" algn="ctr">
+                      <a:solidFill>
+                        <a:srgbClr val="FAF8F4"/>
+                      </a:solidFill>
+                    </a:lnT>
+                    <a:lnR w="0" cap="flat" cmpd="sng" algn="ctr">
+                      <a:solidFill>
+                        <a:srgbClr val="FAF8F4"/>
+                      </a:solidFill>
+                    </a:lnR>
+                    <a:lnL w="0" cap="flat" cmpd="sng" algn="ctr">
+                      <a:solidFill>
+                        <a:srgbClr val="FAF8F4"/>
+                      </a:solidFill>
+                    </a:lnL>
+                    <a:noFill/>
+                  </a:tcPr>
+                </a:tc>
+              </a:tr>
+              <a:tr h="558363">
+                <a:tc>
+                  <a:txBody>
+                    <a:bodyPr wrap="square"/>
+                    <a:lstStyle/>
+                    <a:p>
+                      <a:pPr>
+                        <a:lnSpc>
+                          <a:spcPct val="134000"/>
+                        </a:lnSpc>
+                      </a:pPr>
+                      <a:r>
+                        <a:rPr sz="1100" b="1">
+                          <a:solidFill>
+                            <a:srgbClr val="111111"/>
+                          </a:solidFill>
+                          <a:latin typeface="Poppins"/>
+                        </a:rPr>
+                        <a:t>Membership redesign</a:t>
+                      </a:r>
+                    </a:p>
+                  </a:txBody>
+                  <a:tcPr marL="0" marR="128016" marT="36576" marB="54864" anchor="t">
+                    <a:lnB w="9525" cap="flat" cmpd="sng" algn="ctr">
+                      <a:solidFill>
+                        <a:srgbClr val="D4D2D0"/>
+                      </a:solidFill>
+                    </a:lnB>
+                    <a:lnT w="0" cap="flat" cmpd="sng" algn="ctr">
+                      <a:solidFill>
+                        <a:srgbClr val="FAF8F4"/>
+                      </a:solidFill>
+                    </a:lnT>
+                    <a:lnR w="0" cap="flat" cmpd="sng" algn="ctr">
+                      <a:solidFill>
+                        <a:srgbClr val="FAF8F4"/>
+                      </a:solidFill>
+                    </a:lnR>
+                    <a:lnL w="0" cap="flat" cmpd="sng" algn="ctr">
+                      <a:solidFill>
+                        <a:srgbClr val="FAF8F4"/>
+                      </a:solidFill>
+                    </a:lnL>
+                    <a:noFill/>
+                  </a:tcPr>
+                </a:tc>
+                <a:tc>
+                  <a:txBody>
+                    <a:bodyPr wrap="square"/>
+                    <a:lstStyle/>
+                    <a:p>
+                      <a:pPr>
+                        <a:lnSpc>
+                          <a:spcPct val="134000"/>
+                        </a:lnSpc>
+                      </a:pPr>
+                      <a:r>
+                        <a:rPr sz="1100" b="0">
+                          <a:solidFill>
+                            <a:srgbClr val="111111"/>
+                          </a:solidFill>
+                          <a:latin typeface="Poppins"/>
+                        </a:rPr>
+                        <a:t>One programme serving the refill business, not two serving two shapes. Two posters quote different prices</a:t>
                       </a:r>
                     </a:p>
                   </a:txBody>
@@ -10494,7 +10592,7 @@
         </p:nvGraphicFramePr>
         <p:xfrm>
           <a:off x="914400" y="2880360"/>
-          <a:ext cx="10362893" cy="3142550"/>
+          <a:ext cx="10362893" cy="2482588"/>
         </p:xfrm>
         <a:graphic>
           <a:graphicData uri="http://schemas.openxmlformats.org/drawingml/2006/table">
@@ -11164,280 +11262,6 @@
                           <a:latin typeface="Poppins"/>
                         </a:rPr>
                         <a:t>3 months</a:t>
-                      </a:r>
-                    </a:p>
-                  </a:txBody>
-                  <a:tcPr marL="0" marR="128016" marT="36576" marB="54864" anchor="t">
-                    <a:lnB w="9525" cap="flat" cmpd="sng" algn="ctr">
-                      <a:solidFill>
-                        <a:srgbClr val="D4D2D0"/>
-                      </a:solidFill>
-                    </a:lnB>
-                    <a:lnT w="0" cap="flat" cmpd="sng" algn="ctr">
-                      <a:solidFill>
-                        <a:srgbClr val="FAF8F4"/>
-                      </a:solidFill>
-                    </a:lnT>
-                    <a:lnR w="0" cap="flat" cmpd="sng" algn="ctr">
-                      <a:solidFill>
-                        <a:srgbClr val="FAF8F4"/>
-                      </a:solidFill>
-                    </a:lnR>
-                    <a:lnL w="0" cap="flat" cmpd="sng" algn="ctr">
-                      <a:solidFill>
-                        <a:srgbClr val="FAF8F4"/>
-                      </a:solidFill>
-                    </a:lnL>
-                    <a:noFill/>
-                  </a:tcPr>
-                </a:tc>
-              </a:tr>
-              <a:tr h="329981">
-                <a:tc>
-                  <a:txBody>
-                    <a:bodyPr wrap="square"/>
-                    <a:lstStyle/>
-                    <a:p>
-                      <a:pPr>
-                        <a:lnSpc>
-                          <a:spcPct val="134000"/>
-                        </a:lnSpc>
-                      </a:pPr>
-                      <a:r>
-                        <a:rPr sz="1100" b="1">
-                          <a:solidFill>
-                            <a:srgbClr val="111111"/>
-                          </a:solidFill>
-                          <a:latin typeface="Poppins"/>
-                        </a:rPr>
-                        <a:t>Designing for her</a:t>
-                      </a:r>
-                    </a:p>
-                  </a:txBody>
-                  <a:tcPr marL="0" marR="128016" marT="36576" marB="54864" anchor="t">
-                    <a:lnB w="9525" cap="flat" cmpd="sng" algn="ctr">
-                      <a:solidFill>
-                        <a:srgbClr val="D4D2D0"/>
-                      </a:solidFill>
-                    </a:lnB>
-                    <a:lnT w="0" cap="flat" cmpd="sng" algn="ctr">
-                      <a:solidFill>
-                        <a:srgbClr val="FAF8F4"/>
-                      </a:solidFill>
-                    </a:lnT>
-                    <a:lnR w="0" cap="flat" cmpd="sng" algn="ctr">
-                      <a:solidFill>
-                        <a:srgbClr val="FAF8F4"/>
-                      </a:solidFill>
-                    </a:lnR>
-                    <a:lnL w="0" cap="flat" cmpd="sng" algn="ctr">
-                      <a:solidFill>
-                        <a:srgbClr val="FAF8F4"/>
-                      </a:solidFill>
-                    </a:lnL>
-                    <a:noFill/>
-                  </a:tcPr>
-                </a:tc>
-                <a:tc>
-                  <a:txBody>
-                    <a:bodyPr wrap="square"/>
-                    <a:lstStyle/>
-                    <a:p>
-                      <a:pPr>
-                        <a:lnSpc>
-                          <a:spcPct val="134000"/>
-                        </a:lnSpc>
-                      </a:pPr>
-                      <a:r>
-                        <a:rPr sz="1100" b="0">
-                          <a:solidFill>
-                            <a:srgbClr val="111111"/>
-                          </a:solidFill>
-                          <a:latin typeface="Poppins"/>
-                        </a:rPr>
-                        <a:t>A product and design brief, not a campaign. The range, the RTD, the light and hydration story</a:t>
-                      </a:r>
-                    </a:p>
-                  </a:txBody>
-                  <a:tcPr marL="0" marR="128016" marT="36576" marB="54864" anchor="t">
-                    <a:lnB w="9525" cap="flat" cmpd="sng" algn="ctr">
-                      <a:solidFill>
-                        <a:srgbClr val="D4D2D0"/>
-                      </a:solidFill>
-                    </a:lnB>
-                    <a:lnT w="0" cap="flat" cmpd="sng" algn="ctr">
-                      <a:solidFill>
-                        <a:srgbClr val="FAF8F4"/>
-                      </a:solidFill>
-                    </a:lnT>
-                    <a:lnR w="0" cap="flat" cmpd="sng" algn="ctr">
-                      <a:solidFill>
-                        <a:srgbClr val="FAF8F4"/>
-                      </a:solidFill>
-                    </a:lnR>
-                    <a:lnL w="0" cap="flat" cmpd="sng" algn="ctr">
-                      <a:solidFill>
-                        <a:srgbClr val="FAF8F4"/>
-                      </a:solidFill>
-                    </a:lnL>
-                    <a:noFill/>
-                  </a:tcPr>
-                </a:tc>
-                <a:tc>
-                  <a:txBody>
-                    <a:bodyPr wrap="square"/>
-                    <a:lstStyle/>
-                    <a:p>
-                      <a:pPr>
-                        <a:lnSpc>
-                          <a:spcPct val="134000"/>
-                        </a:lnSpc>
-                      </a:pPr>
-                      <a:r>
-                        <a:rPr sz="1100" b="0">
-                          <a:solidFill>
-                            <a:srgbClr val="111111"/>
-                          </a:solidFill>
-                          <a:latin typeface="Poppins"/>
-                        </a:rPr>
-                        <a:t>6 months</a:t>
-                      </a:r>
-                    </a:p>
-                  </a:txBody>
-                  <a:tcPr marL="0" marR="128016" marT="36576" marB="54864" anchor="t">
-                    <a:lnB w="9525" cap="flat" cmpd="sng" algn="ctr">
-                      <a:solidFill>
-                        <a:srgbClr val="D4D2D0"/>
-                      </a:solidFill>
-                    </a:lnB>
-                    <a:lnT w="0" cap="flat" cmpd="sng" algn="ctr">
-                      <a:solidFill>
-                        <a:srgbClr val="FAF8F4"/>
-                      </a:solidFill>
-                    </a:lnT>
-                    <a:lnR w="0" cap="flat" cmpd="sng" algn="ctr">
-                      <a:solidFill>
-                        <a:srgbClr val="FAF8F4"/>
-                      </a:solidFill>
-                    </a:lnR>
-                    <a:lnL w="0" cap="flat" cmpd="sng" algn="ctr">
-                      <a:solidFill>
-                        <a:srgbClr val="FAF8F4"/>
-                      </a:solidFill>
-                    </a:lnL>
-                    <a:noFill/>
-                  </a:tcPr>
-                </a:tc>
-              </a:tr>
-              <a:tr h="329981">
-                <a:tc>
-                  <a:txBody>
-                    <a:bodyPr wrap="square"/>
-                    <a:lstStyle/>
-                    <a:p>
-                      <a:pPr>
-                        <a:lnSpc>
-                          <a:spcPct val="134000"/>
-                        </a:lnSpc>
-                      </a:pPr>
-                      <a:r>
-                        <a:rPr sz="1100" b="1">
-                          <a:solidFill>
-                            <a:srgbClr val="111111"/>
-                          </a:solidFill>
-                          <a:latin typeface="Poppins"/>
-                        </a:rPr>
-                        <a:t>The unit as an object</a:t>
-                      </a:r>
-                    </a:p>
-                  </a:txBody>
-                  <a:tcPr marL="0" marR="128016" marT="36576" marB="54864" anchor="t">
-                    <a:lnB w="9525" cap="flat" cmpd="sng" algn="ctr">
-                      <a:solidFill>
-                        <a:srgbClr val="D4D2D0"/>
-                      </a:solidFill>
-                    </a:lnB>
-                    <a:lnT w="0" cap="flat" cmpd="sng" algn="ctr">
-                      <a:solidFill>
-                        <a:srgbClr val="FAF8F4"/>
-                      </a:solidFill>
-                    </a:lnT>
-                    <a:lnR w="0" cap="flat" cmpd="sng" algn="ctr">
-                      <a:solidFill>
-                        <a:srgbClr val="FAF8F4"/>
-                      </a:solidFill>
-                    </a:lnR>
-                    <a:lnL w="0" cap="flat" cmpd="sng" algn="ctr">
-                      <a:solidFill>
-                        <a:srgbClr val="FAF8F4"/>
-                      </a:solidFill>
-                    </a:lnL>
-                    <a:noFill/>
-                  </a:tcPr>
-                </a:tc>
-                <a:tc>
-                  <a:txBody>
-                    <a:bodyPr wrap="square"/>
-                    <a:lstStyle/>
-                    <a:p>
-                      <a:pPr>
-                        <a:lnSpc>
-                          <a:spcPct val="134000"/>
-                        </a:lnSpc>
-                      </a:pPr>
-                      <a:r>
-                        <a:rPr sz="1100" b="0">
-                          <a:solidFill>
-                            <a:srgbClr val="111111"/>
-                          </a:solidFill>
-                          <a:latin typeface="Poppins"/>
-                        </a:rPr>
-                        <a:t>A design direction for hardware that earns a place on the bench or in the outdoor kitchen</a:t>
-                      </a:r>
-                    </a:p>
-                  </a:txBody>
-                  <a:tcPr marL="0" marR="128016" marT="36576" marB="54864" anchor="t">
-                    <a:lnB w="9525" cap="flat" cmpd="sng" algn="ctr">
-                      <a:solidFill>
-                        <a:srgbClr val="D4D2D0"/>
-                      </a:solidFill>
-                    </a:lnB>
-                    <a:lnT w="0" cap="flat" cmpd="sng" algn="ctr">
-                      <a:solidFill>
-                        <a:srgbClr val="FAF8F4"/>
-                      </a:solidFill>
-                    </a:lnT>
-                    <a:lnR w="0" cap="flat" cmpd="sng" algn="ctr">
-                      <a:solidFill>
-                        <a:srgbClr val="FAF8F4"/>
-                      </a:solidFill>
-                    </a:lnR>
-                    <a:lnL w="0" cap="flat" cmpd="sng" algn="ctr">
-                      <a:solidFill>
-                        <a:srgbClr val="FAF8F4"/>
-                      </a:solidFill>
-                    </a:lnL>
-                    <a:noFill/>
-                  </a:tcPr>
-                </a:tc>
-                <a:tc>
-                  <a:txBody>
-                    <a:bodyPr wrap="square"/>
-                    <a:lstStyle/>
-                    <a:p>
-                      <a:pPr>
-                        <a:lnSpc>
-                          <a:spcPct val="134000"/>
-                        </a:lnSpc>
-                      </a:pPr>
-                      <a:r>
-                        <a:rPr sz="1100" b="0">
-                          <a:solidFill>
-                            <a:srgbClr val="111111"/>
-                          </a:solidFill>
-                          <a:latin typeface="Poppins"/>
-                        </a:rPr>
-                        <a:t>6 months</a:t>
                       </a:r>
                     </a:p>
                   </a:txBody>
@@ -12746,7 +12570,7 @@
                 </a:solidFill>
                 <a:latin typeface="Poppins"/>
               </a:rPr>
-              <a:t>Designing for her, and the unit as an object worth owning. Writing a brief is a month. Acting on one is product and industrial design, with different people in it and a different order of spend.</a:t>
+              <a:t>Designing for her, and the unit as an object worth owning. Acting on either is product and industrial design, with different people in it and a different order of spend.</a:t>
             </a:r>
           </a:p>
           <a:p>
@@ -12765,7 +12589,7 @@
                 </a:solidFill>
                 <a:latin typeface="Poppins"/>
               </a:rPr>
-              <a:t>Both are scoped as a separate project in the Product Design Brief, on the delivery site at /product-design-brief. It runs alongside this engagement rather than inside it and is quoted separately. Nothing in it changes what is covered here or what it costs.</a:t>
+              <a:t>Both are scoped separately in the Product Design Brief, at /product-design-brief. They are concepts at this stage, not work booked into a horizon, which is why neither carries a date in the workstreams.</a:t>
             </a:r>
           </a:p>
         </p:txBody>

--- a/00 Admin/04 Commercial + SOW/JP_TapThat_ProposalDeck_v03.pptx
+++ b/00 Admin/04 Commercial + SOW/JP_TapThat_ProposalDeck_v03.pptx
@@ -7244,7 +7244,7 @@
         </p:nvGraphicFramePr>
         <p:xfrm>
           <a:off x="914400" y="2194560"/>
-          <a:ext cx="10362893" cy="3954479"/>
+          <a:ext cx="10362893" cy="4056078"/>
         </p:xfrm>
         <a:graphic>
           <a:graphicData uri="http://schemas.openxmlformats.org/drawingml/2006/table">
@@ -7457,7 +7457,7 @@
                           </a:solidFill>
                           <a:latin typeface="Poppins"/>
                         </a:rPr>
-                        <a:t>Tokens do not travel. A reward worth passing on does. Rebuilt around a free keg and a QR card an owner hands to a mate</a:t>
+                        <a:t>Tokens do not travel. A free keg does. Rebuilt around a keg and a QR card an owner hands to a mate</a:t>
                       </a:r>
                     </a:p>
                   </a:txBody>
@@ -7594,7 +7594,7 @@
                           </a:solidFill>
                           <a:latin typeface="Poppins"/>
                         </a:rPr>
-                        <a:t>The same mechanic pointed at keg system sales, for the team and for existing customers. Tracked so it can be paid</a:t>
+                        <a:t>The same mechanic pointed at system sales, for the team and existing customers. Tracked so it can be paid</a:t>
                       </a:r>
                     </a:p>
                   </a:txBody>
@@ -7805,6 +7805,143 @@
                   </a:tcPr>
                 </a:tc>
               </a:tr>
+              <a:tr h="329981">
+                <a:tc>
+                  <a:txBody>
+                    <a:bodyPr wrap="square"/>
+                    <a:lstStyle/>
+                    <a:p>
+                      <a:pPr>
+                        <a:lnSpc>
+                          <a:spcPct val="134000"/>
+                        </a:lnSpc>
+                      </a:pPr>
+                      <a:r>
+                        <a:rPr sz="1100" b="1">
+                          <a:solidFill>
+                            <a:srgbClr val="111111"/>
+                          </a:solidFill>
+                          <a:latin typeface="Poppins"/>
+                        </a:rPr>
+                        <a:t>Trades as a referral force</a:t>
+                      </a:r>
+                    </a:p>
+                  </a:txBody>
+                  <a:tcPr marL="0" marR="128016" marT="36576" marB="54864" anchor="t">
+                    <a:lnB w="9525" cap="flat" cmpd="sng" algn="ctr">
+                      <a:solidFill>
+                        <a:srgbClr val="D4D2D0"/>
+                      </a:solidFill>
+                    </a:lnB>
+                    <a:lnT w="0" cap="flat" cmpd="sng" algn="ctr">
+                      <a:solidFill>
+                        <a:srgbClr val="FAF8F4"/>
+                      </a:solidFill>
+                    </a:lnT>
+                    <a:lnR w="0" cap="flat" cmpd="sng" algn="ctr">
+                      <a:solidFill>
+                        <a:srgbClr val="FAF8F4"/>
+                      </a:solidFill>
+                    </a:lnR>
+                    <a:lnL w="0" cap="flat" cmpd="sng" algn="ctr">
+                      <a:solidFill>
+                        <a:srgbClr val="FAF8F4"/>
+                      </a:solidFill>
+                    </a:lnL>
+                    <a:noFill/>
+                  </a:tcPr>
+                </a:tc>
+                <a:tc>
+                  <a:txBody>
+                    <a:bodyPr wrap="square"/>
+                    <a:lstStyle/>
+                    <a:p>
+                      <a:pPr>
+                        <a:lnSpc>
+                          <a:spcPct val="134000"/>
+                        </a:lnSpc>
+                      </a:pPr>
+                      <a:r>
+                        <a:rPr sz="1100" b="0">
+                          <a:solidFill>
+                            <a:srgbClr val="111111"/>
+                          </a:solidFill>
+                          <a:latin typeface="Poppins"/>
+                        </a:rPr>
+                        <a:t>Plumbers and kitchen installers carry the same card, with a kickback the CRM tracks</a:t>
+                      </a:r>
+                    </a:p>
+                  </a:txBody>
+                  <a:tcPr marL="0" marR="128016" marT="36576" marB="54864" anchor="t">
+                    <a:lnB w="9525" cap="flat" cmpd="sng" algn="ctr">
+                      <a:solidFill>
+                        <a:srgbClr val="D4D2D0"/>
+                      </a:solidFill>
+                    </a:lnB>
+                    <a:lnT w="0" cap="flat" cmpd="sng" algn="ctr">
+                      <a:solidFill>
+                        <a:srgbClr val="FAF8F4"/>
+                      </a:solidFill>
+                    </a:lnT>
+                    <a:lnR w="0" cap="flat" cmpd="sng" algn="ctr">
+                      <a:solidFill>
+                        <a:srgbClr val="FAF8F4"/>
+                      </a:solidFill>
+                    </a:lnR>
+                    <a:lnL w="0" cap="flat" cmpd="sng" algn="ctr">
+                      <a:solidFill>
+                        <a:srgbClr val="FAF8F4"/>
+                      </a:solidFill>
+                    </a:lnL>
+                    <a:noFill/>
+                  </a:tcPr>
+                </a:tc>
+                <a:tc>
+                  <a:txBody>
+                    <a:bodyPr wrap="square"/>
+                    <a:lstStyle/>
+                    <a:p>
+                      <a:pPr>
+                        <a:lnSpc>
+                          <a:spcPct val="134000"/>
+                        </a:lnSpc>
+                      </a:pPr>
+                      <a:r>
+                        <a:rPr sz="1100" b="0">
+                          <a:solidFill>
+                            <a:srgbClr val="111111"/>
+                          </a:solidFill>
+                          <a:latin typeface="Poppins"/>
+                        </a:rPr>
+                        <a:t>3 months</a:t>
+                      </a:r>
+                    </a:p>
+                  </a:txBody>
+                  <a:tcPr marL="0" marR="128016" marT="36576" marB="54864" anchor="t">
+                    <a:lnB w="9525" cap="flat" cmpd="sng" algn="ctr">
+                      <a:solidFill>
+                        <a:srgbClr val="D4D2D0"/>
+                      </a:solidFill>
+                    </a:lnB>
+                    <a:lnT w="0" cap="flat" cmpd="sng" algn="ctr">
+                      <a:solidFill>
+                        <a:srgbClr val="FAF8F4"/>
+                      </a:solidFill>
+                    </a:lnT>
+                    <a:lnR w="0" cap="flat" cmpd="sng" algn="ctr">
+                      <a:solidFill>
+                        <a:srgbClr val="FAF8F4"/>
+                      </a:solidFill>
+                    </a:lnR>
+                    <a:lnL w="0" cap="flat" cmpd="sng" algn="ctr">
+                      <a:solidFill>
+                        <a:srgbClr val="FAF8F4"/>
+                      </a:solidFill>
+                    </a:lnL>
+                    <a:noFill/>
+                  </a:tcPr>
+                </a:tc>
+              </a:tr>
               <a:tr h="558363">
                 <a:tc>
                   <a:txBody>
@@ -7823,7 +7960,7 @@
                           </a:solidFill>
                           <a:latin typeface="Poppins"/>
                         </a:rPr>
-                        <a:t>Trades as a referral force</a:t>
+                        <a:t>Influencer strategy and outreach</a:t>
                       </a:r>
                     </a:p>
                   </a:txBody>
@@ -7868,7 +8005,7 @@
                           </a:solidFill>
                           <a:latin typeface="Poppins"/>
                         </a:rPr>
-                        <a:t>Plumbers and kitchen installers carry the same card, with a kickback and the tracking that lets you pay it</a:t>
+                        <a:t>Three tiers: local reach, outdoor living, food and drink. Gifted first, paid where earned. Run to ABAC rules</a:t>
                       </a:r>
                     </a:p>
                   </a:txBody>
@@ -8079,7 +8216,7 @@
                   </a:tcPr>
                 </a:tc>
               </a:tr>
-              <a:tr h="558363">
+              <a:tr h="329981">
                 <a:tc>
                   <a:txBody>
                     <a:bodyPr wrap="square"/>
@@ -8142,7 +8279,7 @@
                           </a:solidFill>
                           <a:latin typeface="Poppins"/>
                         </a:rPr>
-                        <a:t>A test, not a commitment. An owner hosts at home and earns a free keg or credit on anything sold</a:t>
+                        <a:t>A test. An owner hosts at home and earns a keg or credit on anything sold</a:t>
                       </a:r>
                     </a:p>
                   </a:txBody>
@@ -8279,7 +8416,7 @@
                           </a:solidFill>
                           <a:latin typeface="Poppins"/>
                         </a:rPr>
-                        <a:t>East coast technician routes already visiting thousands of businesses. A referral on a service visit</a:t>
+                        <a:t>East coast technician routes already visiting thousands of businesses. A referral on a service call</a:t>
                       </a:r>
                     </a:p>
                   </a:txBody>

--- a/00 Admin/04 Commercial + SOW/JP_TapThat_ProposalDeck_v03.pptx
+++ b/00 Admin/04 Commercial + SOW/JP_TapThat_ProposalDeck_v03.pptx
@@ -35,7 +35,6 @@
     <p:sldId id="283" r:id="rId34"/>
     <p:sldId id="284" r:id="rId35"/>
     <p:sldId id="285" r:id="rId36"/>
-    <p:sldId id="286" r:id="rId37"/>
   </p:sldIdLst>
   <p:sldSz cx="12191695" cy="6858000" type="screen4x3"/>
   <p:notesSz cx="6858000" cy="9144000"/>
@@ -4252,7 +4251,7 @@
                           </a:solidFill>
                           <a:latin typeface="Poppins"/>
                         </a:rPr>
-                        <a:t>18% of sales already, on a programme nobody can hold</a:t>
+                        <a:t>18% of sales already, on a program nobody can hold</a:t>
                       </a:r>
                     </a:p>
                   </a:txBody>
@@ -4389,7 +4388,7 @@
                           </a:solidFill>
                           <a:latin typeface="Poppins"/>
                         </a:rPr>
-                        <a:t>Events, functions, ticketed music and local business</a:t>
+                        <a:t>Events, functions and local business trade</a:t>
                       </a:r>
                     </a:p>
                   </a:txBody>
@@ -7412,7 +7411,7 @@
                           </a:solidFill>
                           <a:latin typeface="Poppins"/>
                         </a:rPr>
-                        <a:t>Referral programme</a:t>
+                        <a:t>Referral program</a:t>
                       </a:r>
                     </a:p>
                   </a:txBody>
@@ -7549,7 +7548,7 @@
                           </a:solidFill>
                           <a:latin typeface="Poppins"/>
                         </a:rPr>
-                        <a:t>Internal referral programme</a:t>
+                        <a:t>Internal referral program</a:t>
                       </a:r>
                     </a:p>
                   </a:txBody>
@@ -8005,7 +8004,7 @@
                           </a:solidFill>
                           <a:latin typeface="Poppins"/>
                         </a:rPr>
-                        <a:t>Three tiers: local reach, outdoor living, food and drink. Gifted first, paid where earned. Run to ABAC rules</a:t>
+                        <a:t>Three tiers: local reach, outdoor living, food and drink. Gifted first, paid where earned, to ABAC rules. Plan: tapthat-creator-plan.pages.dev</a:t>
                       </a:r>
                     </a:p>
                   </a:txBody>
@@ -8608,7 +8607,7 @@
         </p:nvGraphicFramePr>
         <p:xfrm>
           <a:off x="914400" y="2194560"/>
-          <a:ext cx="10362893" cy="3599314"/>
+          <a:ext cx="10362893" cy="2710970"/>
         </p:xfrm>
         <a:graphic>
           <a:graphicData uri="http://schemas.openxmlformats.org/drawingml/2006/table">
@@ -8758,7 +8757,7 @@
                   </a:tcPr>
                 </a:tc>
               </a:tr>
-              <a:tr h="558363">
+              <a:tr h="329981">
                 <a:tc>
                   <a:txBody>
                     <a:bodyPr wrap="square"/>
@@ -8776,7 +8775,7 @@
                           </a:solidFill>
                           <a:latin typeface="Poppins"/>
                         </a:rPr>
-                        <a:t>Oktoberfest and the giveaway</a:t>
+                        <a:t>Competitions, twice a year</a:t>
                       </a:r>
                     </a:p>
                   </a:txBody>
@@ -8821,7 +8820,7 @@
                           </a:solidFill>
                           <a:latin typeface="Poppins"/>
                         </a:rPr>
-                        <a:t>The first dated event. Campaign, artwork, entry mechanics into the CRM, and the follow-up that converts entries</a:t>
+                        <a:t>About thirty systems each. The insider offer lands the moment someone enters</a:t>
                       </a:r>
                     </a:p>
                   </a:txBody>
@@ -8866,7 +8865,7 @@
                           </a:solidFill>
                           <a:latin typeface="Poppins"/>
                         </a:rPr>
-                        <a:t>30 days</a:t>
+                        <a:t>3 months</a:t>
                       </a:r>
                     </a:p>
                   </a:txBody>
@@ -8913,7 +8912,7 @@
                           </a:solidFill>
                           <a:latin typeface="Poppins"/>
                         </a:rPr>
-                        <a:t>Competitions, twice a year</a:t>
+                        <a:t>Local business program</a:t>
                       </a:r>
                     </a:p>
                   </a:txBody>
@@ -8958,7 +8957,7 @@
                           </a:solidFill>
                           <a:latin typeface="Poppins"/>
                         </a:rPr>
-                        <a:t>About thirty systems each. The insider offer lands the moment someone enters</a:t>
+                        <a:t>Lunch and after-work trade from the industrial area: offer, outreach list, collateral</a:t>
                       </a:r>
                     </a:p>
                   </a:txBody>
@@ -9050,7 +9049,7 @@
                           </a:solidFill>
                           <a:latin typeface="Poppins"/>
                         </a:rPr>
-                        <a:t>Local business programme</a:t>
+                        <a:t>Tours and tastings</a:t>
                       </a:r>
                     </a:p>
                   </a:txBody>
@@ -9095,7 +9094,7 @@
                           </a:solidFill>
                           <a:latin typeface="Poppins"/>
                         </a:rPr>
-                        <a:t>Lunch and after-work trade from the industrial area: offer, outreach list, collateral</a:t>
+                        <a:t>Onto the circuit. The award and the bus parking are the reasons to stop here</a:t>
                       </a:r>
                     </a:p>
                   </a:txBody>
@@ -9187,280 +9186,6 @@
                           </a:solidFill>
                           <a:latin typeface="Poppins"/>
                         </a:rPr>
-                        <a:t>Ticketed music and calendar</a:t>
-                      </a:r>
-                    </a:p>
-                  </a:txBody>
-                  <a:tcPr marL="0" marR="128016" marT="36576" marB="54864" anchor="t">
-                    <a:lnB w="9525" cap="flat" cmpd="sng" algn="ctr">
-                      <a:solidFill>
-                        <a:srgbClr val="D4D2D0"/>
-                      </a:solidFill>
-                    </a:lnB>
-                    <a:lnT w="0" cap="flat" cmpd="sng" algn="ctr">
-                      <a:solidFill>
-                        <a:srgbClr val="FAF8F4"/>
-                      </a:solidFill>
-                    </a:lnT>
-                    <a:lnR w="0" cap="flat" cmpd="sng" algn="ctr">
-                      <a:solidFill>
-                        <a:srgbClr val="FAF8F4"/>
-                      </a:solidFill>
-                    </a:lnR>
-                    <a:lnL w="0" cap="flat" cmpd="sng" algn="ctr">
-                      <a:solidFill>
-                        <a:srgbClr val="FAF8F4"/>
-                      </a:solidFill>
-                    </a:lnL>
-                    <a:noFill/>
-                  </a:tcPr>
-                </a:tc>
-                <a:tc>
-                  <a:txBody>
-                    <a:bodyPr wrap="square"/>
-                    <a:lstStyle/>
-                    <a:p>
-                      <a:pPr>
-                        <a:lnSpc>
-                          <a:spcPct val="134000"/>
-                        </a:lnSpc>
-                      </a:pPr>
-                      <a:r>
-                        <a:rPr sz="1100" b="0">
-                          <a:solidFill>
-                            <a:srgbClr val="111111"/>
-                          </a:solidFill>
-                          <a:latin typeface="Poppins"/>
-                        </a:rPr>
-                        <a:t>A replicable calendar, with the promotion built once and reused</a:t>
-                      </a:r>
-                    </a:p>
-                  </a:txBody>
-                  <a:tcPr marL="0" marR="128016" marT="36576" marB="54864" anchor="t">
-                    <a:lnB w="9525" cap="flat" cmpd="sng" algn="ctr">
-                      <a:solidFill>
-                        <a:srgbClr val="D4D2D0"/>
-                      </a:solidFill>
-                    </a:lnB>
-                    <a:lnT w="0" cap="flat" cmpd="sng" algn="ctr">
-                      <a:solidFill>
-                        <a:srgbClr val="FAF8F4"/>
-                      </a:solidFill>
-                    </a:lnT>
-                    <a:lnR w="0" cap="flat" cmpd="sng" algn="ctr">
-                      <a:solidFill>
-                        <a:srgbClr val="FAF8F4"/>
-                      </a:solidFill>
-                    </a:lnR>
-                    <a:lnL w="0" cap="flat" cmpd="sng" algn="ctr">
-                      <a:solidFill>
-                        <a:srgbClr val="FAF8F4"/>
-                      </a:solidFill>
-                    </a:lnL>
-                    <a:noFill/>
-                  </a:tcPr>
-                </a:tc>
-                <a:tc>
-                  <a:txBody>
-                    <a:bodyPr wrap="square"/>
-                    <a:lstStyle/>
-                    <a:p>
-                      <a:pPr>
-                        <a:lnSpc>
-                          <a:spcPct val="134000"/>
-                        </a:lnSpc>
-                      </a:pPr>
-                      <a:r>
-                        <a:rPr sz="1100" b="0">
-                          <a:solidFill>
-                            <a:srgbClr val="111111"/>
-                          </a:solidFill>
-                          <a:latin typeface="Poppins"/>
-                        </a:rPr>
-                        <a:t>3 months</a:t>
-                      </a:r>
-                    </a:p>
-                  </a:txBody>
-                  <a:tcPr marL="0" marR="128016" marT="36576" marB="54864" anchor="t">
-                    <a:lnB w="9525" cap="flat" cmpd="sng" algn="ctr">
-                      <a:solidFill>
-                        <a:srgbClr val="D4D2D0"/>
-                      </a:solidFill>
-                    </a:lnB>
-                    <a:lnT w="0" cap="flat" cmpd="sng" algn="ctr">
-                      <a:solidFill>
-                        <a:srgbClr val="FAF8F4"/>
-                      </a:solidFill>
-                    </a:lnT>
-                    <a:lnR w="0" cap="flat" cmpd="sng" algn="ctr">
-                      <a:solidFill>
-                        <a:srgbClr val="FAF8F4"/>
-                      </a:solidFill>
-                    </a:lnR>
-                    <a:lnL w="0" cap="flat" cmpd="sng" algn="ctr">
-                      <a:solidFill>
-                        <a:srgbClr val="FAF8F4"/>
-                      </a:solidFill>
-                    </a:lnL>
-                    <a:noFill/>
-                  </a:tcPr>
-                </a:tc>
-              </a:tr>
-              <a:tr h="329981">
-                <a:tc>
-                  <a:txBody>
-                    <a:bodyPr wrap="square"/>
-                    <a:lstStyle/>
-                    <a:p>
-                      <a:pPr>
-                        <a:lnSpc>
-                          <a:spcPct val="134000"/>
-                        </a:lnSpc>
-                      </a:pPr>
-                      <a:r>
-                        <a:rPr sz="1100" b="1">
-                          <a:solidFill>
-                            <a:srgbClr val="111111"/>
-                          </a:solidFill>
-                          <a:latin typeface="Poppins"/>
-                        </a:rPr>
-                        <a:t>Tours and tastings</a:t>
-                      </a:r>
-                    </a:p>
-                  </a:txBody>
-                  <a:tcPr marL="0" marR="128016" marT="36576" marB="54864" anchor="t">
-                    <a:lnB w="9525" cap="flat" cmpd="sng" algn="ctr">
-                      <a:solidFill>
-                        <a:srgbClr val="D4D2D0"/>
-                      </a:solidFill>
-                    </a:lnB>
-                    <a:lnT w="0" cap="flat" cmpd="sng" algn="ctr">
-                      <a:solidFill>
-                        <a:srgbClr val="FAF8F4"/>
-                      </a:solidFill>
-                    </a:lnT>
-                    <a:lnR w="0" cap="flat" cmpd="sng" algn="ctr">
-                      <a:solidFill>
-                        <a:srgbClr val="FAF8F4"/>
-                      </a:solidFill>
-                    </a:lnR>
-                    <a:lnL w="0" cap="flat" cmpd="sng" algn="ctr">
-                      <a:solidFill>
-                        <a:srgbClr val="FAF8F4"/>
-                      </a:solidFill>
-                    </a:lnL>
-                    <a:noFill/>
-                  </a:tcPr>
-                </a:tc>
-                <a:tc>
-                  <a:txBody>
-                    <a:bodyPr wrap="square"/>
-                    <a:lstStyle/>
-                    <a:p>
-                      <a:pPr>
-                        <a:lnSpc>
-                          <a:spcPct val="134000"/>
-                        </a:lnSpc>
-                      </a:pPr>
-                      <a:r>
-                        <a:rPr sz="1100" b="0">
-                          <a:solidFill>
-                            <a:srgbClr val="111111"/>
-                          </a:solidFill>
-                          <a:latin typeface="Poppins"/>
-                        </a:rPr>
-                        <a:t>Onto the circuit. The award and the bus parking are the reasons to stop here</a:t>
-                      </a:r>
-                    </a:p>
-                  </a:txBody>
-                  <a:tcPr marL="0" marR="128016" marT="36576" marB="54864" anchor="t">
-                    <a:lnB w="9525" cap="flat" cmpd="sng" algn="ctr">
-                      <a:solidFill>
-                        <a:srgbClr val="D4D2D0"/>
-                      </a:solidFill>
-                    </a:lnB>
-                    <a:lnT w="0" cap="flat" cmpd="sng" algn="ctr">
-                      <a:solidFill>
-                        <a:srgbClr val="FAF8F4"/>
-                      </a:solidFill>
-                    </a:lnT>
-                    <a:lnR w="0" cap="flat" cmpd="sng" algn="ctr">
-                      <a:solidFill>
-                        <a:srgbClr val="FAF8F4"/>
-                      </a:solidFill>
-                    </a:lnR>
-                    <a:lnL w="0" cap="flat" cmpd="sng" algn="ctr">
-                      <a:solidFill>
-                        <a:srgbClr val="FAF8F4"/>
-                      </a:solidFill>
-                    </a:lnL>
-                    <a:noFill/>
-                  </a:tcPr>
-                </a:tc>
-                <a:tc>
-                  <a:txBody>
-                    <a:bodyPr wrap="square"/>
-                    <a:lstStyle/>
-                    <a:p>
-                      <a:pPr>
-                        <a:lnSpc>
-                          <a:spcPct val="134000"/>
-                        </a:lnSpc>
-                      </a:pPr>
-                      <a:r>
-                        <a:rPr sz="1100" b="0">
-                          <a:solidFill>
-                            <a:srgbClr val="111111"/>
-                          </a:solidFill>
-                          <a:latin typeface="Poppins"/>
-                        </a:rPr>
-                        <a:t>3 months</a:t>
-                      </a:r>
-                    </a:p>
-                  </a:txBody>
-                  <a:tcPr marL="0" marR="128016" marT="36576" marB="54864" anchor="t">
-                    <a:lnB w="9525" cap="flat" cmpd="sng" algn="ctr">
-                      <a:solidFill>
-                        <a:srgbClr val="D4D2D0"/>
-                      </a:solidFill>
-                    </a:lnB>
-                    <a:lnT w="0" cap="flat" cmpd="sng" algn="ctr">
-                      <a:solidFill>
-                        <a:srgbClr val="FAF8F4"/>
-                      </a:solidFill>
-                    </a:lnT>
-                    <a:lnR w="0" cap="flat" cmpd="sng" algn="ctr">
-                      <a:solidFill>
-                        <a:srgbClr val="FAF8F4"/>
-                      </a:solidFill>
-                    </a:lnR>
-                    <a:lnL w="0" cap="flat" cmpd="sng" algn="ctr">
-                      <a:solidFill>
-                        <a:srgbClr val="FAF8F4"/>
-                      </a:solidFill>
-                    </a:lnL>
-                    <a:noFill/>
-                  </a:tcPr>
-                </a:tc>
-              </a:tr>
-              <a:tr h="329981">
-                <a:tc>
-                  <a:txBody>
-                    <a:bodyPr wrap="square"/>
-                    <a:lstStyle/>
-                    <a:p>
-                      <a:pPr>
-                        <a:lnSpc>
-                          <a:spcPct val="134000"/>
-                        </a:lnSpc>
-                      </a:pPr>
-                      <a:r>
-                        <a:rPr sz="1100" b="1">
-                          <a:solidFill>
-                            <a:srgbClr val="111111"/>
-                          </a:solidFill>
-                          <a:latin typeface="Poppins"/>
-                        </a:rPr>
                         <a:t>Weddings and functions</a:t>
                       </a:r>
                     </a:p>
@@ -9780,7 +9505,7 @@
                           </a:solidFill>
                           <a:latin typeface="Poppins"/>
                         </a:rPr>
-                        <a:t>One programme serving the refill business, not two serving two shapes. Two posters quote different prices</a:t>
+                        <a:t>Held at your request until you release it. One program for the refill business, not two. Two posters quote different prices</a:t>
                       </a:r>
                     </a:p>
                   </a:txBody>
@@ -9825,7 +9550,7 @@
                           </a:solidFill>
                           <a:latin typeface="Poppins"/>
                         </a:rPr>
-                        <a:t>6 months</a:t>
+                        <a:t>On hold</a:t>
                       </a:r>
                     </a:p>
                   </a:txBody>
@@ -10729,7 +10454,7 @@
         </p:nvGraphicFramePr>
         <p:xfrm>
           <a:off x="914400" y="2880360"/>
-          <a:ext cx="10362893" cy="2482588"/>
+          <a:ext cx="10362893" cy="2710970"/>
         </p:xfrm>
         <a:graphic>
           <a:graphicData uri="http://schemas.openxmlformats.org/drawingml/2006/table">
@@ -11564,7 +11289,7 @@
                   </a:tcPr>
                 </a:tc>
               </a:tr>
-              <a:tr h="329981">
+              <a:tr h="558363">
                 <a:tc>
                   <a:txBody>
                     <a:bodyPr wrap="square"/>
@@ -11627,7 +11352,7 @@
                           </a:solidFill>
                           <a:latin typeface="Poppins"/>
                         </a:rPr>
-                        <a:t>Oktoberfest, the switcher, the referral programme, the ambassadors and the calendar</a:t>
+                        <a:t>The switcher, the referral program, the ambassador and creator content, and the competition campaign</a:t>
                       </a:r>
                     </a:p>
                   </a:txBody>
@@ -13654,7 +13379,7 @@
                           </a:solidFill>
                           <a:latin typeface="Poppins"/>
                         </a:rPr>
-                        <a:t>Ambassadors named, Oktoberfest run, giveaway entries in the CRM</a:t>
+                        <a:t>Ambassadors named and briefed, with a shoot date in the calendar</a:t>
                       </a:r>
                     </a:p>
                   </a:txBody>
@@ -13970,7 +13695,7 @@
                 </a:solidFill>
                 <a:latin typeface="Poppins"/>
               </a:rPr>
-              <a:t>TIMELINE</a:t>
+              <a:t>WAYS OF WORKING</a:t>
             </a:r>
           </a:p>
         </p:txBody>
@@ -14009,7 +13734,7 @@
                 </a:solidFill>
                 <a:latin typeface="Poppins"/>
               </a:rPr>
-              <a:t>On your ladder, not ours.</a:t>
+              <a:t>Who does what, and how often.</a:t>
             </a:r>
           </a:p>
         </p:txBody>
@@ -14024,7 +13749,7 @@
         </p:nvGraphicFramePr>
         <p:xfrm>
           <a:off x="914400" y="2194560"/>
-          <a:ext cx="10362895" cy="2507772"/>
+          <a:ext cx="10362895" cy="2710970"/>
         </p:xfrm>
         <a:graphic>
           <a:graphicData uri="http://schemas.openxmlformats.org/drawingml/2006/table">
@@ -14033,8 +13758,8 @@
                 <a:tableStyleId>{2D5ABB26-0587-4C30-8999-92F81FD0307C}</a:tableStyleId>
               </a:tblPr>
               <a:tblGrid>
-                <a:gridCol w="1761692"/>
-                <a:gridCol w="8601203"/>
+                <a:gridCol w="1865321"/>
+                <a:gridCol w="8497574"/>
               </a:tblGrid>
               <a:tr h="274320">
                 <a:tc>
@@ -14054,7 +13779,7 @@
                           </a:solidFill>
                           <a:latin typeface="Poppins"/>
                         </a:rPr>
-                        <a:t>HORIZON</a:t>
+                        <a:t/>
                       </a:r>
                     </a:p>
                   </a:txBody>
@@ -14099,7 +13824,7 @@
                           </a:solidFill>
                           <a:latin typeface="Poppins"/>
                         </a:rPr>
-                        <a:t>WHAT IS TRUE AT THE END OF IT</a:t>
+                        <a:t>HOW IT RUNS</a:t>
                       </a:r>
                     </a:p>
                   </a:txBody>
@@ -14146,8 +13871,7 @@
                           </a:solidFill>
                           <a:latin typeface="Poppins"/>
                         </a:rPr>
-                        <a:t>30 days
-Mid-October</a:t>
+                        <a:t>Christy runs it</a:t>
                       </a:r>
                     </a:p>
                   </a:txBody>
@@ -14192,7 +13916,375 @@
                           </a:solidFill>
                           <a:latin typeface="Poppins"/>
                         </a:rPr>
-                        <a:t>Showroom or event space decided, and the Jewell split agreed. Messaging and journey signed on the home entertainment position. KPIs and the weekly rhythm set. Oktoberfest run. The 250 date chosen</a:t>
+                        <a:t>Christy Kilmartin leads the engagement: strategy, direction, and the call on what gets built next. Your first call on anything</a:t>
+                      </a:r>
+                    </a:p>
+                  </a:txBody>
+                  <a:tcPr marL="0" marR="128016" marT="36576" marB="54864" anchor="t">
+                    <a:lnB w="9525" cap="flat" cmpd="sng" algn="ctr">
+                      <a:solidFill>
+                        <a:srgbClr val="D4D2D0"/>
+                      </a:solidFill>
+                    </a:lnB>
+                    <a:lnT w="0" cap="flat" cmpd="sng" algn="ctr">
+                      <a:solidFill>
+                        <a:srgbClr val="FAF8F4"/>
+                      </a:solidFill>
+                    </a:lnT>
+                    <a:lnR w="0" cap="flat" cmpd="sng" algn="ctr">
+                      <a:solidFill>
+                        <a:srgbClr val="FAF8F4"/>
+                      </a:solidFill>
+                    </a:lnR>
+                    <a:lnL w="0" cap="flat" cmpd="sng" algn="ctr">
+                      <a:solidFill>
+                        <a:srgbClr val="FAF8F4"/>
+                      </a:solidFill>
+                    </a:lnL>
+                    <a:noFill/>
+                  </a:tcPr>
+                </a:tc>
+              </a:tr>
+              <a:tr h="329981">
+                <a:tc>
+                  <a:txBody>
+                    <a:bodyPr wrap="square"/>
+                    <a:lstStyle/>
+                    <a:p>
+                      <a:pPr>
+                        <a:lnSpc>
+                          <a:spcPct val="134000"/>
+                        </a:lnSpc>
+                      </a:pPr>
+                      <a:r>
+                        <a:rPr sz="1100" b="1">
+                          <a:solidFill>
+                            <a:srgbClr val="111111"/>
+                          </a:solidFill>
+                          <a:latin typeface="Poppins"/>
+                        </a:rPr>
+                        <a:t>Harry executes</a:t>
+                      </a:r>
+                    </a:p>
+                  </a:txBody>
+                  <a:tcPr marL="0" marR="128016" marT="36576" marB="54864" anchor="t">
+                    <a:lnB w="9525" cap="flat" cmpd="sng" algn="ctr">
+                      <a:solidFill>
+                        <a:srgbClr val="D4D2D0"/>
+                      </a:solidFill>
+                    </a:lnB>
+                    <a:lnT w="0" cap="flat" cmpd="sng" algn="ctr">
+                      <a:solidFill>
+                        <a:srgbClr val="FAF8F4"/>
+                      </a:solidFill>
+                    </a:lnT>
+                    <a:lnR w="0" cap="flat" cmpd="sng" algn="ctr">
+                      <a:solidFill>
+                        <a:srgbClr val="FAF8F4"/>
+                      </a:solidFill>
+                    </a:lnR>
+                    <a:lnL w="0" cap="flat" cmpd="sng" algn="ctr">
+                      <a:solidFill>
+                        <a:srgbClr val="FAF8F4"/>
+                      </a:solidFill>
+                    </a:lnL>
+                    <a:noFill/>
+                  </a:tcPr>
+                </a:tc>
+                <a:tc>
+                  <a:txBody>
+                    <a:bodyPr wrap="square"/>
+                    <a:lstStyle/>
+                    <a:p>
+                      <a:pPr>
+                        <a:lnSpc>
+                          <a:spcPct val="134000"/>
+                        </a:lnSpc>
+                      </a:pPr>
+                      <a:r>
+                        <a:rPr sz="1100" b="0">
+                          <a:solidFill>
+                            <a:srgbClr val="111111"/>
+                          </a:solidFill>
+                          <a:latin typeface="Poppins"/>
+                        </a:rPr>
+                        <a:t>Harry is the operator inside Tap That. Everything we design is built to be run from that seat</a:t>
+                      </a:r>
+                    </a:p>
+                  </a:txBody>
+                  <a:tcPr marL="0" marR="128016" marT="36576" marB="54864" anchor="t">
+                    <a:lnB w="9525" cap="flat" cmpd="sng" algn="ctr">
+                      <a:solidFill>
+                        <a:srgbClr val="D4D2D0"/>
+                      </a:solidFill>
+                    </a:lnB>
+                    <a:lnT w="0" cap="flat" cmpd="sng" algn="ctr">
+                      <a:solidFill>
+                        <a:srgbClr val="FAF8F4"/>
+                      </a:solidFill>
+                    </a:lnT>
+                    <a:lnR w="0" cap="flat" cmpd="sng" algn="ctr">
+                      <a:solidFill>
+                        <a:srgbClr val="FAF8F4"/>
+                      </a:solidFill>
+                    </a:lnR>
+                    <a:lnL w="0" cap="flat" cmpd="sng" algn="ctr">
+                      <a:solidFill>
+                        <a:srgbClr val="FAF8F4"/>
+                      </a:solidFill>
+                    </a:lnL>
+                    <a:noFill/>
+                  </a:tcPr>
+                </a:tc>
+              </a:tr>
+              <a:tr h="329981">
+                <a:tc>
+                  <a:txBody>
+                    <a:bodyPr wrap="square"/>
+                    <a:lstStyle/>
+                    <a:p>
+                      <a:pPr>
+                        <a:lnSpc>
+                          <a:spcPct val="134000"/>
+                        </a:lnSpc>
+                      </a:pPr>
+                      <a:r>
+                        <a:rPr sz="1100" b="1">
+                          <a:solidFill>
+                            <a:srgbClr val="111111"/>
+                          </a:solidFill>
+                          <a:latin typeface="Poppins"/>
+                        </a:rPr>
+                        <a:t>Weekly</a:t>
+                      </a:r>
+                    </a:p>
+                  </a:txBody>
+                  <a:tcPr marL="0" marR="128016" marT="36576" marB="54864" anchor="t">
+                    <a:lnB w="9525" cap="flat" cmpd="sng" algn="ctr">
+                      <a:solidFill>
+                        <a:srgbClr val="D4D2D0"/>
+                      </a:solidFill>
+                    </a:lnB>
+                    <a:lnT w="0" cap="flat" cmpd="sng" algn="ctr">
+                      <a:solidFill>
+                        <a:srgbClr val="FAF8F4"/>
+                      </a:solidFill>
+                    </a:lnT>
+                    <a:lnR w="0" cap="flat" cmpd="sng" algn="ctr">
+                      <a:solidFill>
+                        <a:srgbClr val="FAF8F4"/>
+                      </a:solidFill>
+                    </a:lnR>
+                    <a:lnL w="0" cap="flat" cmpd="sng" algn="ctr">
+                      <a:solidFill>
+                        <a:srgbClr val="FAF8F4"/>
+                      </a:solidFill>
+                    </a:lnL>
+                    <a:noFill/>
+                  </a:tcPr>
+                </a:tc>
+                <a:tc>
+                  <a:txBody>
+                    <a:bodyPr wrap="square"/>
+                    <a:lstStyle/>
+                    <a:p>
+                      <a:pPr>
+                        <a:lnSpc>
+                          <a:spcPct val="134000"/>
+                        </a:lnSpc>
+                      </a:pPr>
+                      <a:r>
+                        <a:rPr sz="1100" b="0">
+                          <a:solidFill>
+                            <a:srgbClr val="111111"/>
+                          </a:solidFill>
+                          <a:latin typeface="Poppins"/>
+                        </a:rPr>
+                        <a:t>Forty-five minutes with Harry and Justin, led by Christy. Ronnie locks the standing day</a:t>
+                      </a:r>
+                    </a:p>
+                  </a:txBody>
+                  <a:tcPr marL="0" marR="128016" marT="36576" marB="54864" anchor="t">
+                    <a:lnB w="9525" cap="flat" cmpd="sng" algn="ctr">
+                      <a:solidFill>
+                        <a:srgbClr val="D4D2D0"/>
+                      </a:solidFill>
+                    </a:lnB>
+                    <a:lnT w="0" cap="flat" cmpd="sng" algn="ctr">
+                      <a:solidFill>
+                        <a:srgbClr val="FAF8F4"/>
+                      </a:solidFill>
+                    </a:lnT>
+                    <a:lnR w="0" cap="flat" cmpd="sng" algn="ctr">
+                      <a:solidFill>
+                        <a:srgbClr val="FAF8F4"/>
+                      </a:solidFill>
+                    </a:lnR>
+                    <a:lnL w="0" cap="flat" cmpd="sng" algn="ctr">
+                      <a:solidFill>
+                        <a:srgbClr val="FAF8F4"/>
+                      </a:solidFill>
+                    </a:lnL>
+                    <a:noFill/>
+                  </a:tcPr>
+                </a:tc>
+              </a:tr>
+              <a:tr h="329981">
+                <a:tc>
+                  <a:txBody>
+                    <a:bodyPr wrap="square"/>
+                    <a:lstStyle/>
+                    <a:p>
+                      <a:pPr>
+                        <a:lnSpc>
+                          <a:spcPct val="134000"/>
+                        </a:lnSpc>
+                      </a:pPr>
+                      <a:r>
+                        <a:rPr sz="1100" b="1">
+                          <a:solidFill>
+                            <a:srgbClr val="111111"/>
+                          </a:solidFill>
+                          <a:latin typeface="Poppins"/>
+                        </a:rPr>
+                        <a:t>Monthly</a:t>
+                      </a:r>
+                    </a:p>
+                  </a:txBody>
+                  <a:tcPr marL="0" marR="128016" marT="36576" marB="54864" anchor="t">
+                    <a:lnB w="9525" cap="flat" cmpd="sng" algn="ctr">
+                      <a:solidFill>
+                        <a:srgbClr val="D4D2D0"/>
+                      </a:solidFill>
+                    </a:lnB>
+                    <a:lnT w="0" cap="flat" cmpd="sng" algn="ctr">
+                      <a:solidFill>
+                        <a:srgbClr val="FAF8F4"/>
+                      </a:solidFill>
+                    </a:lnT>
+                    <a:lnR w="0" cap="flat" cmpd="sng" algn="ctr">
+                      <a:solidFill>
+                        <a:srgbClr val="FAF8F4"/>
+                      </a:solidFill>
+                    </a:lnR>
+                    <a:lnL w="0" cap="flat" cmpd="sng" algn="ctr">
+                      <a:solidFill>
+                        <a:srgbClr val="FAF8F4"/>
+                      </a:solidFill>
+                    </a:lnL>
+                    <a:noFill/>
+                  </a:tcPr>
+                </a:tc>
+                <a:tc>
+                  <a:txBody>
+                    <a:bodyPr wrap="square"/>
+                    <a:lstStyle/>
+                    <a:p>
+                      <a:pPr>
+                        <a:lnSpc>
+                          <a:spcPct val="134000"/>
+                        </a:lnSpc>
+                      </a:pPr>
+                      <a:r>
+                        <a:rPr sz="1100" b="0">
+                          <a:solidFill>
+                            <a:srgbClr val="111111"/>
+                          </a:solidFill>
+                          <a:latin typeface="Poppins"/>
+                        </a:rPr>
+                        <a:t>One hour with both founders on the four numbers. Decisions taken in the room and recorded</a:t>
+                      </a:r>
+                    </a:p>
+                  </a:txBody>
+                  <a:tcPr marL="0" marR="128016" marT="36576" marB="54864" anchor="t">
+                    <a:lnB w="9525" cap="flat" cmpd="sng" algn="ctr">
+                      <a:solidFill>
+                        <a:srgbClr val="D4D2D0"/>
+                      </a:solidFill>
+                    </a:lnB>
+                    <a:lnT w="0" cap="flat" cmpd="sng" algn="ctr">
+                      <a:solidFill>
+                        <a:srgbClr val="FAF8F4"/>
+                      </a:solidFill>
+                    </a:lnT>
+                    <a:lnR w="0" cap="flat" cmpd="sng" algn="ctr">
+                      <a:solidFill>
+                        <a:srgbClr val="FAF8F4"/>
+                      </a:solidFill>
+                    </a:lnR>
+                    <a:lnL w="0" cap="flat" cmpd="sng" algn="ctr">
+                      <a:solidFill>
+                        <a:srgbClr val="FAF8F4"/>
+                      </a:solidFill>
+                    </a:lnL>
+                    <a:noFill/>
+                  </a:tcPr>
+                </a:tc>
+              </a:tr>
+              <a:tr h="329981">
+                <a:tc>
+                  <a:txBody>
+                    <a:bodyPr wrap="square"/>
+                    <a:lstStyle/>
+                    <a:p>
+                      <a:pPr>
+                        <a:lnSpc>
+                          <a:spcPct val="134000"/>
+                        </a:lnSpc>
+                      </a:pPr>
+                      <a:r>
+                        <a:rPr sz="1100" b="1">
+                          <a:solidFill>
+                            <a:srgbClr val="111111"/>
+                          </a:solidFill>
+                          <a:latin typeface="Poppins"/>
+                        </a:rPr>
+                        <a:t>Reviews</a:t>
+                      </a:r>
+                    </a:p>
+                  </a:txBody>
+                  <a:tcPr marL="0" marR="128016" marT="36576" marB="54864" anchor="t">
+                    <a:lnB w="9525" cap="flat" cmpd="sng" algn="ctr">
+                      <a:solidFill>
+                        <a:srgbClr val="D4D2D0"/>
+                      </a:solidFill>
+                    </a:lnB>
+                    <a:lnT w="0" cap="flat" cmpd="sng" algn="ctr">
+                      <a:solidFill>
+                        <a:srgbClr val="FAF8F4"/>
+                      </a:solidFill>
+                    </a:lnT>
+                    <a:lnR w="0" cap="flat" cmpd="sng" algn="ctr">
+                      <a:solidFill>
+                        <a:srgbClr val="FAF8F4"/>
+                      </a:solidFill>
+                    </a:lnR>
+                    <a:lnL w="0" cap="flat" cmpd="sng" algn="ctr">
+                      <a:solidFill>
+                        <a:srgbClr val="FAF8F4"/>
+                      </a:solidFill>
+                    </a:lnL>
+                    <a:noFill/>
+                  </a:tcPr>
+                </a:tc>
+                <a:tc>
+                  <a:txBody>
+                    <a:bodyPr wrap="square"/>
+                    <a:lstStyle/>
+                    <a:p>
+                      <a:pPr>
+                        <a:lnSpc>
+                          <a:spcPct val="134000"/>
+                        </a:lnSpc>
+                      </a:pPr>
+                      <a:r>
+                        <a:rPr sz="1100" b="0">
+                          <a:solidFill>
+                            <a:srgbClr val="111111"/>
+                          </a:solidFill>
+                          <a:latin typeface="Poppins"/>
+                        </a:rPr>
+                        <a:t>Mid-October, mid-December, March, September. A written review and a stop-or-continue conversation at each</a:t>
                       </a:r>
                     </a:p>
                   </a:txBody>
@@ -14239,8 +14331,7 @@
                           </a:solidFill>
                           <a:latin typeface="Poppins"/>
                         </a:rPr>
-                        <a:t>3 months
-Mid-December</a:t>
+                        <a:t>Sign-off</a:t>
                       </a:r>
                     </a:p>
                   </a:txBody>
@@ -14285,193 +14376,7 @@
                           </a:solidFill>
                           <a:latin typeface="Poppins"/>
                         </a:rPr>
-                        <a:t>Website and SEM live. GoTab and Fishbowl connected, CRM triggers replacing the 90-day SMS. Lease-to-buy and delivery launched. Referral programme live, with trades carrying cards. Wholesale pipeline in the CRM. Next hire decided</a:t>
-                      </a:r>
-                    </a:p>
-                  </a:txBody>
-                  <a:tcPr marL="0" marR="128016" marT="36576" marB="54864" anchor="t">
-                    <a:lnB w="9525" cap="flat" cmpd="sng" algn="ctr">
-                      <a:solidFill>
-                        <a:srgbClr val="D4D2D0"/>
-                      </a:solidFill>
-                    </a:lnB>
-                    <a:lnT w="0" cap="flat" cmpd="sng" algn="ctr">
-                      <a:solidFill>
-                        <a:srgbClr val="FAF8F4"/>
-                      </a:solidFill>
-                    </a:lnT>
-                    <a:lnR w="0" cap="flat" cmpd="sng" algn="ctr">
-                      <a:solidFill>
-                        <a:srgbClr val="FAF8F4"/>
-                      </a:solidFill>
-                    </a:lnR>
-                    <a:lnL w="0" cap="flat" cmpd="sng" algn="ctr">
-                      <a:solidFill>
-                        <a:srgbClr val="FAF8F4"/>
-                      </a:solidFill>
-                    </a:lnL>
-                    <a:noFill/>
-                  </a:tcPr>
-                </a:tc>
-              </a:tr>
-              <a:tr h="558363">
-                <a:tc>
-                  <a:txBody>
-                    <a:bodyPr wrap="square"/>
-                    <a:lstStyle/>
-                    <a:p>
-                      <a:pPr>
-                        <a:lnSpc>
-                          <a:spcPct val="134000"/>
-                        </a:lnSpc>
-                      </a:pPr>
-                      <a:r>
-                        <a:rPr sz="1100" b="1">
-                          <a:solidFill>
-                            <a:srgbClr val="111111"/>
-                          </a:solidFill>
-                          <a:latin typeface="Poppins"/>
-                        </a:rPr>
-                        <a:t>6 months
-March 2027</a:t>
-                      </a:r>
-                    </a:p>
-                  </a:txBody>
-                  <a:tcPr marL="0" marR="128016" marT="36576" marB="54864" anchor="t">
-                    <a:lnB w="9525" cap="flat" cmpd="sng" algn="ctr">
-                      <a:solidFill>
-                        <a:srgbClr val="D4D2D0"/>
-                      </a:solidFill>
-                    </a:lnB>
-                    <a:lnT w="0" cap="flat" cmpd="sng" algn="ctr">
-                      <a:solidFill>
-                        <a:srgbClr val="FAF8F4"/>
-                      </a:solidFill>
-                    </a:lnT>
-                    <a:lnR w="0" cap="flat" cmpd="sng" algn="ctr">
-                      <a:solidFill>
-                        <a:srgbClr val="FAF8F4"/>
-                      </a:solidFill>
-                    </a:lnR>
-                    <a:lnL w="0" cap="flat" cmpd="sng" algn="ctr">
-                      <a:solidFill>
-                        <a:srgbClr val="FAF8F4"/>
-                      </a:solidFill>
-                    </a:lnL>
-                    <a:noFill/>
-                  </a:tcPr>
-                </a:tc>
-                <a:tc>
-                  <a:txBody>
-                    <a:bodyPr wrap="square"/>
-                    <a:lstStyle/>
-                    <a:p>
-                      <a:pPr>
-                        <a:lnSpc>
-                          <a:spcPct val="134000"/>
-                        </a:lnSpc>
-                      </a:pPr>
-                      <a:r>
-                        <a:rPr sz="1100" b="0">
-                          <a:solidFill>
-                            <a:srgbClr val="111111"/>
-                          </a:solidFill>
-                          <a:latin typeface="Poppins"/>
-                        </a:rPr>
-                        <a:t>250 active keg refillers, or December if you take the Christmas date. Weddings and functions selling. Membership redesigned. Designing-for-her and hardware-as-object briefs in market</a:t>
-                      </a:r>
-                    </a:p>
-                  </a:txBody>
-                  <a:tcPr marL="0" marR="128016" marT="36576" marB="54864" anchor="t">
-                    <a:lnB w="9525" cap="flat" cmpd="sng" algn="ctr">
-                      <a:solidFill>
-                        <a:srgbClr val="D4D2D0"/>
-                      </a:solidFill>
-                    </a:lnB>
-                    <a:lnT w="0" cap="flat" cmpd="sng" algn="ctr">
-                      <a:solidFill>
-                        <a:srgbClr val="FAF8F4"/>
-                      </a:solidFill>
-                    </a:lnT>
-                    <a:lnR w="0" cap="flat" cmpd="sng" algn="ctr">
-                      <a:solidFill>
-                        <a:srgbClr val="FAF8F4"/>
-                      </a:solidFill>
-                    </a:lnR>
-                    <a:lnL w="0" cap="flat" cmpd="sng" algn="ctr">
-                      <a:solidFill>
-                        <a:srgbClr val="FAF8F4"/>
-                      </a:solidFill>
-                    </a:lnL>
-                    <a:noFill/>
-                  </a:tcPr>
-                </a:tc>
-              </a:tr>
-              <a:tr h="558363">
-                <a:tc>
-                  <a:txBody>
-                    <a:bodyPr wrap="square"/>
-                    <a:lstStyle/>
-                    <a:p>
-                      <a:pPr>
-                        <a:lnSpc>
-                          <a:spcPct val="134000"/>
-                        </a:lnSpc>
-                      </a:pPr>
-                      <a:r>
-                        <a:rPr sz="1100" b="1">
-                          <a:solidFill>
-                            <a:srgbClr val="111111"/>
-                          </a:solidFill>
-                          <a:latin typeface="Poppins"/>
-                        </a:rPr>
-                        <a:t>1 year
-September 2027</a:t>
-                      </a:r>
-                    </a:p>
-                  </a:txBody>
-                  <a:tcPr marL="0" marR="128016" marT="36576" marB="54864" anchor="t">
-                    <a:lnB w="9525" cap="flat" cmpd="sng" algn="ctr">
-                      <a:solidFill>
-                        <a:srgbClr val="D4D2D0"/>
-                      </a:solidFill>
-                    </a:lnB>
-                    <a:lnT w="0" cap="flat" cmpd="sng" algn="ctr">
-                      <a:solidFill>
-                        <a:srgbClr val="FAF8F4"/>
-                      </a:solidFill>
-                    </a:lnT>
-                    <a:lnR w="0" cap="flat" cmpd="sng" algn="ctr">
-                      <a:solidFill>
-                        <a:srgbClr val="FAF8F4"/>
-                      </a:solidFill>
-                    </a:lnR>
-                    <a:lnL w="0" cap="flat" cmpd="sng" algn="ctr">
-                      <a:solidFill>
-                        <a:srgbClr val="FAF8F4"/>
-                      </a:solidFill>
-                    </a:lnL>
-                    <a:noFill/>
-                  </a:tcPr>
-                </a:tc>
-                <a:tc>
-                  <a:txBody>
-                    <a:bodyPr wrap="square"/>
-                    <a:lstStyle/>
-                    <a:p>
-                      <a:pPr>
-                        <a:lnSpc>
-                          <a:spcPct val="134000"/>
-                        </a:lnSpc>
-                      </a:pPr>
-                      <a:r>
-                        <a:rPr sz="1100" b="0">
-                          <a:solidFill>
-                            <a:srgbClr val="111111"/>
-                          </a:solidFill>
-                          <a:latin typeface="Poppins"/>
-                        </a:rPr>
-                        <a:t>Referrals, JVPs and online driving most system sales. Replicable events calendar running. Cashflow positive, Justin on a wage</a:t>
+                        <a:t>One named person approves messaging, offers and anything that goes to market. We suggest Justin, with Chris consulted on brand and product</a:t>
                       </a:r>
                     </a:p>
                   </a:txBody>
@@ -14504,45 +14409,6 @@
           </a:graphicData>
         </a:graphic>
       </p:graphicFrame>
-      <p:sp>
-        <p:nvSpPr>
-          <p:cNvPr id="5" name="TextBox 4"/>
-          <p:cNvSpPr txBox="1"/>
-          <p:nvPr/>
-        </p:nvSpPr>
-        <p:spPr>
-          <a:xfrm>
-            <a:off x="914400" y="6291072"/>
-            <a:ext cx="10362895" cy="274320"/>
-          </a:xfrm>
-          <a:prstGeom prst="rect">
-            <a:avLst/>
-          </a:prstGeom>
-          <a:noFill/>
-        </p:spPr>
-        <p:txBody>
-          <a:bodyPr wrap="square" lIns="0" rIns="0" tIns="0" bIns="0" anchor="t">
-            <a:spAutoFit/>
-          </a:bodyPr>
-          <a:lstStyle/>
-          <a:p>
-            <a:pPr algn="l">
-              <a:lnSpc>
-                <a:spcPct val="100000"/>
-              </a:lnSpc>
-            </a:pPr>
-            <a:r>
-              <a:rPr sz="900" b="0">
-                <a:solidFill>
-                  <a:srgbClr val="666666"/>
-                </a:solidFill>
-                <a:latin typeface="Poppins"/>
-              </a:rPr>
-              <a:t>Three years, five years and the exit sit on the summary sheet. This covers the first year of the climb.</a:t>
-            </a:r>
-          </a:p>
-        </p:txBody>
-      </p:sp>
     </p:spTree>
   </p:cSld>
   <p:clrMapOvr>
@@ -14603,7 +14469,7 @@
                 </a:solidFill>
                 <a:latin typeface="Poppins"/>
               </a:rPr>
-              <a:t>WAYS OF WORKING</a:t>
+              <a:t>WHAT WE NEED FROM YOU</a:t>
             </a:r>
           </a:p>
         </p:txBody>
@@ -14642,7 +14508,7 @@
                 </a:solidFill>
                 <a:latin typeface="Poppins"/>
               </a:rPr>
-              <a:t>Who does what, and how often.</a:t>
+              <a:t>Seven inputs, and when.</a:t>
             </a:r>
           </a:p>
         </p:txBody>
@@ -14657,7 +14523,7 @@
         </p:nvGraphicFramePr>
         <p:xfrm>
           <a:off x="914400" y="2194560"/>
-          <a:ext cx="10362895" cy="2710970"/>
+          <a:ext cx="10362894" cy="2584187"/>
         </p:xfrm>
         <a:graphic>
           <a:graphicData uri="http://schemas.openxmlformats.org/drawingml/2006/table">
@@ -14666,8 +14532,8 @@
                 <a:tableStyleId>{2D5ABB26-0587-4C30-8999-92F81FD0307C}</a:tableStyleId>
               </a:tblPr>
               <a:tblGrid>
-                <a:gridCol w="1865321"/>
-                <a:gridCol w="8497574"/>
+                <a:gridCol w="2694352"/>
+                <a:gridCol w="7668542"/>
               </a:tblGrid>
               <a:tr h="274320">
                 <a:tc>
@@ -14687,7 +14553,7 @@
                           </a:solidFill>
                           <a:latin typeface="Poppins"/>
                         </a:rPr>
-                        <a:t/>
+                        <a:t>INPUT</a:t>
                       </a:r>
                     </a:p>
                   </a:txBody>
@@ -14732,99 +14598,7 @@
                           </a:solidFill>
                           <a:latin typeface="Poppins"/>
                         </a:rPr>
-                        <a:t>HOW IT RUNS</a:t>
-                      </a:r>
-                    </a:p>
-                  </a:txBody>
-                  <a:tcPr marL="0" marR="128016" marT="36576" marB="54864" anchor="t">
-                    <a:lnB w="9525" cap="flat" cmpd="sng" algn="ctr">
-                      <a:solidFill>
-                        <a:srgbClr val="D4D2D0"/>
-                      </a:solidFill>
-                    </a:lnB>
-                    <a:lnT w="0" cap="flat" cmpd="sng" algn="ctr">
-                      <a:solidFill>
-                        <a:srgbClr val="FAF8F4"/>
-                      </a:solidFill>
-                    </a:lnT>
-                    <a:lnR w="0" cap="flat" cmpd="sng" algn="ctr">
-                      <a:solidFill>
-                        <a:srgbClr val="FAF8F4"/>
-                      </a:solidFill>
-                    </a:lnR>
-                    <a:lnL w="0" cap="flat" cmpd="sng" algn="ctr">
-                      <a:solidFill>
-                        <a:srgbClr val="FAF8F4"/>
-                      </a:solidFill>
-                    </a:lnL>
-                    <a:noFill/>
-                  </a:tcPr>
-                </a:tc>
-              </a:tr>
-              <a:tr h="558363">
-                <a:tc>
-                  <a:txBody>
-                    <a:bodyPr wrap="square"/>
-                    <a:lstStyle/>
-                    <a:p>
-                      <a:pPr>
-                        <a:lnSpc>
-                          <a:spcPct val="134000"/>
-                        </a:lnSpc>
-                      </a:pPr>
-                      <a:r>
-                        <a:rPr sz="1100" b="1">
-                          <a:solidFill>
-                            <a:srgbClr val="111111"/>
-                          </a:solidFill>
-                          <a:latin typeface="Poppins"/>
-                        </a:rPr>
-                        <a:t>Christy runs it</a:t>
-                      </a:r>
-                    </a:p>
-                  </a:txBody>
-                  <a:tcPr marL="0" marR="128016" marT="36576" marB="54864" anchor="t">
-                    <a:lnB w="9525" cap="flat" cmpd="sng" algn="ctr">
-                      <a:solidFill>
-                        <a:srgbClr val="D4D2D0"/>
-                      </a:solidFill>
-                    </a:lnB>
-                    <a:lnT w="0" cap="flat" cmpd="sng" algn="ctr">
-                      <a:solidFill>
-                        <a:srgbClr val="FAF8F4"/>
-                      </a:solidFill>
-                    </a:lnT>
-                    <a:lnR w="0" cap="flat" cmpd="sng" algn="ctr">
-                      <a:solidFill>
-                        <a:srgbClr val="FAF8F4"/>
-                      </a:solidFill>
-                    </a:lnR>
-                    <a:lnL w="0" cap="flat" cmpd="sng" algn="ctr">
-                      <a:solidFill>
-                        <a:srgbClr val="FAF8F4"/>
-                      </a:solidFill>
-                    </a:lnL>
-                    <a:noFill/>
-                  </a:tcPr>
-                </a:tc>
-                <a:tc>
-                  <a:txBody>
-                    <a:bodyPr wrap="square"/>
-                    <a:lstStyle/>
-                    <a:p>
-                      <a:pPr>
-                        <a:lnSpc>
-                          <a:spcPct val="134000"/>
-                        </a:lnSpc>
-                      </a:pPr>
-                      <a:r>
-                        <a:rPr sz="1100" b="0">
-                          <a:solidFill>
-                            <a:srgbClr val="111111"/>
-                          </a:solidFill>
-                          <a:latin typeface="Poppins"/>
-                        </a:rPr>
-                        <a:t>Christy Kilmartin leads the engagement: strategy, direction, and the call on what gets built next. Your first call on anything</a:t>
+                        <a:t>WHY, AND WHEN</a:t>
                       </a:r>
                     </a:p>
                   </a:txBody>
@@ -14871,7 +14645,7 @@
                           </a:solidFill>
                           <a:latin typeface="Poppins"/>
                         </a:rPr>
-                        <a:t>Harry executes</a:t>
+                        <a:t>Showroom or event space</a:t>
                       </a:r>
                     </a:p>
                   </a:txBody>
@@ -14916,7 +14690,7 @@
                           </a:solidFill>
                           <a:latin typeface="Poppins"/>
                         </a:rPr>
-                        <a:t>Harry is the operator inside Tap That. Everything we design is built to be run from that seat</a:t>
+                        <a:t>The last piece of the shape decision. Within 30 days</a:t>
                       </a:r>
                     </a:p>
                   </a:txBody>
@@ -14963,7 +14737,7 @@
                           </a:solidFill>
                           <a:latin typeface="Poppins"/>
                         </a:rPr>
-                        <a:t>Weekly</a:t>
+                        <a:t>The 250 date</a:t>
                       </a:r>
                     </a:p>
                   </a:txBody>
@@ -15008,7 +14782,7 @@
                           </a:solidFill>
                           <a:latin typeface="Poppins"/>
                         </a:rPr>
-                        <a:t>Forty-five minutes with Harry and Justin, led by Christy. Ronnie locks the standing day</a:t>
+                        <a:t>March 2027 or Christmas 2026. It changes the shape of the first three months. Before this is signed</a:t>
                       </a:r>
                     </a:p>
                   </a:txBody>
@@ -15055,7 +14829,7 @@
                           </a:solidFill>
                           <a:latin typeface="Poppins"/>
                         </a:rPr>
-                        <a:t>Monthly</a:t>
+                        <a:t>The Jewell split</a:t>
                       </a:r>
                     </a:p>
                   </a:txBody>
@@ -15100,7 +14874,7 @@
                           </a:solidFill>
                           <a:latin typeface="Poppins"/>
                         </a:rPr>
-                        <a:t>One hour with both founders on the four numbers. Decisions taken in the room and recorded</a:t>
+                        <a:t>Your mark-up of the workstreams: what we own, what Harry and Justin keep. At the first weekly check-in</a:t>
                       </a:r>
                     </a:p>
                   </a:txBody>
@@ -15147,7 +14921,7 @@
                           </a:solidFill>
                           <a:latin typeface="Poppins"/>
                         </a:rPr>
-                        <a:t>Reviews</a:t>
+                        <a:t>One definition of active refiller</a:t>
                       </a:r>
                     </a:p>
                   </a:txBody>
@@ -15192,7 +14966,7 @@
                           </a:solidFill>
                           <a:latin typeface="Poppins"/>
                         </a:rPr>
-                        <a:t>Mid-October, mid-December, March, September. A written review and a stop-or-continue conversation at each</a:t>
+                        <a:t>Before the first monthly report, or the number gets argued about instead of acted on</a:t>
                       </a:r>
                     </a:p>
                   </a:txBody>
@@ -15221,7 +14995,7 @@
                   </a:tcPr>
                 </a:tc>
               </a:tr>
-              <a:tr h="558363">
+              <a:tr h="329981">
                 <a:tc>
                   <a:txBody>
                     <a:bodyPr wrap="square"/>
@@ -15239,7 +15013,7 @@
                           </a:solidFill>
                           <a:latin typeface="Poppins"/>
                         </a:rPr>
-                        <a:t>Sign-off</a:t>
+                        <a:t>$2.55 as the per-schooner figure</a:t>
                       </a:r>
                     </a:p>
                   </a:txBody>
@@ -15284,7 +15058,191 @@
                           </a:solidFill>
                           <a:latin typeface="Poppins"/>
                         </a:rPr>
-                        <a:t>One named person approves messaging, offers and anything that goes to market. We suggest Justin, with Chris consulted on brand and product</a:t>
+                        <a:t>Confirmed on the live ad, and the other maths retired. Within 30 days</a:t>
+                      </a:r>
+                    </a:p>
+                  </a:txBody>
+                  <a:tcPr marL="0" marR="128016" marT="36576" marB="54864" anchor="t">
+                    <a:lnB w="9525" cap="flat" cmpd="sng" algn="ctr">
+                      <a:solidFill>
+                        <a:srgbClr val="D4D2D0"/>
+                      </a:solidFill>
+                    </a:lnB>
+                    <a:lnT w="0" cap="flat" cmpd="sng" algn="ctr">
+                      <a:solidFill>
+                        <a:srgbClr val="FAF8F4"/>
+                      </a:solidFill>
+                    </a:lnT>
+                    <a:lnR w="0" cap="flat" cmpd="sng" algn="ctr">
+                      <a:solidFill>
+                        <a:srgbClr val="FAF8F4"/>
+                      </a:solidFill>
+                    </a:lnR>
+                    <a:lnL w="0" cap="flat" cmpd="sng" algn="ctr">
+                      <a:solidFill>
+                        <a:srgbClr val="FAF8F4"/>
+                      </a:solidFill>
+                    </a:lnL>
+                    <a:noFill/>
+                  </a:tcPr>
+                </a:tc>
+              </a:tr>
+              <a:tr h="329981">
+                <a:tc>
+                  <a:txBody>
+                    <a:bodyPr wrap="square"/>
+                    <a:lstStyle/>
+                    <a:p>
+                      <a:pPr>
+                        <a:lnSpc>
+                          <a:spcPct val="134000"/>
+                        </a:lnSpc>
+                      </a:pPr>
+                      <a:r>
+                        <a:rPr sz="1100" b="1">
+                          <a:solidFill>
+                            <a:srgbClr val="111111"/>
+                          </a:solidFill>
+                          <a:latin typeface="Poppins"/>
+                        </a:rPr>
+                        <a:t>GoTab and Fishbowl timeline</a:t>
+                      </a:r>
+                    </a:p>
+                  </a:txBody>
+                  <a:tcPr marL="0" marR="128016" marT="36576" marB="54864" anchor="t">
+                    <a:lnB w="9525" cap="flat" cmpd="sng" algn="ctr">
+                      <a:solidFill>
+                        <a:srgbClr val="D4D2D0"/>
+                      </a:solidFill>
+                    </a:lnB>
+                    <a:lnT w="0" cap="flat" cmpd="sng" algn="ctr">
+                      <a:solidFill>
+                        <a:srgbClr val="FAF8F4"/>
+                      </a:solidFill>
+                    </a:lnT>
+                    <a:lnR w="0" cap="flat" cmpd="sng" algn="ctr">
+                      <a:solidFill>
+                        <a:srgbClr val="FAF8F4"/>
+                      </a:solidFill>
+                    </a:lnR>
+                    <a:lnL w="0" cap="flat" cmpd="sng" algn="ctr">
+                      <a:solidFill>
+                        <a:srgbClr val="FAF8F4"/>
+                      </a:solidFill>
+                    </a:lnL>
+                    <a:noFill/>
+                  </a:tcPr>
+                </a:tc>
+                <a:tc>
+                  <a:txBody>
+                    <a:bodyPr wrap="square"/>
+                    <a:lstStyle/>
+                    <a:p>
+                      <a:pPr>
+                        <a:lnSpc>
+                          <a:spcPct val="134000"/>
+                        </a:lnSpc>
+                      </a:pPr>
+                      <a:r>
+                        <a:rPr sz="1100" b="0">
+                          <a:solidFill>
+                            <a:srgbClr val="111111"/>
+                          </a:solidFill>
+                          <a:latin typeface="Poppins"/>
+                        </a:rPr>
+                        <a:t>It sequences the CRM build. Before the three-month sprint starts</a:t>
+                      </a:r>
+                    </a:p>
+                  </a:txBody>
+                  <a:tcPr marL="0" marR="128016" marT="36576" marB="54864" anchor="t">
+                    <a:lnB w="9525" cap="flat" cmpd="sng" algn="ctr">
+                      <a:solidFill>
+                        <a:srgbClr val="D4D2D0"/>
+                      </a:solidFill>
+                    </a:lnB>
+                    <a:lnT w="0" cap="flat" cmpd="sng" algn="ctr">
+                      <a:solidFill>
+                        <a:srgbClr val="FAF8F4"/>
+                      </a:solidFill>
+                    </a:lnT>
+                    <a:lnR w="0" cap="flat" cmpd="sng" algn="ctr">
+                      <a:solidFill>
+                        <a:srgbClr val="FAF8F4"/>
+                      </a:solidFill>
+                    </a:lnR>
+                    <a:lnL w="0" cap="flat" cmpd="sng" algn="ctr">
+                      <a:solidFill>
+                        <a:srgbClr val="FAF8F4"/>
+                      </a:solidFill>
+                    </a:lnL>
+                    <a:noFill/>
+                  </a:tcPr>
+                </a:tc>
+              </a:tr>
+              <a:tr h="329981">
+                <a:tc>
+                  <a:txBody>
+                    <a:bodyPr wrap="square"/>
+                    <a:lstStyle/>
+                    <a:p>
+                      <a:pPr>
+                        <a:lnSpc>
+                          <a:spcPct val="134000"/>
+                        </a:lnSpc>
+                      </a:pPr>
+                      <a:r>
+                        <a:rPr sz="1100" b="1">
+                          <a:solidFill>
+                            <a:srgbClr val="111111"/>
+                          </a:solidFill>
+                          <a:latin typeface="Poppins"/>
+                        </a:rPr>
+                        <a:t>Introductions</a:t>
+                      </a:r>
+                    </a:p>
+                  </a:txBody>
+                  <a:tcPr marL="0" marR="128016" marT="36576" marB="54864" anchor="t">
+                    <a:lnB w="9525" cap="flat" cmpd="sng" algn="ctr">
+                      <a:solidFill>
+                        <a:srgbClr val="D4D2D0"/>
+                      </a:solidFill>
+                    </a:lnB>
+                    <a:lnT w="0" cap="flat" cmpd="sng" algn="ctr">
+                      <a:solidFill>
+                        <a:srgbClr val="FAF8F4"/>
+                      </a:solidFill>
+                    </a:lnT>
+                    <a:lnR w="0" cap="flat" cmpd="sng" algn="ctr">
+                      <a:solidFill>
+                        <a:srgbClr val="FAF8F4"/>
+                      </a:solidFill>
+                    </a:lnR>
+                    <a:lnL w="0" cap="flat" cmpd="sng" algn="ctr">
+                      <a:solidFill>
+                        <a:srgbClr val="FAF8F4"/>
+                      </a:solidFill>
+                    </a:lnL>
+                    <a:noFill/>
+                  </a:tcPr>
+                </a:tc>
+                <a:tc>
+                  <a:txBody>
+                    <a:bodyPr wrap="square"/>
+                    <a:lstStyle/>
+                    <a:p>
+                      <a:pPr>
+                        <a:lnSpc>
+                          <a:spcPct val="134000"/>
+                        </a:lnSpc>
+                      </a:pPr>
+                      <a:r>
+                        <a:rPr sz="1100" b="0">
+                          <a:solidFill>
+                            <a:srgbClr val="111111"/>
+                          </a:solidFill>
+                          <a:latin typeface="Poppins"/>
+                        </a:rPr>
+                        <a:t>The ambassadors, Mark's venues, and the Kegland and Benchy contacts</a:t>
                       </a:r>
                     </a:p>
                   </a:txBody>
@@ -15326,6 +15284,149 @@
 </file>
 
 <file path=ppt/slides/slide25.xml><?xml version="1.0" encoding="utf-8"?>
+<p:sld xmlns:a="http://schemas.openxmlformats.org/drawingml/2006/main" xmlns:p="http://schemas.openxmlformats.org/presentationml/2006/main" xmlns:r="http://schemas.openxmlformats.org/officeDocument/2006/relationships">
+  <p:cSld>
+    <p:bg>
+      <p:bgPr>
+        <a:solidFill>
+          <a:srgbClr val="111111"/>
+        </a:solidFill>
+        <a:effectLst/>
+      </p:bgPr>
+    </p:bg>
+    <p:spTree>
+      <p:nvGrpSpPr>
+        <p:cNvPr id="1" name=""/>
+        <p:cNvGrpSpPr/>
+        <p:nvPr/>
+      </p:nvGrpSpPr>
+      <p:grpSpPr/>
+      <p:sp>
+        <p:nvSpPr>
+          <p:cNvPr id="2" name="TextBox 1"/>
+          <p:cNvSpPr txBox="1"/>
+          <p:nvPr/>
+        </p:nvSpPr>
+        <p:spPr>
+          <a:xfrm>
+            <a:off x="914400" y="914400"/>
+            <a:ext cx="10362895" cy="274320"/>
+          </a:xfrm>
+          <a:prstGeom prst="rect">
+            <a:avLst/>
+          </a:prstGeom>
+          <a:noFill/>
+        </p:spPr>
+        <p:txBody>
+          <a:bodyPr wrap="square" lIns="0" rIns="0" tIns="0" bIns="0" anchor="t">
+            <a:spAutoFit/>
+          </a:bodyPr>
+          <a:lstStyle/>
+          <a:p>
+            <a:pPr algn="l">
+              <a:lnSpc>
+                <a:spcPct val="100000"/>
+              </a:lnSpc>
+            </a:pPr>
+            <a:r>
+              <a:rPr sz="1400" b="0" spc="200">
+                <a:solidFill>
+                  <a:srgbClr val="FAF8F4"/>
+                </a:solidFill>
+                <a:latin typeface="Poppins"/>
+              </a:rPr>
+              <a:t>PART 04</a:t>
+            </a:r>
+          </a:p>
+        </p:txBody>
+      </p:sp>
+      <p:sp>
+        <p:nvSpPr>
+          <p:cNvPr id="3" name="TextBox 2"/>
+          <p:cNvSpPr txBox="1"/>
+          <p:nvPr/>
+        </p:nvSpPr>
+        <p:spPr>
+          <a:xfrm>
+            <a:off x="914400" y="2194560"/>
+            <a:ext cx="10362895" cy="2377440"/>
+          </a:xfrm>
+          <a:prstGeom prst="rect">
+            <a:avLst/>
+          </a:prstGeom>
+          <a:noFill/>
+        </p:spPr>
+        <p:txBody>
+          <a:bodyPr wrap="square" lIns="0" rIns="0" tIns="0" bIns="0" anchor="ctr">
+            <a:spAutoFit/>
+          </a:bodyPr>
+          <a:lstStyle/>
+          <a:p>
+            <a:pPr algn="l">
+              <a:lnSpc>
+                <a:spcPct val="100000"/>
+              </a:lnSpc>
+            </a:pPr>
+            <a:r>
+              <a:rPr sz="9600" b="0">
+                <a:solidFill>
+                  <a:srgbClr val="FAF8F4"/>
+                </a:solidFill>
+                <a:latin typeface="Poppins"/>
+              </a:rPr>
+              <a:t>Investment.</a:t>
+            </a:r>
+          </a:p>
+        </p:txBody>
+      </p:sp>
+      <p:sp>
+        <p:nvSpPr>
+          <p:cNvPr id="4" name="TextBox 3"/>
+          <p:cNvSpPr txBox="1"/>
+          <p:nvPr/>
+        </p:nvSpPr>
+        <p:spPr>
+          <a:xfrm>
+            <a:off x="914400" y="5212080"/>
+            <a:ext cx="10362895" cy="457200"/>
+          </a:xfrm>
+          <a:prstGeom prst="rect">
+            <a:avLst/>
+          </a:prstGeom>
+          <a:noFill/>
+        </p:spPr>
+        <p:txBody>
+          <a:bodyPr wrap="square" lIns="0" rIns="0" tIns="0" bIns="0" anchor="t">
+            <a:spAutoFit/>
+          </a:bodyPr>
+          <a:lstStyle/>
+          <a:p>
+            <a:pPr algn="l">
+              <a:lnSpc>
+                <a:spcPct val="130000"/>
+              </a:lnSpc>
+            </a:pPr>
+            <a:r>
+              <a:rPr sz="1600" b="0">
+                <a:solidFill>
+                  <a:srgbClr val="FAF8F4"/>
+                </a:solidFill>
+                <a:latin typeface="Poppins"/>
+              </a:rPr>
+              <a:t>Two options, one plan, one rhythm.</a:t>
+            </a:r>
+          </a:p>
+        </p:txBody>
+      </p:sp>
+    </p:spTree>
+  </p:cSld>
+  <p:clrMapOvr>
+    <a:masterClrMapping/>
+  </p:clrMapOvr>
+</p:sld>
+</file>
+
+<file path=ppt/slides/slide26.xml><?xml version="1.0" encoding="utf-8"?>
 <p:sld xmlns:a="http://schemas.openxmlformats.org/drawingml/2006/main" xmlns:p="http://schemas.openxmlformats.org/presentationml/2006/main" xmlns:r="http://schemas.openxmlformats.org/officeDocument/2006/relationships">
   <p:cSld>
     <p:bg>
@@ -15377,7 +15478,7 @@
                 </a:solidFill>
                 <a:latin typeface="Poppins"/>
               </a:rPr>
-              <a:t>WHAT WE NEED FROM YOU</a:t>
+              <a:t>OPTION A</a:t>
             </a:r>
           </a:p>
         </p:txBody>
@@ -15416,22 +15517,61 @@
                 </a:solidFill>
                 <a:latin typeface="Poppins"/>
               </a:rPr>
-              <a:t>Seven inputs, and when.</a:t>
+              <a:t>The ninety-day sprint.</a:t>
+            </a:r>
+          </a:p>
+        </p:txBody>
+      </p:sp>
+      <p:sp>
+        <p:nvSpPr>
+          <p:cNvPr id="4" name="TextBox 3"/>
+          <p:cNvSpPr txBox="1"/>
+          <p:nvPr/>
+        </p:nvSpPr>
+        <p:spPr>
+          <a:xfrm>
+            <a:off x="914400" y="2084831"/>
+            <a:ext cx="8778240" cy="548640"/>
+          </a:xfrm>
+          <a:prstGeom prst="rect">
+            <a:avLst/>
+          </a:prstGeom>
+          <a:noFill/>
+        </p:spPr>
+        <p:txBody>
+          <a:bodyPr wrap="square" lIns="0" rIns="0" tIns="0" bIns="0" anchor="t">
+            <a:spAutoFit/>
+          </a:bodyPr>
+          <a:lstStyle/>
+          <a:p>
+            <a:pPr algn="l">
+              <a:lnSpc>
+                <a:spcPct val="140000"/>
+              </a:lnSpc>
+            </a:pPr>
+            <a:r>
+              <a:rPr sz="1300" b="0">
+                <a:solidFill>
+                  <a:srgbClr val="666666"/>
+                </a:solidFill>
+                <a:latin typeface="Poppins"/>
+              </a:rPr>
+              <a:t>Discover and Design already delivered, rack value $20,000, charged at $4,995 on acceptance of either option.</a:t>
             </a:r>
           </a:p>
         </p:txBody>
       </p:sp>
       <p:graphicFrame>
         <p:nvGraphicFramePr>
-          <p:cNvPr id="4" name="Table 3"/>
+          <p:cNvPr id="5" name="Table 4"/>
           <p:cNvGraphicFramePr>
             <a:graphicFrameLocks noGrp="1"/>
           </p:cNvGraphicFramePr>
           <p:nvPr/>
         </p:nvGraphicFramePr>
         <p:xfrm>
-          <a:off x="914400" y="2194560"/>
-          <a:ext cx="10362894" cy="2584187"/>
+          <a:off x="914400" y="2880360"/>
+          <a:ext cx="10362894" cy="2507772"/>
         </p:xfrm>
         <a:graphic>
           <a:graphicData uri="http://schemas.openxmlformats.org/drawingml/2006/table">
@@ -15440,8 +15580,8 @@
                 <a:tableStyleId>{2D5ABB26-0587-4C30-8999-92F81FD0307C}</a:tableStyleId>
               </a:tblPr>
               <a:tblGrid>
-                <a:gridCol w="2694352"/>
-                <a:gridCol w="7668542"/>
+                <a:gridCol w="8083058"/>
+                <a:gridCol w="2279836"/>
               </a:tblGrid>
               <a:tr h="274320">
                 <a:tc>
@@ -15461,7 +15601,7 @@
                           </a:solidFill>
                           <a:latin typeface="Poppins"/>
                         </a:rPr>
-                        <a:t>INPUT</a:t>
+                        <a:t>LINE</a:t>
                       </a:r>
                     </a:p>
                   </a:txBody>
@@ -15506,7 +15646,7 @@
                           </a:solidFill>
                           <a:latin typeface="Poppins"/>
                         </a:rPr>
-                        <a:t>WHY, AND WHEN</a:t>
+                        <a:t>FEE</a:t>
                       </a:r>
                     </a:p>
                   </a:txBody>
@@ -15535,7 +15675,7 @@
                   </a:tcPr>
                 </a:tc>
               </a:tr>
-              <a:tr h="329981">
+              <a:tr h="558363">
                 <a:tc>
                   <a:txBody>
                     <a:bodyPr wrap="square"/>
@@ -15553,7 +15693,7 @@
                           </a:solidFill>
                           <a:latin typeface="Poppins"/>
                         </a:rPr>
-                        <a:t>Showroom or event space</a:t>
+                        <a:t>Foundation builds. Website rebuild with the buy path and proof pages, SEM set-up, trigger-based CRM with segments, three campaign landing pages</a:t>
                       </a:r>
                     </a:p>
                   </a:txBody>
@@ -15598,7 +15738,7 @@
                           </a:solidFill>
                           <a:latin typeface="Poppins"/>
                         </a:rPr>
-                        <a:t>The last piece of the shape decision. Within 30 days</a:t>
+                        <a:t>$9,250</a:t>
                       </a:r>
                     </a:p>
                   </a:txBody>
@@ -15627,7 +15767,7 @@
                   </a:tcPr>
                 </a:tc>
               </a:tr>
-              <a:tr h="329981">
+              <a:tr h="558363">
                 <a:tc>
                   <a:txBody>
                     <a:bodyPr wrap="square"/>
@@ -15645,7 +15785,7 @@
                           </a:solidFill>
                           <a:latin typeface="Poppins"/>
                         </a:rPr>
-                        <a:t>The 250 date</a:t>
+                        <a:t>Program design. Switcher offer and partner approach, referral program, wholesale structure and hire brief, key messaging and the customer journey, the competition campaign</a:t>
                       </a:r>
                     </a:p>
                   </a:txBody>
@@ -15690,7 +15830,7 @@
                           </a:solidFill>
                           <a:latin typeface="Poppins"/>
                         </a:rPr>
-                        <a:t>March 2027 or Christmas 2026. It changes the shape of the first three months. Before this is signed</a:t>
+                        <a:t>$8,500</a:t>
                       </a:r>
                     </a:p>
                   </a:txBody>
@@ -15719,7 +15859,7 @@
                   </a:tcPr>
                 </a:tc>
               </a:tr>
-              <a:tr h="329981">
+              <a:tr h="558363">
                 <a:tc>
                   <a:txBody>
                     <a:bodyPr wrap="square"/>
@@ -15737,7 +15877,7 @@
                           </a:solidFill>
                           <a:latin typeface="Poppins"/>
                         </a:rPr>
-                        <a:t>The Jewell split</a:t>
+                        <a:t>Running the sprint, three months. SEM and Meta management, JVP and wholesale outreach, content and artwork, the rhythm and the report</a:t>
                       </a:r>
                     </a:p>
                   </a:txBody>
@@ -15782,7 +15922,7 @@
                           </a:solidFill>
                           <a:latin typeface="Poppins"/>
                         </a:rPr>
-                        <a:t>Your mark-up of the workstreams: what we own, what Harry and Justin keep. At the first weekly check-in</a:t>
+                        <a:t>$3,250 a month, $9,750</a:t>
                       </a:r>
                     </a:p>
                   </a:txBody>
@@ -15811,7 +15951,7 @@
                   </a:tcPr>
                 </a:tc>
               </a:tr>
-              <a:tr h="329981">
+              <a:tr h="558363">
                 <a:tc>
                   <a:txBody>
                     <a:bodyPr wrap="square"/>
@@ -15829,7 +15969,7 @@
                           </a:solidFill>
                           <a:latin typeface="Poppins"/>
                         </a:rPr>
-                        <a:t>One definition of active refiller</a:t>
+                        <a:t>Option A total</a:t>
                       </a:r>
                     </a:p>
                   </a:txBody>
@@ -15874,283 +16014,8 @@
                           </a:solidFill>
                           <a:latin typeface="Poppins"/>
                         </a:rPr>
-                        <a:t>Before the first monthly report, or the number gets argued about instead of acted on</a:t>
-                      </a:r>
-                    </a:p>
-                  </a:txBody>
-                  <a:tcPr marL="0" marR="128016" marT="36576" marB="54864" anchor="t">
-                    <a:lnB w="9525" cap="flat" cmpd="sng" algn="ctr">
-                      <a:solidFill>
-                        <a:srgbClr val="D4D2D0"/>
-                      </a:solidFill>
-                    </a:lnB>
-                    <a:lnT w="0" cap="flat" cmpd="sng" algn="ctr">
-                      <a:solidFill>
-                        <a:srgbClr val="FAF8F4"/>
-                      </a:solidFill>
-                    </a:lnT>
-                    <a:lnR w="0" cap="flat" cmpd="sng" algn="ctr">
-                      <a:solidFill>
-                        <a:srgbClr val="FAF8F4"/>
-                      </a:solidFill>
-                    </a:lnR>
-                    <a:lnL w="0" cap="flat" cmpd="sng" algn="ctr">
-                      <a:solidFill>
-                        <a:srgbClr val="FAF8F4"/>
-                      </a:solidFill>
-                    </a:lnL>
-                    <a:noFill/>
-                  </a:tcPr>
-                </a:tc>
-              </a:tr>
-              <a:tr h="329981">
-                <a:tc>
-                  <a:txBody>
-                    <a:bodyPr wrap="square"/>
-                    <a:lstStyle/>
-                    <a:p>
-                      <a:pPr>
-                        <a:lnSpc>
-                          <a:spcPct val="134000"/>
-                        </a:lnSpc>
-                      </a:pPr>
-                      <a:r>
-                        <a:rPr sz="1100" b="1">
-                          <a:solidFill>
-                            <a:srgbClr val="111111"/>
-                          </a:solidFill>
-                          <a:latin typeface="Poppins"/>
-                        </a:rPr>
-                        <a:t>$2.55 as the per-schooner figure</a:t>
-                      </a:r>
-                    </a:p>
-                  </a:txBody>
-                  <a:tcPr marL="0" marR="128016" marT="36576" marB="54864" anchor="t">
-                    <a:lnB w="9525" cap="flat" cmpd="sng" algn="ctr">
-                      <a:solidFill>
-                        <a:srgbClr val="D4D2D0"/>
-                      </a:solidFill>
-                    </a:lnB>
-                    <a:lnT w="0" cap="flat" cmpd="sng" algn="ctr">
-                      <a:solidFill>
-                        <a:srgbClr val="FAF8F4"/>
-                      </a:solidFill>
-                    </a:lnT>
-                    <a:lnR w="0" cap="flat" cmpd="sng" algn="ctr">
-                      <a:solidFill>
-                        <a:srgbClr val="FAF8F4"/>
-                      </a:solidFill>
-                    </a:lnR>
-                    <a:lnL w="0" cap="flat" cmpd="sng" algn="ctr">
-                      <a:solidFill>
-                        <a:srgbClr val="FAF8F4"/>
-                      </a:solidFill>
-                    </a:lnL>
-                    <a:noFill/>
-                  </a:tcPr>
-                </a:tc>
-                <a:tc>
-                  <a:txBody>
-                    <a:bodyPr wrap="square"/>
-                    <a:lstStyle/>
-                    <a:p>
-                      <a:pPr>
-                        <a:lnSpc>
-                          <a:spcPct val="134000"/>
-                        </a:lnSpc>
-                      </a:pPr>
-                      <a:r>
-                        <a:rPr sz="1100" b="0">
-                          <a:solidFill>
-                            <a:srgbClr val="111111"/>
-                          </a:solidFill>
-                          <a:latin typeface="Poppins"/>
-                        </a:rPr>
-                        <a:t>Confirmed on the live ad, and the other maths retired. Within 30 days</a:t>
-                      </a:r>
-                    </a:p>
-                  </a:txBody>
-                  <a:tcPr marL="0" marR="128016" marT="36576" marB="54864" anchor="t">
-                    <a:lnB w="9525" cap="flat" cmpd="sng" algn="ctr">
-                      <a:solidFill>
-                        <a:srgbClr val="D4D2D0"/>
-                      </a:solidFill>
-                    </a:lnB>
-                    <a:lnT w="0" cap="flat" cmpd="sng" algn="ctr">
-                      <a:solidFill>
-                        <a:srgbClr val="FAF8F4"/>
-                      </a:solidFill>
-                    </a:lnT>
-                    <a:lnR w="0" cap="flat" cmpd="sng" algn="ctr">
-                      <a:solidFill>
-                        <a:srgbClr val="FAF8F4"/>
-                      </a:solidFill>
-                    </a:lnR>
-                    <a:lnL w="0" cap="flat" cmpd="sng" algn="ctr">
-                      <a:solidFill>
-                        <a:srgbClr val="FAF8F4"/>
-                      </a:solidFill>
-                    </a:lnL>
-                    <a:noFill/>
-                  </a:tcPr>
-                </a:tc>
-              </a:tr>
-              <a:tr h="329981">
-                <a:tc>
-                  <a:txBody>
-                    <a:bodyPr wrap="square"/>
-                    <a:lstStyle/>
-                    <a:p>
-                      <a:pPr>
-                        <a:lnSpc>
-                          <a:spcPct val="134000"/>
-                        </a:lnSpc>
-                      </a:pPr>
-                      <a:r>
-                        <a:rPr sz="1100" b="1">
-                          <a:solidFill>
-                            <a:srgbClr val="111111"/>
-                          </a:solidFill>
-                          <a:latin typeface="Poppins"/>
-                        </a:rPr>
-                        <a:t>GoTab and Fishbowl timeline</a:t>
-                      </a:r>
-                    </a:p>
-                  </a:txBody>
-                  <a:tcPr marL="0" marR="128016" marT="36576" marB="54864" anchor="t">
-                    <a:lnB w="9525" cap="flat" cmpd="sng" algn="ctr">
-                      <a:solidFill>
-                        <a:srgbClr val="D4D2D0"/>
-                      </a:solidFill>
-                    </a:lnB>
-                    <a:lnT w="0" cap="flat" cmpd="sng" algn="ctr">
-                      <a:solidFill>
-                        <a:srgbClr val="FAF8F4"/>
-                      </a:solidFill>
-                    </a:lnT>
-                    <a:lnR w="0" cap="flat" cmpd="sng" algn="ctr">
-                      <a:solidFill>
-                        <a:srgbClr val="FAF8F4"/>
-                      </a:solidFill>
-                    </a:lnR>
-                    <a:lnL w="0" cap="flat" cmpd="sng" algn="ctr">
-                      <a:solidFill>
-                        <a:srgbClr val="FAF8F4"/>
-                      </a:solidFill>
-                    </a:lnL>
-                    <a:noFill/>
-                  </a:tcPr>
-                </a:tc>
-                <a:tc>
-                  <a:txBody>
-                    <a:bodyPr wrap="square"/>
-                    <a:lstStyle/>
-                    <a:p>
-                      <a:pPr>
-                        <a:lnSpc>
-                          <a:spcPct val="134000"/>
-                        </a:lnSpc>
-                      </a:pPr>
-                      <a:r>
-                        <a:rPr sz="1100" b="0">
-                          <a:solidFill>
-                            <a:srgbClr val="111111"/>
-                          </a:solidFill>
-                          <a:latin typeface="Poppins"/>
-                        </a:rPr>
-                        <a:t>It sequences the CRM build. Before the three-month sprint starts</a:t>
-                      </a:r>
-                    </a:p>
-                  </a:txBody>
-                  <a:tcPr marL="0" marR="128016" marT="36576" marB="54864" anchor="t">
-                    <a:lnB w="9525" cap="flat" cmpd="sng" algn="ctr">
-                      <a:solidFill>
-                        <a:srgbClr val="D4D2D0"/>
-                      </a:solidFill>
-                    </a:lnB>
-                    <a:lnT w="0" cap="flat" cmpd="sng" algn="ctr">
-                      <a:solidFill>
-                        <a:srgbClr val="FAF8F4"/>
-                      </a:solidFill>
-                    </a:lnT>
-                    <a:lnR w="0" cap="flat" cmpd="sng" algn="ctr">
-                      <a:solidFill>
-                        <a:srgbClr val="FAF8F4"/>
-                      </a:solidFill>
-                    </a:lnR>
-                    <a:lnL w="0" cap="flat" cmpd="sng" algn="ctr">
-                      <a:solidFill>
-                        <a:srgbClr val="FAF8F4"/>
-                      </a:solidFill>
-                    </a:lnL>
-                    <a:noFill/>
-                  </a:tcPr>
-                </a:tc>
-              </a:tr>
-              <a:tr h="329981">
-                <a:tc>
-                  <a:txBody>
-                    <a:bodyPr wrap="square"/>
-                    <a:lstStyle/>
-                    <a:p>
-                      <a:pPr>
-                        <a:lnSpc>
-                          <a:spcPct val="134000"/>
-                        </a:lnSpc>
-                      </a:pPr>
-                      <a:r>
-                        <a:rPr sz="1100" b="1">
-                          <a:solidFill>
-                            <a:srgbClr val="111111"/>
-                          </a:solidFill>
-                          <a:latin typeface="Poppins"/>
-                        </a:rPr>
-                        <a:t>Introductions</a:t>
-                      </a:r>
-                    </a:p>
-                  </a:txBody>
-                  <a:tcPr marL="0" marR="128016" marT="36576" marB="54864" anchor="t">
-                    <a:lnB w="9525" cap="flat" cmpd="sng" algn="ctr">
-                      <a:solidFill>
-                        <a:srgbClr val="D4D2D0"/>
-                      </a:solidFill>
-                    </a:lnB>
-                    <a:lnT w="0" cap="flat" cmpd="sng" algn="ctr">
-                      <a:solidFill>
-                        <a:srgbClr val="FAF8F4"/>
-                      </a:solidFill>
-                    </a:lnT>
-                    <a:lnR w="0" cap="flat" cmpd="sng" algn="ctr">
-                      <a:solidFill>
-                        <a:srgbClr val="FAF8F4"/>
-                      </a:solidFill>
-                    </a:lnR>
-                    <a:lnL w="0" cap="flat" cmpd="sng" algn="ctr">
-                      <a:solidFill>
-                        <a:srgbClr val="FAF8F4"/>
-                      </a:solidFill>
-                    </a:lnL>
-                    <a:noFill/>
-                  </a:tcPr>
-                </a:tc>
-                <a:tc>
-                  <a:txBody>
-                    <a:bodyPr wrap="square"/>
-                    <a:lstStyle/>
-                    <a:p>
-                      <a:pPr>
-                        <a:lnSpc>
-                          <a:spcPct val="134000"/>
-                        </a:lnSpc>
-                      </a:pPr>
-                      <a:r>
-                        <a:rPr sz="1100" b="0">
-                          <a:solidFill>
-                            <a:srgbClr val="111111"/>
-                          </a:solidFill>
-                          <a:latin typeface="Poppins"/>
-                        </a:rPr>
-                        <a:t>The ambassadors, Mark's venues, and the Kegland and Benchy contacts</a:t>
+                        <a:t>$25,000 + GST
+normally $27,500</a:t>
                       </a:r>
                     </a:p>
                   </a:txBody>
@@ -16183,41 +16048,15 @@
           </a:graphicData>
         </a:graphic>
       </p:graphicFrame>
-    </p:spTree>
-  </p:cSld>
-  <p:clrMapOvr>
-    <a:masterClrMapping/>
-  </p:clrMapOvr>
-</p:sld>
-</file>
-
-<file path=ppt/slides/slide26.xml><?xml version="1.0" encoding="utf-8"?>
-<p:sld xmlns:a="http://schemas.openxmlformats.org/drawingml/2006/main" xmlns:p="http://schemas.openxmlformats.org/presentationml/2006/main" xmlns:r="http://schemas.openxmlformats.org/officeDocument/2006/relationships">
-  <p:cSld>
-    <p:bg>
-      <p:bgPr>
-        <a:solidFill>
-          <a:srgbClr val="111111"/>
-        </a:solidFill>
-        <a:effectLst/>
-      </p:bgPr>
-    </p:bg>
-    <p:spTree>
-      <p:nvGrpSpPr>
-        <p:cNvPr id="1" name=""/>
-        <p:cNvGrpSpPr/>
-        <p:nvPr/>
-      </p:nvGrpSpPr>
-      <p:grpSpPr/>
       <p:sp>
         <p:nvSpPr>
-          <p:cNvPr id="2" name="TextBox 1"/>
+          <p:cNvPr id="6" name="TextBox 5"/>
           <p:cNvSpPr txBox="1"/>
           <p:nvPr/>
         </p:nvSpPr>
         <p:spPr>
           <a:xfrm>
-            <a:off x="914400" y="914400"/>
+            <a:off x="914400" y="6291072"/>
             <a:ext cx="10362895" cy="274320"/>
           </a:xfrm>
           <a:prstGeom prst="rect">
@@ -16237,91 +16076,13 @@
               </a:lnSpc>
             </a:pPr>
             <a:r>
-              <a:rPr sz="1400" b="0" spc="200">
+              <a:rPr sz="900" b="0">
                 <a:solidFill>
-                  <a:srgbClr val="FAF8F4"/>
+                  <a:srgbClr val="666666"/>
                 </a:solidFill>
                 <a:latin typeface="Poppins"/>
               </a:rPr>
-              <a:t>PART 04</a:t>
-            </a:r>
-          </a:p>
-        </p:txBody>
-      </p:sp>
-      <p:sp>
-        <p:nvSpPr>
-          <p:cNvPr id="3" name="TextBox 2"/>
-          <p:cNvSpPr txBox="1"/>
-          <p:nvPr/>
-        </p:nvSpPr>
-        <p:spPr>
-          <a:xfrm>
-            <a:off x="914400" y="2194560"/>
-            <a:ext cx="10362895" cy="2377440"/>
-          </a:xfrm>
-          <a:prstGeom prst="rect">
-            <a:avLst/>
-          </a:prstGeom>
-          <a:noFill/>
-        </p:spPr>
-        <p:txBody>
-          <a:bodyPr wrap="square" lIns="0" rIns="0" tIns="0" bIns="0" anchor="ctr">
-            <a:spAutoFit/>
-          </a:bodyPr>
-          <a:lstStyle/>
-          <a:p>
-            <a:pPr algn="l">
-              <a:lnSpc>
-                <a:spcPct val="100000"/>
-              </a:lnSpc>
-            </a:pPr>
-            <a:r>
-              <a:rPr sz="9600" b="0">
-                <a:solidFill>
-                  <a:srgbClr val="FAF8F4"/>
-                </a:solidFill>
-                <a:latin typeface="Poppins"/>
-              </a:rPr>
-              <a:t>Investment.</a:t>
-            </a:r>
-          </a:p>
-        </p:txBody>
-      </p:sp>
-      <p:sp>
-        <p:nvSpPr>
-          <p:cNvPr id="4" name="TextBox 3"/>
-          <p:cNvSpPr txBox="1"/>
-          <p:nvPr/>
-        </p:nvSpPr>
-        <p:spPr>
-          <a:xfrm>
-            <a:off x="914400" y="5212080"/>
-            <a:ext cx="10362895" cy="457200"/>
-          </a:xfrm>
-          <a:prstGeom prst="rect">
-            <a:avLst/>
-          </a:prstGeom>
-          <a:noFill/>
-        </p:spPr>
-        <p:txBody>
-          <a:bodyPr wrap="square" lIns="0" rIns="0" tIns="0" bIns="0" anchor="t">
-            <a:spAutoFit/>
-          </a:bodyPr>
-          <a:lstStyle/>
-          <a:p>
-            <a:pPr algn="l">
-              <a:lnSpc>
-                <a:spcPct val="130000"/>
-              </a:lnSpc>
-            </a:pPr>
-            <a:r>
-              <a:rPr sz="1600" b="0">
-                <a:solidFill>
-                  <a:srgbClr val="FAF8F4"/>
-                </a:solidFill>
-                <a:latin typeface="Poppins"/>
-              </a:rPr>
-              <a:t>Two options, one plan, one rhythm.</a:t>
+              <a:t>$25,000 on acceptance, or $8,333 a month across the three months. Stop or continue at the mid-December review. The line fees are the standard rate and sum to $27,500; the discount is applied to the total.</a:t>
             </a:r>
           </a:p>
         </p:txBody>
@@ -16386,7 +16147,7 @@
                 </a:solidFill>
                 <a:latin typeface="Poppins"/>
               </a:rPr>
-              <a:t>OPTION A</a:t>
+              <a:t>OPTION B</a:t>
             </a:r>
           </a:p>
         </p:txBody>
@@ -16425,7 +16186,7 @@
                 </a:solidFill>
                 <a:latin typeface="Poppins"/>
               </a:rPr>
-              <a:t>The ninety-day sprint.</a:t>
+              <a:t>Twelve months.</a:t>
             </a:r>
           </a:p>
         </p:txBody>
@@ -16464,7 +16225,7 @@
                 </a:solidFill>
                 <a:latin typeface="Poppins"/>
               </a:rPr>
-              <a:t>Discover and Design already delivered, rack value $20,000, charged at $4,995 on acceptance of either option.</a:t>
+              <a:t>An active refill customer is worth about $2,400 a year. Option B pays for itself at twenty-five additional refillers held for a year, and your own six-month target adds about 145.</a:t>
             </a:r>
           </a:p>
         </p:txBody>
@@ -16479,7 +16240,7 @@
         </p:nvGraphicFramePr>
         <p:xfrm>
           <a:off x="914400" y="2880360"/>
-          <a:ext cx="10362894" cy="2507772"/>
+          <a:ext cx="10362894" cy="2177789"/>
         </p:xfrm>
         <a:graphic>
           <a:graphicData uri="http://schemas.openxmlformats.org/drawingml/2006/table">
@@ -16488,8 +16249,8 @@
                 <a:tableStyleId>{2D5ABB26-0587-4C30-8999-92F81FD0307C}</a:tableStyleId>
               </a:tblPr>
               <a:tblGrid>
-                <a:gridCol w="8083058"/>
-                <a:gridCol w="2279836"/>
+                <a:gridCol w="7046768"/>
+                <a:gridCol w="3316126"/>
               </a:tblGrid>
               <a:tr h="274320">
                 <a:tc>
@@ -16583,7 +16344,7 @@
                   </a:tcPr>
                 </a:tc>
               </a:tr>
-              <a:tr h="558363">
+              <a:tr h="329981">
                 <a:tc>
                   <a:txBody>
                     <a:bodyPr wrap="square"/>
@@ -16601,7 +16362,7 @@
                           </a:solidFill>
                           <a:latin typeface="Poppins"/>
                         </a:rPr>
-                        <a:t>Foundation builds. Website rebuild with the buy path and proof pages, SEM set-up, trigger-based CRM with segments, three campaign landing pages</a:t>
+                        <a:t>Everything in Option A, delivered in the first three months</a:t>
                       </a:r>
                     </a:p>
                   </a:txBody>
@@ -16646,7 +16407,7 @@
                           </a:solidFill>
                           <a:latin typeface="Poppins"/>
                         </a:rPr>
-                        <a:t>$9,250</a:t>
+                        <a:t>Included</a:t>
                       </a:r>
                     </a:p>
                   </a:txBody>
@@ -16675,7 +16436,7 @@
                   </a:tcPr>
                 </a:tc>
               </a:tr>
-              <a:tr h="558363">
+              <a:tr h="786744">
                 <a:tc>
                   <a:txBody>
                     <a:bodyPr wrap="square"/>
@@ -16693,7 +16454,7 @@
                           </a:solidFill>
                           <a:latin typeface="Poppins"/>
                         </a:rPr>
-                        <a:t>Programme design. Switcher offer and partner approach, referral programme, wholesale structure and hire brief, key messaging and the customer journey, Oktoberfest</a:t>
+                        <a:t>Months four to twelve. Weddings and functions, party rental reworked, the membership redesign when you release it, range and hero marketing, club and venue offers, SEM, outreach, content and artwork continuing, the reviews at March and September</a:t>
                       </a:r>
                     </a:p>
                   </a:txBody>
@@ -16738,7 +16499,7 @@
                           </a:solidFill>
                           <a:latin typeface="Poppins"/>
                         </a:rPr>
-                        <a:t>$8,500</a:t>
+                        <a:t>Included</a:t>
                       </a:r>
                     </a:p>
                   </a:txBody>
@@ -16767,7 +16528,7 @@
                   </a:tcPr>
                 </a:tc>
               </a:tr>
-              <a:tr h="558363">
+              <a:tr h="786744">
                 <a:tc>
                   <a:txBody>
                     <a:bodyPr wrap="square"/>
@@ -16785,7 +16546,7 @@
                           </a:solidFill>
                           <a:latin typeface="Poppins"/>
                         </a:rPr>
-                        <a:t>Running the sprint, three months. SEM and Meta management, JVP and wholesale outreach, content and artwork, the rhythm and the report</a:t>
+                        <a:t>Option B total</a:t>
                       </a:r>
                     </a:p>
                   </a:txBody>
@@ -16830,100 +16591,9 @@
                           </a:solidFill>
                           <a:latin typeface="Poppins"/>
                         </a:rPr>
-                        <a:t>$3,250 a month, $9,750</a:t>
-                      </a:r>
-                    </a:p>
-                  </a:txBody>
-                  <a:tcPr marL="0" marR="128016" marT="36576" marB="54864" anchor="t">
-                    <a:lnB w="9525" cap="flat" cmpd="sng" algn="ctr">
-                      <a:solidFill>
-                        <a:srgbClr val="D4D2D0"/>
-                      </a:solidFill>
-                    </a:lnB>
-                    <a:lnT w="0" cap="flat" cmpd="sng" algn="ctr">
-                      <a:solidFill>
-                        <a:srgbClr val="FAF8F4"/>
-                      </a:solidFill>
-                    </a:lnT>
-                    <a:lnR w="0" cap="flat" cmpd="sng" algn="ctr">
-                      <a:solidFill>
-                        <a:srgbClr val="FAF8F4"/>
-                      </a:solidFill>
-                    </a:lnR>
-                    <a:lnL w="0" cap="flat" cmpd="sng" algn="ctr">
-                      <a:solidFill>
-                        <a:srgbClr val="FAF8F4"/>
-                      </a:solidFill>
-                    </a:lnL>
-                    <a:noFill/>
-                  </a:tcPr>
-                </a:tc>
-              </a:tr>
-              <a:tr h="558363">
-                <a:tc>
-                  <a:txBody>
-                    <a:bodyPr wrap="square"/>
-                    <a:lstStyle/>
-                    <a:p>
-                      <a:pPr>
-                        <a:lnSpc>
-                          <a:spcPct val="134000"/>
-                        </a:lnSpc>
-                      </a:pPr>
-                      <a:r>
-                        <a:rPr sz="1100" b="1">
-                          <a:solidFill>
-                            <a:srgbClr val="111111"/>
-                          </a:solidFill>
-                          <a:latin typeface="Poppins"/>
-                        </a:rPr>
-                        <a:t>Option A total</a:t>
-                      </a:r>
-                    </a:p>
-                  </a:txBody>
-                  <a:tcPr marL="0" marR="128016" marT="36576" marB="54864" anchor="t">
-                    <a:lnB w="9525" cap="flat" cmpd="sng" algn="ctr">
-                      <a:solidFill>
-                        <a:srgbClr val="D4D2D0"/>
-                      </a:solidFill>
-                    </a:lnB>
-                    <a:lnT w="0" cap="flat" cmpd="sng" algn="ctr">
-                      <a:solidFill>
-                        <a:srgbClr val="FAF8F4"/>
-                      </a:solidFill>
-                    </a:lnT>
-                    <a:lnR w="0" cap="flat" cmpd="sng" algn="ctr">
-                      <a:solidFill>
-                        <a:srgbClr val="FAF8F4"/>
-                      </a:solidFill>
-                    </a:lnR>
-                    <a:lnL w="0" cap="flat" cmpd="sng" algn="ctr">
-                      <a:solidFill>
-                        <a:srgbClr val="FAF8F4"/>
-                      </a:solidFill>
-                    </a:lnL>
-                    <a:noFill/>
-                  </a:tcPr>
-                </a:tc>
-                <a:tc>
-                  <a:txBody>
-                    <a:bodyPr wrap="square"/>
-                    <a:lstStyle/>
-                    <a:p>
-                      <a:pPr>
-                        <a:lnSpc>
-                          <a:spcPct val="134000"/>
-                        </a:lnSpc>
-                      </a:pPr>
-                      <a:r>
-                        <a:rPr sz="1100" b="0">
-                          <a:solidFill>
-                            <a:srgbClr val="111111"/>
-                          </a:solidFill>
-                          <a:latin typeface="Poppins"/>
-                        </a:rPr>
-                        <a:t>$12,500 + GST
-normally $27,500</a:t>
+                        <a:t>$4,999 a month + GST
+normally $5,500
+$59,988 over twelve months</a:t>
                       </a:r>
                     </a:p>
                   </a:txBody>
@@ -16990,7 +16660,7 @@
                 </a:solidFill>
                 <a:latin typeface="Poppins"/>
               </a:rPr>
-              <a:t>50% on acceptance, 50% at the mid-December review. Stop or continue at that review. The line fees are the standard rate and sum to $27,500; the discount is applied to the total.</a:t>
+              <a:t>Monthly in advance. Minimum three months, then stop at any review with a month's notice.</a:t>
             </a:r>
           </a:p>
         </p:txBody>
@@ -17055,584 +16725,6 @@
                 </a:solidFill>
                 <a:latin typeface="Poppins"/>
               </a:rPr>
-              <a:t>OPTION B</a:t>
-            </a:r>
-          </a:p>
-        </p:txBody>
-      </p:sp>
-      <p:sp>
-        <p:nvSpPr>
-          <p:cNvPr id="3" name="TextBox 2"/>
-          <p:cNvSpPr txBox="1"/>
-          <p:nvPr/>
-        </p:nvSpPr>
-        <p:spPr>
-          <a:xfrm>
-            <a:off x="914400" y="1371600"/>
-            <a:ext cx="10362895" cy="640080"/>
-          </a:xfrm>
-          <a:prstGeom prst="rect">
-            <a:avLst/>
-          </a:prstGeom>
-          <a:noFill/>
-        </p:spPr>
-        <p:txBody>
-          <a:bodyPr wrap="square" lIns="0" rIns="0" tIns="0" bIns="0" anchor="t">
-            <a:spAutoFit/>
-          </a:bodyPr>
-          <a:lstStyle/>
-          <a:p>
-            <a:pPr algn="l">
-              <a:lnSpc>
-                <a:spcPct val="112000"/>
-              </a:lnSpc>
-            </a:pPr>
-            <a:r>
-              <a:rPr sz="2800" b="0">
-                <a:solidFill>
-                  <a:srgbClr val="111111"/>
-                </a:solidFill>
-                <a:latin typeface="Poppins"/>
-              </a:rPr>
-              <a:t>Twelve months.</a:t>
-            </a:r>
-          </a:p>
-        </p:txBody>
-      </p:sp>
-      <p:sp>
-        <p:nvSpPr>
-          <p:cNvPr id="4" name="TextBox 3"/>
-          <p:cNvSpPr txBox="1"/>
-          <p:nvPr/>
-        </p:nvSpPr>
-        <p:spPr>
-          <a:xfrm>
-            <a:off x="914400" y="2084831"/>
-            <a:ext cx="8778240" cy="548640"/>
-          </a:xfrm>
-          <a:prstGeom prst="rect">
-            <a:avLst/>
-          </a:prstGeom>
-          <a:noFill/>
-        </p:spPr>
-        <p:txBody>
-          <a:bodyPr wrap="square" lIns="0" rIns="0" tIns="0" bIns="0" anchor="t">
-            <a:spAutoFit/>
-          </a:bodyPr>
-          <a:lstStyle/>
-          <a:p>
-            <a:pPr algn="l">
-              <a:lnSpc>
-                <a:spcPct val="140000"/>
-              </a:lnSpc>
-            </a:pPr>
-            <a:r>
-              <a:rPr sz="1300" b="0">
-                <a:solidFill>
-                  <a:srgbClr val="666666"/>
-                </a:solidFill>
-                <a:latin typeface="Poppins"/>
-              </a:rPr>
-              <a:t>An active refill customer is worth about $2,400 a year. Option B pays for itself at thirteen additional refillers held for a year, and your own six-month target adds about 145.</a:t>
-            </a:r>
-          </a:p>
-        </p:txBody>
-      </p:sp>
-      <p:graphicFrame>
-        <p:nvGraphicFramePr>
-          <p:cNvPr id="5" name="Table 4"/>
-          <p:cNvGraphicFramePr>
-            <a:graphicFrameLocks noGrp="1"/>
-          </p:cNvGraphicFramePr>
-          <p:nvPr/>
-        </p:nvGraphicFramePr>
-        <p:xfrm>
-          <a:off x="914400" y="2880360"/>
-          <a:ext cx="10362894" cy="2177789"/>
-        </p:xfrm>
-        <a:graphic>
-          <a:graphicData uri="http://schemas.openxmlformats.org/drawingml/2006/table">
-            <a:tbl>
-              <a:tblPr firstRow="0" bandRow="0">
-                <a:tableStyleId>{2D5ABB26-0587-4C30-8999-92F81FD0307C}</a:tableStyleId>
-              </a:tblPr>
-              <a:tblGrid>
-                <a:gridCol w="7046768"/>
-                <a:gridCol w="3316126"/>
-              </a:tblGrid>
-              <a:tr h="274320">
-                <a:tc>
-                  <a:txBody>
-                    <a:bodyPr wrap="square"/>
-                    <a:lstStyle/>
-                    <a:p>
-                      <a:pPr>
-                        <a:lnSpc>
-                          <a:spcPct val="134000"/>
-                        </a:lnSpc>
-                      </a:pPr>
-                      <a:r>
-                        <a:rPr sz="900" b="0" spc="200">
-                          <a:solidFill>
-                            <a:srgbClr val="666666"/>
-                          </a:solidFill>
-                          <a:latin typeface="Poppins"/>
-                        </a:rPr>
-                        <a:t>LINE</a:t>
-                      </a:r>
-                    </a:p>
-                  </a:txBody>
-                  <a:tcPr marL="0" marR="128016" marT="36576" marB="54864" anchor="t">
-                    <a:lnB w="9525" cap="flat" cmpd="sng" algn="ctr">
-                      <a:solidFill>
-                        <a:srgbClr val="D4D2D0"/>
-                      </a:solidFill>
-                    </a:lnB>
-                    <a:lnT w="0" cap="flat" cmpd="sng" algn="ctr">
-                      <a:solidFill>
-                        <a:srgbClr val="FAF8F4"/>
-                      </a:solidFill>
-                    </a:lnT>
-                    <a:lnR w="0" cap="flat" cmpd="sng" algn="ctr">
-                      <a:solidFill>
-                        <a:srgbClr val="FAF8F4"/>
-                      </a:solidFill>
-                    </a:lnR>
-                    <a:lnL w="0" cap="flat" cmpd="sng" algn="ctr">
-                      <a:solidFill>
-                        <a:srgbClr val="FAF8F4"/>
-                      </a:solidFill>
-                    </a:lnL>
-                    <a:noFill/>
-                  </a:tcPr>
-                </a:tc>
-                <a:tc>
-                  <a:txBody>
-                    <a:bodyPr wrap="square"/>
-                    <a:lstStyle/>
-                    <a:p>
-                      <a:pPr>
-                        <a:lnSpc>
-                          <a:spcPct val="134000"/>
-                        </a:lnSpc>
-                      </a:pPr>
-                      <a:r>
-                        <a:rPr sz="900" b="0" spc="200">
-                          <a:solidFill>
-                            <a:srgbClr val="666666"/>
-                          </a:solidFill>
-                          <a:latin typeface="Poppins"/>
-                        </a:rPr>
-                        <a:t>FEE</a:t>
-                      </a:r>
-                    </a:p>
-                  </a:txBody>
-                  <a:tcPr marL="0" marR="128016" marT="36576" marB="54864" anchor="t">
-                    <a:lnB w="9525" cap="flat" cmpd="sng" algn="ctr">
-                      <a:solidFill>
-                        <a:srgbClr val="D4D2D0"/>
-                      </a:solidFill>
-                    </a:lnB>
-                    <a:lnT w="0" cap="flat" cmpd="sng" algn="ctr">
-                      <a:solidFill>
-                        <a:srgbClr val="FAF8F4"/>
-                      </a:solidFill>
-                    </a:lnT>
-                    <a:lnR w="0" cap="flat" cmpd="sng" algn="ctr">
-                      <a:solidFill>
-                        <a:srgbClr val="FAF8F4"/>
-                      </a:solidFill>
-                    </a:lnR>
-                    <a:lnL w="0" cap="flat" cmpd="sng" algn="ctr">
-                      <a:solidFill>
-                        <a:srgbClr val="FAF8F4"/>
-                      </a:solidFill>
-                    </a:lnL>
-                    <a:noFill/>
-                  </a:tcPr>
-                </a:tc>
-              </a:tr>
-              <a:tr h="329981">
-                <a:tc>
-                  <a:txBody>
-                    <a:bodyPr wrap="square"/>
-                    <a:lstStyle/>
-                    <a:p>
-                      <a:pPr>
-                        <a:lnSpc>
-                          <a:spcPct val="134000"/>
-                        </a:lnSpc>
-                      </a:pPr>
-                      <a:r>
-                        <a:rPr sz="1100" b="1">
-                          <a:solidFill>
-                            <a:srgbClr val="111111"/>
-                          </a:solidFill>
-                          <a:latin typeface="Poppins"/>
-                        </a:rPr>
-                        <a:t>Everything in Option A, delivered in the first three months</a:t>
-                      </a:r>
-                    </a:p>
-                  </a:txBody>
-                  <a:tcPr marL="0" marR="128016" marT="36576" marB="54864" anchor="t">
-                    <a:lnB w="9525" cap="flat" cmpd="sng" algn="ctr">
-                      <a:solidFill>
-                        <a:srgbClr val="D4D2D0"/>
-                      </a:solidFill>
-                    </a:lnB>
-                    <a:lnT w="0" cap="flat" cmpd="sng" algn="ctr">
-                      <a:solidFill>
-                        <a:srgbClr val="FAF8F4"/>
-                      </a:solidFill>
-                    </a:lnT>
-                    <a:lnR w="0" cap="flat" cmpd="sng" algn="ctr">
-                      <a:solidFill>
-                        <a:srgbClr val="FAF8F4"/>
-                      </a:solidFill>
-                    </a:lnR>
-                    <a:lnL w="0" cap="flat" cmpd="sng" algn="ctr">
-                      <a:solidFill>
-                        <a:srgbClr val="FAF8F4"/>
-                      </a:solidFill>
-                    </a:lnL>
-                    <a:noFill/>
-                  </a:tcPr>
-                </a:tc>
-                <a:tc>
-                  <a:txBody>
-                    <a:bodyPr wrap="square"/>
-                    <a:lstStyle/>
-                    <a:p>
-                      <a:pPr>
-                        <a:lnSpc>
-                          <a:spcPct val="134000"/>
-                        </a:lnSpc>
-                      </a:pPr>
-                      <a:r>
-                        <a:rPr sz="1100" b="0">
-                          <a:solidFill>
-                            <a:srgbClr val="111111"/>
-                          </a:solidFill>
-                          <a:latin typeface="Poppins"/>
-                        </a:rPr>
-                        <a:t>Included</a:t>
-                      </a:r>
-                    </a:p>
-                  </a:txBody>
-                  <a:tcPr marL="0" marR="128016" marT="36576" marB="54864" anchor="t">
-                    <a:lnB w="9525" cap="flat" cmpd="sng" algn="ctr">
-                      <a:solidFill>
-                        <a:srgbClr val="D4D2D0"/>
-                      </a:solidFill>
-                    </a:lnB>
-                    <a:lnT w="0" cap="flat" cmpd="sng" algn="ctr">
-                      <a:solidFill>
-                        <a:srgbClr val="FAF8F4"/>
-                      </a:solidFill>
-                    </a:lnT>
-                    <a:lnR w="0" cap="flat" cmpd="sng" algn="ctr">
-                      <a:solidFill>
-                        <a:srgbClr val="FAF8F4"/>
-                      </a:solidFill>
-                    </a:lnR>
-                    <a:lnL w="0" cap="flat" cmpd="sng" algn="ctr">
-                      <a:solidFill>
-                        <a:srgbClr val="FAF8F4"/>
-                      </a:solidFill>
-                    </a:lnL>
-                    <a:noFill/>
-                  </a:tcPr>
-                </a:tc>
-              </a:tr>
-              <a:tr h="786744">
-                <a:tc>
-                  <a:txBody>
-                    <a:bodyPr wrap="square"/>
-                    <a:lstStyle/>
-                    <a:p>
-                      <a:pPr>
-                        <a:lnSpc>
-                          <a:spcPct val="134000"/>
-                        </a:lnSpc>
-                      </a:pPr>
-                      <a:r>
-                        <a:rPr sz="1100" b="1">
-                          <a:solidFill>
-                            <a:srgbClr val="111111"/>
-                          </a:solidFill>
-                          <a:latin typeface="Poppins"/>
-                        </a:rPr>
-                        <a:t>Months four to twelve. Weddings and functions, membership redesign, the designing-for-her brief, range and hero marketing, club and venue offers, the events calendar, SEM, outreach, content and artwork continuing, the reviews at March and September</a:t>
-                      </a:r>
-                    </a:p>
-                  </a:txBody>
-                  <a:tcPr marL="0" marR="128016" marT="36576" marB="54864" anchor="t">
-                    <a:lnB w="9525" cap="flat" cmpd="sng" algn="ctr">
-                      <a:solidFill>
-                        <a:srgbClr val="D4D2D0"/>
-                      </a:solidFill>
-                    </a:lnB>
-                    <a:lnT w="0" cap="flat" cmpd="sng" algn="ctr">
-                      <a:solidFill>
-                        <a:srgbClr val="FAF8F4"/>
-                      </a:solidFill>
-                    </a:lnT>
-                    <a:lnR w="0" cap="flat" cmpd="sng" algn="ctr">
-                      <a:solidFill>
-                        <a:srgbClr val="FAF8F4"/>
-                      </a:solidFill>
-                    </a:lnR>
-                    <a:lnL w="0" cap="flat" cmpd="sng" algn="ctr">
-                      <a:solidFill>
-                        <a:srgbClr val="FAF8F4"/>
-                      </a:solidFill>
-                    </a:lnL>
-                    <a:noFill/>
-                  </a:tcPr>
-                </a:tc>
-                <a:tc>
-                  <a:txBody>
-                    <a:bodyPr wrap="square"/>
-                    <a:lstStyle/>
-                    <a:p>
-                      <a:pPr>
-                        <a:lnSpc>
-                          <a:spcPct val="134000"/>
-                        </a:lnSpc>
-                      </a:pPr>
-                      <a:r>
-                        <a:rPr sz="1100" b="0">
-                          <a:solidFill>
-                            <a:srgbClr val="111111"/>
-                          </a:solidFill>
-                          <a:latin typeface="Poppins"/>
-                        </a:rPr>
-                        <a:t>Included</a:t>
-                      </a:r>
-                    </a:p>
-                  </a:txBody>
-                  <a:tcPr marL="0" marR="128016" marT="36576" marB="54864" anchor="t">
-                    <a:lnB w="9525" cap="flat" cmpd="sng" algn="ctr">
-                      <a:solidFill>
-                        <a:srgbClr val="D4D2D0"/>
-                      </a:solidFill>
-                    </a:lnB>
-                    <a:lnT w="0" cap="flat" cmpd="sng" algn="ctr">
-                      <a:solidFill>
-                        <a:srgbClr val="FAF8F4"/>
-                      </a:solidFill>
-                    </a:lnT>
-                    <a:lnR w="0" cap="flat" cmpd="sng" algn="ctr">
-                      <a:solidFill>
-                        <a:srgbClr val="FAF8F4"/>
-                      </a:solidFill>
-                    </a:lnR>
-                    <a:lnL w="0" cap="flat" cmpd="sng" algn="ctr">
-                      <a:solidFill>
-                        <a:srgbClr val="FAF8F4"/>
-                      </a:solidFill>
-                    </a:lnL>
-                    <a:noFill/>
-                  </a:tcPr>
-                </a:tc>
-              </a:tr>
-              <a:tr h="786744">
-                <a:tc>
-                  <a:txBody>
-                    <a:bodyPr wrap="square"/>
-                    <a:lstStyle/>
-                    <a:p>
-                      <a:pPr>
-                        <a:lnSpc>
-                          <a:spcPct val="134000"/>
-                        </a:lnSpc>
-                      </a:pPr>
-                      <a:r>
-                        <a:rPr sz="1100" b="1">
-                          <a:solidFill>
-                            <a:srgbClr val="111111"/>
-                          </a:solidFill>
-                          <a:latin typeface="Poppins"/>
-                        </a:rPr>
-                        <a:t>Option B total</a:t>
-                      </a:r>
-                    </a:p>
-                  </a:txBody>
-                  <a:tcPr marL="0" marR="128016" marT="36576" marB="54864" anchor="t">
-                    <a:lnB w="9525" cap="flat" cmpd="sng" algn="ctr">
-                      <a:solidFill>
-                        <a:srgbClr val="D4D2D0"/>
-                      </a:solidFill>
-                    </a:lnB>
-                    <a:lnT w="0" cap="flat" cmpd="sng" algn="ctr">
-                      <a:solidFill>
-                        <a:srgbClr val="FAF8F4"/>
-                      </a:solidFill>
-                    </a:lnT>
-                    <a:lnR w="0" cap="flat" cmpd="sng" algn="ctr">
-                      <a:solidFill>
-                        <a:srgbClr val="FAF8F4"/>
-                      </a:solidFill>
-                    </a:lnR>
-                    <a:lnL w="0" cap="flat" cmpd="sng" algn="ctr">
-                      <a:solidFill>
-                        <a:srgbClr val="FAF8F4"/>
-                      </a:solidFill>
-                    </a:lnL>
-                    <a:noFill/>
-                  </a:tcPr>
-                </a:tc>
-                <a:tc>
-                  <a:txBody>
-                    <a:bodyPr wrap="square"/>
-                    <a:lstStyle/>
-                    <a:p>
-                      <a:pPr>
-                        <a:lnSpc>
-                          <a:spcPct val="134000"/>
-                        </a:lnSpc>
-                      </a:pPr>
-                      <a:r>
-                        <a:rPr sz="1100" b="0">
-                          <a:solidFill>
-                            <a:srgbClr val="111111"/>
-                          </a:solidFill>
-                          <a:latin typeface="Poppins"/>
-                        </a:rPr>
-                        <a:t>$2,500 a month + GST
-normally $5,500
-$30,000 over twelve months</a:t>
-                      </a:r>
-                    </a:p>
-                  </a:txBody>
-                  <a:tcPr marL="0" marR="128016" marT="36576" marB="54864" anchor="t">
-                    <a:lnB w="9525" cap="flat" cmpd="sng" algn="ctr">
-                      <a:solidFill>
-                        <a:srgbClr val="D4D2D0"/>
-                      </a:solidFill>
-                    </a:lnB>
-                    <a:lnT w="0" cap="flat" cmpd="sng" algn="ctr">
-                      <a:solidFill>
-                        <a:srgbClr val="FAF8F4"/>
-                      </a:solidFill>
-                    </a:lnT>
-                    <a:lnR w="0" cap="flat" cmpd="sng" algn="ctr">
-                      <a:solidFill>
-                        <a:srgbClr val="FAF8F4"/>
-                      </a:solidFill>
-                    </a:lnR>
-                    <a:lnL w="0" cap="flat" cmpd="sng" algn="ctr">
-                      <a:solidFill>
-                        <a:srgbClr val="FAF8F4"/>
-                      </a:solidFill>
-                    </a:lnL>
-                    <a:noFill/>
-                  </a:tcPr>
-                </a:tc>
-              </a:tr>
-            </a:tbl>
-          </a:graphicData>
-        </a:graphic>
-      </p:graphicFrame>
-      <p:sp>
-        <p:nvSpPr>
-          <p:cNvPr id="6" name="TextBox 5"/>
-          <p:cNvSpPr txBox="1"/>
-          <p:nvPr/>
-        </p:nvSpPr>
-        <p:spPr>
-          <a:xfrm>
-            <a:off x="914400" y="6291072"/>
-            <a:ext cx="10362895" cy="274320"/>
-          </a:xfrm>
-          <a:prstGeom prst="rect">
-            <a:avLst/>
-          </a:prstGeom>
-          <a:noFill/>
-        </p:spPr>
-        <p:txBody>
-          <a:bodyPr wrap="square" lIns="0" rIns="0" tIns="0" bIns="0" anchor="t">
-            <a:spAutoFit/>
-          </a:bodyPr>
-          <a:lstStyle/>
-          <a:p>
-            <a:pPr algn="l">
-              <a:lnSpc>
-                <a:spcPct val="100000"/>
-              </a:lnSpc>
-            </a:pPr>
-            <a:r>
-              <a:rPr sz="900" b="0">
-                <a:solidFill>
-                  <a:srgbClr val="666666"/>
-                </a:solidFill>
-                <a:latin typeface="Poppins"/>
-              </a:rPr>
-              <a:t>Monthly in advance. Minimum three months, then stop at any review with a month's notice. Rates behind every figure: Client Director $1,500 a day, Client Manager $1,250 a day.</a:t>
-            </a:r>
-          </a:p>
-        </p:txBody>
-      </p:sp>
-    </p:spTree>
-  </p:cSld>
-  <p:clrMapOvr>
-    <a:masterClrMapping/>
-  </p:clrMapOvr>
-</p:sld>
-</file>
-
-<file path=ppt/slides/slide29.xml><?xml version="1.0" encoding="utf-8"?>
-<p:sld xmlns:a="http://schemas.openxmlformats.org/drawingml/2006/main" xmlns:p="http://schemas.openxmlformats.org/presentationml/2006/main" xmlns:r="http://schemas.openxmlformats.org/officeDocument/2006/relationships">
-  <p:cSld>
-    <p:bg>
-      <p:bgPr>
-        <a:solidFill>
-          <a:srgbClr val="FAF8F4"/>
-        </a:solidFill>
-        <a:effectLst/>
-      </p:bgPr>
-    </p:bg>
-    <p:spTree>
-      <p:nvGrpSpPr>
-        <p:cNvPr id="1" name=""/>
-        <p:cNvGrpSpPr/>
-        <p:nvPr/>
-      </p:nvGrpSpPr>
-      <p:grpSpPr/>
-      <p:sp>
-        <p:nvSpPr>
-          <p:cNvPr id="2" name="TextBox 1"/>
-          <p:cNvSpPr txBox="1"/>
-          <p:nvPr/>
-        </p:nvSpPr>
-        <p:spPr>
-          <a:xfrm>
-            <a:off x="914400" y="914400"/>
-            <a:ext cx="10362895" cy="274320"/>
-          </a:xfrm>
-          <a:prstGeom prst="rect">
-            <a:avLst/>
-          </a:prstGeom>
-          <a:noFill/>
-        </p:spPr>
-        <p:txBody>
-          <a:bodyPr wrap="square" lIns="0" rIns="0" tIns="0" bIns="0" anchor="t">
-            <a:spAutoFit/>
-          </a:bodyPr>
-          <a:lstStyle/>
-          <a:p>
-            <a:pPr algn="l">
-              <a:lnSpc>
-                <a:spcPct val="100000"/>
-              </a:lnSpc>
-            </a:pPr>
-            <a:r>
-              <a:rPr sz="900" b="0" spc="200">
-                <a:solidFill>
-                  <a:srgbClr val="111111"/>
-                </a:solidFill>
-                <a:latin typeface="Poppins"/>
-              </a:rPr>
               <a:t>NOT INCLUDED</a:t>
             </a:r>
           </a:p>
@@ -18210,172 +17302,7 @@
 </p:sld>
 </file>
 
-<file path=ppt/slides/slide3.xml><?xml version="1.0" encoding="utf-8"?>
-<p:sld xmlns:a="http://schemas.openxmlformats.org/drawingml/2006/main" xmlns:p="http://schemas.openxmlformats.org/presentationml/2006/main" xmlns:r="http://schemas.openxmlformats.org/officeDocument/2006/relationships">
-  <p:cSld>
-    <p:bg>
-      <p:bgPr>
-        <a:solidFill>
-          <a:srgbClr val="FAF8F4"/>
-        </a:solidFill>
-        <a:effectLst/>
-      </p:bgPr>
-    </p:bg>
-    <p:spTree>
-      <p:nvGrpSpPr>
-        <p:cNvPr id="1" name=""/>
-        <p:cNvGrpSpPr/>
-        <p:nvPr/>
-      </p:nvGrpSpPr>
-      <p:grpSpPr/>
-      <p:sp>
-        <p:nvSpPr>
-          <p:cNvPr id="2" name="TextBox 1"/>
-          <p:cNvSpPr txBox="1"/>
-          <p:nvPr/>
-        </p:nvSpPr>
-        <p:spPr>
-          <a:xfrm>
-            <a:off x="914400" y="914400"/>
-            <a:ext cx="10362895" cy="274320"/>
-          </a:xfrm>
-          <a:prstGeom prst="rect">
-            <a:avLst/>
-          </a:prstGeom>
-          <a:noFill/>
-        </p:spPr>
-        <p:txBody>
-          <a:bodyPr wrap="square" lIns="0" rIns="0" tIns="0" bIns="0" anchor="t">
-            <a:spAutoFit/>
-          </a:bodyPr>
-          <a:lstStyle/>
-          <a:p>
-            <a:pPr algn="l">
-              <a:lnSpc>
-                <a:spcPct val="100000"/>
-              </a:lnSpc>
-            </a:pPr>
-            <a:r>
-              <a:rPr sz="900" b="0" spc="200">
-                <a:solidFill>
-                  <a:srgbClr val="111111"/>
-                </a:solidFill>
-                <a:latin typeface="Poppins"/>
-              </a:rPr>
-              <a:t>THE DIAGNOSIS</a:t>
-            </a:r>
-          </a:p>
-        </p:txBody>
-      </p:sp>
-      <p:sp>
-        <p:nvSpPr>
-          <p:cNvPr id="3" name="TextBox 2"/>
-          <p:cNvSpPr txBox="1"/>
-          <p:nvPr/>
-        </p:nvSpPr>
-        <p:spPr>
-          <a:xfrm>
-            <a:off x="914400" y="1691640"/>
-            <a:ext cx="10362895" cy="2103120"/>
-          </a:xfrm>
-          <a:prstGeom prst="rect">
-            <a:avLst/>
-          </a:prstGeom>
-          <a:noFill/>
-        </p:spPr>
-        <p:txBody>
-          <a:bodyPr wrap="square" lIns="0" rIns="0" tIns="0" bIns="0" anchor="t">
-            <a:spAutoFit/>
-          </a:bodyPr>
-          <a:lstStyle/>
-          <a:p>
-            <a:pPr algn="l">
-              <a:lnSpc>
-                <a:spcPct val="112000"/>
-              </a:lnSpc>
-            </a:pPr>
-            <a:r>
-              <a:rPr sz="4200" b="0">
-                <a:solidFill>
-                  <a:srgbClr val="111111"/>
-                </a:solidFill>
-                <a:latin typeface="Poppins"/>
-              </a:rPr>
-              <a:t>You do not have a strategy problem. You have an execution problem.</a:t>
-            </a:r>
-          </a:p>
-        </p:txBody>
-      </p:sp>
-      <p:sp>
-        <p:nvSpPr>
-          <p:cNvPr id="4" name="TextBox 3"/>
-          <p:cNvSpPr txBox="1"/>
-          <p:nvPr/>
-        </p:nvSpPr>
-        <p:spPr>
-          <a:xfrm>
-            <a:off x="914400" y="4114800"/>
-            <a:ext cx="7863840" cy="2011680"/>
-          </a:xfrm>
-          <a:prstGeom prst="rect">
-            <a:avLst/>
-          </a:prstGeom>
-          <a:noFill/>
-        </p:spPr>
-        <p:txBody>
-          <a:bodyPr wrap="square" lIns="0" rIns="0" tIns="0" bIns="0" anchor="t">
-            <a:spAutoFit/>
-          </a:bodyPr>
-          <a:lstStyle/>
-          <a:p>
-            <a:pPr algn="l">
-              <a:lnSpc>
-                <a:spcPct val="150000"/>
-              </a:lnSpc>
-              <a:spcAft>
-                <a:spcPts val="800"/>
-              </a:spcAft>
-            </a:pPr>
-            <a:r>
-              <a:rPr sz="1400" b="0">
-                <a:solidFill>
-                  <a:srgbClr val="111111"/>
-                </a:solidFill>
-                <a:latin typeface="Poppins"/>
-              </a:rPr>
-              <a:t>Three weeks on, that still holds. The refill business reached 96 to 113 active customers without a marketing push. Meta ads are working and there is nowhere to send the traffic. The website, POS and CRM do not talk to each other, so every campaign underperforms before it launches.</a:t>
-            </a:r>
-          </a:p>
-          <a:p>
-            <a:pPr algn="l">
-              <a:lnSpc>
-                <a:spcPct val="150000"/>
-              </a:lnSpc>
-              <a:spcAft>
-                <a:spcPts val="800"/>
-              </a:spcAft>
-            </a:pPr>
-            <a:r>
-              <a:rPr sz="1400" b="0">
-                <a:solidFill>
-                  <a:srgbClr val="111111"/>
-                </a:solidFill>
-                <a:latin typeface="Poppins"/>
-              </a:rPr>
-              <a:t>The constraint is hands, not ideas. We said that in August. Nothing since has changed it.</a:t>
-            </a:r>
-          </a:p>
-        </p:txBody>
-      </p:sp>
-    </p:spTree>
-  </p:cSld>
-  <p:clrMapOvr>
-    <a:masterClrMapping/>
-  </p:clrMapOvr>
-</p:sld>
-</file>
-
-<file path=ppt/slides/slide30.xml><?xml version="1.0" encoding="utf-8"?>
+<file path=ppt/slides/slide29.xml><?xml version="1.0" encoding="utf-8"?>
 <p:sld xmlns:a="http://schemas.openxmlformats.org/drawingml/2006/main" xmlns:p="http://schemas.openxmlformats.org/presentationml/2006/main" xmlns:r="http://schemas.openxmlformats.org/officeDocument/2006/relationships">
   <p:cSld>
     <p:bg>
@@ -18505,7 +17432,7 @@
                 </a:solidFill>
                 <a:latin typeface="Poppins"/>
               </a:rPr>
-              <a:t>We propose the week of 28 September, which puts Oktoberfest on 1 October inside the first week and closes the 30-day sprint before the end of October.</a:t>
+              <a:t>We propose the week of 12 October, which closes the 30-day sprint before the middle of November.</a:t>
             </a:r>
           </a:p>
         </p:txBody>
@@ -18943,7 +17870,172 @@
 </p:sld>
 </file>
 
-<file path=ppt/slides/slide31.xml><?xml version="1.0" encoding="utf-8"?>
+<file path=ppt/slides/slide3.xml><?xml version="1.0" encoding="utf-8"?>
+<p:sld xmlns:a="http://schemas.openxmlformats.org/drawingml/2006/main" xmlns:p="http://schemas.openxmlformats.org/presentationml/2006/main" xmlns:r="http://schemas.openxmlformats.org/officeDocument/2006/relationships">
+  <p:cSld>
+    <p:bg>
+      <p:bgPr>
+        <a:solidFill>
+          <a:srgbClr val="FAF8F4"/>
+        </a:solidFill>
+        <a:effectLst/>
+      </p:bgPr>
+    </p:bg>
+    <p:spTree>
+      <p:nvGrpSpPr>
+        <p:cNvPr id="1" name=""/>
+        <p:cNvGrpSpPr/>
+        <p:nvPr/>
+      </p:nvGrpSpPr>
+      <p:grpSpPr/>
+      <p:sp>
+        <p:nvSpPr>
+          <p:cNvPr id="2" name="TextBox 1"/>
+          <p:cNvSpPr txBox="1"/>
+          <p:nvPr/>
+        </p:nvSpPr>
+        <p:spPr>
+          <a:xfrm>
+            <a:off x="914400" y="914400"/>
+            <a:ext cx="10362895" cy="274320"/>
+          </a:xfrm>
+          <a:prstGeom prst="rect">
+            <a:avLst/>
+          </a:prstGeom>
+          <a:noFill/>
+        </p:spPr>
+        <p:txBody>
+          <a:bodyPr wrap="square" lIns="0" rIns="0" tIns="0" bIns="0" anchor="t">
+            <a:spAutoFit/>
+          </a:bodyPr>
+          <a:lstStyle/>
+          <a:p>
+            <a:pPr algn="l">
+              <a:lnSpc>
+                <a:spcPct val="100000"/>
+              </a:lnSpc>
+            </a:pPr>
+            <a:r>
+              <a:rPr sz="900" b="0" spc="200">
+                <a:solidFill>
+                  <a:srgbClr val="111111"/>
+                </a:solidFill>
+                <a:latin typeface="Poppins"/>
+              </a:rPr>
+              <a:t>THE DIAGNOSIS</a:t>
+            </a:r>
+          </a:p>
+        </p:txBody>
+      </p:sp>
+      <p:sp>
+        <p:nvSpPr>
+          <p:cNvPr id="3" name="TextBox 2"/>
+          <p:cNvSpPr txBox="1"/>
+          <p:nvPr/>
+        </p:nvSpPr>
+        <p:spPr>
+          <a:xfrm>
+            <a:off x="914400" y="1691640"/>
+            <a:ext cx="10362895" cy="2103120"/>
+          </a:xfrm>
+          <a:prstGeom prst="rect">
+            <a:avLst/>
+          </a:prstGeom>
+          <a:noFill/>
+        </p:spPr>
+        <p:txBody>
+          <a:bodyPr wrap="square" lIns="0" rIns="0" tIns="0" bIns="0" anchor="t">
+            <a:spAutoFit/>
+          </a:bodyPr>
+          <a:lstStyle/>
+          <a:p>
+            <a:pPr algn="l">
+              <a:lnSpc>
+                <a:spcPct val="112000"/>
+              </a:lnSpc>
+            </a:pPr>
+            <a:r>
+              <a:rPr sz="4200" b="0">
+                <a:solidFill>
+                  <a:srgbClr val="111111"/>
+                </a:solidFill>
+                <a:latin typeface="Poppins"/>
+              </a:rPr>
+              <a:t>You do not have a strategy problem. You have an execution problem.</a:t>
+            </a:r>
+          </a:p>
+        </p:txBody>
+      </p:sp>
+      <p:sp>
+        <p:nvSpPr>
+          <p:cNvPr id="4" name="TextBox 3"/>
+          <p:cNvSpPr txBox="1"/>
+          <p:nvPr/>
+        </p:nvSpPr>
+        <p:spPr>
+          <a:xfrm>
+            <a:off x="914400" y="4114800"/>
+            <a:ext cx="7863840" cy="2011680"/>
+          </a:xfrm>
+          <a:prstGeom prst="rect">
+            <a:avLst/>
+          </a:prstGeom>
+          <a:noFill/>
+        </p:spPr>
+        <p:txBody>
+          <a:bodyPr wrap="square" lIns="0" rIns="0" tIns="0" bIns="0" anchor="t">
+            <a:spAutoFit/>
+          </a:bodyPr>
+          <a:lstStyle/>
+          <a:p>
+            <a:pPr algn="l">
+              <a:lnSpc>
+                <a:spcPct val="150000"/>
+              </a:lnSpc>
+              <a:spcAft>
+                <a:spcPts val="800"/>
+              </a:spcAft>
+            </a:pPr>
+            <a:r>
+              <a:rPr sz="1400" b="0">
+                <a:solidFill>
+                  <a:srgbClr val="111111"/>
+                </a:solidFill>
+                <a:latin typeface="Poppins"/>
+              </a:rPr>
+              <a:t>Three weeks on, that still holds. The refill business reached 96 to 113 active customers without a marketing push. Meta ads are working and there is nowhere to send the traffic. The website, POS and CRM do not talk to each other, so every campaign underperforms before it launches.</a:t>
+            </a:r>
+          </a:p>
+          <a:p>
+            <a:pPr algn="l">
+              <a:lnSpc>
+                <a:spcPct val="150000"/>
+              </a:lnSpc>
+              <a:spcAft>
+                <a:spcPts val="800"/>
+              </a:spcAft>
+            </a:pPr>
+            <a:r>
+              <a:rPr sz="1400" b="0">
+                <a:solidFill>
+                  <a:srgbClr val="111111"/>
+                </a:solidFill>
+                <a:latin typeface="Poppins"/>
+              </a:rPr>
+              <a:t>The constraint is hands, not ideas. We said that in August. Nothing since has changed it.</a:t>
+            </a:r>
+          </a:p>
+        </p:txBody>
+      </p:sp>
+    </p:spTree>
+  </p:cSld>
+  <p:clrMapOvr>
+    <a:masterClrMapping/>
+  </p:clrMapOvr>
+</p:sld>
+</file>
+
+<file path=ppt/slides/slide30.xml><?xml version="1.0" encoding="utf-8"?>
 <p:sld xmlns:a="http://schemas.openxmlformats.org/drawingml/2006/main" xmlns:p="http://schemas.openxmlformats.org/presentationml/2006/main" xmlns:r="http://schemas.openxmlformats.org/officeDocument/2006/relationships">
   <p:cSld>
     <p:bg>

--- a/00 Admin/04 Commercial + SOW/JP_TapThat_ProposalDeck_v03.pptx
+++ b/00 Admin/04 Commercial + SOW/JP_TapThat_ProposalDeck_v03.pptx
@@ -15571,7 +15571,7 @@
         </p:nvGraphicFramePr>
         <p:xfrm>
           <a:off x="914400" y="2880360"/>
-          <a:ext cx="10362894" cy="2507772"/>
+          <a:ext cx="10362894" cy="832683"/>
         </p:xfrm>
         <a:graphic>
           <a:graphicData uri="http://schemas.openxmlformats.org/drawingml/2006/table">
@@ -15647,282 +15647,6 @@
                           <a:latin typeface="Poppins"/>
                         </a:rPr>
                         <a:t>FEE</a:t>
-                      </a:r>
-                    </a:p>
-                  </a:txBody>
-                  <a:tcPr marL="0" marR="128016" marT="36576" marB="54864" anchor="t">
-                    <a:lnB w="9525" cap="flat" cmpd="sng" algn="ctr">
-                      <a:solidFill>
-                        <a:srgbClr val="D4D2D0"/>
-                      </a:solidFill>
-                    </a:lnB>
-                    <a:lnT w="0" cap="flat" cmpd="sng" algn="ctr">
-                      <a:solidFill>
-                        <a:srgbClr val="FAF8F4"/>
-                      </a:solidFill>
-                    </a:lnT>
-                    <a:lnR w="0" cap="flat" cmpd="sng" algn="ctr">
-                      <a:solidFill>
-                        <a:srgbClr val="FAF8F4"/>
-                      </a:solidFill>
-                    </a:lnR>
-                    <a:lnL w="0" cap="flat" cmpd="sng" algn="ctr">
-                      <a:solidFill>
-                        <a:srgbClr val="FAF8F4"/>
-                      </a:solidFill>
-                    </a:lnL>
-                    <a:noFill/>
-                  </a:tcPr>
-                </a:tc>
-              </a:tr>
-              <a:tr h="558363">
-                <a:tc>
-                  <a:txBody>
-                    <a:bodyPr wrap="square"/>
-                    <a:lstStyle/>
-                    <a:p>
-                      <a:pPr>
-                        <a:lnSpc>
-                          <a:spcPct val="134000"/>
-                        </a:lnSpc>
-                      </a:pPr>
-                      <a:r>
-                        <a:rPr sz="1100" b="1">
-                          <a:solidFill>
-                            <a:srgbClr val="111111"/>
-                          </a:solidFill>
-                          <a:latin typeface="Poppins"/>
-                        </a:rPr>
-                        <a:t>Foundation builds. Website rebuild with the buy path and proof pages, SEM set-up, trigger-based CRM with segments, three campaign landing pages</a:t>
-                      </a:r>
-                    </a:p>
-                  </a:txBody>
-                  <a:tcPr marL="0" marR="128016" marT="36576" marB="54864" anchor="t">
-                    <a:lnB w="9525" cap="flat" cmpd="sng" algn="ctr">
-                      <a:solidFill>
-                        <a:srgbClr val="D4D2D0"/>
-                      </a:solidFill>
-                    </a:lnB>
-                    <a:lnT w="0" cap="flat" cmpd="sng" algn="ctr">
-                      <a:solidFill>
-                        <a:srgbClr val="FAF8F4"/>
-                      </a:solidFill>
-                    </a:lnT>
-                    <a:lnR w="0" cap="flat" cmpd="sng" algn="ctr">
-                      <a:solidFill>
-                        <a:srgbClr val="FAF8F4"/>
-                      </a:solidFill>
-                    </a:lnR>
-                    <a:lnL w="0" cap="flat" cmpd="sng" algn="ctr">
-                      <a:solidFill>
-                        <a:srgbClr val="FAF8F4"/>
-                      </a:solidFill>
-                    </a:lnL>
-                    <a:noFill/>
-                  </a:tcPr>
-                </a:tc>
-                <a:tc>
-                  <a:txBody>
-                    <a:bodyPr wrap="square"/>
-                    <a:lstStyle/>
-                    <a:p>
-                      <a:pPr>
-                        <a:lnSpc>
-                          <a:spcPct val="134000"/>
-                        </a:lnSpc>
-                      </a:pPr>
-                      <a:r>
-                        <a:rPr sz="1100" b="0">
-                          <a:solidFill>
-                            <a:srgbClr val="111111"/>
-                          </a:solidFill>
-                          <a:latin typeface="Poppins"/>
-                        </a:rPr>
-                        <a:t>$9,250</a:t>
-                      </a:r>
-                    </a:p>
-                  </a:txBody>
-                  <a:tcPr marL="0" marR="128016" marT="36576" marB="54864" anchor="t">
-                    <a:lnB w="9525" cap="flat" cmpd="sng" algn="ctr">
-                      <a:solidFill>
-                        <a:srgbClr val="D4D2D0"/>
-                      </a:solidFill>
-                    </a:lnB>
-                    <a:lnT w="0" cap="flat" cmpd="sng" algn="ctr">
-                      <a:solidFill>
-                        <a:srgbClr val="FAF8F4"/>
-                      </a:solidFill>
-                    </a:lnT>
-                    <a:lnR w="0" cap="flat" cmpd="sng" algn="ctr">
-                      <a:solidFill>
-                        <a:srgbClr val="FAF8F4"/>
-                      </a:solidFill>
-                    </a:lnR>
-                    <a:lnL w="0" cap="flat" cmpd="sng" algn="ctr">
-                      <a:solidFill>
-                        <a:srgbClr val="FAF8F4"/>
-                      </a:solidFill>
-                    </a:lnL>
-                    <a:noFill/>
-                  </a:tcPr>
-                </a:tc>
-              </a:tr>
-              <a:tr h="558363">
-                <a:tc>
-                  <a:txBody>
-                    <a:bodyPr wrap="square"/>
-                    <a:lstStyle/>
-                    <a:p>
-                      <a:pPr>
-                        <a:lnSpc>
-                          <a:spcPct val="134000"/>
-                        </a:lnSpc>
-                      </a:pPr>
-                      <a:r>
-                        <a:rPr sz="1100" b="1">
-                          <a:solidFill>
-                            <a:srgbClr val="111111"/>
-                          </a:solidFill>
-                          <a:latin typeface="Poppins"/>
-                        </a:rPr>
-                        <a:t>Program design. Switcher offer and partner approach, referral program, wholesale structure and hire brief, key messaging and the customer journey, the competition campaign</a:t>
-                      </a:r>
-                    </a:p>
-                  </a:txBody>
-                  <a:tcPr marL="0" marR="128016" marT="36576" marB="54864" anchor="t">
-                    <a:lnB w="9525" cap="flat" cmpd="sng" algn="ctr">
-                      <a:solidFill>
-                        <a:srgbClr val="D4D2D0"/>
-                      </a:solidFill>
-                    </a:lnB>
-                    <a:lnT w="0" cap="flat" cmpd="sng" algn="ctr">
-                      <a:solidFill>
-                        <a:srgbClr val="FAF8F4"/>
-                      </a:solidFill>
-                    </a:lnT>
-                    <a:lnR w="0" cap="flat" cmpd="sng" algn="ctr">
-                      <a:solidFill>
-                        <a:srgbClr val="FAF8F4"/>
-                      </a:solidFill>
-                    </a:lnR>
-                    <a:lnL w="0" cap="flat" cmpd="sng" algn="ctr">
-                      <a:solidFill>
-                        <a:srgbClr val="FAF8F4"/>
-                      </a:solidFill>
-                    </a:lnL>
-                    <a:noFill/>
-                  </a:tcPr>
-                </a:tc>
-                <a:tc>
-                  <a:txBody>
-                    <a:bodyPr wrap="square"/>
-                    <a:lstStyle/>
-                    <a:p>
-                      <a:pPr>
-                        <a:lnSpc>
-                          <a:spcPct val="134000"/>
-                        </a:lnSpc>
-                      </a:pPr>
-                      <a:r>
-                        <a:rPr sz="1100" b="0">
-                          <a:solidFill>
-                            <a:srgbClr val="111111"/>
-                          </a:solidFill>
-                          <a:latin typeface="Poppins"/>
-                        </a:rPr>
-                        <a:t>$8,500</a:t>
-                      </a:r>
-                    </a:p>
-                  </a:txBody>
-                  <a:tcPr marL="0" marR="128016" marT="36576" marB="54864" anchor="t">
-                    <a:lnB w="9525" cap="flat" cmpd="sng" algn="ctr">
-                      <a:solidFill>
-                        <a:srgbClr val="D4D2D0"/>
-                      </a:solidFill>
-                    </a:lnB>
-                    <a:lnT w="0" cap="flat" cmpd="sng" algn="ctr">
-                      <a:solidFill>
-                        <a:srgbClr val="FAF8F4"/>
-                      </a:solidFill>
-                    </a:lnT>
-                    <a:lnR w="0" cap="flat" cmpd="sng" algn="ctr">
-                      <a:solidFill>
-                        <a:srgbClr val="FAF8F4"/>
-                      </a:solidFill>
-                    </a:lnR>
-                    <a:lnL w="0" cap="flat" cmpd="sng" algn="ctr">
-                      <a:solidFill>
-                        <a:srgbClr val="FAF8F4"/>
-                      </a:solidFill>
-                    </a:lnL>
-                    <a:noFill/>
-                  </a:tcPr>
-                </a:tc>
-              </a:tr>
-              <a:tr h="558363">
-                <a:tc>
-                  <a:txBody>
-                    <a:bodyPr wrap="square"/>
-                    <a:lstStyle/>
-                    <a:p>
-                      <a:pPr>
-                        <a:lnSpc>
-                          <a:spcPct val="134000"/>
-                        </a:lnSpc>
-                      </a:pPr>
-                      <a:r>
-                        <a:rPr sz="1100" b="1">
-                          <a:solidFill>
-                            <a:srgbClr val="111111"/>
-                          </a:solidFill>
-                          <a:latin typeface="Poppins"/>
-                        </a:rPr>
-                        <a:t>Running the sprint, three months. SEM and Meta management, JVP and wholesale outreach, content and artwork, the rhythm and the report</a:t>
-                      </a:r>
-                    </a:p>
-                  </a:txBody>
-                  <a:tcPr marL="0" marR="128016" marT="36576" marB="54864" anchor="t">
-                    <a:lnB w="9525" cap="flat" cmpd="sng" algn="ctr">
-                      <a:solidFill>
-                        <a:srgbClr val="D4D2D0"/>
-                      </a:solidFill>
-                    </a:lnB>
-                    <a:lnT w="0" cap="flat" cmpd="sng" algn="ctr">
-                      <a:solidFill>
-                        <a:srgbClr val="FAF8F4"/>
-                      </a:solidFill>
-                    </a:lnT>
-                    <a:lnR w="0" cap="flat" cmpd="sng" algn="ctr">
-                      <a:solidFill>
-                        <a:srgbClr val="FAF8F4"/>
-                      </a:solidFill>
-                    </a:lnR>
-                    <a:lnL w="0" cap="flat" cmpd="sng" algn="ctr">
-                      <a:solidFill>
-                        <a:srgbClr val="FAF8F4"/>
-                      </a:solidFill>
-                    </a:lnL>
-                    <a:noFill/>
-                  </a:tcPr>
-                </a:tc>
-                <a:tc>
-                  <a:txBody>
-                    <a:bodyPr wrap="square"/>
-                    <a:lstStyle/>
-                    <a:p>
-                      <a:pPr>
-                        <a:lnSpc>
-                          <a:spcPct val="134000"/>
-                        </a:lnSpc>
-                      </a:pPr>
-                      <a:r>
-                        <a:rPr sz="1100" b="0">
-                          <a:solidFill>
-                            <a:srgbClr val="111111"/>
-                          </a:solidFill>
-                          <a:latin typeface="Poppins"/>
-                        </a:rPr>
-                        <a:t>$3,250 a month, $9,750</a:t>
                       </a:r>
                     </a:p>
                   </a:txBody>
@@ -16082,7 +15806,7 @@
                 </a:solidFill>
                 <a:latin typeface="Poppins"/>
               </a:rPr>
-              <a:t>$25,000 on acceptance, or $8,333 a month across the three months. Stop or continue at the mid-December review. The line fees are the standard rate and sum to $27,500; the discount is applied to the total.</a:t>
+              <a:t>$25,000 on acceptance, or $8,333 a month across the three months. Stop or continue at the mid-December review. Inclusions to be confirmed.</a:t>
             </a:r>
           </a:p>
         </p:txBody>
@@ -16240,7 +15964,7 @@
         </p:nvGraphicFramePr>
         <p:xfrm>
           <a:off x="914400" y="2880360"/>
-          <a:ext cx="10362894" cy="2177789"/>
+          <a:ext cx="10362894" cy="1061064"/>
         </p:xfrm>
         <a:graphic>
           <a:graphicData uri="http://schemas.openxmlformats.org/drawingml/2006/table">
@@ -16316,190 +16040,6 @@
                           <a:latin typeface="Poppins"/>
                         </a:rPr>
                         <a:t>FEE</a:t>
-                      </a:r>
-                    </a:p>
-                  </a:txBody>
-                  <a:tcPr marL="0" marR="128016" marT="36576" marB="54864" anchor="t">
-                    <a:lnB w="9525" cap="flat" cmpd="sng" algn="ctr">
-                      <a:solidFill>
-                        <a:srgbClr val="D4D2D0"/>
-                      </a:solidFill>
-                    </a:lnB>
-                    <a:lnT w="0" cap="flat" cmpd="sng" algn="ctr">
-                      <a:solidFill>
-                        <a:srgbClr val="FAF8F4"/>
-                      </a:solidFill>
-                    </a:lnT>
-                    <a:lnR w="0" cap="flat" cmpd="sng" algn="ctr">
-                      <a:solidFill>
-                        <a:srgbClr val="FAF8F4"/>
-                      </a:solidFill>
-                    </a:lnR>
-                    <a:lnL w="0" cap="flat" cmpd="sng" algn="ctr">
-                      <a:solidFill>
-                        <a:srgbClr val="FAF8F4"/>
-                      </a:solidFill>
-                    </a:lnL>
-                    <a:noFill/>
-                  </a:tcPr>
-                </a:tc>
-              </a:tr>
-              <a:tr h="329981">
-                <a:tc>
-                  <a:txBody>
-                    <a:bodyPr wrap="square"/>
-                    <a:lstStyle/>
-                    <a:p>
-                      <a:pPr>
-                        <a:lnSpc>
-                          <a:spcPct val="134000"/>
-                        </a:lnSpc>
-                      </a:pPr>
-                      <a:r>
-                        <a:rPr sz="1100" b="1">
-                          <a:solidFill>
-                            <a:srgbClr val="111111"/>
-                          </a:solidFill>
-                          <a:latin typeface="Poppins"/>
-                        </a:rPr>
-                        <a:t>Everything in Option A, delivered in the first three months</a:t>
-                      </a:r>
-                    </a:p>
-                  </a:txBody>
-                  <a:tcPr marL="0" marR="128016" marT="36576" marB="54864" anchor="t">
-                    <a:lnB w="9525" cap="flat" cmpd="sng" algn="ctr">
-                      <a:solidFill>
-                        <a:srgbClr val="D4D2D0"/>
-                      </a:solidFill>
-                    </a:lnB>
-                    <a:lnT w="0" cap="flat" cmpd="sng" algn="ctr">
-                      <a:solidFill>
-                        <a:srgbClr val="FAF8F4"/>
-                      </a:solidFill>
-                    </a:lnT>
-                    <a:lnR w="0" cap="flat" cmpd="sng" algn="ctr">
-                      <a:solidFill>
-                        <a:srgbClr val="FAF8F4"/>
-                      </a:solidFill>
-                    </a:lnR>
-                    <a:lnL w="0" cap="flat" cmpd="sng" algn="ctr">
-                      <a:solidFill>
-                        <a:srgbClr val="FAF8F4"/>
-                      </a:solidFill>
-                    </a:lnL>
-                    <a:noFill/>
-                  </a:tcPr>
-                </a:tc>
-                <a:tc>
-                  <a:txBody>
-                    <a:bodyPr wrap="square"/>
-                    <a:lstStyle/>
-                    <a:p>
-                      <a:pPr>
-                        <a:lnSpc>
-                          <a:spcPct val="134000"/>
-                        </a:lnSpc>
-                      </a:pPr>
-                      <a:r>
-                        <a:rPr sz="1100" b="0">
-                          <a:solidFill>
-                            <a:srgbClr val="111111"/>
-                          </a:solidFill>
-                          <a:latin typeface="Poppins"/>
-                        </a:rPr>
-                        <a:t>Included</a:t>
-                      </a:r>
-                    </a:p>
-                  </a:txBody>
-                  <a:tcPr marL="0" marR="128016" marT="36576" marB="54864" anchor="t">
-                    <a:lnB w="9525" cap="flat" cmpd="sng" algn="ctr">
-                      <a:solidFill>
-                        <a:srgbClr val="D4D2D0"/>
-                      </a:solidFill>
-                    </a:lnB>
-                    <a:lnT w="0" cap="flat" cmpd="sng" algn="ctr">
-                      <a:solidFill>
-                        <a:srgbClr val="FAF8F4"/>
-                      </a:solidFill>
-                    </a:lnT>
-                    <a:lnR w="0" cap="flat" cmpd="sng" algn="ctr">
-                      <a:solidFill>
-                        <a:srgbClr val="FAF8F4"/>
-                      </a:solidFill>
-                    </a:lnR>
-                    <a:lnL w="0" cap="flat" cmpd="sng" algn="ctr">
-                      <a:solidFill>
-                        <a:srgbClr val="FAF8F4"/>
-                      </a:solidFill>
-                    </a:lnL>
-                    <a:noFill/>
-                  </a:tcPr>
-                </a:tc>
-              </a:tr>
-              <a:tr h="786744">
-                <a:tc>
-                  <a:txBody>
-                    <a:bodyPr wrap="square"/>
-                    <a:lstStyle/>
-                    <a:p>
-                      <a:pPr>
-                        <a:lnSpc>
-                          <a:spcPct val="134000"/>
-                        </a:lnSpc>
-                      </a:pPr>
-                      <a:r>
-                        <a:rPr sz="1100" b="1">
-                          <a:solidFill>
-                            <a:srgbClr val="111111"/>
-                          </a:solidFill>
-                          <a:latin typeface="Poppins"/>
-                        </a:rPr>
-                        <a:t>Months four to twelve. Weddings and functions, party rental reworked, the membership redesign when you release it, range and hero marketing, club and venue offers, SEM, outreach, content and artwork continuing, the reviews at March and September</a:t>
-                      </a:r>
-                    </a:p>
-                  </a:txBody>
-                  <a:tcPr marL="0" marR="128016" marT="36576" marB="54864" anchor="t">
-                    <a:lnB w="9525" cap="flat" cmpd="sng" algn="ctr">
-                      <a:solidFill>
-                        <a:srgbClr val="D4D2D0"/>
-                      </a:solidFill>
-                    </a:lnB>
-                    <a:lnT w="0" cap="flat" cmpd="sng" algn="ctr">
-                      <a:solidFill>
-                        <a:srgbClr val="FAF8F4"/>
-                      </a:solidFill>
-                    </a:lnT>
-                    <a:lnR w="0" cap="flat" cmpd="sng" algn="ctr">
-                      <a:solidFill>
-                        <a:srgbClr val="FAF8F4"/>
-                      </a:solidFill>
-                    </a:lnR>
-                    <a:lnL w="0" cap="flat" cmpd="sng" algn="ctr">
-                      <a:solidFill>
-                        <a:srgbClr val="FAF8F4"/>
-                      </a:solidFill>
-                    </a:lnL>
-                    <a:noFill/>
-                  </a:tcPr>
-                </a:tc>
-                <a:tc>
-                  <a:txBody>
-                    <a:bodyPr wrap="square"/>
-                    <a:lstStyle/>
-                    <a:p>
-                      <a:pPr>
-                        <a:lnSpc>
-                          <a:spcPct val="134000"/>
-                        </a:lnSpc>
-                      </a:pPr>
-                      <a:r>
-                        <a:rPr sz="1100" b="0">
-                          <a:solidFill>
-                            <a:srgbClr val="111111"/>
-                          </a:solidFill>
-                          <a:latin typeface="Poppins"/>
-                        </a:rPr>
-                        <a:t>Included</a:t>
                       </a:r>
                     </a:p>
                   </a:txBody>
@@ -16660,7 +16200,7 @@
                 </a:solidFill>
                 <a:latin typeface="Poppins"/>
               </a:rPr>
-              <a:t>Monthly in advance. Minimum three months, then stop at any review with a month's notice.</a:t>
+              <a:t>Monthly in advance. Minimum three months, then stop at any review with a month's notice. Inclusions to be confirmed.</a:t>
             </a:r>
           </a:p>
         </p:txBody>
